--- a/Templates/MOS New.pptx
+++ b/Templates/MOS New.pptx
@@ -5,10 +5,10 @@
     <p:sldMasterId id="2147483660" r:id="rId1"/>
   </p:sldMasterIdLst>
   <p:notesMasterIdLst>
-    <p:notesMasterId r:id="rId29"/>
+    <p:notesMasterId r:id="rId18"/>
   </p:notesMasterIdLst>
   <p:handoutMasterIdLst>
-    <p:handoutMasterId r:id="rId30"/>
+    <p:handoutMasterId r:id="rId19"/>
   </p:handoutMasterIdLst>
   <p:sldIdLst>
     <p:sldId id="256" r:id="rId2"/>
@@ -25,19 +25,8 @@
     <p:sldId id="267" r:id="rId13"/>
     <p:sldId id="269" r:id="rId14"/>
     <p:sldId id="270" r:id="rId15"/>
-    <p:sldId id="320" r:id="rId16"/>
-    <p:sldId id="322" r:id="rId17"/>
-    <p:sldId id="323" r:id="rId18"/>
-    <p:sldId id="324" r:id="rId19"/>
-    <p:sldId id="326" r:id="rId20"/>
-    <p:sldId id="315" r:id="rId21"/>
-    <p:sldId id="321" r:id="rId22"/>
-    <p:sldId id="316" r:id="rId23"/>
-    <p:sldId id="317" r:id="rId24"/>
-    <p:sldId id="318" r:id="rId25"/>
-    <p:sldId id="319" r:id="rId26"/>
-    <p:sldId id="325" r:id="rId27"/>
-    <p:sldId id="314" r:id="rId28"/>
+    <p:sldId id="325" r:id="rId16"/>
+    <p:sldId id="314" r:id="rId17"/>
   </p:sldIdLst>
   <p:sldSz cx="6858000" cy="9906000" type="A4"/>
   <p:notesSz cx="6858000" cy="9144000"/>
@@ -242,7 +231,7 @@
           <a:p>
             <a:fld id="{E506D17F-E4B4-4820-A4BE-0384D31174A0}" type="datetimeFigureOut">
               <a:rPr lang="en-SG" smtClean="0"/>
-              <a:t>19/5/2025</a:t>
+              <a:t>2/9/2026</a:t>
             </a:fld>
             <a:endParaRPr lang="en-SG"/>
           </a:p>
@@ -424,7 +413,7 @@
           <a:p>
             <a:fld id="{3315A462-7DEF-46C0-A9B4-8893538CBD9C}" type="datetimeFigureOut">
               <a:rPr lang="en-SG" smtClean="0"/>
-              <a:t>19/5/2025</a:t>
+              <a:t>2/9/2026</a:t>
             </a:fld>
             <a:endParaRPr lang="en-SG"/>
           </a:p>
@@ -1022,7 +1011,7 @@
           <a:p>
             <a:fld id="{9EA9A5E4-9D84-4DC7-9128-85DFE0CC6F6D}" type="datetime1">
               <a:rPr lang="en-SG" smtClean="0"/>
-              <a:t>19/5/2025</a:t>
+              <a:t>2/9/2026</a:t>
             </a:fld>
             <a:endParaRPr lang="en-SG"/>
           </a:p>
@@ -1192,7 +1181,7 @@
           <a:p>
             <a:fld id="{E20E8396-67A2-497C-B9A0-2407E3E357B5}" type="datetime1">
               <a:rPr lang="en-SG" smtClean="0"/>
-              <a:t>19/5/2025</a:t>
+              <a:t>2/9/2026</a:t>
             </a:fld>
             <a:endParaRPr lang="en-SG"/>
           </a:p>
@@ -1372,7 +1361,7 @@
           <a:p>
             <a:fld id="{76E924FB-569A-4D1B-87D6-23A0321F24D5}" type="datetime1">
               <a:rPr lang="en-SG" smtClean="0"/>
-              <a:t>19/5/2025</a:t>
+              <a:t>2/9/2026</a:t>
             </a:fld>
             <a:endParaRPr lang="en-SG"/>
           </a:p>
@@ -1542,7 +1531,7 @@
           <a:p>
             <a:fld id="{CDDCCA85-04C4-4CA2-986D-42E8E71F131F}" type="datetime1">
               <a:rPr lang="en-SG" smtClean="0"/>
-              <a:t>19/5/2025</a:t>
+              <a:t>2/9/2026</a:t>
             </a:fld>
             <a:endParaRPr lang="en-SG"/>
           </a:p>
@@ -1788,7 +1777,7 @@
           <a:p>
             <a:fld id="{F2CF5C94-43CA-4A19-AD03-438E93C1139C}" type="datetime1">
               <a:rPr lang="en-SG" smtClean="0"/>
-              <a:t>19/5/2025</a:t>
+              <a:t>2/9/2026</a:t>
             </a:fld>
             <a:endParaRPr lang="en-SG"/>
           </a:p>
@@ -2020,7 +2009,7 @@
           <a:p>
             <a:fld id="{F436F022-0714-4A90-B5EA-C8B2B851CBA8}" type="datetime1">
               <a:rPr lang="en-SG" smtClean="0"/>
-              <a:t>19/5/2025</a:t>
+              <a:t>2/9/2026</a:t>
             </a:fld>
             <a:endParaRPr lang="en-SG"/>
           </a:p>
@@ -2387,7 +2376,7 @@
           <a:p>
             <a:fld id="{1793FF73-5C5A-4B77-BF7B-C9EECA6CDB5F}" type="datetime1">
               <a:rPr lang="en-SG" smtClean="0"/>
-              <a:t>19/5/2025</a:t>
+              <a:t>2/9/2026</a:t>
             </a:fld>
             <a:endParaRPr lang="en-SG"/>
           </a:p>
@@ -2505,7 +2494,7 @@
           <a:p>
             <a:fld id="{72452109-4DFE-4E29-9DE2-FEC0FD5AFE5A}" type="datetime1">
               <a:rPr lang="en-SG" smtClean="0"/>
-              <a:t>19/5/2025</a:t>
+              <a:t>2/9/2026</a:t>
             </a:fld>
             <a:endParaRPr lang="en-SG"/>
           </a:p>
@@ -2600,7 +2589,7 @@
           <a:p>
             <a:fld id="{4F934439-5E6F-4079-8501-35A945881991}" type="datetime1">
               <a:rPr lang="en-SG" smtClean="0"/>
-              <a:t>19/5/2025</a:t>
+              <a:t>2/9/2026</a:t>
             </a:fld>
             <a:endParaRPr lang="en-SG"/>
           </a:p>
@@ -2877,7 +2866,7 @@
           <a:p>
             <a:fld id="{18750931-BAEE-48D1-80D1-12FA3AC9F16B}" type="datetime1">
               <a:rPr lang="en-SG" smtClean="0"/>
-              <a:t>19/5/2025</a:t>
+              <a:t>2/9/2026</a:t>
             </a:fld>
             <a:endParaRPr lang="en-SG"/>
           </a:p>
@@ -3134,7 +3123,7 @@
           <a:p>
             <a:fld id="{ADC4A7DB-4EE6-47B2-BF6E-0D6E6FAE7EB5}" type="datetime1">
               <a:rPr lang="en-SG" smtClean="0"/>
-              <a:t>19/5/2025</a:t>
+              <a:t>2/9/2026</a:t>
             </a:fld>
             <a:endParaRPr lang="en-SG"/>
           </a:p>
@@ -3347,7 +3336,7 @@
           <a:p>
             <a:fld id="{00B7D629-4347-4FB3-82EA-8AAB0540DD70}" type="datetime1">
               <a:rPr lang="en-SG" smtClean="0"/>
-              <a:t>19/5/2025</a:t>
+              <a:t>2/9/2026</a:t>
             </a:fld>
             <a:endParaRPr lang="en-SG"/>
           </a:p>
@@ -9099,7790 +9088,6 @@
         <p:cNvPr id="1" name="">
           <a:extLst>
             <a:ext uri="{FF2B5EF4-FFF2-40B4-BE49-F238E27FC236}">
-              <a16:creationId xmlns:a16="http://schemas.microsoft.com/office/drawing/2014/main" id="{1255BCA9-F4F0-C398-7B3D-6E2BF9FB1E60}"/>
-            </a:ext>
-          </a:extLst>
-        </p:cNvPr>
-        <p:cNvGrpSpPr/>
-        <p:nvPr/>
-      </p:nvGrpSpPr>
-      <p:grpSpPr>
-        <a:xfrm>
-          <a:off x="0" y="0"/>
-          <a:ext cx="0" cy="0"/>
-          <a:chOff x="0" y="0"/>
-          <a:chExt cx="0" cy="0"/>
-        </a:xfrm>
-      </p:grpSpPr>
-      <p:grpSp>
-        <p:nvGrpSpPr>
-          <p:cNvPr id="10" name="Group 9">
-            <a:extLst>
-              <a:ext uri="{FF2B5EF4-FFF2-40B4-BE49-F238E27FC236}">
-                <a16:creationId xmlns:a16="http://schemas.microsoft.com/office/drawing/2014/main" id="{15A1ABF0-9330-404E-3AA1-1846E4822F02}"/>
-              </a:ext>
-            </a:extLst>
-          </p:cNvPr>
-          <p:cNvGrpSpPr/>
-          <p:nvPr/>
-        </p:nvGrpSpPr>
-        <p:grpSpPr>
-          <a:xfrm>
-            <a:off x="0" y="1"/>
-            <a:ext cx="6857999" cy="1168400"/>
-            <a:chOff x="701748" y="108190"/>
-            <a:chExt cx="5454507" cy="1318601"/>
-          </a:xfrm>
-        </p:grpSpPr>
-        <p:sp>
-          <p:nvSpPr>
-            <p:cNvPr id="6" name="TextBox 5">
-              <a:extLst>
-                <a:ext uri="{FF2B5EF4-FFF2-40B4-BE49-F238E27FC236}">
-                  <a16:creationId xmlns:a16="http://schemas.microsoft.com/office/drawing/2014/main" id="{07C9C726-A347-5C0F-2006-2047FA78CFC9}"/>
-                </a:ext>
-              </a:extLst>
-            </p:cNvPr>
-            <p:cNvSpPr txBox="1"/>
-            <p:nvPr/>
-          </p:nvSpPr>
-          <p:spPr>
-            <a:xfrm>
-              <a:off x="701748" y="108190"/>
-              <a:ext cx="5454507" cy="1318601"/>
-            </a:xfrm>
-            <a:prstGeom prst="rect">
-              <a:avLst/>
-            </a:prstGeom>
-            <a:noFill/>
-            <a:ln>
-              <a:solidFill>
-                <a:schemeClr val="accent1"/>
-              </a:solidFill>
-            </a:ln>
-          </p:spPr>
-          <p:txBody>
-            <a:bodyPr wrap="square" rtlCol="0">
-              <a:spAutoFit/>
-            </a:bodyPr>
-            <a:lstStyle/>
-            <a:p>
-              <a:pPr algn="ctr">
-                <a:buNone/>
-                <a:tabLst>
-                  <a:tab pos="2743200" algn="ctr"/>
-                  <a:tab pos="5486400" algn="r"/>
-                </a:tabLst>
-              </a:pPr>
-              <a:r>
-                <a:rPr lang="en-US" sz="1100" b="1" dirty="0">
-                  <a:solidFill>
-                    <a:srgbClr val="0000FF"/>
-                  </a:solidFill>
-                  <a:effectLst/>
-                  <a:latin typeface="Times New Roman" panose="02020603050405020304" pitchFamily="18" charset="0"/>
-                  <a:ea typeface="SimSun" panose="02010600030101010101" pitchFamily="2" charset="-122"/>
-                </a:rPr>
-                <a:t>ERIC WONG MACHINERY TRANSPORTATION PTE LTD</a:t>
-              </a:r>
-              <a:endParaRPr lang="en-SG" sz="1100" b="1" dirty="0">
-                <a:solidFill>
-                  <a:srgbClr val="0000FF"/>
-                </a:solidFill>
-                <a:latin typeface="Times New Roman" panose="02020603050405020304" pitchFamily="18" charset="0"/>
-                <a:ea typeface="SimSun" panose="02010600030101010101" pitchFamily="2" charset="-122"/>
-              </a:endParaRPr>
-            </a:p>
-            <a:p>
-              <a:pPr algn="ctr">
-                <a:buNone/>
-                <a:tabLst>
-                  <a:tab pos="2743200" algn="ctr"/>
-                  <a:tab pos="5486400" algn="r"/>
-                </a:tabLst>
-              </a:pPr>
-              <a:r>
-                <a:rPr lang="en-US" sz="1100" dirty="0">
-                  <a:effectLst/>
-                  <a:latin typeface="Times New Roman" panose="02020603050405020304" pitchFamily="18" charset="0"/>
-                  <a:ea typeface="SimSun" panose="02010600030101010101" pitchFamily="2" charset="-122"/>
-                </a:rPr>
-                <a:t>28 </a:t>
-              </a:r>
-              <a:r>
-                <a:rPr lang="en-US" sz="1100" dirty="0" err="1">
-                  <a:effectLst/>
-                  <a:latin typeface="Times New Roman" panose="02020603050405020304" pitchFamily="18" charset="0"/>
-                  <a:ea typeface="SimSun" panose="02010600030101010101" pitchFamily="2" charset="-122"/>
-                </a:rPr>
-                <a:t>Kranji</a:t>
-              </a:r>
-              <a:r>
-                <a:rPr lang="en-US" sz="1100" dirty="0">
-                  <a:effectLst/>
-                  <a:latin typeface="Times New Roman" panose="02020603050405020304" pitchFamily="18" charset="0"/>
-                  <a:ea typeface="SimSun" panose="02010600030101010101" pitchFamily="2" charset="-122"/>
-                </a:rPr>
-                <a:t> Loop #05-03, </a:t>
-              </a:r>
-              <a:r>
-                <a:rPr lang="en-US" sz="1100" dirty="0" err="1">
-                  <a:effectLst/>
-                  <a:latin typeface="Times New Roman" panose="02020603050405020304" pitchFamily="18" charset="0"/>
-                  <a:ea typeface="SimSun" panose="02010600030101010101" pitchFamily="2" charset="-122"/>
-                </a:rPr>
-                <a:t>Kranji</a:t>
-              </a:r>
-              <a:r>
-                <a:rPr lang="en-US" sz="1100" dirty="0">
-                  <a:effectLst/>
-                  <a:latin typeface="Times New Roman" panose="02020603050405020304" pitchFamily="18" charset="0"/>
-                  <a:ea typeface="SimSun" panose="02010600030101010101" pitchFamily="2" charset="-122"/>
-                </a:rPr>
-                <a:t> Green, Singapore 739571</a:t>
-              </a:r>
-              <a:endParaRPr lang="en-SG" sz="1100" dirty="0">
-                <a:latin typeface="Times New Roman" panose="02020603050405020304" pitchFamily="18" charset="0"/>
-                <a:ea typeface="SimSun" panose="02010600030101010101" pitchFamily="2" charset="-122"/>
-              </a:endParaRPr>
-            </a:p>
-            <a:p>
-              <a:pPr algn="ctr">
-                <a:buNone/>
-                <a:tabLst>
-                  <a:tab pos="2743200" algn="ctr"/>
-                  <a:tab pos="5486400" algn="r"/>
-                </a:tabLst>
-              </a:pPr>
-              <a:r>
-                <a:rPr lang="en-US" sz="1100" dirty="0">
-                  <a:effectLst/>
-                  <a:latin typeface="Times New Roman" panose="02020603050405020304" pitchFamily="18" charset="0"/>
-                  <a:ea typeface="SimSun" panose="02010600030101010101" pitchFamily="2" charset="-122"/>
-                </a:rPr>
-                <a:t>Tel: 62824175, 62828203, 62826020</a:t>
-              </a:r>
-              <a:endParaRPr lang="en-SG" sz="1100" dirty="0">
-                <a:effectLst/>
-                <a:latin typeface="Times New Roman" panose="02020603050405020304" pitchFamily="18" charset="0"/>
-                <a:ea typeface="SimSun" panose="02010600030101010101" pitchFamily="2" charset="-122"/>
-              </a:endParaRPr>
-            </a:p>
-            <a:p>
-              <a:pPr algn="ctr">
-                <a:buNone/>
-                <a:tabLst>
-                  <a:tab pos="2743200" algn="ctr"/>
-                  <a:tab pos="5486400" algn="r"/>
-                </a:tabLst>
-              </a:pPr>
-              <a:r>
-                <a:rPr lang="en-US" sz="1100" dirty="0">
-                  <a:effectLst/>
-                  <a:latin typeface="Times New Roman" panose="02020603050405020304" pitchFamily="18" charset="0"/>
-                  <a:ea typeface="SimSun" panose="02010600030101010101" pitchFamily="2" charset="-122"/>
-                </a:rPr>
-                <a:t>GST Reg No. : M2-8923804-2</a:t>
-              </a:r>
-              <a:endParaRPr lang="en-SG" sz="1100" dirty="0">
-                <a:latin typeface="Times New Roman" panose="02020603050405020304" pitchFamily="18" charset="0"/>
-                <a:ea typeface="SimSun" panose="02010600030101010101" pitchFamily="2" charset="-122"/>
-              </a:endParaRPr>
-            </a:p>
-            <a:p>
-              <a:pPr algn="ctr">
-                <a:buNone/>
-                <a:tabLst>
-                  <a:tab pos="2743200" algn="ctr"/>
-                  <a:tab pos="5486400" algn="r"/>
-                </a:tabLst>
-              </a:pPr>
-              <a:r>
-                <a:rPr lang="en-US" sz="1100" dirty="0">
-                  <a:effectLst/>
-                  <a:latin typeface="Times New Roman" panose="02020603050405020304" pitchFamily="18" charset="0"/>
-                  <a:ea typeface="SimSun" panose="02010600030101010101" pitchFamily="2" charset="-122"/>
-                  <a:hlinkClick r:id="rId2"/>
-                </a:rPr>
-                <a:t>http://www.ericwong.com</a:t>
-              </a:r>
-              <a:endParaRPr lang="en-SG" sz="1100" dirty="0">
-                <a:latin typeface="Times New Roman" panose="02020603050405020304" pitchFamily="18" charset="0"/>
-                <a:ea typeface="SimSun" panose="02010600030101010101" pitchFamily="2" charset="-122"/>
-              </a:endParaRPr>
-            </a:p>
-            <a:p>
-              <a:pPr algn="ctr">
-                <a:buNone/>
-                <a:tabLst>
-                  <a:tab pos="2743200" algn="ctr"/>
-                  <a:tab pos="5486400" algn="r"/>
-                </a:tabLst>
-              </a:pPr>
-              <a:r>
-                <a:rPr lang="en-US" sz="1100" dirty="0">
-                  <a:latin typeface="Times New Roman" panose="02020603050405020304" pitchFamily="18" charset="0"/>
-                  <a:ea typeface="SimSun" panose="02010600030101010101" pitchFamily="2" charset="-122"/>
-                </a:rPr>
-                <a:t>E</a:t>
-              </a:r>
-              <a:r>
-                <a:rPr lang="en-US" sz="1100" dirty="0">
-                  <a:effectLst/>
-                  <a:latin typeface="Times New Roman" panose="02020603050405020304" pitchFamily="18" charset="0"/>
-                  <a:ea typeface="SimSun" panose="02010600030101010101" pitchFamily="2" charset="-122"/>
-                </a:rPr>
-                <a:t>-mail: ewmtpl@gmail.com</a:t>
-              </a:r>
-              <a:endParaRPr lang="en-SG" sz="1100" dirty="0">
-                <a:effectLst/>
-                <a:latin typeface="Times New Roman" panose="02020603050405020304" pitchFamily="18" charset="0"/>
-                <a:ea typeface="SimSun" panose="02010600030101010101" pitchFamily="2" charset="-122"/>
-              </a:endParaRPr>
-            </a:p>
-            <a:p>
-              <a:endParaRPr lang="en-SG" sz="1400" dirty="0"/>
-            </a:p>
-          </p:txBody>
-        </p:sp>
-        <p:pic>
-          <p:nvPicPr>
-            <p:cNvPr id="8" name="Picture 7" descr="A red logo with a white background&#10;&#10;AI-generated content may be incorrect.">
-              <a:extLst>
-                <a:ext uri="{FF2B5EF4-FFF2-40B4-BE49-F238E27FC236}">
-                  <a16:creationId xmlns:a16="http://schemas.microsoft.com/office/drawing/2014/main" id="{6DED748C-365E-5B99-0EA6-74103312A6B4}"/>
-                </a:ext>
-              </a:extLst>
-            </p:cNvPr>
-            <p:cNvPicPr>
-              <a:picLocks noChangeAspect="1"/>
-            </p:cNvPicPr>
-            <p:nvPr/>
-          </p:nvPicPr>
-          <p:blipFill>
-            <a:blip r:embed="rId3">
-              <a:extLst>
-                <a:ext uri="{28A0092B-C50C-407E-A947-70E740481C1C}">
-                  <a14:useLocalDpi xmlns:a14="http://schemas.microsoft.com/office/drawing/2010/main" val="0"/>
-                </a:ext>
-              </a:extLst>
-            </a:blip>
-            <a:stretch>
-              <a:fillRect/>
-            </a:stretch>
-          </p:blipFill>
-          <p:spPr>
-            <a:xfrm>
-              <a:off x="990192" y="150552"/>
-              <a:ext cx="726493" cy="1233876"/>
-            </a:xfrm>
-            <a:prstGeom prst="rect">
-              <a:avLst/>
-            </a:prstGeom>
-          </p:spPr>
-        </p:pic>
-      </p:grpSp>
-      <p:graphicFrame>
-        <p:nvGraphicFramePr>
-          <p:cNvPr id="9" name="Table 8">
-            <a:extLst>
-              <a:ext uri="{FF2B5EF4-FFF2-40B4-BE49-F238E27FC236}">
-                <a16:creationId xmlns:a16="http://schemas.microsoft.com/office/drawing/2014/main" id="{227A391C-A0B6-4F35-05AB-8755EA92494A}"/>
-              </a:ext>
-            </a:extLst>
-          </p:cNvPr>
-          <p:cNvGraphicFramePr>
-            <a:graphicFrameLocks noGrp="1"/>
-          </p:cNvGraphicFramePr>
-          <p:nvPr/>
-        </p:nvGraphicFramePr>
-        <p:xfrm>
-          <a:off x="0" y="1168401"/>
-          <a:ext cx="6857998" cy="1605983"/>
-        </p:xfrm>
-        <a:graphic>
-          <a:graphicData uri="http://schemas.openxmlformats.org/drawingml/2006/table">
-            <a:tbl>
-              <a:tblPr firstRow="1" bandRow="1">
-                <a:tableStyleId>{5C22544A-7EE6-4342-B048-85BDC9FD1C3A}</a:tableStyleId>
-              </a:tblPr>
-              <a:tblGrid>
-                <a:gridCol w="3428999">
-                  <a:extLst>
-                    <a:ext uri="{9D8B030D-6E8A-4147-A177-3AD203B41FA5}">
-                      <a16:colId xmlns:a16="http://schemas.microsoft.com/office/drawing/2014/main" val="3963200382"/>
-                    </a:ext>
-                  </a:extLst>
-                </a:gridCol>
-                <a:gridCol w="3428999">
-                  <a:extLst>
-                    <a:ext uri="{9D8B030D-6E8A-4147-A177-3AD203B41FA5}">
-                      <a16:colId xmlns:a16="http://schemas.microsoft.com/office/drawing/2014/main" val="281614988"/>
-                    </a:ext>
-                  </a:extLst>
-                </a:gridCol>
-              </a:tblGrid>
-              <a:tr h="370840">
-                <a:tc gridSpan="2">
-                  <a:txBody>
-                    <a:bodyPr/>
-                    <a:lstStyle/>
-                    <a:p>
-                      <a:pPr algn="ctr"/>
-                      <a:r>
-                        <a:rPr lang="en-SG" dirty="0"/>
-                        <a:t>Customer / Tenant Company: Singapore Mint</a:t>
-                      </a:r>
-                    </a:p>
-                  </a:txBody>
-                  <a:tcPr/>
-                </a:tc>
-                <a:tc hMerge="1">
-                  <a:txBody>
-                    <a:bodyPr/>
-                    <a:lstStyle/>
-                    <a:p>
-                      <a:endParaRPr lang="en-SG" dirty="0"/>
-                    </a:p>
-                  </a:txBody>
-                  <a:tcPr/>
-                </a:tc>
-                <a:extLst>
-                  <a:ext uri="{0D108BD9-81ED-4DB2-BD59-A6C34878D82A}">
-                    <a16:rowId xmlns:a16="http://schemas.microsoft.com/office/drawing/2014/main" val="3714705615"/>
-                  </a:ext>
-                </a:extLst>
-              </a:tr>
-              <a:tr h="327659">
-                <a:tc>
-                  <a:txBody>
-                    <a:bodyPr/>
-                    <a:lstStyle/>
-                    <a:p>
-                      <a:r>
-                        <a:rPr lang="en-SG" sz="1100" dirty="0"/>
-                        <a:t>Site Location: Singapore Mint </a:t>
-                      </a:r>
-                    </a:p>
-                  </a:txBody>
-                  <a:tcPr/>
-                </a:tc>
-                <a:tc rowSpan="3">
-                  <a:txBody>
-                    <a:bodyPr/>
-                    <a:lstStyle/>
-                    <a:p>
-                      <a:endParaRPr lang="en-SG" sz="1100" dirty="0"/>
-                    </a:p>
-                    <a:p>
-                      <a:endParaRPr lang="en-SG" sz="1100" dirty="0"/>
-                    </a:p>
-                    <a:p>
-                      <a:endParaRPr lang="en-SG" sz="1100" dirty="0"/>
-                    </a:p>
-                    <a:p>
-                      <a:endParaRPr lang="en-SG" sz="1100" dirty="0"/>
-                    </a:p>
-                    <a:p>
-                      <a:r>
-                        <a:rPr lang="en-SG" sz="1100" dirty="0"/>
-                        <a:t>Approved By:  Eric Wong (Director)</a:t>
-                      </a:r>
-                    </a:p>
-                  </a:txBody>
-                  <a:tcPr>
-                    <a:solidFill>
-                      <a:schemeClr val="bg1"/>
-                    </a:solidFill>
-                  </a:tcPr>
-                </a:tc>
-                <a:extLst>
-                  <a:ext uri="{0D108BD9-81ED-4DB2-BD59-A6C34878D82A}">
-                    <a16:rowId xmlns:a16="http://schemas.microsoft.com/office/drawing/2014/main" val="2691564520"/>
-                  </a:ext>
-                </a:extLst>
-              </a:tr>
-              <a:tr h="343322">
-                <a:tc>
-                  <a:txBody>
-                    <a:bodyPr/>
-                    <a:lstStyle/>
-                    <a:p>
-                      <a:r>
-                        <a:rPr lang="en-SG" sz="1100" dirty="0"/>
-                        <a:t>Process: Lifting and Moving of Machinery on Platform</a:t>
-                      </a:r>
-                    </a:p>
-                  </a:txBody>
-                  <a:tcPr/>
-                </a:tc>
-                <a:tc vMerge="1">
-                  <a:txBody>
-                    <a:bodyPr/>
-                    <a:lstStyle/>
-                    <a:p>
-                      <a:endParaRPr lang="en-SG" dirty="0"/>
-                    </a:p>
-                  </a:txBody>
-                  <a:tcPr/>
-                </a:tc>
-                <a:extLst>
-                  <a:ext uri="{0D108BD9-81ED-4DB2-BD59-A6C34878D82A}">
-                    <a16:rowId xmlns:a16="http://schemas.microsoft.com/office/drawing/2014/main" val="784894797"/>
-                  </a:ext>
-                </a:extLst>
-              </a:tr>
-              <a:tr h="268395">
-                <a:tc>
-                  <a:txBody>
-                    <a:bodyPr/>
-                    <a:lstStyle/>
-                    <a:p>
-                      <a:r>
-                        <a:rPr lang="en-SG" sz="1100" dirty="0"/>
-                        <a:t>Prepared by: Kevin Wong</a:t>
-                      </a:r>
-                    </a:p>
-                  </a:txBody>
-                  <a:tcPr/>
-                </a:tc>
-                <a:tc vMerge="1">
-                  <a:txBody>
-                    <a:bodyPr/>
-                    <a:lstStyle/>
-                    <a:p>
-                      <a:endParaRPr lang="en-SG" dirty="0"/>
-                    </a:p>
-                  </a:txBody>
-                  <a:tcPr/>
-                </a:tc>
-                <a:extLst>
-                  <a:ext uri="{0D108BD9-81ED-4DB2-BD59-A6C34878D82A}">
-                    <a16:rowId xmlns:a16="http://schemas.microsoft.com/office/drawing/2014/main" val="3405944484"/>
-                  </a:ext>
-                </a:extLst>
-              </a:tr>
-              <a:tr h="295767">
-                <a:tc>
-                  <a:txBody>
-                    <a:bodyPr/>
-                    <a:lstStyle/>
-                    <a:p>
-                      <a:r>
-                        <a:rPr lang="en-SG" sz="1100" dirty="0"/>
-                        <a:t>Last Review Date: 24.02.2025</a:t>
-                      </a:r>
-                    </a:p>
-                  </a:txBody>
-                  <a:tcPr/>
-                </a:tc>
-                <a:tc>
-                  <a:txBody>
-                    <a:bodyPr/>
-                    <a:lstStyle/>
-                    <a:p>
-                      <a:r>
-                        <a:rPr lang="en-SG" sz="1100" dirty="0"/>
-                        <a:t>Next Review Date: 23.02.2026</a:t>
-                      </a:r>
-                    </a:p>
-                  </a:txBody>
-                  <a:tcPr/>
-                </a:tc>
-                <a:extLst>
-                  <a:ext uri="{0D108BD9-81ED-4DB2-BD59-A6C34878D82A}">
-                    <a16:rowId xmlns:a16="http://schemas.microsoft.com/office/drawing/2014/main" val="3430118298"/>
-                  </a:ext>
-                </a:extLst>
-              </a:tr>
-            </a:tbl>
-          </a:graphicData>
-        </a:graphic>
-      </p:graphicFrame>
-      <p:pic>
-        <p:nvPicPr>
-          <p:cNvPr id="11" name="Picture 10" descr="A close-up of a stamp&#10;&#10;AI-generated content may be incorrect.">
-            <a:extLst>
-              <a:ext uri="{FF2B5EF4-FFF2-40B4-BE49-F238E27FC236}">
-                <a16:creationId xmlns:a16="http://schemas.microsoft.com/office/drawing/2014/main" id="{00C2B440-6228-B2F6-B69E-467D88013F5C}"/>
-              </a:ext>
-            </a:extLst>
-          </p:cNvPr>
-          <p:cNvPicPr>
-            <a:picLocks noChangeAspect="1"/>
-          </p:cNvPicPr>
-          <p:nvPr/>
-        </p:nvPicPr>
-        <p:blipFill>
-          <a:blip r:embed="rId4">
-            <a:extLst>
-              <a:ext uri="{28A0092B-C50C-407E-A947-70E740481C1C}">
-                <a14:useLocalDpi xmlns:a14="http://schemas.microsoft.com/office/drawing/2010/main" val="0"/>
-              </a:ext>
-            </a:extLst>
-          </a:blip>
-          <a:stretch>
-            <a:fillRect/>
-          </a:stretch>
-        </p:blipFill>
-        <p:spPr>
-          <a:xfrm>
-            <a:off x="5878548" y="1522307"/>
-            <a:ext cx="693638" cy="764310"/>
-          </a:xfrm>
-          <a:prstGeom prst="rect">
-            <a:avLst/>
-          </a:prstGeom>
-        </p:spPr>
-      </p:pic>
-      <p:sp>
-        <p:nvSpPr>
-          <p:cNvPr id="4" name="Slide Number Placeholder 3">
-            <a:extLst>
-              <a:ext uri="{FF2B5EF4-FFF2-40B4-BE49-F238E27FC236}">
-                <a16:creationId xmlns:a16="http://schemas.microsoft.com/office/drawing/2014/main" id="{EDE40760-D5C7-6571-1B2A-A090D4DD3A5B}"/>
-              </a:ext>
-            </a:extLst>
-          </p:cNvPr>
-          <p:cNvSpPr>
-            <a:spLocks noGrp="1"/>
-          </p:cNvSpPr>
-          <p:nvPr>
-            <p:ph type="sldNum" sz="quarter" idx="12"/>
-          </p:nvPr>
-        </p:nvSpPr>
-        <p:spPr/>
-        <p:txBody>
-          <a:bodyPr/>
-          <a:lstStyle/>
-          <a:p>
-            <a:fld id="{F0052729-9336-4E5B-BC69-5177B8B6DD05}" type="slidenum">
-              <a:rPr lang="en-SG" smtClean="0"/>
-              <a:t>15</a:t>
-            </a:fld>
-            <a:endParaRPr lang="en-SG"/>
-          </a:p>
-        </p:txBody>
-      </p:sp>
-    </p:spTree>
-    <p:extLst>
-      <p:ext uri="{BB962C8B-B14F-4D97-AF65-F5344CB8AC3E}">
-        <p14:creationId xmlns:p14="http://schemas.microsoft.com/office/powerpoint/2010/main" val="1293698649"/>
-      </p:ext>
-    </p:extLst>
-  </p:cSld>
-  <p:clrMapOvr>
-    <a:masterClrMapping/>
-  </p:clrMapOvr>
-</p:sld>
-</file>
-
-<file path=ppt/slides/slide16.xml><?xml version="1.0" encoding="utf-8"?>
-<p:sld xmlns:a="http://schemas.openxmlformats.org/drawingml/2006/main" xmlns:r="http://schemas.openxmlformats.org/officeDocument/2006/relationships" xmlns:p="http://schemas.openxmlformats.org/presentationml/2006/main">
-  <p:cSld>
-    <p:spTree>
-      <p:nvGrpSpPr>
-        <p:cNvPr id="1" name="">
-          <a:extLst>
-            <a:ext uri="{FF2B5EF4-FFF2-40B4-BE49-F238E27FC236}">
-              <a16:creationId xmlns:a16="http://schemas.microsoft.com/office/drawing/2014/main" id="{32DA2A15-7526-73CD-BBF2-C85384E6DE38}"/>
-            </a:ext>
-          </a:extLst>
-        </p:cNvPr>
-        <p:cNvGrpSpPr/>
-        <p:nvPr/>
-      </p:nvGrpSpPr>
-      <p:grpSpPr>
-        <a:xfrm>
-          <a:off x="0" y="0"/>
-          <a:ext cx="0" cy="0"/>
-          <a:chOff x="0" y="0"/>
-          <a:chExt cx="0" cy="0"/>
-        </a:xfrm>
-      </p:grpSpPr>
-      <p:grpSp>
-        <p:nvGrpSpPr>
-          <p:cNvPr id="10" name="Group 9">
-            <a:extLst>
-              <a:ext uri="{FF2B5EF4-FFF2-40B4-BE49-F238E27FC236}">
-                <a16:creationId xmlns:a16="http://schemas.microsoft.com/office/drawing/2014/main" id="{C7DEB8C6-68E7-82B4-690F-0AFC7C88D243}"/>
-              </a:ext>
-            </a:extLst>
-          </p:cNvPr>
-          <p:cNvGrpSpPr/>
-          <p:nvPr/>
-        </p:nvGrpSpPr>
-        <p:grpSpPr>
-          <a:xfrm>
-            <a:off x="0" y="1"/>
-            <a:ext cx="6857999" cy="1168400"/>
-            <a:chOff x="701748" y="108190"/>
-            <a:chExt cx="5454507" cy="1318601"/>
-          </a:xfrm>
-        </p:grpSpPr>
-        <p:sp>
-          <p:nvSpPr>
-            <p:cNvPr id="6" name="TextBox 5">
-              <a:extLst>
-                <a:ext uri="{FF2B5EF4-FFF2-40B4-BE49-F238E27FC236}">
-                  <a16:creationId xmlns:a16="http://schemas.microsoft.com/office/drawing/2014/main" id="{F9A63E15-E1CB-45EB-F020-71266088F991}"/>
-                </a:ext>
-              </a:extLst>
-            </p:cNvPr>
-            <p:cNvSpPr txBox="1"/>
-            <p:nvPr/>
-          </p:nvSpPr>
-          <p:spPr>
-            <a:xfrm>
-              <a:off x="701748" y="108190"/>
-              <a:ext cx="5454507" cy="1318601"/>
-            </a:xfrm>
-            <a:prstGeom prst="rect">
-              <a:avLst/>
-            </a:prstGeom>
-            <a:noFill/>
-            <a:ln>
-              <a:solidFill>
-                <a:schemeClr val="accent1"/>
-              </a:solidFill>
-            </a:ln>
-          </p:spPr>
-          <p:txBody>
-            <a:bodyPr wrap="square" rtlCol="0">
-              <a:spAutoFit/>
-            </a:bodyPr>
-            <a:lstStyle/>
-            <a:p>
-              <a:pPr algn="ctr">
-                <a:buNone/>
-                <a:tabLst>
-                  <a:tab pos="2743200" algn="ctr"/>
-                  <a:tab pos="5486400" algn="r"/>
-                </a:tabLst>
-              </a:pPr>
-              <a:r>
-                <a:rPr lang="en-US" sz="1100" b="1" dirty="0">
-                  <a:solidFill>
-                    <a:srgbClr val="0000FF"/>
-                  </a:solidFill>
-                  <a:effectLst/>
-                  <a:latin typeface="Times New Roman" panose="02020603050405020304" pitchFamily="18" charset="0"/>
-                  <a:ea typeface="SimSun" panose="02010600030101010101" pitchFamily="2" charset="-122"/>
-                </a:rPr>
-                <a:t>ERIC WONG MACHINERY TRANSPORTATION PTE LTD</a:t>
-              </a:r>
-              <a:endParaRPr lang="en-SG" sz="1100" b="1" dirty="0">
-                <a:solidFill>
-                  <a:srgbClr val="0000FF"/>
-                </a:solidFill>
-                <a:latin typeface="Times New Roman" panose="02020603050405020304" pitchFamily="18" charset="0"/>
-                <a:ea typeface="SimSun" panose="02010600030101010101" pitchFamily="2" charset="-122"/>
-              </a:endParaRPr>
-            </a:p>
-            <a:p>
-              <a:pPr algn="ctr">
-                <a:buNone/>
-                <a:tabLst>
-                  <a:tab pos="2743200" algn="ctr"/>
-                  <a:tab pos="5486400" algn="r"/>
-                </a:tabLst>
-              </a:pPr>
-              <a:r>
-                <a:rPr lang="en-US" sz="1100" dirty="0">
-                  <a:effectLst/>
-                  <a:latin typeface="Times New Roman" panose="02020603050405020304" pitchFamily="18" charset="0"/>
-                  <a:ea typeface="SimSun" panose="02010600030101010101" pitchFamily="2" charset="-122"/>
-                </a:rPr>
-                <a:t>28 </a:t>
-              </a:r>
-              <a:r>
-                <a:rPr lang="en-US" sz="1100" dirty="0" err="1">
-                  <a:effectLst/>
-                  <a:latin typeface="Times New Roman" panose="02020603050405020304" pitchFamily="18" charset="0"/>
-                  <a:ea typeface="SimSun" panose="02010600030101010101" pitchFamily="2" charset="-122"/>
-                </a:rPr>
-                <a:t>Kranji</a:t>
-              </a:r>
-              <a:r>
-                <a:rPr lang="en-US" sz="1100" dirty="0">
-                  <a:effectLst/>
-                  <a:latin typeface="Times New Roman" panose="02020603050405020304" pitchFamily="18" charset="0"/>
-                  <a:ea typeface="SimSun" panose="02010600030101010101" pitchFamily="2" charset="-122"/>
-                </a:rPr>
-                <a:t> Loop #05-03, </a:t>
-              </a:r>
-              <a:r>
-                <a:rPr lang="en-US" sz="1100" dirty="0" err="1">
-                  <a:effectLst/>
-                  <a:latin typeface="Times New Roman" panose="02020603050405020304" pitchFamily="18" charset="0"/>
-                  <a:ea typeface="SimSun" panose="02010600030101010101" pitchFamily="2" charset="-122"/>
-                </a:rPr>
-                <a:t>Kranji</a:t>
-              </a:r>
-              <a:r>
-                <a:rPr lang="en-US" sz="1100" dirty="0">
-                  <a:effectLst/>
-                  <a:latin typeface="Times New Roman" panose="02020603050405020304" pitchFamily="18" charset="0"/>
-                  <a:ea typeface="SimSun" panose="02010600030101010101" pitchFamily="2" charset="-122"/>
-                </a:rPr>
-                <a:t> Green, Singapore 739571</a:t>
-              </a:r>
-              <a:endParaRPr lang="en-SG" sz="1100" dirty="0">
-                <a:latin typeface="Times New Roman" panose="02020603050405020304" pitchFamily="18" charset="0"/>
-                <a:ea typeface="SimSun" panose="02010600030101010101" pitchFamily="2" charset="-122"/>
-              </a:endParaRPr>
-            </a:p>
-            <a:p>
-              <a:pPr algn="ctr">
-                <a:buNone/>
-                <a:tabLst>
-                  <a:tab pos="2743200" algn="ctr"/>
-                  <a:tab pos="5486400" algn="r"/>
-                </a:tabLst>
-              </a:pPr>
-              <a:r>
-                <a:rPr lang="en-US" sz="1100" dirty="0">
-                  <a:effectLst/>
-                  <a:latin typeface="Times New Roman" panose="02020603050405020304" pitchFamily="18" charset="0"/>
-                  <a:ea typeface="SimSun" panose="02010600030101010101" pitchFamily="2" charset="-122"/>
-                </a:rPr>
-                <a:t>Tel: 62824175, 62828203, 62826020</a:t>
-              </a:r>
-              <a:endParaRPr lang="en-SG" sz="1100" dirty="0">
-                <a:effectLst/>
-                <a:latin typeface="Times New Roman" panose="02020603050405020304" pitchFamily="18" charset="0"/>
-                <a:ea typeface="SimSun" panose="02010600030101010101" pitchFamily="2" charset="-122"/>
-              </a:endParaRPr>
-            </a:p>
-            <a:p>
-              <a:pPr algn="ctr">
-                <a:buNone/>
-                <a:tabLst>
-                  <a:tab pos="2743200" algn="ctr"/>
-                  <a:tab pos="5486400" algn="r"/>
-                </a:tabLst>
-              </a:pPr>
-              <a:r>
-                <a:rPr lang="en-US" sz="1100" dirty="0">
-                  <a:effectLst/>
-                  <a:latin typeface="Times New Roman" panose="02020603050405020304" pitchFamily="18" charset="0"/>
-                  <a:ea typeface="SimSun" panose="02010600030101010101" pitchFamily="2" charset="-122"/>
-                </a:rPr>
-                <a:t>GST Reg No. : M2-8923804-2</a:t>
-              </a:r>
-              <a:endParaRPr lang="en-SG" sz="1100" dirty="0">
-                <a:latin typeface="Times New Roman" panose="02020603050405020304" pitchFamily="18" charset="0"/>
-                <a:ea typeface="SimSun" panose="02010600030101010101" pitchFamily="2" charset="-122"/>
-              </a:endParaRPr>
-            </a:p>
-            <a:p>
-              <a:pPr algn="ctr">
-                <a:buNone/>
-                <a:tabLst>
-                  <a:tab pos="2743200" algn="ctr"/>
-                  <a:tab pos="5486400" algn="r"/>
-                </a:tabLst>
-              </a:pPr>
-              <a:r>
-                <a:rPr lang="en-US" sz="1100" dirty="0">
-                  <a:effectLst/>
-                  <a:latin typeface="Times New Roman" panose="02020603050405020304" pitchFamily="18" charset="0"/>
-                  <a:ea typeface="SimSun" panose="02010600030101010101" pitchFamily="2" charset="-122"/>
-                  <a:hlinkClick r:id="rId2"/>
-                </a:rPr>
-                <a:t>http://www.ericwong.com</a:t>
-              </a:r>
-              <a:endParaRPr lang="en-SG" sz="1100" dirty="0">
-                <a:latin typeface="Times New Roman" panose="02020603050405020304" pitchFamily="18" charset="0"/>
-                <a:ea typeface="SimSun" panose="02010600030101010101" pitchFamily="2" charset="-122"/>
-              </a:endParaRPr>
-            </a:p>
-            <a:p>
-              <a:pPr algn="ctr">
-                <a:buNone/>
-                <a:tabLst>
-                  <a:tab pos="2743200" algn="ctr"/>
-                  <a:tab pos="5486400" algn="r"/>
-                </a:tabLst>
-              </a:pPr>
-              <a:r>
-                <a:rPr lang="en-US" sz="1100" dirty="0">
-                  <a:latin typeface="Times New Roman" panose="02020603050405020304" pitchFamily="18" charset="0"/>
-                  <a:ea typeface="SimSun" panose="02010600030101010101" pitchFamily="2" charset="-122"/>
-                </a:rPr>
-                <a:t>E</a:t>
-              </a:r>
-              <a:r>
-                <a:rPr lang="en-US" sz="1100" dirty="0">
-                  <a:effectLst/>
-                  <a:latin typeface="Times New Roman" panose="02020603050405020304" pitchFamily="18" charset="0"/>
-                  <a:ea typeface="SimSun" panose="02010600030101010101" pitchFamily="2" charset="-122"/>
-                </a:rPr>
-                <a:t>-mail: ewmtpl@gmail.com</a:t>
-              </a:r>
-              <a:endParaRPr lang="en-SG" sz="1100" dirty="0">
-                <a:effectLst/>
-                <a:latin typeface="Times New Roman" panose="02020603050405020304" pitchFamily="18" charset="0"/>
-                <a:ea typeface="SimSun" panose="02010600030101010101" pitchFamily="2" charset="-122"/>
-              </a:endParaRPr>
-            </a:p>
-            <a:p>
-              <a:endParaRPr lang="en-SG" sz="1400" dirty="0"/>
-            </a:p>
-          </p:txBody>
-        </p:sp>
-        <p:pic>
-          <p:nvPicPr>
-            <p:cNvPr id="8" name="Picture 7" descr="A red logo with a white background&#10;&#10;AI-generated content may be incorrect.">
-              <a:extLst>
-                <a:ext uri="{FF2B5EF4-FFF2-40B4-BE49-F238E27FC236}">
-                  <a16:creationId xmlns:a16="http://schemas.microsoft.com/office/drawing/2014/main" id="{C0CD73B0-52F6-5211-D92C-1BDEA56A9F2E}"/>
-                </a:ext>
-              </a:extLst>
-            </p:cNvPr>
-            <p:cNvPicPr>
-              <a:picLocks noChangeAspect="1"/>
-            </p:cNvPicPr>
-            <p:nvPr/>
-          </p:nvPicPr>
-          <p:blipFill>
-            <a:blip r:embed="rId3">
-              <a:extLst>
-                <a:ext uri="{28A0092B-C50C-407E-A947-70E740481C1C}">
-                  <a14:useLocalDpi xmlns:a14="http://schemas.microsoft.com/office/drawing/2010/main" val="0"/>
-                </a:ext>
-              </a:extLst>
-            </a:blip>
-            <a:stretch>
-              <a:fillRect/>
-            </a:stretch>
-          </p:blipFill>
-          <p:spPr>
-            <a:xfrm>
-              <a:off x="990192" y="150552"/>
-              <a:ext cx="726493" cy="1233876"/>
-            </a:xfrm>
-            <a:prstGeom prst="rect">
-              <a:avLst/>
-            </a:prstGeom>
-          </p:spPr>
-        </p:pic>
-      </p:grpSp>
-      <p:graphicFrame>
-        <p:nvGraphicFramePr>
-          <p:cNvPr id="9" name="Table 8">
-            <a:extLst>
-              <a:ext uri="{FF2B5EF4-FFF2-40B4-BE49-F238E27FC236}">
-                <a16:creationId xmlns:a16="http://schemas.microsoft.com/office/drawing/2014/main" id="{00A681CA-179C-BA3F-723D-AC156C88F138}"/>
-              </a:ext>
-            </a:extLst>
-          </p:cNvPr>
-          <p:cNvGraphicFramePr>
-            <a:graphicFrameLocks noGrp="1"/>
-          </p:cNvGraphicFramePr>
-          <p:nvPr/>
-        </p:nvGraphicFramePr>
-        <p:xfrm>
-          <a:off x="0" y="1168401"/>
-          <a:ext cx="6857998" cy="1605983"/>
-        </p:xfrm>
-        <a:graphic>
-          <a:graphicData uri="http://schemas.openxmlformats.org/drawingml/2006/table">
-            <a:tbl>
-              <a:tblPr firstRow="1" bandRow="1">
-                <a:tableStyleId>{5C22544A-7EE6-4342-B048-85BDC9FD1C3A}</a:tableStyleId>
-              </a:tblPr>
-              <a:tblGrid>
-                <a:gridCol w="3428999">
-                  <a:extLst>
-                    <a:ext uri="{9D8B030D-6E8A-4147-A177-3AD203B41FA5}">
-                      <a16:colId xmlns:a16="http://schemas.microsoft.com/office/drawing/2014/main" val="3963200382"/>
-                    </a:ext>
-                  </a:extLst>
-                </a:gridCol>
-                <a:gridCol w="3428999">
-                  <a:extLst>
-                    <a:ext uri="{9D8B030D-6E8A-4147-A177-3AD203B41FA5}">
-                      <a16:colId xmlns:a16="http://schemas.microsoft.com/office/drawing/2014/main" val="281614988"/>
-                    </a:ext>
-                  </a:extLst>
-                </a:gridCol>
-              </a:tblGrid>
-              <a:tr h="370840">
-                <a:tc gridSpan="2">
-                  <a:txBody>
-                    <a:bodyPr/>
-                    <a:lstStyle/>
-                    <a:p>
-                      <a:pPr algn="ctr"/>
-                      <a:r>
-                        <a:rPr lang="en-SG" dirty="0"/>
-                        <a:t>Customer / Tenant Company: Singapore Mint</a:t>
-                      </a:r>
-                    </a:p>
-                  </a:txBody>
-                  <a:tcPr/>
-                </a:tc>
-                <a:tc hMerge="1">
-                  <a:txBody>
-                    <a:bodyPr/>
-                    <a:lstStyle/>
-                    <a:p>
-                      <a:endParaRPr lang="en-SG" dirty="0"/>
-                    </a:p>
-                  </a:txBody>
-                  <a:tcPr/>
-                </a:tc>
-                <a:extLst>
-                  <a:ext uri="{0D108BD9-81ED-4DB2-BD59-A6C34878D82A}">
-                    <a16:rowId xmlns:a16="http://schemas.microsoft.com/office/drawing/2014/main" val="3714705615"/>
-                  </a:ext>
-                </a:extLst>
-              </a:tr>
-              <a:tr h="327659">
-                <a:tc>
-                  <a:txBody>
-                    <a:bodyPr/>
-                    <a:lstStyle/>
-                    <a:p>
-                      <a:r>
-                        <a:rPr lang="en-SG" sz="1100" dirty="0"/>
-                        <a:t>Site Location: Singapore Mint </a:t>
-                      </a:r>
-                    </a:p>
-                  </a:txBody>
-                  <a:tcPr/>
-                </a:tc>
-                <a:tc rowSpan="3">
-                  <a:txBody>
-                    <a:bodyPr/>
-                    <a:lstStyle/>
-                    <a:p>
-                      <a:endParaRPr lang="en-SG" sz="1100" dirty="0"/>
-                    </a:p>
-                    <a:p>
-                      <a:endParaRPr lang="en-SG" sz="1100" dirty="0"/>
-                    </a:p>
-                    <a:p>
-                      <a:endParaRPr lang="en-SG" sz="1100" dirty="0"/>
-                    </a:p>
-                    <a:p>
-                      <a:endParaRPr lang="en-SG" sz="1100" dirty="0"/>
-                    </a:p>
-                    <a:p>
-                      <a:r>
-                        <a:rPr lang="en-SG" sz="1100" dirty="0"/>
-                        <a:t>Approved By:  Eric Wong (Director)</a:t>
-                      </a:r>
-                    </a:p>
-                  </a:txBody>
-                  <a:tcPr>
-                    <a:solidFill>
-                      <a:schemeClr val="bg1"/>
-                    </a:solidFill>
-                  </a:tcPr>
-                </a:tc>
-                <a:extLst>
-                  <a:ext uri="{0D108BD9-81ED-4DB2-BD59-A6C34878D82A}">
-                    <a16:rowId xmlns:a16="http://schemas.microsoft.com/office/drawing/2014/main" val="2691564520"/>
-                  </a:ext>
-                </a:extLst>
-              </a:tr>
-              <a:tr h="343322">
-                <a:tc>
-                  <a:txBody>
-                    <a:bodyPr/>
-                    <a:lstStyle/>
-                    <a:p>
-                      <a:r>
-                        <a:rPr lang="en-SG" sz="1100" dirty="0"/>
-                        <a:t>Process: Lifting and Moving of Machinery on Platform</a:t>
-                      </a:r>
-                    </a:p>
-                  </a:txBody>
-                  <a:tcPr/>
-                </a:tc>
-                <a:tc vMerge="1">
-                  <a:txBody>
-                    <a:bodyPr/>
-                    <a:lstStyle/>
-                    <a:p>
-                      <a:endParaRPr lang="en-SG" dirty="0"/>
-                    </a:p>
-                  </a:txBody>
-                  <a:tcPr/>
-                </a:tc>
-                <a:extLst>
-                  <a:ext uri="{0D108BD9-81ED-4DB2-BD59-A6C34878D82A}">
-                    <a16:rowId xmlns:a16="http://schemas.microsoft.com/office/drawing/2014/main" val="784894797"/>
-                  </a:ext>
-                </a:extLst>
-              </a:tr>
-              <a:tr h="268395">
-                <a:tc>
-                  <a:txBody>
-                    <a:bodyPr/>
-                    <a:lstStyle/>
-                    <a:p>
-                      <a:r>
-                        <a:rPr lang="en-SG" sz="1100" dirty="0"/>
-                        <a:t>Prepared by: Kevin Wong</a:t>
-                      </a:r>
-                    </a:p>
-                  </a:txBody>
-                  <a:tcPr/>
-                </a:tc>
-                <a:tc vMerge="1">
-                  <a:txBody>
-                    <a:bodyPr/>
-                    <a:lstStyle/>
-                    <a:p>
-                      <a:endParaRPr lang="en-SG" dirty="0"/>
-                    </a:p>
-                  </a:txBody>
-                  <a:tcPr/>
-                </a:tc>
-                <a:extLst>
-                  <a:ext uri="{0D108BD9-81ED-4DB2-BD59-A6C34878D82A}">
-                    <a16:rowId xmlns:a16="http://schemas.microsoft.com/office/drawing/2014/main" val="3405944484"/>
-                  </a:ext>
-                </a:extLst>
-              </a:tr>
-              <a:tr h="295767">
-                <a:tc>
-                  <a:txBody>
-                    <a:bodyPr/>
-                    <a:lstStyle/>
-                    <a:p>
-                      <a:r>
-                        <a:rPr lang="en-SG" sz="1100" dirty="0"/>
-                        <a:t>Last Review Date: 24.02.2025</a:t>
-                      </a:r>
-                    </a:p>
-                  </a:txBody>
-                  <a:tcPr/>
-                </a:tc>
-                <a:tc>
-                  <a:txBody>
-                    <a:bodyPr/>
-                    <a:lstStyle/>
-                    <a:p>
-                      <a:r>
-                        <a:rPr lang="en-SG" sz="1100" dirty="0"/>
-                        <a:t>Next Review Date: 23.02.2026</a:t>
-                      </a:r>
-                    </a:p>
-                  </a:txBody>
-                  <a:tcPr/>
-                </a:tc>
-                <a:extLst>
-                  <a:ext uri="{0D108BD9-81ED-4DB2-BD59-A6C34878D82A}">
-                    <a16:rowId xmlns:a16="http://schemas.microsoft.com/office/drawing/2014/main" val="3430118298"/>
-                  </a:ext>
-                </a:extLst>
-              </a:tr>
-            </a:tbl>
-          </a:graphicData>
-        </a:graphic>
-      </p:graphicFrame>
-      <p:pic>
-        <p:nvPicPr>
-          <p:cNvPr id="11" name="Picture 10" descr="A close-up of a stamp&#10;&#10;AI-generated content may be incorrect.">
-            <a:extLst>
-              <a:ext uri="{FF2B5EF4-FFF2-40B4-BE49-F238E27FC236}">
-                <a16:creationId xmlns:a16="http://schemas.microsoft.com/office/drawing/2014/main" id="{F2ECC0F6-A20F-D8E8-0D0E-1D760F07E521}"/>
-              </a:ext>
-            </a:extLst>
-          </p:cNvPr>
-          <p:cNvPicPr>
-            <a:picLocks noChangeAspect="1"/>
-          </p:cNvPicPr>
-          <p:nvPr/>
-        </p:nvPicPr>
-        <p:blipFill>
-          <a:blip r:embed="rId4">
-            <a:extLst>
-              <a:ext uri="{28A0092B-C50C-407E-A947-70E740481C1C}">
-                <a14:useLocalDpi xmlns:a14="http://schemas.microsoft.com/office/drawing/2010/main" val="0"/>
-              </a:ext>
-            </a:extLst>
-          </a:blip>
-          <a:stretch>
-            <a:fillRect/>
-          </a:stretch>
-        </p:blipFill>
-        <p:spPr>
-          <a:xfrm>
-            <a:off x="5878548" y="1522307"/>
-            <a:ext cx="693638" cy="764310"/>
-          </a:xfrm>
-          <a:prstGeom prst="rect">
-            <a:avLst/>
-          </a:prstGeom>
-        </p:spPr>
-      </p:pic>
-      <p:sp>
-        <p:nvSpPr>
-          <p:cNvPr id="4" name="Slide Number Placeholder 3">
-            <a:extLst>
-              <a:ext uri="{FF2B5EF4-FFF2-40B4-BE49-F238E27FC236}">
-                <a16:creationId xmlns:a16="http://schemas.microsoft.com/office/drawing/2014/main" id="{D1BB4277-BAC8-93E3-25EA-2D8A847DEC87}"/>
-              </a:ext>
-            </a:extLst>
-          </p:cNvPr>
-          <p:cNvSpPr>
-            <a:spLocks noGrp="1"/>
-          </p:cNvSpPr>
-          <p:nvPr>
-            <p:ph type="sldNum" sz="quarter" idx="12"/>
-          </p:nvPr>
-        </p:nvSpPr>
-        <p:spPr/>
-        <p:txBody>
-          <a:bodyPr/>
-          <a:lstStyle/>
-          <a:p>
-            <a:fld id="{F0052729-9336-4E5B-BC69-5177B8B6DD05}" type="slidenum">
-              <a:rPr lang="en-SG" smtClean="0"/>
-              <a:t>16</a:t>
-            </a:fld>
-            <a:endParaRPr lang="en-SG"/>
-          </a:p>
-        </p:txBody>
-      </p:sp>
-    </p:spTree>
-    <p:extLst>
-      <p:ext uri="{BB962C8B-B14F-4D97-AF65-F5344CB8AC3E}">
-        <p14:creationId xmlns:p14="http://schemas.microsoft.com/office/powerpoint/2010/main" val="336424969"/>
-      </p:ext>
-    </p:extLst>
-  </p:cSld>
-  <p:clrMapOvr>
-    <a:masterClrMapping/>
-  </p:clrMapOvr>
-</p:sld>
-</file>
-
-<file path=ppt/slides/slide17.xml><?xml version="1.0" encoding="utf-8"?>
-<p:sld xmlns:a="http://schemas.openxmlformats.org/drawingml/2006/main" xmlns:r="http://schemas.openxmlformats.org/officeDocument/2006/relationships" xmlns:p="http://schemas.openxmlformats.org/presentationml/2006/main">
-  <p:cSld>
-    <p:spTree>
-      <p:nvGrpSpPr>
-        <p:cNvPr id="1" name="">
-          <a:extLst>
-            <a:ext uri="{FF2B5EF4-FFF2-40B4-BE49-F238E27FC236}">
-              <a16:creationId xmlns:a16="http://schemas.microsoft.com/office/drawing/2014/main" id="{21511545-1CE0-3561-4573-9EAA0187B8C9}"/>
-            </a:ext>
-          </a:extLst>
-        </p:cNvPr>
-        <p:cNvGrpSpPr/>
-        <p:nvPr/>
-      </p:nvGrpSpPr>
-      <p:grpSpPr>
-        <a:xfrm>
-          <a:off x="0" y="0"/>
-          <a:ext cx="0" cy="0"/>
-          <a:chOff x="0" y="0"/>
-          <a:chExt cx="0" cy="0"/>
-        </a:xfrm>
-      </p:grpSpPr>
-      <p:grpSp>
-        <p:nvGrpSpPr>
-          <p:cNvPr id="10" name="Group 9">
-            <a:extLst>
-              <a:ext uri="{FF2B5EF4-FFF2-40B4-BE49-F238E27FC236}">
-                <a16:creationId xmlns:a16="http://schemas.microsoft.com/office/drawing/2014/main" id="{64EDC3F7-BCF5-AB9A-6CC6-BD8A635DCBB4}"/>
-              </a:ext>
-            </a:extLst>
-          </p:cNvPr>
-          <p:cNvGrpSpPr/>
-          <p:nvPr/>
-        </p:nvGrpSpPr>
-        <p:grpSpPr>
-          <a:xfrm>
-            <a:off x="0" y="1"/>
-            <a:ext cx="6857999" cy="1168400"/>
-            <a:chOff x="701748" y="108190"/>
-            <a:chExt cx="5454507" cy="1318601"/>
-          </a:xfrm>
-        </p:grpSpPr>
-        <p:sp>
-          <p:nvSpPr>
-            <p:cNvPr id="6" name="TextBox 5">
-              <a:extLst>
-                <a:ext uri="{FF2B5EF4-FFF2-40B4-BE49-F238E27FC236}">
-                  <a16:creationId xmlns:a16="http://schemas.microsoft.com/office/drawing/2014/main" id="{733382A1-0F02-C3EE-1A94-D104F2E7B92D}"/>
-                </a:ext>
-              </a:extLst>
-            </p:cNvPr>
-            <p:cNvSpPr txBox="1"/>
-            <p:nvPr/>
-          </p:nvSpPr>
-          <p:spPr>
-            <a:xfrm>
-              <a:off x="701748" y="108190"/>
-              <a:ext cx="5454507" cy="1318601"/>
-            </a:xfrm>
-            <a:prstGeom prst="rect">
-              <a:avLst/>
-            </a:prstGeom>
-            <a:noFill/>
-            <a:ln>
-              <a:solidFill>
-                <a:schemeClr val="accent1"/>
-              </a:solidFill>
-            </a:ln>
-          </p:spPr>
-          <p:txBody>
-            <a:bodyPr wrap="square" rtlCol="0">
-              <a:spAutoFit/>
-            </a:bodyPr>
-            <a:lstStyle/>
-            <a:p>
-              <a:pPr algn="ctr">
-                <a:buNone/>
-                <a:tabLst>
-                  <a:tab pos="2743200" algn="ctr"/>
-                  <a:tab pos="5486400" algn="r"/>
-                </a:tabLst>
-              </a:pPr>
-              <a:r>
-                <a:rPr lang="en-US" sz="1100" b="1" dirty="0">
-                  <a:solidFill>
-                    <a:srgbClr val="0000FF"/>
-                  </a:solidFill>
-                  <a:effectLst/>
-                  <a:latin typeface="Times New Roman" panose="02020603050405020304" pitchFamily="18" charset="0"/>
-                  <a:ea typeface="SimSun" panose="02010600030101010101" pitchFamily="2" charset="-122"/>
-                </a:rPr>
-                <a:t>ERIC WONG MACHINERY TRANSPORTATION PTE LTD</a:t>
-              </a:r>
-              <a:endParaRPr lang="en-SG" sz="1100" b="1" dirty="0">
-                <a:solidFill>
-                  <a:srgbClr val="0000FF"/>
-                </a:solidFill>
-                <a:latin typeface="Times New Roman" panose="02020603050405020304" pitchFamily="18" charset="0"/>
-                <a:ea typeface="SimSun" panose="02010600030101010101" pitchFamily="2" charset="-122"/>
-              </a:endParaRPr>
-            </a:p>
-            <a:p>
-              <a:pPr algn="ctr">
-                <a:buNone/>
-                <a:tabLst>
-                  <a:tab pos="2743200" algn="ctr"/>
-                  <a:tab pos="5486400" algn="r"/>
-                </a:tabLst>
-              </a:pPr>
-              <a:r>
-                <a:rPr lang="en-US" sz="1100" dirty="0">
-                  <a:effectLst/>
-                  <a:latin typeface="Times New Roman" panose="02020603050405020304" pitchFamily="18" charset="0"/>
-                  <a:ea typeface="SimSun" panose="02010600030101010101" pitchFamily="2" charset="-122"/>
-                </a:rPr>
-                <a:t>28 </a:t>
-              </a:r>
-              <a:r>
-                <a:rPr lang="en-US" sz="1100" dirty="0" err="1">
-                  <a:effectLst/>
-                  <a:latin typeface="Times New Roman" panose="02020603050405020304" pitchFamily="18" charset="0"/>
-                  <a:ea typeface="SimSun" panose="02010600030101010101" pitchFamily="2" charset="-122"/>
-                </a:rPr>
-                <a:t>Kranji</a:t>
-              </a:r>
-              <a:r>
-                <a:rPr lang="en-US" sz="1100" dirty="0">
-                  <a:effectLst/>
-                  <a:latin typeface="Times New Roman" panose="02020603050405020304" pitchFamily="18" charset="0"/>
-                  <a:ea typeface="SimSun" panose="02010600030101010101" pitchFamily="2" charset="-122"/>
-                </a:rPr>
-                <a:t> Loop #05-03, </a:t>
-              </a:r>
-              <a:r>
-                <a:rPr lang="en-US" sz="1100" dirty="0" err="1">
-                  <a:effectLst/>
-                  <a:latin typeface="Times New Roman" panose="02020603050405020304" pitchFamily="18" charset="0"/>
-                  <a:ea typeface="SimSun" panose="02010600030101010101" pitchFamily="2" charset="-122"/>
-                </a:rPr>
-                <a:t>Kranji</a:t>
-              </a:r>
-              <a:r>
-                <a:rPr lang="en-US" sz="1100" dirty="0">
-                  <a:effectLst/>
-                  <a:latin typeface="Times New Roman" panose="02020603050405020304" pitchFamily="18" charset="0"/>
-                  <a:ea typeface="SimSun" panose="02010600030101010101" pitchFamily="2" charset="-122"/>
-                </a:rPr>
-                <a:t> Green, Singapore 739571</a:t>
-              </a:r>
-              <a:endParaRPr lang="en-SG" sz="1100" dirty="0">
-                <a:latin typeface="Times New Roman" panose="02020603050405020304" pitchFamily="18" charset="0"/>
-                <a:ea typeface="SimSun" panose="02010600030101010101" pitchFamily="2" charset="-122"/>
-              </a:endParaRPr>
-            </a:p>
-            <a:p>
-              <a:pPr algn="ctr">
-                <a:buNone/>
-                <a:tabLst>
-                  <a:tab pos="2743200" algn="ctr"/>
-                  <a:tab pos="5486400" algn="r"/>
-                </a:tabLst>
-              </a:pPr>
-              <a:r>
-                <a:rPr lang="en-US" sz="1100" dirty="0">
-                  <a:effectLst/>
-                  <a:latin typeface="Times New Roman" panose="02020603050405020304" pitchFamily="18" charset="0"/>
-                  <a:ea typeface="SimSun" panose="02010600030101010101" pitchFamily="2" charset="-122"/>
-                </a:rPr>
-                <a:t>Tel: 62824175, 62828203, 62826020</a:t>
-              </a:r>
-              <a:endParaRPr lang="en-SG" sz="1100" dirty="0">
-                <a:effectLst/>
-                <a:latin typeface="Times New Roman" panose="02020603050405020304" pitchFamily="18" charset="0"/>
-                <a:ea typeface="SimSun" panose="02010600030101010101" pitchFamily="2" charset="-122"/>
-              </a:endParaRPr>
-            </a:p>
-            <a:p>
-              <a:pPr algn="ctr">
-                <a:buNone/>
-                <a:tabLst>
-                  <a:tab pos="2743200" algn="ctr"/>
-                  <a:tab pos="5486400" algn="r"/>
-                </a:tabLst>
-              </a:pPr>
-              <a:r>
-                <a:rPr lang="en-US" sz="1100" dirty="0">
-                  <a:effectLst/>
-                  <a:latin typeface="Times New Roman" panose="02020603050405020304" pitchFamily="18" charset="0"/>
-                  <a:ea typeface="SimSun" panose="02010600030101010101" pitchFamily="2" charset="-122"/>
-                </a:rPr>
-                <a:t>GST Reg No. : M2-8923804-2</a:t>
-              </a:r>
-              <a:endParaRPr lang="en-SG" sz="1100" dirty="0">
-                <a:latin typeface="Times New Roman" panose="02020603050405020304" pitchFamily="18" charset="0"/>
-                <a:ea typeface="SimSun" panose="02010600030101010101" pitchFamily="2" charset="-122"/>
-              </a:endParaRPr>
-            </a:p>
-            <a:p>
-              <a:pPr algn="ctr">
-                <a:buNone/>
-                <a:tabLst>
-                  <a:tab pos="2743200" algn="ctr"/>
-                  <a:tab pos="5486400" algn="r"/>
-                </a:tabLst>
-              </a:pPr>
-              <a:r>
-                <a:rPr lang="en-US" sz="1100" dirty="0">
-                  <a:effectLst/>
-                  <a:latin typeface="Times New Roman" panose="02020603050405020304" pitchFamily="18" charset="0"/>
-                  <a:ea typeface="SimSun" panose="02010600030101010101" pitchFamily="2" charset="-122"/>
-                  <a:hlinkClick r:id="rId2"/>
-                </a:rPr>
-                <a:t>http://www.ericwong.com</a:t>
-              </a:r>
-              <a:endParaRPr lang="en-SG" sz="1100" dirty="0">
-                <a:latin typeface="Times New Roman" panose="02020603050405020304" pitchFamily="18" charset="0"/>
-                <a:ea typeface="SimSun" panose="02010600030101010101" pitchFamily="2" charset="-122"/>
-              </a:endParaRPr>
-            </a:p>
-            <a:p>
-              <a:pPr algn="ctr">
-                <a:buNone/>
-                <a:tabLst>
-                  <a:tab pos="2743200" algn="ctr"/>
-                  <a:tab pos="5486400" algn="r"/>
-                </a:tabLst>
-              </a:pPr>
-              <a:r>
-                <a:rPr lang="en-US" sz="1100" dirty="0">
-                  <a:latin typeface="Times New Roman" panose="02020603050405020304" pitchFamily="18" charset="0"/>
-                  <a:ea typeface="SimSun" panose="02010600030101010101" pitchFamily="2" charset="-122"/>
-                </a:rPr>
-                <a:t>E</a:t>
-              </a:r>
-              <a:r>
-                <a:rPr lang="en-US" sz="1100" dirty="0">
-                  <a:effectLst/>
-                  <a:latin typeface="Times New Roman" panose="02020603050405020304" pitchFamily="18" charset="0"/>
-                  <a:ea typeface="SimSun" panose="02010600030101010101" pitchFamily="2" charset="-122"/>
-                </a:rPr>
-                <a:t>-mail: ewmtpl@gmail.com</a:t>
-              </a:r>
-              <a:endParaRPr lang="en-SG" sz="1100" dirty="0">
-                <a:effectLst/>
-                <a:latin typeface="Times New Roman" panose="02020603050405020304" pitchFamily="18" charset="0"/>
-                <a:ea typeface="SimSun" panose="02010600030101010101" pitchFamily="2" charset="-122"/>
-              </a:endParaRPr>
-            </a:p>
-            <a:p>
-              <a:endParaRPr lang="en-SG" sz="1400" dirty="0"/>
-            </a:p>
-          </p:txBody>
-        </p:sp>
-        <p:pic>
-          <p:nvPicPr>
-            <p:cNvPr id="8" name="Picture 7" descr="A red logo with a white background&#10;&#10;AI-generated content may be incorrect.">
-              <a:extLst>
-                <a:ext uri="{FF2B5EF4-FFF2-40B4-BE49-F238E27FC236}">
-                  <a16:creationId xmlns:a16="http://schemas.microsoft.com/office/drawing/2014/main" id="{797E2B50-DA8D-86A5-1E85-35E0C56497DB}"/>
-                </a:ext>
-              </a:extLst>
-            </p:cNvPr>
-            <p:cNvPicPr>
-              <a:picLocks noChangeAspect="1"/>
-            </p:cNvPicPr>
-            <p:nvPr/>
-          </p:nvPicPr>
-          <p:blipFill>
-            <a:blip r:embed="rId3">
-              <a:extLst>
-                <a:ext uri="{28A0092B-C50C-407E-A947-70E740481C1C}">
-                  <a14:useLocalDpi xmlns:a14="http://schemas.microsoft.com/office/drawing/2010/main" val="0"/>
-                </a:ext>
-              </a:extLst>
-            </a:blip>
-            <a:stretch>
-              <a:fillRect/>
-            </a:stretch>
-          </p:blipFill>
-          <p:spPr>
-            <a:xfrm>
-              <a:off x="990192" y="150552"/>
-              <a:ext cx="726493" cy="1233876"/>
-            </a:xfrm>
-            <a:prstGeom prst="rect">
-              <a:avLst/>
-            </a:prstGeom>
-          </p:spPr>
-        </p:pic>
-      </p:grpSp>
-      <p:graphicFrame>
-        <p:nvGraphicFramePr>
-          <p:cNvPr id="9" name="Table 8">
-            <a:extLst>
-              <a:ext uri="{FF2B5EF4-FFF2-40B4-BE49-F238E27FC236}">
-                <a16:creationId xmlns:a16="http://schemas.microsoft.com/office/drawing/2014/main" id="{D6C8BA79-9CAD-9EEB-90C4-B6E8DF79B632}"/>
-              </a:ext>
-            </a:extLst>
-          </p:cNvPr>
-          <p:cNvGraphicFramePr>
-            <a:graphicFrameLocks noGrp="1"/>
-          </p:cNvGraphicFramePr>
-          <p:nvPr/>
-        </p:nvGraphicFramePr>
-        <p:xfrm>
-          <a:off x="0" y="1168401"/>
-          <a:ext cx="6857998" cy="1605983"/>
-        </p:xfrm>
-        <a:graphic>
-          <a:graphicData uri="http://schemas.openxmlformats.org/drawingml/2006/table">
-            <a:tbl>
-              <a:tblPr firstRow="1" bandRow="1">
-                <a:tableStyleId>{5C22544A-7EE6-4342-B048-85BDC9FD1C3A}</a:tableStyleId>
-              </a:tblPr>
-              <a:tblGrid>
-                <a:gridCol w="3428999">
-                  <a:extLst>
-                    <a:ext uri="{9D8B030D-6E8A-4147-A177-3AD203B41FA5}">
-                      <a16:colId xmlns:a16="http://schemas.microsoft.com/office/drawing/2014/main" val="3963200382"/>
-                    </a:ext>
-                  </a:extLst>
-                </a:gridCol>
-                <a:gridCol w="3428999">
-                  <a:extLst>
-                    <a:ext uri="{9D8B030D-6E8A-4147-A177-3AD203B41FA5}">
-                      <a16:colId xmlns:a16="http://schemas.microsoft.com/office/drawing/2014/main" val="281614988"/>
-                    </a:ext>
-                  </a:extLst>
-                </a:gridCol>
-              </a:tblGrid>
-              <a:tr h="370840">
-                <a:tc gridSpan="2">
-                  <a:txBody>
-                    <a:bodyPr/>
-                    <a:lstStyle/>
-                    <a:p>
-                      <a:pPr algn="ctr"/>
-                      <a:r>
-                        <a:rPr lang="en-SG" dirty="0"/>
-                        <a:t>Customer / Tenant Company: Singapore Mint</a:t>
-                      </a:r>
-                    </a:p>
-                  </a:txBody>
-                  <a:tcPr/>
-                </a:tc>
-                <a:tc hMerge="1">
-                  <a:txBody>
-                    <a:bodyPr/>
-                    <a:lstStyle/>
-                    <a:p>
-                      <a:endParaRPr lang="en-SG" dirty="0"/>
-                    </a:p>
-                  </a:txBody>
-                  <a:tcPr/>
-                </a:tc>
-                <a:extLst>
-                  <a:ext uri="{0D108BD9-81ED-4DB2-BD59-A6C34878D82A}">
-                    <a16:rowId xmlns:a16="http://schemas.microsoft.com/office/drawing/2014/main" val="3714705615"/>
-                  </a:ext>
-                </a:extLst>
-              </a:tr>
-              <a:tr h="327659">
-                <a:tc>
-                  <a:txBody>
-                    <a:bodyPr/>
-                    <a:lstStyle/>
-                    <a:p>
-                      <a:r>
-                        <a:rPr lang="en-SG" sz="1100" dirty="0"/>
-                        <a:t>Site Location: Singapore Mint </a:t>
-                      </a:r>
-                    </a:p>
-                  </a:txBody>
-                  <a:tcPr/>
-                </a:tc>
-                <a:tc rowSpan="3">
-                  <a:txBody>
-                    <a:bodyPr/>
-                    <a:lstStyle/>
-                    <a:p>
-                      <a:endParaRPr lang="en-SG" sz="1100" dirty="0"/>
-                    </a:p>
-                    <a:p>
-                      <a:endParaRPr lang="en-SG" sz="1100" dirty="0"/>
-                    </a:p>
-                    <a:p>
-                      <a:endParaRPr lang="en-SG" sz="1100" dirty="0"/>
-                    </a:p>
-                    <a:p>
-                      <a:endParaRPr lang="en-SG" sz="1100" dirty="0"/>
-                    </a:p>
-                    <a:p>
-                      <a:r>
-                        <a:rPr lang="en-SG" sz="1100" dirty="0"/>
-                        <a:t>Approved By:  Eric Wong (Director)</a:t>
-                      </a:r>
-                    </a:p>
-                  </a:txBody>
-                  <a:tcPr>
-                    <a:solidFill>
-                      <a:schemeClr val="bg1"/>
-                    </a:solidFill>
-                  </a:tcPr>
-                </a:tc>
-                <a:extLst>
-                  <a:ext uri="{0D108BD9-81ED-4DB2-BD59-A6C34878D82A}">
-                    <a16:rowId xmlns:a16="http://schemas.microsoft.com/office/drawing/2014/main" val="2691564520"/>
-                  </a:ext>
-                </a:extLst>
-              </a:tr>
-              <a:tr h="343322">
-                <a:tc>
-                  <a:txBody>
-                    <a:bodyPr/>
-                    <a:lstStyle/>
-                    <a:p>
-                      <a:r>
-                        <a:rPr lang="en-SG" sz="1100" dirty="0"/>
-                        <a:t>Process: Lifting and Moving of Machinery on Platform</a:t>
-                      </a:r>
-                    </a:p>
-                  </a:txBody>
-                  <a:tcPr/>
-                </a:tc>
-                <a:tc vMerge="1">
-                  <a:txBody>
-                    <a:bodyPr/>
-                    <a:lstStyle/>
-                    <a:p>
-                      <a:endParaRPr lang="en-SG" dirty="0"/>
-                    </a:p>
-                  </a:txBody>
-                  <a:tcPr/>
-                </a:tc>
-                <a:extLst>
-                  <a:ext uri="{0D108BD9-81ED-4DB2-BD59-A6C34878D82A}">
-                    <a16:rowId xmlns:a16="http://schemas.microsoft.com/office/drawing/2014/main" val="784894797"/>
-                  </a:ext>
-                </a:extLst>
-              </a:tr>
-              <a:tr h="268395">
-                <a:tc>
-                  <a:txBody>
-                    <a:bodyPr/>
-                    <a:lstStyle/>
-                    <a:p>
-                      <a:r>
-                        <a:rPr lang="en-SG" sz="1100" dirty="0"/>
-                        <a:t>Prepared by: Kevin Wong</a:t>
-                      </a:r>
-                    </a:p>
-                  </a:txBody>
-                  <a:tcPr/>
-                </a:tc>
-                <a:tc vMerge="1">
-                  <a:txBody>
-                    <a:bodyPr/>
-                    <a:lstStyle/>
-                    <a:p>
-                      <a:endParaRPr lang="en-SG" dirty="0"/>
-                    </a:p>
-                  </a:txBody>
-                  <a:tcPr/>
-                </a:tc>
-                <a:extLst>
-                  <a:ext uri="{0D108BD9-81ED-4DB2-BD59-A6C34878D82A}">
-                    <a16:rowId xmlns:a16="http://schemas.microsoft.com/office/drawing/2014/main" val="3405944484"/>
-                  </a:ext>
-                </a:extLst>
-              </a:tr>
-              <a:tr h="295767">
-                <a:tc>
-                  <a:txBody>
-                    <a:bodyPr/>
-                    <a:lstStyle/>
-                    <a:p>
-                      <a:r>
-                        <a:rPr lang="en-SG" sz="1100" dirty="0"/>
-                        <a:t>Last Review Date: 24.02.2025</a:t>
-                      </a:r>
-                    </a:p>
-                  </a:txBody>
-                  <a:tcPr/>
-                </a:tc>
-                <a:tc>
-                  <a:txBody>
-                    <a:bodyPr/>
-                    <a:lstStyle/>
-                    <a:p>
-                      <a:r>
-                        <a:rPr lang="en-SG" sz="1100" dirty="0"/>
-                        <a:t>Next Review Date: 23.02.2026</a:t>
-                      </a:r>
-                    </a:p>
-                  </a:txBody>
-                  <a:tcPr/>
-                </a:tc>
-                <a:extLst>
-                  <a:ext uri="{0D108BD9-81ED-4DB2-BD59-A6C34878D82A}">
-                    <a16:rowId xmlns:a16="http://schemas.microsoft.com/office/drawing/2014/main" val="3430118298"/>
-                  </a:ext>
-                </a:extLst>
-              </a:tr>
-            </a:tbl>
-          </a:graphicData>
-        </a:graphic>
-      </p:graphicFrame>
-      <p:pic>
-        <p:nvPicPr>
-          <p:cNvPr id="11" name="Picture 10" descr="A close-up of a stamp&#10;&#10;AI-generated content may be incorrect.">
-            <a:extLst>
-              <a:ext uri="{FF2B5EF4-FFF2-40B4-BE49-F238E27FC236}">
-                <a16:creationId xmlns:a16="http://schemas.microsoft.com/office/drawing/2014/main" id="{9085CDAC-F66D-A64D-949F-A89B3E5884A4}"/>
-              </a:ext>
-            </a:extLst>
-          </p:cNvPr>
-          <p:cNvPicPr>
-            <a:picLocks noChangeAspect="1"/>
-          </p:cNvPicPr>
-          <p:nvPr/>
-        </p:nvPicPr>
-        <p:blipFill>
-          <a:blip r:embed="rId4">
-            <a:extLst>
-              <a:ext uri="{28A0092B-C50C-407E-A947-70E740481C1C}">
-                <a14:useLocalDpi xmlns:a14="http://schemas.microsoft.com/office/drawing/2010/main" val="0"/>
-              </a:ext>
-            </a:extLst>
-          </a:blip>
-          <a:stretch>
-            <a:fillRect/>
-          </a:stretch>
-        </p:blipFill>
-        <p:spPr>
-          <a:xfrm>
-            <a:off x="5878548" y="1522307"/>
-            <a:ext cx="693638" cy="764310"/>
-          </a:xfrm>
-          <a:prstGeom prst="rect">
-            <a:avLst/>
-          </a:prstGeom>
-        </p:spPr>
-      </p:pic>
-      <p:sp>
-        <p:nvSpPr>
-          <p:cNvPr id="4" name="Slide Number Placeholder 3">
-            <a:extLst>
-              <a:ext uri="{FF2B5EF4-FFF2-40B4-BE49-F238E27FC236}">
-                <a16:creationId xmlns:a16="http://schemas.microsoft.com/office/drawing/2014/main" id="{76B97874-CCD9-2070-6C6E-EDE3013DBA47}"/>
-              </a:ext>
-            </a:extLst>
-          </p:cNvPr>
-          <p:cNvSpPr>
-            <a:spLocks noGrp="1"/>
-          </p:cNvSpPr>
-          <p:nvPr>
-            <p:ph type="sldNum" sz="quarter" idx="12"/>
-          </p:nvPr>
-        </p:nvSpPr>
-        <p:spPr/>
-        <p:txBody>
-          <a:bodyPr/>
-          <a:lstStyle/>
-          <a:p>
-            <a:fld id="{F0052729-9336-4E5B-BC69-5177B8B6DD05}" type="slidenum">
-              <a:rPr lang="en-SG" smtClean="0"/>
-              <a:t>17</a:t>
-            </a:fld>
-            <a:endParaRPr lang="en-SG"/>
-          </a:p>
-        </p:txBody>
-      </p:sp>
-    </p:spTree>
-    <p:extLst>
-      <p:ext uri="{BB962C8B-B14F-4D97-AF65-F5344CB8AC3E}">
-        <p14:creationId xmlns:p14="http://schemas.microsoft.com/office/powerpoint/2010/main" val="1233248383"/>
-      </p:ext>
-    </p:extLst>
-  </p:cSld>
-  <p:clrMapOvr>
-    <a:masterClrMapping/>
-  </p:clrMapOvr>
-</p:sld>
-</file>
-
-<file path=ppt/slides/slide18.xml><?xml version="1.0" encoding="utf-8"?>
-<p:sld xmlns:a="http://schemas.openxmlformats.org/drawingml/2006/main" xmlns:r="http://schemas.openxmlformats.org/officeDocument/2006/relationships" xmlns:p="http://schemas.openxmlformats.org/presentationml/2006/main">
-  <p:cSld>
-    <p:spTree>
-      <p:nvGrpSpPr>
-        <p:cNvPr id="1" name="">
-          <a:extLst>
-            <a:ext uri="{FF2B5EF4-FFF2-40B4-BE49-F238E27FC236}">
-              <a16:creationId xmlns:a16="http://schemas.microsoft.com/office/drawing/2014/main" id="{7EA5E232-1CCB-9DF6-E155-582AF7B2D2F2}"/>
-            </a:ext>
-          </a:extLst>
-        </p:cNvPr>
-        <p:cNvGrpSpPr/>
-        <p:nvPr/>
-      </p:nvGrpSpPr>
-      <p:grpSpPr>
-        <a:xfrm>
-          <a:off x="0" y="0"/>
-          <a:ext cx="0" cy="0"/>
-          <a:chOff x="0" y="0"/>
-          <a:chExt cx="0" cy="0"/>
-        </a:xfrm>
-      </p:grpSpPr>
-      <p:grpSp>
-        <p:nvGrpSpPr>
-          <p:cNvPr id="10" name="Group 9">
-            <a:extLst>
-              <a:ext uri="{FF2B5EF4-FFF2-40B4-BE49-F238E27FC236}">
-                <a16:creationId xmlns:a16="http://schemas.microsoft.com/office/drawing/2014/main" id="{C11F0D3D-8998-75CA-7D79-01F8CC977220}"/>
-              </a:ext>
-            </a:extLst>
-          </p:cNvPr>
-          <p:cNvGrpSpPr/>
-          <p:nvPr/>
-        </p:nvGrpSpPr>
-        <p:grpSpPr>
-          <a:xfrm>
-            <a:off x="0" y="1"/>
-            <a:ext cx="6857999" cy="1168400"/>
-            <a:chOff x="701748" y="108190"/>
-            <a:chExt cx="5454507" cy="1318601"/>
-          </a:xfrm>
-        </p:grpSpPr>
-        <p:sp>
-          <p:nvSpPr>
-            <p:cNvPr id="6" name="TextBox 5">
-              <a:extLst>
-                <a:ext uri="{FF2B5EF4-FFF2-40B4-BE49-F238E27FC236}">
-                  <a16:creationId xmlns:a16="http://schemas.microsoft.com/office/drawing/2014/main" id="{79398187-BA8D-208E-20A6-66F64540D4C8}"/>
-                </a:ext>
-              </a:extLst>
-            </p:cNvPr>
-            <p:cNvSpPr txBox="1"/>
-            <p:nvPr/>
-          </p:nvSpPr>
-          <p:spPr>
-            <a:xfrm>
-              <a:off x="701748" y="108190"/>
-              <a:ext cx="5454507" cy="1318601"/>
-            </a:xfrm>
-            <a:prstGeom prst="rect">
-              <a:avLst/>
-            </a:prstGeom>
-            <a:noFill/>
-            <a:ln>
-              <a:solidFill>
-                <a:schemeClr val="accent1"/>
-              </a:solidFill>
-            </a:ln>
-          </p:spPr>
-          <p:txBody>
-            <a:bodyPr wrap="square" rtlCol="0">
-              <a:spAutoFit/>
-            </a:bodyPr>
-            <a:lstStyle/>
-            <a:p>
-              <a:pPr algn="ctr">
-                <a:buNone/>
-                <a:tabLst>
-                  <a:tab pos="2743200" algn="ctr"/>
-                  <a:tab pos="5486400" algn="r"/>
-                </a:tabLst>
-              </a:pPr>
-              <a:r>
-                <a:rPr lang="en-US" sz="1100" b="1" dirty="0">
-                  <a:solidFill>
-                    <a:srgbClr val="0000FF"/>
-                  </a:solidFill>
-                  <a:effectLst/>
-                  <a:latin typeface="Times New Roman" panose="02020603050405020304" pitchFamily="18" charset="0"/>
-                  <a:ea typeface="SimSun" panose="02010600030101010101" pitchFamily="2" charset="-122"/>
-                </a:rPr>
-                <a:t>ERIC WONG MACHINERY TRANSPORTATION PTE LTD</a:t>
-              </a:r>
-              <a:endParaRPr lang="en-SG" sz="1100" b="1" dirty="0">
-                <a:solidFill>
-                  <a:srgbClr val="0000FF"/>
-                </a:solidFill>
-                <a:latin typeface="Times New Roman" panose="02020603050405020304" pitchFamily="18" charset="0"/>
-                <a:ea typeface="SimSun" panose="02010600030101010101" pitchFamily="2" charset="-122"/>
-              </a:endParaRPr>
-            </a:p>
-            <a:p>
-              <a:pPr algn="ctr">
-                <a:buNone/>
-                <a:tabLst>
-                  <a:tab pos="2743200" algn="ctr"/>
-                  <a:tab pos="5486400" algn="r"/>
-                </a:tabLst>
-              </a:pPr>
-              <a:r>
-                <a:rPr lang="en-US" sz="1100" dirty="0">
-                  <a:effectLst/>
-                  <a:latin typeface="Times New Roman" panose="02020603050405020304" pitchFamily="18" charset="0"/>
-                  <a:ea typeface="SimSun" panose="02010600030101010101" pitchFamily="2" charset="-122"/>
-                </a:rPr>
-                <a:t>28 </a:t>
-              </a:r>
-              <a:r>
-                <a:rPr lang="en-US" sz="1100" dirty="0" err="1">
-                  <a:effectLst/>
-                  <a:latin typeface="Times New Roman" panose="02020603050405020304" pitchFamily="18" charset="0"/>
-                  <a:ea typeface="SimSun" panose="02010600030101010101" pitchFamily="2" charset="-122"/>
-                </a:rPr>
-                <a:t>Kranji</a:t>
-              </a:r>
-              <a:r>
-                <a:rPr lang="en-US" sz="1100" dirty="0">
-                  <a:effectLst/>
-                  <a:latin typeface="Times New Roman" panose="02020603050405020304" pitchFamily="18" charset="0"/>
-                  <a:ea typeface="SimSun" panose="02010600030101010101" pitchFamily="2" charset="-122"/>
-                </a:rPr>
-                <a:t> Loop #05-03, </a:t>
-              </a:r>
-              <a:r>
-                <a:rPr lang="en-US" sz="1100" dirty="0" err="1">
-                  <a:effectLst/>
-                  <a:latin typeface="Times New Roman" panose="02020603050405020304" pitchFamily="18" charset="0"/>
-                  <a:ea typeface="SimSun" panose="02010600030101010101" pitchFamily="2" charset="-122"/>
-                </a:rPr>
-                <a:t>Kranji</a:t>
-              </a:r>
-              <a:r>
-                <a:rPr lang="en-US" sz="1100" dirty="0">
-                  <a:effectLst/>
-                  <a:latin typeface="Times New Roman" panose="02020603050405020304" pitchFamily="18" charset="0"/>
-                  <a:ea typeface="SimSun" panose="02010600030101010101" pitchFamily="2" charset="-122"/>
-                </a:rPr>
-                <a:t> Green, Singapore 739571</a:t>
-              </a:r>
-              <a:endParaRPr lang="en-SG" sz="1100" dirty="0">
-                <a:latin typeface="Times New Roman" panose="02020603050405020304" pitchFamily="18" charset="0"/>
-                <a:ea typeface="SimSun" panose="02010600030101010101" pitchFamily="2" charset="-122"/>
-              </a:endParaRPr>
-            </a:p>
-            <a:p>
-              <a:pPr algn="ctr">
-                <a:buNone/>
-                <a:tabLst>
-                  <a:tab pos="2743200" algn="ctr"/>
-                  <a:tab pos="5486400" algn="r"/>
-                </a:tabLst>
-              </a:pPr>
-              <a:r>
-                <a:rPr lang="en-US" sz="1100" dirty="0">
-                  <a:effectLst/>
-                  <a:latin typeface="Times New Roman" panose="02020603050405020304" pitchFamily="18" charset="0"/>
-                  <a:ea typeface="SimSun" panose="02010600030101010101" pitchFamily="2" charset="-122"/>
-                </a:rPr>
-                <a:t>Tel: 62824175, 62828203, 62826020</a:t>
-              </a:r>
-              <a:endParaRPr lang="en-SG" sz="1100" dirty="0">
-                <a:effectLst/>
-                <a:latin typeface="Times New Roman" panose="02020603050405020304" pitchFamily="18" charset="0"/>
-                <a:ea typeface="SimSun" panose="02010600030101010101" pitchFamily="2" charset="-122"/>
-              </a:endParaRPr>
-            </a:p>
-            <a:p>
-              <a:pPr algn="ctr">
-                <a:buNone/>
-                <a:tabLst>
-                  <a:tab pos="2743200" algn="ctr"/>
-                  <a:tab pos="5486400" algn="r"/>
-                </a:tabLst>
-              </a:pPr>
-              <a:r>
-                <a:rPr lang="en-US" sz="1100" dirty="0">
-                  <a:effectLst/>
-                  <a:latin typeface="Times New Roman" panose="02020603050405020304" pitchFamily="18" charset="0"/>
-                  <a:ea typeface="SimSun" panose="02010600030101010101" pitchFamily="2" charset="-122"/>
-                </a:rPr>
-                <a:t>GST Reg No. : M2-8923804-2</a:t>
-              </a:r>
-              <a:endParaRPr lang="en-SG" sz="1100" dirty="0">
-                <a:latin typeface="Times New Roman" panose="02020603050405020304" pitchFamily="18" charset="0"/>
-                <a:ea typeface="SimSun" panose="02010600030101010101" pitchFamily="2" charset="-122"/>
-              </a:endParaRPr>
-            </a:p>
-            <a:p>
-              <a:pPr algn="ctr">
-                <a:buNone/>
-                <a:tabLst>
-                  <a:tab pos="2743200" algn="ctr"/>
-                  <a:tab pos="5486400" algn="r"/>
-                </a:tabLst>
-              </a:pPr>
-              <a:r>
-                <a:rPr lang="en-US" sz="1100" dirty="0">
-                  <a:effectLst/>
-                  <a:latin typeface="Times New Roman" panose="02020603050405020304" pitchFamily="18" charset="0"/>
-                  <a:ea typeface="SimSun" panose="02010600030101010101" pitchFamily="2" charset="-122"/>
-                  <a:hlinkClick r:id="rId2"/>
-                </a:rPr>
-                <a:t>http://www.ericwong.com</a:t>
-              </a:r>
-              <a:endParaRPr lang="en-SG" sz="1100" dirty="0">
-                <a:latin typeface="Times New Roman" panose="02020603050405020304" pitchFamily="18" charset="0"/>
-                <a:ea typeface="SimSun" panose="02010600030101010101" pitchFamily="2" charset="-122"/>
-              </a:endParaRPr>
-            </a:p>
-            <a:p>
-              <a:pPr algn="ctr">
-                <a:buNone/>
-                <a:tabLst>
-                  <a:tab pos="2743200" algn="ctr"/>
-                  <a:tab pos="5486400" algn="r"/>
-                </a:tabLst>
-              </a:pPr>
-              <a:r>
-                <a:rPr lang="en-US" sz="1100" dirty="0">
-                  <a:latin typeface="Times New Roman" panose="02020603050405020304" pitchFamily="18" charset="0"/>
-                  <a:ea typeface="SimSun" panose="02010600030101010101" pitchFamily="2" charset="-122"/>
-                </a:rPr>
-                <a:t>E</a:t>
-              </a:r>
-              <a:r>
-                <a:rPr lang="en-US" sz="1100" dirty="0">
-                  <a:effectLst/>
-                  <a:latin typeface="Times New Roman" panose="02020603050405020304" pitchFamily="18" charset="0"/>
-                  <a:ea typeface="SimSun" panose="02010600030101010101" pitchFamily="2" charset="-122"/>
-                </a:rPr>
-                <a:t>-mail: ewmtpl@gmail.com</a:t>
-              </a:r>
-              <a:endParaRPr lang="en-SG" sz="1100" dirty="0">
-                <a:effectLst/>
-                <a:latin typeface="Times New Roman" panose="02020603050405020304" pitchFamily="18" charset="0"/>
-                <a:ea typeface="SimSun" panose="02010600030101010101" pitchFamily="2" charset="-122"/>
-              </a:endParaRPr>
-            </a:p>
-            <a:p>
-              <a:endParaRPr lang="en-SG" sz="1400" dirty="0"/>
-            </a:p>
-          </p:txBody>
-        </p:sp>
-        <p:pic>
-          <p:nvPicPr>
-            <p:cNvPr id="8" name="Picture 7" descr="A red logo with a white background&#10;&#10;AI-generated content may be incorrect.">
-              <a:extLst>
-                <a:ext uri="{FF2B5EF4-FFF2-40B4-BE49-F238E27FC236}">
-                  <a16:creationId xmlns:a16="http://schemas.microsoft.com/office/drawing/2014/main" id="{63C1B23C-278D-572C-7476-25FAAB15E8D8}"/>
-                </a:ext>
-              </a:extLst>
-            </p:cNvPr>
-            <p:cNvPicPr>
-              <a:picLocks noChangeAspect="1"/>
-            </p:cNvPicPr>
-            <p:nvPr/>
-          </p:nvPicPr>
-          <p:blipFill>
-            <a:blip r:embed="rId3">
-              <a:extLst>
-                <a:ext uri="{28A0092B-C50C-407E-A947-70E740481C1C}">
-                  <a14:useLocalDpi xmlns:a14="http://schemas.microsoft.com/office/drawing/2010/main" val="0"/>
-                </a:ext>
-              </a:extLst>
-            </a:blip>
-            <a:stretch>
-              <a:fillRect/>
-            </a:stretch>
-          </p:blipFill>
-          <p:spPr>
-            <a:xfrm>
-              <a:off x="990192" y="150552"/>
-              <a:ext cx="726493" cy="1233876"/>
-            </a:xfrm>
-            <a:prstGeom prst="rect">
-              <a:avLst/>
-            </a:prstGeom>
-          </p:spPr>
-        </p:pic>
-      </p:grpSp>
-      <p:graphicFrame>
-        <p:nvGraphicFramePr>
-          <p:cNvPr id="9" name="Table 8">
-            <a:extLst>
-              <a:ext uri="{FF2B5EF4-FFF2-40B4-BE49-F238E27FC236}">
-                <a16:creationId xmlns:a16="http://schemas.microsoft.com/office/drawing/2014/main" id="{665C714F-ED19-E27D-F327-602D25723DBB}"/>
-              </a:ext>
-            </a:extLst>
-          </p:cNvPr>
-          <p:cNvGraphicFramePr>
-            <a:graphicFrameLocks noGrp="1"/>
-          </p:cNvGraphicFramePr>
-          <p:nvPr/>
-        </p:nvGraphicFramePr>
-        <p:xfrm>
-          <a:off x="0" y="1168401"/>
-          <a:ext cx="6857998" cy="1605983"/>
-        </p:xfrm>
-        <a:graphic>
-          <a:graphicData uri="http://schemas.openxmlformats.org/drawingml/2006/table">
-            <a:tbl>
-              <a:tblPr firstRow="1" bandRow="1">
-                <a:tableStyleId>{5C22544A-7EE6-4342-B048-85BDC9FD1C3A}</a:tableStyleId>
-              </a:tblPr>
-              <a:tblGrid>
-                <a:gridCol w="3428999">
-                  <a:extLst>
-                    <a:ext uri="{9D8B030D-6E8A-4147-A177-3AD203B41FA5}">
-                      <a16:colId xmlns:a16="http://schemas.microsoft.com/office/drawing/2014/main" val="3963200382"/>
-                    </a:ext>
-                  </a:extLst>
-                </a:gridCol>
-                <a:gridCol w="3428999">
-                  <a:extLst>
-                    <a:ext uri="{9D8B030D-6E8A-4147-A177-3AD203B41FA5}">
-                      <a16:colId xmlns:a16="http://schemas.microsoft.com/office/drawing/2014/main" val="281614988"/>
-                    </a:ext>
-                  </a:extLst>
-                </a:gridCol>
-              </a:tblGrid>
-              <a:tr h="370840">
-                <a:tc gridSpan="2">
-                  <a:txBody>
-                    <a:bodyPr/>
-                    <a:lstStyle/>
-                    <a:p>
-                      <a:pPr algn="ctr"/>
-                      <a:r>
-                        <a:rPr lang="en-SG" dirty="0"/>
-                        <a:t>Customer / Tenant Company: Singapore Mint</a:t>
-                      </a:r>
-                    </a:p>
-                  </a:txBody>
-                  <a:tcPr/>
-                </a:tc>
-                <a:tc hMerge="1">
-                  <a:txBody>
-                    <a:bodyPr/>
-                    <a:lstStyle/>
-                    <a:p>
-                      <a:endParaRPr lang="en-SG" dirty="0"/>
-                    </a:p>
-                  </a:txBody>
-                  <a:tcPr/>
-                </a:tc>
-                <a:extLst>
-                  <a:ext uri="{0D108BD9-81ED-4DB2-BD59-A6C34878D82A}">
-                    <a16:rowId xmlns:a16="http://schemas.microsoft.com/office/drawing/2014/main" val="3714705615"/>
-                  </a:ext>
-                </a:extLst>
-              </a:tr>
-              <a:tr h="327659">
-                <a:tc>
-                  <a:txBody>
-                    <a:bodyPr/>
-                    <a:lstStyle/>
-                    <a:p>
-                      <a:r>
-                        <a:rPr lang="en-SG" sz="1100" dirty="0"/>
-                        <a:t>Site Location: Singapore Mint </a:t>
-                      </a:r>
-                    </a:p>
-                  </a:txBody>
-                  <a:tcPr/>
-                </a:tc>
-                <a:tc rowSpan="3">
-                  <a:txBody>
-                    <a:bodyPr/>
-                    <a:lstStyle/>
-                    <a:p>
-                      <a:endParaRPr lang="en-SG" sz="1100" dirty="0"/>
-                    </a:p>
-                    <a:p>
-                      <a:endParaRPr lang="en-SG" sz="1100" dirty="0"/>
-                    </a:p>
-                    <a:p>
-                      <a:endParaRPr lang="en-SG" sz="1100" dirty="0"/>
-                    </a:p>
-                    <a:p>
-                      <a:endParaRPr lang="en-SG" sz="1100" dirty="0"/>
-                    </a:p>
-                    <a:p>
-                      <a:r>
-                        <a:rPr lang="en-SG" sz="1100" dirty="0"/>
-                        <a:t>Approved By:  Eric Wong (Director)</a:t>
-                      </a:r>
-                    </a:p>
-                  </a:txBody>
-                  <a:tcPr>
-                    <a:solidFill>
-                      <a:schemeClr val="bg1"/>
-                    </a:solidFill>
-                  </a:tcPr>
-                </a:tc>
-                <a:extLst>
-                  <a:ext uri="{0D108BD9-81ED-4DB2-BD59-A6C34878D82A}">
-                    <a16:rowId xmlns:a16="http://schemas.microsoft.com/office/drawing/2014/main" val="2691564520"/>
-                  </a:ext>
-                </a:extLst>
-              </a:tr>
-              <a:tr h="343322">
-                <a:tc>
-                  <a:txBody>
-                    <a:bodyPr/>
-                    <a:lstStyle/>
-                    <a:p>
-                      <a:r>
-                        <a:rPr lang="en-SG" sz="1100" dirty="0"/>
-                        <a:t>Process: Lifting and Moving of Machinery on Platform</a:t>
-                      </a:r>
-                    </a:p>
-                  </a:txBody>
-                  <a:tcPr/>
-                </a:tc>
-                <a:tc vMerge="1">
-                  <a:txBody>
-                    <a:bodyPr/>
-                    <a:lstStyle/>
-                    <a:p>
-                      <a:endParaRPr lang="en-SG" dirty="0"/>
-                    </a:p>
-                  </a:txBody>
-                  <a:tcPr/>
-                </a:tc>
-                <a:extLst>
-                  <a:ext uri="{0D108BD9-81ED-4DB2-BD59-A6C34878D82A}">
-                    <a16:rowId xmlns:a16="http://schemas.microsoft.com/office/drawing/2014/main" val="784894797"/>
-                  </a:ext>
-                </a:extLst>
-              </a:tr>
-              <a:tr h="268395">
-                <a:tc>
-                  <a:txBody>
-                    <a:bodyPr/>
-                    <a:lstStyle/>
-                    <a:p>
-                      <a:r>
-                        <a:rPr lang="en-SG" sz="1100" dirty="0"/>
-                        <a:t>Prepared by: Kevin Wong</a:t>
-                      </a:r>
-                    </a:p>
-                  </a:txBody>
-                  <a:tcPr/>
-                </a:tc>
-                <a:tc vMerge="1">
-                  <a:txBody>
-                    <a:bodyPr/>
-                    <a:lstStyle/>
-                    <a:p>
-                      <a:endParaRPr lang="en-SG" dirty="0"/>
-                    </a:p>
-                  </a:txBody>
-                  <a:tcPr/>
-                </a:tc>
-                <a:extLst>
-                  <a:ext uri="{0D108BD9-81ED-4DB2-BD59-A6C34878D82A}">
-                    <a16:rowId xmlns:a16="http://schemas.microsoft.com/office/drawing/2014/main" val="3405944484"/>
-                  </a:ext>
-                </a:extLst>
-              </a:tr>
-              <a:tr h="295767">
-                <a:tc>
-                  <a:txBody>
-                    <a:bodyPr/>
-                    <a:lstStyle/>
-                    <a:p>
-                      <a:r>
-                        <a:rPr lang="en-SG" sz="1100" dirty="0"/>
-                        <a:t>Last Review Date: 24.02.2025</a:t>
-                      </a:r>
-                    </a:p>
-                  </a:txBody>
-                  <a:tcPr/>
-                </a:tc>
-                <a:tc>
-                  <a:txBody>
-                    <a:bodyPr/>
-                    <a:lstStyle/>
-                    <a:p>
-                      <a:r>
-                        <a:rPr lang="en-SG" sz="1100" dirty="0"/>
-                        <a:t>Next Review Date: 23.02.2026</a:t>
-                      </a:r>
-                    </a:p>
-                  </a:txBody>
-                  <a:tcPr/>
-                </a:tc>
-                <a:extLst>
-                  <a:ext uri="{0D108BD9-81ED-4DB2-BD59-A6C34878D82A}">
-                    <a16:rowId xmlns:a16="http://schemas.microsoft.com/office/drawing/2014/main" val="3430118298"/>
-                  </a:ext>
-                </a:extLst>
-              </a:tr>
-            </a:tbl>
-          </a:graphicData>
-        </a:graphic>
-      </p:graphicFrame>
-      <p:pic>
-        <p:nvPicPr>
-          <p:cNvPr id="11" name="Picture 10" descr="A close-up of a stamp&#10;&#10;AI-generated content may be incorrect.">
-            <a:extLst>
-              <a:ext uri="{FF2B5EF4-FFF2-40B4-BE49-F238E27FC236}">
-                <a16:creationId xmlns:a16="http://schemas.microsoft.com/office/drawing/2014/main" id="{3DB237BB-D4FF-5C99-7A57-59D2CD55E1C1}"/>
-              </a:ext>
-            </a:extLst>
-          </p:cNvPr>
-          <p:cNvPicPr>
-            <a:picLocks noChangeAspect="1"/>
-          </p:cNvPicPr>
-          <p:nvPr/>
-        </p:nvPicPr>
-        <p:blipFill>
-          <a:blip r:embed="rId4">
-            <a:extLst>
-              <a:ext uri="{28A0092B-C50C-407E-A947-70E740481C1C}">
-                <a14:useLocalDpi xmlns:a14="http://schemas.microsoft.com/office/drawing/2010/main" val="0"/>
-              </a:ext>
-            </a:extLst>
-          </a:blip>
-          <a:stretch>
-            <a:fillRect/>
-          </a:stretch>
-        </p:blipFill>
-        <p:spPr>
-          <a:xfrm>
-            <a:off x="5878548" y="1522307"/>
-            <a:ext cx="693638" cy="764310"/>
-          </a:xfrm>
-          <a:prstGeom prst="rect">
-            <a:avLst/>
-          </a:prstGeom>
-        </p:spPr>
-      </p:pic>
-      <p:sp>
-        <p:nvSpPr>
-          <p:cNvPr id="4" name="Slide Number Placeholder 3">
-            <a:extLst>
-              <a:ext uri="{FF2B5EF4-FFF2-40B4-BE49-F238E27FC236}">
-                <a16:creationId xmlns:a16="http://schemas.microsoft.com/office/drawing/2014/main" id="{24322AA7-3530-D750-C00C-D53B5BE046DA}"/>
-              </a:ext>
-            </a:extLst>
-          </p:cNvPr>
-          <p:cNvSpPr>
-            <a:spLocks noGrp="1"/>
-          </p:cNvSpPr>
-          <p:nvPr>
-            <p:ph type="sldNum" sz="quarter" idx="12"/>
-          </p:nvPr>
-        </p:nvSpPr>
-        <p:spPr/>
-        <p:txBody>
-          <a:bodyPr/>
-          <a:lstStyle/>
-          <a:p>
-            <a:fld id="{F0052729-9336-4E5B-BC69-5177B8B6DD05}" type="slidenum">
-              <a:rPr lang="en-SG" smtClean="0"/>
-              <a:t>18</a:t>
-            </a:fld>
-            <a:endParaRPr lang="en-SG"/>
-          </a:p>
-        </p:txBody>
-      </p:sp>
-    </p:spTree>
-    <p:extLst>
-      <p:ext uri="{BB962C8B-B14F-4D97-AF65-F5344CB8AC3E}">
-        <p14:creationId xmlns:p14="http://schemas.microsoft.com/office/powerpoint/2010/main" val="1299604318"/>
-      </p:ext>
-    </p:extLst>
-  </p:cSld>
-  <p:clrMapOvr>
-    <a:masterClrMapping/>
-  </p:clrMapOvr>
-</p:sld>
-</file>
-
-<file path=ppt/slides/slide19.xml><?xml version="1.0" encoding="utf-8"?>
-<p:sld xmlns:a="http://schemas.openxmlformats.org/drawingml/2006/main" xmlns:r="http://schemas.openxmlformats.org/officeDocument/2006/relationships" xmlns:p="http://schemas.openxmlformats.org/presentationml/2006/main">
-  <p:cSld>
-    <p:spTree>
-      <p:nvGrpSpPr>
-        <p:cNvPr id="1" name="">
-          <a:extLst>
-            <a:ext uri="{FF2B5EF4-FFF2-40B4-BE49-F238E27FC236}">
-              <a16:creationId xmlns:a16="http://schemas.microsoft.com/office/drawing/2014/main" id="{C7E27E28-2145-70C3-5DD3-128B40943BAF}"/>
-            </a:ext>
-          </a:extLst>
-        </p:cNvPr>
-        <p:cNvGrpSpPr/>
-        <p:nvPr/>
-      </p:nvGrpSpPr>
-      <p:grpSpPr>
-        <a:xfrm>
-          <a:off x="0" y="0"/>
-          <a:ext cx="0" cy="0"/>
-          <a:chOff x="0" y="0"/>
-          <a:chExt cx="0" cy="0"/>
-        </a:xfrm>
-      </p:grpSpPr>
-      <p:grpSp>
-        <p:nvGrpSpPr>
-          <p:cNvPr id="10" name="Group 9">
-            <a:extLst>
-              <a:ext uri="{FF2B5EF4-FFF2-40B4-BE49-F238E27FC236}">
-                <a16:creationId xmlns:a16="http://schemas.microsoft.com/office/drawing/2014/main" id="{35ABE0FD-27C8-F882-67AD-2A771F461CE0}"/>
-              </a:ext>
-            </a:extLst>
-          </p:cNvPr>
-          <p:cNvGrpSpPr/>
-          <p:nvPr/>
-        </p:nvGrpSpPr>
-        <p:grpSpPr>
-          <a:xfrm>
-            <a:off x="0" y="1"/>
-            <a:ext cx="6857999" cy="1168400"/>
-            <a:chOff x="701748" y="108190"/>
-            <a:chExt cx="5454507" cy="1318601"/>
-          </a:xfrm>
-        </p:grpSpPr>
-        <p:sp>
-          <p:nvSpPr>
-            <p:cNvPr id="6" name="TextBox 5">
-              <a:extLst>
-                <a:ext uri="{FF2B5EF4-FFF2-40B4-BE49-F238E27FC236}">
-                  <a16:creationId xmlns:a16="http://schemas.microsoft.com/office/drawing/2014/main" id="{DFB6DF21-582F-723A-F7FD-395E975AF278}"/>
-                </a:ext>
-              </a:extLst>
-            </p:cNvPr>
-            <p:cNvSpPr txBox="1"/>
-            <p:nvPr/>
-          </p:nvSpPr>
-          <p:spPr>
-            <a:xfrm>
-              <a:off x="701748" y="108190"/>
-              <a:ext cx="5454507" cy="1318601"/>
-            </a:xfrm>
-            <a:prstGeom prst="rect">
-              <a:avLst/>
-            </a:prstGeom>
-            <a:noFill/>
-            <a:ln>
-              <a:solidFill>
-                <a:schemeClr val="accent1"/>
-              </a:solidFill>
-            </a:ln>
-          </p:spPr>
-          <p:txBody>
-            <a:bodyPr wrap="square" rtlCol="0">
-              <a:spAutoFit/>
-            </a:bodyPr>
-            <a:lstStyle/>
-            <a:p>
-              <a:pPr algn="ctr">
-                <a:buNone/>
-                <a:tabLst>
-                  <a:tab pos="2743200" algn="ctr"/>
-                  <a:tab pos="5486400" algn="r"/>
-                </a:tabLst>
-              </a:pPr>
-              <a:r>
-                <a:rPr lang="en-US" sz="1100" b="1" dirty="0">
-                  <a:solidFill>
-                    <a:srgbClr val="0000FF"/>
-                  </a:solidFill>
-                  <a:effectLst/>
-                  <a:latin typeface="Times New Roman" panose="02020603050405020304" pitchFamily="18" charset="0"/>
-                  <a:ea typeface="SimSun" panose="02010600030101010101" pitchFamily="2" charset="-122"/>
-                </a:rPr>
-                <a:t>ERIC WONG MACHINERY TRANSPORTATION PTE LTD</a:t>
-              </a:r>
-              <a:endParaRPr lang="en-SG" sz="1100" b="1" dirty="0">
-                <a:solidFill>
-                  <a:srgbClr val="0000FF"/>
-                </a:solidFill>
-                <a:latin typeface="Times New Roman" panose="02020603050405020304" pitchFamily="18" charset="0"/>
-                <a:ea typeface="SimSun" panose="02010600030101010101" pitchFamily="2" charset="-122"/>
-              </a:endParaRPr>
-            </a:p>
-            <a:p>
-              <a:pPr algn="ctr">
-                <a:buNone/>
-                <a:tabLst>
-                  <a:tab pos="2743200" algn="ctr"/>
-                  <a:tab pos="5486400" algn="r"/>
-                </a:tabLst>
-              </a:pPr>
-              <a:r>
-                <a:rPr lang="en-US" sz="1100" dirty="0">
-                  <a:effectLst/>
-                  <a:latin typeface="Times New Roman" panose="02020603050405020304" pitchFamily="18" charset="0"/>
-                  <a:ea typeface="SimSun" panose="02010600030101010101" pitchFamily="2" charset="-122"/>
-                </a:rPr>
-                <a:t>28 </a:t>
-              </a:r>
-              <a:r>
-                <a:rPr lang="en-US" sz="1100" dirty="0" err="1">
-                  <a:effectLst/>
-                  <a:latin typeface="Times New Roman" panose="02020603050405020304" pitchFamily="18" charset="0"/>
-                  <a:ea typeface="SimSun" panose="02010600030101010101" pitchFamily="2" charset="-122"/>
-                </a:rPr>
-                <a:t>Kranji</a:t>
-              </a:r>
-              <a:r>
-                <a:rPr lang="en-US" sz="1100" dirty="0">
-                  <a:effectLst/>
-                  <a:latin typeface="Times New Roman" panose="02020603050405020304" pitchFamily="18" charset="0"/>
-                  <a:ea typeface="SimSun" panose="02010600030101010101" pitchFamily="2" charset="-122"/>
-                </a:rPr>
-                <a:t> Loop #05-03, </a:t>
-              </a:r>
-              <a:r>
-                <a:rPr lang="en-US" sz="1100" dirty="0" err="1">
-                  <a:effectLst/>
-                  <a:latin typeface="Times New Roman" panose="02020603050405020304" pitchFamily="18" charset="0"/>
-                  <a:ea typeface="SimSun" panose="02010600030101010101" pitchFamily="2" charset="-122"/>
-                </a:rPr>
-                <a:t>Kranji</a:t>
-              </a:r>
-              <a:r>
-                <a:rPr lang="en-US" sz="1100" dirty="0">
-                  <a:effectLst/>
-                  <a:latin typeface="Times New Roman" panose="02020603050405020304" pitchFamily="18" charset="0"/>
-                  <a:ea typeface="SimSun" panose="02010600030101010101" pitchFamily="2" charset="-122"/>
-                </a:rPr>
-                <a:t> Green, Singapore 739571</a:t>
-              </a:r>
-              <a:endParaRPr lang="en-SG" sz="1100" dirty="0">
-                <a:latin typeface="Times New Roman" panose="02020603050405020304" pitchFamily="18" charset="0"/>
-                <a:ea typeface="SimSun" panose="02010600030101010101" pitchFamily="2" charset="-122"/>
-              </a:endParaRPr>
-            </a:p>
-            <a:p>
-              <a:pPr algn="ctr">
-                <a:buNone/>
-                <a:tabLst>
-                  <a:tab pos="2743200" algn="ctr"/>
-                  <a:tab pos="5486400" algn="r"/>
-                </a:tabLst>
-              </a:pPr>
-              <a:r>
-                <a:rPr lang="en-US" sz="1100" dirty="0">
-                  <a:effectLst/>
-                  <a:latin typeface="Times New Roman" panose="02020603050405020304" pitchFamily="18" charset="0"/>
-                  <a:ea typeface="SimSun" panose="02010600030101010101" pitchFamily="2" charset="-122"/>
-                </a:rPr>
-                <a:t>Tel: 62824175, 62828203, 62826020</a:t>
-              </a:r>
-              <a:endParaRPr lang="en-SG" sz="1100" dirty="0">
-                <a:effectLst/>
-                <a:latin typeface="Times New Roman" panose="02020603050405020304" pitchFamily="18" charset="0"/>
-                <a:ea typeface="SimSun" panose="02010600030101010101" pitchFamily="2" charset="-122"/>
-              </a:endParaRPr>
-            </a:p>
-            <a:p>
-              <a:pPr algn="ctr">
-                <a:buNone/>
-                <a:tabLst>
-                  <a:tab pos="2743200" algn="ctr"/>
-                  <a:tab pos="5486400" algn="r"/>
-                </a:tabLst>
-              </a:pPr>
-              <a:r>
-                <a:rPr lang="en-US" sz="1100" dirty="0">
-                  <a:effectLst/>
-                  <a:latin typeface="Times New Roman" panose="02020603050405020304" pitchFamily="18" charset="0"/>
-                  <a:ea typeface="SimSun" panose="02010600030101010101" pitchFamily="2" charset="-122"/>
-                </a:rPr>
-                <a:t>GST Reg No. : M2-8923804-2</a:t>
-              </a:r>
-              <a:endParaRPr lang="en-SG" sz="1100" dirty="0">
-                <a:latin typeface="Times New Roman" panose="02020603050405020304" pitchFamily="18" charset="0"/>
-                <a:ea typeface="SimSun" panose="02010600030101010101" pitchFamily="2" charset="-122"/>
-              </a:endParaRPr>
-            </a:p>
-            <a:p>
-              <a:pPr algn="ctr">
-                <a:buNone/>
-                <a:tabLst>
-                  <a:tab pos="2743200" algn="ctr"/>
-                  <a:tab pos="5486400" algn="r"/>
-                </a:tabLst>
-              </a:pPr>
-              <a:r>
-                <a:rPr lang="en-US" sz="1100" dirty="0">
-                  <a:effectLst/>
-                  <a:latin typeface="Times New Roman" panose="02020603050405020304" pitchFamily="18" charset="0"/>
-                  <a:ea typeface="SimSun" panose="02010600030101010101" pitchFamily="2" charset="-122"/>
-                  <a:hlinkClick r:id="rId2"/>
-                </a:rPr>
-                <a:t>http://www.ericwong.com</a:t>
-              </a:r>
-              <a:endParaRPr lang="en-SG" sz="1100" dirty="0">
-                <a:latin typeface="Times New Roman" panose="02020603050405020304" pitchFamily="18" charset="0"/>
-                <a:ea typeface="SimSun" panose="02010600030101010101" pitchFamily="2" charset="-122"/>
-              </a:endParaRPr>
-            </a:p>
-            <a:p>
-              <a:pPr algn="ctr">
-                <a:buNone/>
-                <a:tabLst>
-                  <a:tab pos="2743200" algn="ctr"/>
-                  <a:tab pos="5486400" algn="r"/>
-                </a:tabLst>
-              </a:pPr>
-              <a:r>
-                <a:rPr lang="en-US" sz="1100" dirty="0">
-                  <a:latin typeface="Times New Roman" panose="02020603050405020304" pitchFamily="18" charset="0"/>
-                  <a:ea typeface="SimSun" panose="02010600030101010101" pitchFamily="2" charset="-122"/>
-                </a:rPr>
-                <a:t>E</a:t>
-              </a:r>
-              <a:r>
-                <a:rPr lang="en-US" sz="1100" dirty="0">
-                  <a:effectLst/>
-                  <a:latin typeface="Times New Roman" panose="02020603050405020304" pitchFamily="18" charset="0"/>
-                  <a:ea typeface="SimSun" panose="02010600030101010101" pitchFamily="2" charset="-122"/>
-                </a:rPr>
-                <a:t>-mail: ewmtpl@gmail.com</a:t>
-              </a:r>
-              <a:endParaRPr lang="en-SG" sz="1100" dirty="0">
-                <a:effectLst/>
-                <a:latin typeface="Times New Roman" panose="02020603050405020304" pitchFamily="18" charset="0"/>
-                <a:ea typeface="SimSun" panose="02010600030101010101" pitchFamily="2" charset="-122"/>
-              </a:endParaRPr>
-            </a:p>
-            <a:p>
-              <a:endParaRPr lang="en-SG" sz="1400" dirty="0"/>
-            </a:p>
-          </p:txBody>
-        </p:sp>
-        <p:pic>
-          <p:nvPicPr>
-            <p:cNvPr id="8" name="Picture 7" descr="A red logo with a white background&#10;&#10;AI-generated content may be incorrect.">
-              <a:extLst>
-                <a:ext uri="{FF2B5EF4-FFF2-40B4-BE49-F238E27FC236}">
-                  <a16:creationId xmlns:a16="http://schemas.microsoft.com/office/drawing/2014/main" id="{B855E0CB-2EB0-B040-0374-B04A2BB7BF41}"/>
-                </a:ext>
-              </a:extLst>
-            </p:cNvPr>
-            <p:cNvPicPr>
-              <a:picLocks noChangeAspect="1"/>
-            </p:cNvPicPr>
-            <p:nvPr/>
-          </p:nvPicPr>
-          <p:blipFill>
-            <a:blip r:embed="rId3">
-              <a:extLst>
-                <a:ext uri="{28A0092B-C50C-407E-A947-70E740481C1C}">
-                  <a14:useLocalDpi xmlns:a14="http://schemas.microsoft.com/office/drawing/2010/main" val="0"/>
-                </a:ext>
-              </a:extLst>
-            </a:blip>
-            <a:stretch>
-              <a:fillRect/>
-            </a:stretch>
-          </p:blipFill>
-          <p:spPr>
-            <a:xfrm>
-              <a:off x="990192" y="150552"/>
-              <a:ext cx="726493" cy="1233876"/>
-            </a:xfrm>
-            <a:prstGeom prst="rect">
-              <a:avLst/>
-            </a:prstGeom>
-          </p:spPr>
-        </p:pic>
-      </p:grpSp>
-      <p:graphicFrame>
-        <p:nvGraphicFramePr>
-          <p:cNvPr id="9" name="Table 8">
-            <a:extLst>
-              <a:ext uri="{FF2B5EF4-FFF2-40B4-BE49-F238E27FC236}">
-                <a16:creationId xmlns:a16="http://schemas.microsoft.com/office/drawing/2014/main" id="{73D86A74-09D2-EF77-662C-E39ABC128C2D}"/>
-              </a:ext>
-            </a:extLst>
-          </p:cNvPr>
-          <p:cNvGraphicFramePr>
-            <a:graphicFrameLocks noGrp="1"/>
-          </p:cNvGraphicFramePr>
-          <p:nvPr/>
-        </p:nvGraphicFramePr>
-        <p:xfrm>
-          <a:off x="0" y="1168401"/>
-          <a:ext cx="6857998" cy="1605983"/>
-        </p:xfrm>
-        <a:graphic>
-          <a:graphicData uri="http://schemas.openxmlformats.org/drawingml/2006/table">
-            <a:tbl>
-              <a:tblPr firstRow="1" bandRow="1">
-                <a:tableStyleId>{5C22544A-7EE6-4342-B048-85BDC9FD1C3A}</a:tableStyleId>
-              </a:tblPr>
-              <a:tblGrid>
-                <a:gridCol w="3428999">
-                  <a:extLst>
-                    <a:ext uri="{9D8B030D-6E8A-4147-A177-3AD203B41FA5}">
-                      <a16:colId xmlns:a16="http://schemas.microsoft.com/office/drawing/2014/main" val="3963200382"/>
-                    </a:ext>
-                  </a:extLst>
-                </a:gridCol>
-                <a:gridCol w="3428999">
-                  <a:extLst>
-                    <a:ext uri="{9D8B030D-6E8A-4147-A177-3AD203B41FA5}">
-                      <a16:colId xmlns:a16="http://schemas.microsoft.com/office/drawing/2014/main" val="281614988"/>
-                    </a:ext>
-                  </a:extLst>
-                </a:gridCol>
-              </a:tblGrid>
-              <a:tr h="370840">
-                <a:tc gridSpan="2">
-                  <a:txBody>
-                    <a:bodyPr/>
-                    <a:lstStyle/>
-                    <a:p>
-                      <a:pPr algn="ctr"/>
-                      <a:r>
-                        <a:rPr lang="en-SG" dirty="0"/>
-                        <a:t>Customer / Tenant Company: Singapore Mint</a:t>
-                      </a:r>
-                    </a:p>
-                  </a:txBody>
-                  <a:tcPr/>
-                </a:tc>
-                <a:tc hMerge="1">
-                  <a:txBody>
-                    <a:bodyPr/>
-                    <a:lstStyle/>
-                    <a:p>
-                      <a:endParaRPr lang="en-SG" dirty="0"/>
-                    </a:p>
-                  </a:txBody>
-                  <a:tcPr/>
-                </a:tc>
-                <a:extLst>
-                  <a:ext uri="{0D108BD9-81ED-4DB2-BD59-A6C34878D82A}">
-                    <a16:rowId xmlns:a16="http://schemas.microsoft.com/office/drawing/2014/main" val="3714705615"/>
-                  </a:ext>
-                </a:extLst>
-              </a:tr>
-              <a:tr h="327659">
-                <a:tc>
-                  <a:txBody>
-                    <a:bodyPr/>
-                    <a:lstStyle/>
-                    <a:p>
-                      <a:r>
-                        <a:rPr lang="en-SG" sz="1100" dirty="0"/>
-                        <a:t>Site Location: Singapore Mint </a:t>
-                      </a:r>
-                    </a:p>
-                  </a:txBody>
-                  <a:tcPr/>
-                </a:tc>
-                <a:tc rowSpan="3">
-                  <a:txBody>
-                    <a:bodyPr/>
-                    <a:lstStyle/>
-                    <a:p>
-                      <a:endParaRPr lang="en-SG" sz="1100" dirty="0"/>
-                    </a:p>
-                    <a:p>
-                      <a:endParaRPr lang="en-SG" sz="1100" dirty="0"/>
-                    </a:p>
-                    <a:p>
-                      <a:endParaRPr lang="en-SG" sz="1100" dirty="0"/>
-                    </a:p>
-                    <a:p>
-                      <a:endParaRPr lang="en-SG" sz="1100" dirty="0"/>
-                    </a:p>
-                    <a:p>
-                      <a:r>
-                        <a:rPr lang="en-SG" sz="1100" dirty="0"/>
-                        <a:t>Approved By:  Eric Wong (Director)</a:t>
-                      </a:r>
-                    </a:p>
-                  </a:txBody>
-                  <a:tcPr>
-                    <a:solidFill>
-                      <a:schemeClr val="bg1"/>
-                    </a:solidFill>
-                  </a:tcPr>
-                </a:tc>
-                <a:extLst>
-                  <a:ext uri="{0D108BD9-81ED-4DB2-BD59-A6C34878D82A}">
-                    <a16:rowId xmlns:a16="http://schemas.microsoft.com/office/drawing/2014/main" val="2691564520"/>
-                  </a:ext>
-                </a:extLst>
-              </a:tr>
-              <a:tr h="343322">
-                <a:tc>
-                  <a:txBody>
-                    <a:bodyPr/>
-                    <a:lstStyle/>
-                    <a:p>
-                      <a:r>
-                        <a:rPr lang="en-SG" sz="1100" dirty="0"/>
-                        <a:t>Process: Lifting and Moving of Machinery on Platform</a:t>
-                      </a:r>
-                    </a:p>
-                  </a:txBody>
-                  <a:tcPr/>
-                </a:tc>
-                <a:tc vMerge="1">
-                  <a:txBody>
-                    <a:bodyPr/>
-                    <a:lstStyle/>
-                    <a:p>
-                      <a:endParaRPr lang="en-SG" dirty="0"/>
-                    </a:p>
-                  </a:txBody>
-                  <a:tcPr/>
-                </a:tc>
-                <a:extLst>
-                  <a:ext uri="{0D108BD9-81ED-4DB2-BD59-A6C34878D82A}">
-                    <a16:rowId xmlns:a16="http://schemas.microsoft.com/office/drawing/2014/main" val="784894797"/>
-                  </a:ext>
-                </a:extLst>
-              </a:tr>
-              <a:tr h="268395">
-                <a:tc>
-                  <a:txBody>
-                    <a:bodyPr/>
-                    <a:lstStyle/>
-                    <a:p>
-                      <a:r>
-                        <a:rPr lang="en-SG" sz="1100" dirty="0"/>
-                        <a:t>Prepared by: Kevin Wong</a:t>
-                      </a:r>
-                    </a:p>
-                  </a:txBody>
-                  <a:tcPr/>
-                </a:tc>
-                <a:tc vMerge="1">
-                  <a:txBody>
-                    <a:bodyPr/>
-                    <a:lstStyle/>
-                    <a:p>
-                      <a:endParaRPr lang="en-SG" dirty="0"/>
-                    </a:p>
-                  </a:txBody>
-                  <a:tcPr/>
-                </a:tc>
-                <a:extLst>
-                  <a:ext uri="{0D108BD9-81ED-4DB2-BD59-A6C34878D82A}">
-                    <a16:rowId xmlns:a16="http://schemas.microsoft.com/office/drawing/2014/main" val="3405944484"/>
-                  </a:ext>
-                </a:extLst>
-              </a:tr>
-              <a:tr h="295767">
-                <a:tc>
-                  <a:txBody>
-                    <a:bodyPr/>
-                    <a:lstStyle/>
-                    <a:p>
-                      <a:r>
-                        <a:rPr lang="en-SG" sz="1100" dirty="0"/>
-                        <a:t>Last Review Date: 24.02.2025</a:t>
-                      </a:r>
-                    </a:p>
-                  </a:txBody>
-                  <a:tcPr/>
-                </a:tc>
-                <a:tc>
-                  <a:txBody>
-                    <a:bodyPr/>
-                    <a:lstStyle/>
-                    <a:p>
-                      <a:r>
-                        <a:rPr lang="en-SG" sz="1100" dirty="0"/>
-                        <a:t>Next Review Date: 23.02.2026</a:t>
-                      </a:r>
-                    </a:p>
-                  </a:txBody>
-                  <a:tcPr/>
-                </a:tc>
-                <a:extLst>
-                  <a:ext uri="{0D108BD9-81ED-4DB2-BD59-A6C34878D82A}">
-                    <a16:rowId xmlns:a16="http://schemas.microsoft.com/office/drawing/2014/main" val="3430118298"/>
-                  </a:ext>
-                </a:extLst>
-              </a:tr>
-            </a:tbl>
-          </a:graphicData>
-        </a:graphic>
-      </p:graphicFrame>
-      <p:pic>
-        <p:nvPicPr>
-          <p:cNvPr id="11" name="Picture 10" descr="A close-up of a stamp&#10;&#10;AI-generated content may be incorrect.">
-            <a:extLst>
-              <a:ext uri="{FF2B5EF4-FFF2-40B4-BE49-F238E27FC236}">
-                <a16:creationId xmlns:a16="http://schemas.microsoft.com/office/drawing/2014/main" id="{FAF1EEFE-AB13-9EA9-0D8A-5F8DF6C3045B}"/>
-              </a:ext>
-            </a:extLst>
-          </p:cNvPr>
-          <p:cNvPicPr>
-            <a:picLocks noChangeAspect="1"/>
-          </p:cNvPicPr>
-          <p:nvPr/>
-        </p:nvPicPr>
-        <p:blipFill>
-          <a:blip r:embed="rId4">
-            <a:extLst>
-              <a:ext uri="{28A0092B-C50C-407E-A947-70E740481C1C}">
-                <a14:useLocalDpi xmlns:a14="http://schemas.microsoft.com/office/drawing/2010/main" val="0"/>
-              </a:ext>
-            </a:extLst>
-          </a:blip>
-          <a:stretch>
-            <a:fillRect/>
-          </a:stretch>
-        </p:blipFill>
-        <p:spPr>
-          <a:xfrm>
-            <a:off x="5878548" y="1522307"/>
-            <a:ext cx="693638" cy="764310"/>
-          </a:xfrm>
-          <a:prstGeom prst="rect">
-            <a:avLst/>
-          </a:prstGeom>
-        </p:spPr>
-      </p:pic>
-      <p:sp>
-        <p:nvSpPr>
-          <p:cNvPr id="4" name="Slide Number Placeholder 3">
-            <a:extLst>
-              <a:ext uri="{FF2B5EF4-FFF2-40B4-BE49-F238E27FC236}">
-                <a16:creationId xmlns:a16="http://schemas.microsoft.com/office/drawing/2014/main" id="{AE96F9CF-DBBB-0CCD-000B-7D3555C10E19}"/>
-              </a:ext>
-            </a:extLst>
-          </p:cNvPr>
-          <p:cNvSpPr>
-            <a:spLocks noGrp="1"/>
-          </p:cNvSpPr>
-          <p:nvPr>
-            <p:ph type="sldNum" sz="quarter" idx="12"/>
-          </p:nvPr>
-        </p:nvSpPr>
-        <p:spPr/>
-        <p:txBody>
-          <a:bodyPr/>
-          <a:lstStyle/>
-          <a:p>
-            <a:fld id="{F0052729-9336-4E5B-BC69-5177B8B6DD05}" type="slidenum">
-              <a:rPr lang="en-SG" smtClean="0"/>
-              <a:t>19</a:t>
-            </a:fld>
-            <a:endParaRPr lang="en-SG"/>
-          </a:p>
-        </p:txBody>
-      </p:sp>
-      <p:pic>
-        <p:nvPicPr>
-          <p:cNvPr id="3" name="Picture 2">
-            <a:extLst>
-              <a:ext uri="{FF2B5EF4-FFF2-40B4-BE49-F238E27FC236}">
-                <a16:creationId xmlns:a16="http://schemas.microsoft.com/office/drawing/2014/main" id="{6B5944F0-9B20-6DB2-963A-0B6A0ACD2E47}"/>
-              </a:ext>
-            </a:extLst>
-          </p:cNvPr>
-          <p:cNvPicPr>
-            <a:picLocks noChangeAspect="1"/>
-          </p:cNvPicPr>
-          <p:nvPr/>
-        </p:nvPicPr>
-        <p:blipFill>
-          <a:blip r:embed="rId5">
-            <a:extLst>
-              <a:ext uri="{28A0092B-C50C-407E-A947-70E740481C1C}">
-                <a14:useLocalDpi xmlns:a14="http://schemas.microsoft.com/office/drawing/2010/main" val="0"/>
-              </a:ext>
-            </a:extLst>
-          </a:blip>
-          <a:srcRect l="3665" t="16054"/>
-          <a:stretch/>
-        </p:blipFill>
-        <p:spPr>
-          <a:xfrm>
-            <a:off x="130627" y="2811921"/>
-            <a:ext cx="6596743" cy="6469599"/>
-          </a:xfrm>
-          <a:prstGeom prst="rect">
-            <a:avLst/>
-          </a:prstGeom>
-        </p:spPr>
-      </p:pic>
-    </p:spTree>
-    <p:extLst>
-      <p:ext uri="{BB962C8B-B14F-4D97-AF65-F5344CB8AC3E}">
-        <p14:creationId xmlns:p14="http://schemas.microsoft.com/office/powerpoint/2010/main" val="2914398440"/>
-      </p:ext>
-    </p:extLst>
-  </p:cSld>
-  <p:clrMapOvr>
-    <a:masterClrMapping/>
-  </p:clrMapOvr>
-</p:sld>
-</file>
-
-<file path=ppt/slides/slide2.xml><?xml version="1.0" encoding="utf-8"?>
-<p:sld xmlns:a="http://schemas.openxmlformats.org/drawingml/2006/main" xmlns:r="http://schemas.openxmlformats.org/officeDocument/2006/relationships" xmlns:p="http://schemas.openxmlformats.org/presentationml/2006/main">
-  <p:cSld>
-    <p:spTree>
-      <p:nvGrpSpPr>
-        <p:cNvPr id="1" name="">
-          <a:extLst>
-            <a:ext uri="{FF2B5EF4-FFF2-40B4-BE49-F238E27FC236}">
-              <a16:creationId xmlns:a16="http://schemas.microsoft.com/office/drawing/2014/main" id="{102EC6FC-0672-673F-34B4-9E4031EE9AC6}"/>
-            </a:ext>
-          </a:extLst>
-        </p:cNvPr>
-        <p:cNvGrpSpPr/>
-        <p:nvPr/>
-      </p:nvGrpSpPr>
-      <p:grpSpPr>
-        <a:xfrm>
-          <a:off x="0" y="0"/>
-          <a:ext cx="0" cy="0"/>
-          <a:chOff x="0" y="0"/>
-          <a:chExt cx="0" cy="0"/>
-        </a:xfrm>
-      </p:grpSpPr>
-      <p:grpSp>
-        <p:nvGrpSpPr>
-          <p:cNvPr id="10" name="Group 9">
-            <a:extLst>
-              <a:ext uri="{FF2B5EF4-FFF2-40B4-BE49-F238E27FC236}">
-                <a16:creationId xmlns:a16="http://schemas.microsoft.com/office/drawing/2014/main" id="{79EFB375-181A-C68A-BC1C-97E24E1337F0}"/>
-              </a:ext>
-            </a:extLst>
-          </p:cNvPr>
-          <p:cNvGrpSpPr/>
-          <p:nvPr/>
-        </p:nvGrpSpPr>
-        <p:grpSpPr>
-          <a:xfrm>
-            <a:off x="0" y="1"/>
-            <a:ext cx="6857999" cy="1168400"/>
-            <a:chOff x="701748" y="108190"/>
-            <a:chExt cx="5454507" cy="1318601"/>
-          </a:xfrm>
-        </p:grpSpPr>
-        <p:sp>
-          <p:nvSpPr>
-            <p:cNvPr id="6" name="TextBox 5">
-              <a:extLst>
-                <a:ext uri="{FF2B5EF4-FFF2-40B4-BE49-F238E27FC236}">
-                  <a16:creationId xmlns:a16="http://schemas.microsoft.com/office/drawing/2014/main" id="{EDA7A706-77F8-2CB9-9919-1B5B36404E00}"/>
-                </a:ext>
-              </a:extLst>
-            </p:cNvPr>
-            <p:cNvSpPr txBox="1"/>
-            <p:nvPr/>
-          </p:nvSpPr>
-          <p:spPr>
-            <a:xfrm>
-              <a:off x="701748" y="108190"/>
-              <a:ext cx="5454507" cy="1318601"/>
-            </a:xfrm>
-            <a:prstGeom prst="rect">
-              <a:avLst/>
-            </a:prstGeom>
-            <a:noFill/>
-            <a:ln>
-              <a:solidFill>
-                <a:schemeClr val="accent1"/>
-              </a:solidFill>
-            </a:ln>
-          </p:spPr>
-          <p:txBody>
-            <a:bodyPr wrap="square" rtlCol="0">
-              <a:spAutoFit/>
-            </a:bodyPr>
-            <a:lstStyle/>
-            <a:p>
-              <a:pPr algn="ctr">
-                <a:buNone/>
-                <a:tabLst>
-                  <a:tab pos="2743200" algn="ctr"/>
-                  <a:tab pos="5486400" algn="r"/>
-                </a:tabLst>
-              </a:pPr>
-              <a:r>
-                <a:rPr lang="en-US" sz="1100" b="1" dirty="0">
-                  <a:solidFill>
-                    <a:srgbClr val="0000FF"/>
-                  </a:solidFill>
-                  <a:effectLst/>
-                  <a:latin typeface="Times New Roman" panose="02020603050405020304" pitchFamily="18" charset="0"/>
-                  <a:ea typeface="SimSun" panose="02010600030101010101" pitchFamily="2" charset="-122"/>
-                </a:rPr>
-                <a:t>ERIC WONG MACHINERY TRANSPORTATION PTE LTD</a:t>
-              </a:r>
-              <a:endParaRPr lang="en-SG" sz="1100" b="1" dirty="0">
-                <a:solidFill>
-                  <a:srgbClr val="0000FF"/>
-                </a:solidFill>
-                <a:latin typeface="Times New Roman" panose="02020603050405020304" pitchFamily="18" charset="0"/>
-                <a:ea typeface="SimSun" panose="02010600030101010101" pitchFamily="2" charset="-122"/>
-              </a:endParaRPr>
-            </a:p>
-            <a:p>
-              <a:pPr algn="ctr">
-                <a:buNone/>
-                <a:tabLst>
-                  <a:tab pos="2743200" algn="ctr"/>
-                  <a:tab pos="5486400" algn="r"/>
-                </a:tabLst>
-              </a:pPr>
-              <a:r>
-                <a:rPr lang="en-US" sz="1100" dirty="0">
-                  <a:effectLst/>
-                  <a:latin typeface="Times New Roman" panose="02020603050405020304" pitchFamily="18" charset="0"/>
-                  <a:ea typeface="SimSun" panose="02010600030101010101" pitchFamily="2" charset="-122"/>
-                </a:rPr>
-                <a:t>28 </a:t>
-              </a:r>
-              <a:r>
-                <a:rPr lang="en-US" sz="1100" dirty="0" err="1">
-                  <a:effectLst/>
-                  <a:latin typeface="Times New Roman" panose="02020603050405020304" pitchFamily="18" charset="0"/>
-                  <a:ea typeface="SimSun" panose="02010600030101010101" pitchFamily="2" charset="-122"/>
-                </a:rPr>
-                <a:t>Kranji</a:t>
-              </a:r>
-              <a:r>
-                <a:rPr lang="en-US" sz="1100" dirty="0">
-                  <a:effectLst/>
-                  <a:latin typeface="Times New Roman" panose="02020603050405020304" pitchFamily="18" charset="0"/>
-                  <a:ea typeface="SimSun" panose="02010600030101010101" pitchFamily="2" charset="-122"/>
-                </a:rPr>
-                <a:t> Loop #05-03, </a:t>
-              </a:r>
-              <a:r>
-                <a:rPr lang="en-US" sz="1100" dirty="0" err="1">
-                  <a:effectLst/>
-                  <a:latin typeface="Times New Roman" panose="02020603050405020304" pitchFamily="18" charset="0"/>
-                  <a:ea typeface="SimSun" panose="02010600030101010101" pitchFamily="2" charset="-122"/>
-                </a:rPr>
-                <a:t>Kranji</a:t>
-              </a:r>
-              <a:r>
-                <a:rPr lang="en-US" sz="1100" dirty="0">
-                  <a:effectLst/>
-                  <a:latin typeface="Times New Roman" panose="02020603050405020304" pitchFamily="18" charset="0"/>
-                  <a:ea typeface="SimSun" panose="02010600030101010101" pitchFamily="2" charset="-122"/>
-                </a:rPr>
-                <a:t> Green, Singapore 739571</a:t>
-              </a:r>
-              <a:endParaRPr lang="en-SG" sz="1100" dirty="0">
-                <a:latin typeface="Times New Roman" panose="02020603050405020304" pitchFamily="18" charset="0"/>
-                <a:ea typeface="SimSun" panose="02010600030101010101" pitchFamily="2" charset="-122"/>
-              </a:endParaRPr>
-            </a:p>
-            <a:p>
-              <a:pPr algn="ctr">
-                <a:buNone/>
-                <a:tabLst>
-                  <a:tab pos="2743200" algn="ctr"/>
-                  <a:tab pos="5486400" algn="r"/>
-                </a:tabLst>
-              </a:pPr>
-              <a:r>
-                <a:rPr lang="en-US" sz="1100" dirty="0">
-                  <a:effectLst/>
-                  <a:latin typeface="Times New Roman" panose="02020603050405020304" pitchFamily="18" charset="0"/>
-                  <a:ea typeface="SimSun" panose="02010600030101010101" pitchFamily="2" charset="-122"/>
-                </a:rPr>
-                <a:t>Tel: 62824175, 62828203, 62826020</a:t>
-              </a:r>
-              <a:endParaRPr lang="en-SG" sz="1100" dirty="0">
-                <a:effectLst/>
-                <a:latin typeface="Times New Roman" panose="02020603050405020304" pitchFamily="18" charset="0"/>
-                <a:ea typeface="SimSun" panose="02010600030101010101" pitchFamily="2" charset="-122"/>
-              </a:endParaRPr>
-            </a:p>
-            <a:p>
-              <a:pPr algn="ctr">
-                <a:buNone/>
-                <a:tabLst>
-                  <a:tab pos="2743200" algn="ctr"/>
-                  <a:tab pos="5486400" algn="r"/>
-                </a:tabLst>
-              </a:pPr>
-              <a:r>
-                <a:rPr lang="en-US" sz="1100" dirty="0">
-                  <a:effectLst/>
-                  <a:latin typeface="Times New Roman" panose="02020603050405020304" pitchFamily="18" charset="0"/>
-                  <a:ea typeface="SimSun" panose="02010600030101010101" pitchFamily="2" charset="-122"/>
-                </a:rPr>
-                <a:t>GST Reg No. : M2-8923804-2</a:t>
-              </a:r>
-              <a:endParaRPr lang="en-SG" sz="1100" dirty="0">
-                <a:latin typeface="Times New Roman" panose="02020603050405020304" pitchFamily="18" charset="0"/>
-                <a:ea typeface="SimSun" panose="02010600030101010101" pitchFamily="2" charset="-122"/>
-              </a:endParaRPr>
-            </a:p>
-            <a:p>
-              <a:pPr algn="ctr">
-                <a:buNone/>
-                <a:tabLst>
-                  <a:tab pos="2743200" algn="ctr"/>
-                  <a:tab pos="5486400" algn="r"/>
-                </a:tabLst>
-              </a:pPr>
-              <a:r>
-                <a:rPr lang="en-US" sz="1100" dirty="0">
-                  <a:effectLst/>
-                  <a:latin typeface="Times New Roman" panose="02020603050405020304" pitchFamily="18" charset="0"/>
-                  <a:ea typeface="SimSun" panose="02010600030101010101" pitchFamily="2" charset="-122"/>
-                  <a:hlinkClick r:id="rId2"/>
-                </a:rPr>
-                <a:t>http://www.ericwong.com</a:t>
-              </a:r>
-              <a:endParaRPr lang="en-SG" sz="1100" dirty="0">
-                <a:latin typeface="Times New Roman" panose="02020603050405020304" pitchFamily="18" charset="0"/>
-                <a:ea typeface="SimSun" panose="02010600030101010101" pitchFamily="2" charset="-122"/>
-              </a:endParaRPr>
-            </a:p>
-            <a:p>
-              <a:pPr algn="ctr">
-                <a:buNone/>
-                <a:tabLst>
-                  <a:tab pos="2743200" algn="ctr"/>
-                  <a:tab pos="5486400" algn="r"/>
-                </a:tabLst>
-              </a:pPr>
-              <a:r>
-                <a:rPr lang="en-US" sz="1100" dirty="0">
-                  <a:latin typeface="Times New Roman" panose="02020603050405020304" pitchFamily="18" charset="0"/>
-                  <a:ea typeface="SimSun" panose="02010600030101010101" pitchFamily="2" charset="-122"/>
-                </a:rPr>
-                <a:t>E</a:t>
-              </a:r>
-              <a:r>
-                <a:rPr lang="en-US" sz="1100" dirty="0">
-                  <a:effectLst/>
-                  <a:latin typeface="Times New Roman" panose="02020603050405020304" pitchFamily="18" charset="0"/>
-                  <a:ea typeface="SimSun" panose="02010600030101010101" pitchFamily="2" charset="-122"/>
-                </a:rPr>
-                <a:t>-mail: ewmtpl@gmail.com</a:t>
-              </a:r>
-              <a:endParaRPr lang="en-SG" sz="1100" dirty="0">
-                <a:effectLst/>
-                <a:latin typeface="Times New Roman" panose="02020603050405020304" pitchFamily="18" charset="0"/>
-                <a:ea typeface="SimSun" panose="02010600030101010101" pitchFamily="2" charset="-122"/>
-              </a:endParaRPr>
-            </a:p>
-            <a:p>
-              <a:endParaRPr lang="en-SG" sz="1400" dirty="0"/>
-            </a:p>
-          </p:txBody>
-        </p:sp>
-        <p:pic>
-          <p:nvPicPr>
-            <p:cNvPr id="8" name="Picture 7" descr="A red logo with a white background&#10;&#10;AI-generated content may be incorrect.">
-              <a:extLst>
-                <a:ext uri="{FF2B5EF4-FFF2-40B4-BE49-F238E27FC236}">
-                  <a16:creationId xmlns:a16="http://schemas.microsoft.com/office/drawing/2014/main" id="{0A7F4315-4EEF-4F1D-E0A7-0202101F66BE}"/>
-                </a:ext>
-              </a:extLst>
-            </p:cNvPr>
-            <p:cNvPicPr>
-              <a:picLocks noChangeAspect="1"/>
-            </p:cNvPicPr>
-            <p:nvPr/>
-          </p:nvPicPr>
-          <p:blipFill>
-            <a:blip r:embed="rId3">
-              <a:extLst>
-                <a:ext uri="{28A0092B-C50C-407E-A947-70E740481C1C}">
-                  <a14:useLocalDpi xmlns:a14="http://schemas.microsoft.com/office/drawing/2010/main" val="0"/>
-                </a:ext>
-              </a:extLst>
-            </a:blip>
-            <a:stretch>
-              <a:fillRect/>
-            </a:stretch>
-          </p:blipFill>
-          <p:spPr>
-            <a:xfrm>
-              <a:off x="990192" y="150552"/>
-              <a:ext cx="726493" cy="1233876"/>
-            </a:xfrm>
-            <a:prstGeom prst="rect">
-              <a:avLst/>
-            </a:prstGeom>
-          </p:spPr>
-        </p:pic>
-      </p:grpSp>
-      <p:sp>
-        <p:nvSpPr>
-          <p:cNvPr id="2" name="TextBox 1">
-            <a:extLst>
-              <a:ext uri="{FF2B5EF4-FFF2-40B4-BE49-F238E27FC236}">
-                <a16:creationId xmlns:a16="http://schemas.microsoft.com/office/drawing/2014/main" id="{730C7CF0-7F47-B0D6-0910-F3058F8F64DC}"/>
-              </a:ext>
-            </a:extLst>
-          </p:cNvPr>
-          <p:cNvSpPr txBox="1"/>
-          <p:nvPr/>
-        </p:nvSpPr>
-        <p:spPr>
-          <a:xfrm>
-            <a:off x="213463" y="3009621"/>
-            <a:ext cx="6431071" cy="5906425"/>
-          </a:xfrm>
-          <a:prstGeom prst="rect">
-            <a:avLst/>
-          </a:prstGeom>
-          <a:noFill/>
-        </p:spPr>
-        <p:txBody>
-          <a:bodyPr wrap="square" rtlCol="0">
-            <a:spAutoFit/>
-          </a:bodyPr>
-          <a:lstStyle/>
-          <a:p>
-            <a:pPr>
-              <a:lnSpc>
-                <a:spcPct val="150000"/>
-              </a:lnSpc>
-            </a:pPr>
-            <a:r>
-              <a:rPr lang="en-SG" sz="1100" b="0" i="0" u="none" strike="noStrike" baseline="0" dirty="0">
-                <a:solidFill>
-                  <a:srgbClr val="000000"/>
-                </a:solidFill>
-                <a:latin typeface="Arial" panose="020B0604020202020204" pitchFamily="34" charset="0"/>
-              </a:rPr>
-              <a:t>Contents 										Pages </a:t>
-            </a:r>
-          </a:p>
-          <a:p>
-            <a:pPr marL="171450" indent="-171450">
-              <a:lnSpc>
-                <a:spcPct val="150000"/>
-              </a:lnSpc>
-              <a:buFont typeface="Wingdings" panose="05000000000000000000" pitchFamily="2" charset="2"/>
-              <a:buChar char="q"/>
-            </a:pPr>
-            <a:r>
-              <a:rPr lang="en-US" sz="1100" b="0" i="0" u="none" strike="noStrike" baseline="0" dirty="0">
-                <a:solidFill>
-                  <a:srgbClr val="000000"/>
-                </a:solidFill>
-                <a:latin typeface="Arial" panose="020B0604020202020204" pitchFamily="34" charset="0"/>
-              </a:rPr>
-              <a:t>1.0 Workplace Safety and Health in the Workplace				    2</a:t>
-            </a:r>
-          </a:p>
-          <a:p>
-            <a:pPr marL="171450" indent="-171450">
-              <a:lnSpc>
-                <a:spcPct val="150000"/>
-              </a:lnSpc>
-              <a:buFont typeface="Wingdings" panose="05000000000000000000" pitchFamily="2" charset="2"/>
-              <a:buChar char="q"/>
-            </a:pPr>
-            <a:r>
-              <a:rPr lang="en-SG" sz="1100" b="0" i="0" u="none" strike="noStrike" baseline="0" dirty="0">
-                <a:solidFill>
-                  <a:srgbClr val="000000"/>
-                </a:solidFill>
-                <a:latin typeface="Arial" panose="020B0604020202020204" pitchFamily="34" charset="0"/>
-              </a:rPr>
-              <a:t>2.0 Objectives 									    2 </a:t>
-            </a:r>
-          </a:p>
-          <a:p>
-            <a:pPr marL="171450" indent="-171450">
-              <a:lnSpc>
-                <a:spcPct val="150000"/>
-              </a:lnSpc>
-              <a:buFont typeface="Wingdings" panose="05000000000000000000" pitchFamily="2" charset="2"/>
-              <a:buChar char="q"/>
-            </a:pPr>
-            <a:r>
-              <a:rPr lang="en-SG" sz="1100" b="0" i="0" u="none" strike="noStrike" baseline="0" dirty="0">
-                <a:solidFill>
-                  <a:srgbClr val="000000"/>
-                </a:solidFill>
-                <a:latin typeface="Arial" panose="020B0604020202020204" pitchFamily="34" charset="0"/>
-              </a:rPr>
-              <a:t>3.0 Scope 										    2 </a:t>
-            </a:r>
-          </a:p>
-          <a:p>
-            <a:pPr marL="171450" indent="-171450">
-              <a:lnSpc>
-                <a:spcPct val="150000"/>
-              </a:lnSpc>
-              <a:buFont typeface="Wingdings" panose="05000000000000000000" pitchFamily="2" charset="2"/>
-              <a:buChar char="q"/>
-            </a:pPr>
-            <a:r>
-              <a:rPr lang="en-SG" sz="1100" b="0" i="0" u="none" strike="noStrike" baseline="0" dirty="0">
-                <a:solidFill>
-                  <a:srgbClr val="000000"/>
-                </a:solidFill>
-                <a:latin typeface="Arial" panose="020B0604020202020204" pitchFamily="34" charset="0"/>
-              </a:rPr>
-              <a:t>4.0 Responsibility 									    2 </a:t>
-            </a:r>
-          </a:p>
-          <a:p>
-            <a:pPr marL="171450" indent="-171450">
-              <a:lnSpc>
-                <a:spcPct val="150000"/>
-              </a:lnSpc>
-              <a:buFont typeface="Wingdings" panose="05000000000000000000" pitchFamily="2" charset="2"/>
-              <a:buChar char="q"/>
-            </a:pPr>
-            <a:r>
-              <a:rPr lang="en-SG" sz="1100" b="0" i="0" u="none" strike="noStrike" baseline="0" dirty="0">
-                <a:solidFill>
-                  <a:srgbClr val="000000"/>
-                </a:solidFill>
-                <a:latin typeface="Arial" panose="020B0604020202020204" pitchFamily="34" charset="0"/>
-              </a:rPr>
-              <a:t>5.0 Site Survey 									    4 </a:t>
-            </a:r>
-          </a:p>
-          <a:p>
-            <a:pPr marL="171450" indent="-171450">
-              <a:lnSpc>
-                <a:spcPct val="150000"/>
-              </a:lnSpc>
-              <a:buFont typeface="Wingdings" panose="05000000000000000000" pitchFamily="2" charset="2"/>
-              <a:buChar char="q"/>
-            </a:pPr>
-            <a:r>
-              <a:rPr lang="en-SG" sz="1100" b="0" i="0" u="none" strike="noStrike" baseline="0" dirty="0">
-                <a:solidFill>
-                  <a:srgbClr val="000000"/>
-                </a:solidFill>
-                <a:latin typeface="Arial" panose="020B0604020202020204" pitchFamily="34" charset="0"/>
-              </a:rPr>
-              <a:t>6.0 Risk Assessment 								    4 </a:t>
-            </a:r>
-            <a:endParaRPr lang="en-US" sz="1100" b="0" i="0" u="none" strike="noStrike" baseline="0" dirty="0">
-              <a:solidFill>
-                <a:srgbClr val="000000"/>
-              </a:solidFill>
-              <a:latin typeface="Arial" panose="020B0604020202020204" pitchFamily="34" charset="0"/>
-            </a:endParaRPr>
-          </a:p>
-          <a:p>
-            <a:pPr marL="171450" indent="-171450">
-              <a:lnSpc>
-                <a:spcPct val="150000"/>
-              </a:lnSpc>
-              <a:buFont typeface="Wingdings" panose="05000000000000000000" pitchFamily="2" charset="2"/>
-              <a:buChar char="q"/>
-            </a:pPr>
-            <a:r>
-              <a:rPr lang="en-US" sz="1100" b="0" i="0" u="none" strike="noStrike" baseline="0" dirty="0">
-                <a:solidFill>
-                  <a:srgbClr val="000000"/>
-                </a:solidFill>
-                <a:latin typeface="Arial" panose="020B0604020202020204" pitchFamily="34" charset="0"/>
-              </a:rPr>
-              <a:t>7.0 Classifications of Lifts Types 							    4 </a:t>
-            </a:r>
-            <a:endParaRPr lang="en-SG" sz="1100" b="0" i="0" u="none" strike="noStrike" baseline="0" dirty="0">
-              <a:solidFill>
-                <a:srgbClr val="000000"/>
-              </a:solidFill>
-              <a:latin typeface="Arial" panose="020B0604020202020204" pitchFamily="34" charset="0"/>
-            </a:endParaRPr>
-          </a:p>
-          <a:p>
-            <a:pPr marL="171450" indent="-171450">
-              <a:lnSpc>
-                <a:spcPct val="150000"/>
-              </a:lnSpc>
-              <a:buFont typeface="Wingdings" panose="05000000000000000000" pitchFamily="2" charset="2"/>
-              <a:buChar char="q"/>
-            </a:pPr>
-            <a:r>
-              <a:rPr lang="en-SG" sz="1100" b="0" i="0" u="none" strike="noStrike" baseline="0" dirty="0">
-                <a:solidFill>
-                  <a:srgbClr val="000000"/>
-                </a:solidFill>
-                <a:latin typeface="Arial" panose="020B0604020202020204" pitchFamily="34" charset="0"/>
-              </a:rPr>
-              <a:t>8.0 Routine Lifts 									    5 </a:t>
-            </a:r>
-          </a:p>
-          <a:p>
-            <a:pPr marL="171450" indent="-171450">
-              <a:lnSpc>
-                <a:spcPct val="150000"/>
-              </a:lnSpc>
-              <a:buFont typeface="Wingdings" panose="05000000000000000000" pitchFamily="2" charset="2"/>
-              <a:buChar char="q"/>
-            </a:pPr>
-            <a:r>
-              <a:rPr lang="en-SG" sz="1100" b="0" i="0" u="none" strike="noStrike" baseline="0" dirty="0">
-                <a:solidFill>
-                  <a:srgbClr val="000000"/>
-                </a:solidFill>
-                <a:latin typeface="Arial" panose="020B0604020202020204" pitchFamily="34" charset="0"/>
-              </a:rPr>
-              <a:t>9.0 Non-Routine Lifts 								    6 </a:t>
-            </a:r>
-            <a:endParaRPr lang="en-US" sz="1100" b="0" i="0" u="none" strike="noStrike" baseline="0" dirty="0">
-              <a:solidFill>
-                <a:srgbClr val="000000"/>
-              </a:solidFill>
-              <a:latin typeface="Arial" panose="020B0604020202020204" pitchFamily="34" charset="0"/>
-            </a:endParaRPr>
-          </a:p>
-          <a:p>
-            <a:pPr marL="171450" indent="-171450">
-              <a:lnSpc>
-                <a:spcPct val="150000"/>
-              </a:lnSpc>
-              <a:buFont typeface="Wingdings" panose="05000000000000000000" pitchFamily="2" charset="2"/>
-              <a:buChar char="q"/>
-            </a:pPr>
-            <a:r>
-              <a:rPr lang="en-US" sz="1100" b="0" i="0" u="none" strike="noStrike" baseline="0" dirty="0">
-                <a:solidFill>
-                  <a:srgbClr val="000000"/>
-                </a:solidFill>
-                <a:latin typeface="Arial" panose="020B0604020202020204" pitchFamily="34" charset="0"/>
-              </a:rPr>
-              <a:t>10.0 A Non-Routine Lift is a lift which conforms to the following factors		    </a:t>
-            </a:r>
-            <a:r>
-              <a:rPr lang="en-US" sz="1100" dirty="0">
-                <a:solidFill>
-                  <a:srgbClr val="000000"/>
-                </a:solidFill>
-                <a:latin typeface="Arial" panose="020B0604020202020204" pitchFamily="34" charset="0"/>
-              </a:rPr>
-              <a:t>8</a:t>
-            </a:r>
-            <a:r>
-              <a:rPr lang="en-US" sz="1100" b="0" i="0" u="none" strike="noStrike" baseline="0" dirty="0">
-                <a:solidFill>
-                  <a:srgbClr val="000000"/>
-                </a:solidFill>
-                <a:latin typeface="Arial" panose="020B0604020202020204" pitchFamily="34" charset="0"/>
-              </a:rPr>
-              <a:t> </a:t>
-            </a:r>
-          </a:p>
-          <a:p>
-            <a:pPr marL="171450" indent="-171450">
-              <a:lnSpc>
-                <a:spcPct val="150000"/>
-              </a:lnSpc>
-              <a:buFont typeface="Wingdings" panose="05000000000000000000" pitchFamily="2" charset="2"/>
-              <a:buChar char="q"/>
-            </a:pPr>
-            <a:r>
-              <a:rPr lang="en-US" sz="1100" b="0" i="0" u="none" strike="noStrike" baseline="0" dirty="0">
-                <a:solidFill>
-                  <a:srgbClr val="000000"/>
-                </a:solidFill>
-                <a:latin typeface="Arial" panose="020B0604020202020204" pitchFamily="34" charset="0"/>
-              </a:rPr>
-              <a:t>11.0 Competent Person(s) 							    9 </a:t>
-            </a:r>
-            <a:endParaRPr lang="en-SG" sz="1100" b="0" i="0" u="none" strike="noStrike" baseline="0" dirty="0">
-              <a:solidFill>
-                <a:srgbClr val="000000"/>
-              </a:solidFill>
-              <a:latin typeface="Arial" panose="020B0604020202020204" pitchFamily="34" charset="0"/>
-            </a:endParaRPr>
-          </a:p>
-          <a:p>
-            <a:pPr marL="171450" indent="-171450">
-              <a:lnSpc>
-                <a:spcPct val="150000"/>
-              </a:lnSpc>
-              <a:buFont typeface="Wingdings" panose="05000000000000000000" pitchFamily="2" charset="2"/>
-              <a:buChar char="q"/>
-            </a:pPr>
-            <a:r>
-              <a:rPr lang="en-SG" sz="1100" b="0" i="0" u="none" strike="noStrike" baseline="0" dirty="0">
-                <a:solidFill>
-                  <a:srgbClr val="000000"/>
-                </a:solidFill>
-                <a:latin typeface="Arial" panose="020B0604020202020204" pitchFamily="34" charset="0"/>
-              </a:rPr>
-              <a:t>12.0 Supervisors 									    9 </a:t>
-            </a:r>
-            <a:endParaRPr lang="en-US" sz="1100" b="0" i="0" u="none" strike="noStrike" baseline="0" dirty="0">
-              <a:solidFill>
-                <a:srgbClr val="000000"/>
-              </a:solidFill>
-              <a:latin typeface="Arial" panose="020B0604020202020204" pitchFamily="34" charset="0"/>
-            </a:endParaRPr>
-          </a:p>
-          <a:p>
-            <a:pPr marL="171450" indent="-171450">
-              <a:lnSpc>
-                <a:spcPct val="150000"/>
-              </a:lnSpc>
-              <a:buFont typeface="Wingdings" panose="05000000000000000000" pitchFamily="2" charset="2"/>
-              <a:buChar char="q"/>
-            </a:pPr>
-            <a:r>
-              <a:rPr lang="en-US" sz="1100" b="0" i="0" u="none" strike="noStrike" baseline="0" dirty="0">
-                <a:solidFill>
-                  <a:srgbClr val="000000"/>
-                </a:solidFill>
-                <a:latin typeface="Arial" panose="020B0604020202020204" pitchFamily="34" charset="0"/>
-              </a:rPr>
-              <a:t>13.0 Operators /Riggers /Signalmen 						   10 </a:t>
-            </a:r>
-          </a:p>
-          <a:p>
-            <a:pPr marL="171450" indent="-171450">
-              <a:lnSpc>
-                <a:spcPct val="150000"/>
-              </a:lnSpc>
-              <a:buFont typeface="Wingdings" panose="05000000000000000000" pitchFamily="2" charset="2"/>
-              <a:buChar char="q"/>
-            </a:pPr>
-            <a:r>
-              <a:rPr lang="en-US" sz="1100" b="0" i="0" u="none" strike="noStrike" baseline="0" dirty="0">
-                <a:solidFill>
-                  <a:srgbClr val="000000"/>
-                </a:solidFill>
-                <a:latin typeface="Arial" panose="020B0604020202020204" pitchFamily="34" charset="0"/>
-              </a:rPr>
-              <a:t>14.0 Description of Load(s) to be lifted 						   10 </a:t>
-            </a:r>
-          </a:p>
-          <a:p>
-            <a:pPr marL="171450" indent="-171450">
-              <a:lnSpc>
-                <a:spcPct val="150000"/>
-              </a:lnSpc>
-              <a:buFont typeface="Wingdings" panose="05000000000000000000" pitchFamily="2" charset="2"/>
-              <a:buChar char="q"/>
-            </a:pPr>
-            <a:r>
-              <a:rPr lang="en-US" sz="1100" b="0" i="0" u="none" strike="noStrike" baseline="0" dirty="0">
-                <a:solidFill>
-                  <a:srgbClr val="000000"/>
-                </a:solidFill>
-                <a:latin typeface="Arial" panose="020B0604020202020204" pitchFamily="34" charset="0"/>
-              </a:rPr>
-              <a:t>15.10 Centre of Gravity (CG) of the load 						   11</a:t>
-            </a:r>
-            <a:endParaRPr lang="en-SG" sz="1100" b="0" i="0" u="none" strike="noStrike" baseline="0" dirty="0">
-              <a:solidFill>
-                <a:srgbClr val="000000"/>
-              </a:solidFill>
-              <a:latin typeface="Arial" panose="020B0604020202020204" pitchFamily="34" charset="0"/>
-            </a:endParaRPr>
-          </a:p>
-          <a:p>
-            <a:pPr marL="171450" indent="-171450">
-              <a:lnSpc>
-                <a:spcPct val="150000"/>
-              </a:lnSpc>
-              <a:buFont typeface="Wingdings" panose="05000000000000000000" pitchFamily="2" charset="2"/>
-              <a:buChar char="q"/>
-            </a:pPr>
-            <a:r>
-              <a:rPr lang="en-SG" sz="1100" b="0" i="0" u="none" strike="noStrike" baseline="0" dirty="0">
-                <a:solidFill>
-                  <a:srgbClr val="000000"/>
-                </a:solidFill>
-                <a:latin typeface="Arial" panose="020B0604020202020204" pitchFamily="34" charset="0"/>
-              </a:rPr>
-              <a:t>16.0 Crane Selection 								   11 </a:t>
-            </a:r>
-          </a:p>
-          <a:p>
-            <a:pPr marL="171450" indent="-171450">
-              <a:lnSpc>
-                <a:spcPct val="150000"/>
-              </a:lnSpc>
-              <a:buFont typeface="Wingdings" panose="05000000000000000000" pitchFamily="2" charset="2"/>
-              <a:buChar char="q"/>
-            </a:pPr>
-            <a:r>
-              <a:rPr lang="en-SG" sz="1100" b="0" i="0" u="none" strike="noStrike" baseline="0" dirty="0">
-                <a:solidFill>
-                  <a:srgbClr val="000000"/>
-                </a:solidFill>
-                <a:latin typeface="Arial" panose="020B0604020202020204" pitchFamily="34" charset="0"/>
-              </a:rPr>
-              <a:t>17.0 Ground &amp; Outriggers 								   11 </a:t>
-            </a:r>
-            <a:endParaRPr lang="en-US" sz="1100" b="0" i="0" u="none" strike="noStrike" baseline="0" dirty="0">
-              <a:solidFill>
-                <a:srgbClr val="000000"/>
-              </a:solidFill>
-              <a:latin typeface="Arial" panose="020B0604020202020204" pitchFamily="34" charset="0"/>
-            </a:endParaRPr>
-          </a:p>
-          <a:p>
-            <a:pPr marL="171450" indent="-171450">
-              <a:lnSpc>
-                <a:spcPct val="150000"/>
-              </a:lnSpc>
-              <a:buFont typeface="Wingdings" panose="05000000000000000000" pitchFamily="2" charset="2"/>
-              <a:buChar char="q"/>
-            </a:pPr>
-            <a:r>
-              <a:rPr lang="en-US" sz="1100" b="0" i="0" u="none" strike="noStrike" baseline="0" dirty="0">
-                <a:solidFill>
-                  <a:srgbClr val="000000"/>
-                </a:solidFill>
-                <a:latin typeface="Arial" panose="020B0604020202020204" pitchFamily="34" charset="0"/>
-              </a:rPr>
-              <a:t>18.0 Access &amp; Lifting Location 						   	   12 </a:t>
-            </a:r>
-          </a:p>
-          <a:p>
-            <a:pPr marL="171450" indent="-171450">
-              <a:lnSpc>
-                <a:spcPct val="150000"/>
-              </a:lnSpc>
-              <a:buFont typeface="Wingdings" panose="05000000000000000000" pitchFamily="2" charset="2"/>
-              <a:buChar char="q"/>
-            </a:pPr>
-            <a:r>
-              <a:rPr lang="en-US" sz="1100" b="0" i="0" u="none" strike="noStrike" baseline="0" dirty="0">
-                <a:solidFill>
-                  <a:srgbClr val="000000"/>
-                </a:solidFill>
-                <a:latin typeface="Arial" panose="020B0604020202020204" pitchFamily="34" charset="0"/>
-              </a:rPr>
-              <a:t>19.0 A Pre-Start Meeting 								   12 </a:t>
-            </a:r>
-          </a:p>
-          <a:p>
-            <a:pPr marL="171450" indent="-171450">
-              <a:lnSpc>
-                <a:spcPct val="150000"/>
-              </a:lnSpc>
-              <a:buFont typeface="Wingdings" panose="05000000000000000000" pitchFamily="2" charset="2"/>
-              <a:buChar char="q"/>
-            </a:pPr>
-            <a:r>
-              <a:rPr lang="en-US" sz="1100" b="0" i="0" u="none" strike="noStrike" baseline="0" dirty="0">
-                <a:solidFill>
-                  <a:srgbClr val="000000"/>
-                </a:solidFill>
-                <a:latin typeface="Arial" panose="020B0604020202020204" pitchFamily="34" charset="0"/>
-              </a:rPr>
-              <a:t>20.0 Sequence of Lifting operation 						   13 </a:t>
-            </a:r>
-          </a:p>
-          <a:p>
-            <a:pPr marL="171450" indent="-171450">
-              <a:lnSpc>
-                <a:spcPct val="150000"/>
-              </a:lnSpc>
-              <a:buFont typeface="Wingdings" panose="05000000000000000000" pitchFamily="2" charset="2"/>
-              <a:buChar char="q"/>
-            </a:pPr>
-            <a:r>
-              <a:rPr lang="en-US" sz="1100" b="0" i="0" u="none" strike="noStrike" baseline="0" dirty="0">
-                <a:solidFill>
-                  <a:srgbClr val="000000"/>
-                </a:solidFill>
-                <a:latin typeface="Arial" panose="020B0604020202020204" pitchFamily="34" charset="0"/>
-              </a:rPr>
-              <a:t>21.0 Lifting operation checklist 							   26</a:t>
-            </a:r>
-            <a:endParaRPr lang="en-SG" sz="1100" b="0" i="0" u="none" strike="noStrike" baseline="0" dirty="0">
-              <a:solidFill>
-                <a:srgbClr val="000000"/>
-              </a:solidFill>
-              <a:latin typeface="Arial" panose="020B0604020202020204" pitchFamily="34" charset="0"/>
-            </a:endParaRPr>
-          </a:p>
-          <a:p>
-            <a:pPr marL="171450" indent="-171450">
-              <a:lnSpc>
-                <a:spcPct val="150000"/>
-              </a:lnSpc>
-              <a:buFont typeface="Wingdings" panose="05000000000000000000" pitchFamily="2" charset="2"/>
-              <a:buChar char="q"/>
-            </a:pPr>
-            <a:r>
-              <a:rPr lang="en-SG" sz="1100" b="0" i="0" u="none" strike="noStrike" baseline="0" dirty="0">
-                <a:solidFill>
-                  <a:srgbClr val="000000"/>
-                </a:solidFill>
-                <a:latin typeface="Arial" panose="020B0604020202020204" pitchFamily="34" charset="0"/>
-              </a:rPr>
-              <a:t>22.0 Emergency procedures 							</a:t>
-            </a:r>
-            <a:r>
-              <a:rPr lang="en-SG" sz="1100" dirty="0">
-                <a:solidFill>
-                  <a:srgbClr val="000000"/>
-                </a:solidFill>
-                <a:latin typeface="Arial" panose="020B0604020202020204" pitchFamily="34" charset="0"/>
-              </a:rPr>
-              <a:t> </a:t>
-            </a:r>
-            <a:r>
-              <a:rPr lang="en-SG" sz="1100" b="0" i="0" u="none" strike="noStrike" baseline="0" dirty="0">
-                <a:solidFill>
-                  <a:srgbClr val="000000"/>
-                </a:solidFill>
-                <a:latin typeface="Arial" panose="020B0604020202020204" pitchFamily="34" charset="0"/>
-              </a:rPr>
-              <a:t>  27</a:t>
-            </a:r>
-            <a:endParaRPr lang="en-SG" sz="1100" dirty="0"/>
-          </a:p>
-        </p:txBody>
-      </p:sp>
-      <p:graphicFrame>
-        <p:nvGraphicFramePr>
-          <p:cNvPr id="12" name="Table 11">
-            <a:extLst>
-              <a:ext uri="{FF2B5EF4-FFF2-40B4-BE49-F238E27FC236}">
-                <a16:creationId xmlns:a16="http://schemas.microsoft.com/office/drawing/2014/main" id="{D2F6709C-23E8-B37C-8950-0044B1E68E4B}"/>
-              </a:ext>
-            </a:extLst>
-          </p:cNvPr>
-          <p:cNvGraphicFramePr>
-            <a:graphicFrameLocks noGrp="1"/>
-          </p:cNvGraphicFramePr>
-          <p:nvPr>
-            <p:extLst>
-              <p:ext uri="{D42A27DB-BD31-4B8C-83A1-F6EECF244321}">
-                <p14:modId xmlns:p14="http://schemas.microsoft.com/office/powerpoint/2010/main" val="758747526"/>
-              </p:ext>
-            </p:extLst>
-          </p:nvPr>
-        </p:nvGraphicFramePr>
-        <p:xfrm>
-          <a:off x="0" y="1168401"/>
-          <a:ext cx="6857998" cy="1605983"/>
-        </p:xfrm>
-        <a:graphic>
-          <a:graphicData uri="http://schemas.openxmlformats.org/drawingml/2006/table">
-            <a:tbl>
-              <a:tblPr firstRow="1" bandRow="1">
-                <a:tableStyleId>{5C22544A-7EE6-4342-B048-85BDC9FD1C3A}</a:tableStyleId>
-              </a:tblPr>
-              <a:tblGrid>
-                <a:gridCol w="3428999">
-                  <a:extLst>
-                    <a:ext uri="{9D8B030D-6E8A-4147-A177-3AD203B41FA5}">
-                      <a16:colId xmlns:a16="http://schemas.microsoft.com/office/drawing/2014/main" val="3963200382"/>
-                    </a:ext>
-                  </a:extLst>
-                </a:gridCol>
-                <a:gridCol w="3428999">
-                  <a:extLst>
-                    <a:ext uri="{9D8B030D-6E8A-4147-A177-3AD203B41FA5}">
-                      <a16:colId xmlns:a16="http://schemas.microsoft.com/office/drawing/2014/main" val="281614988"/>
-                    </a:ext>
-                  </a:extLst>
-                </a:gridCol>
-              </a:tblGrid>
-              <a:tr h="370840">
-                <a:tc gridSpan="2">
-                  <a:txBody>
-                    <a:bodyPr/>
-                    <a:lstStyle/>
-                    <a:p>
-                      <a:pPr algn="ctr"/>
-                      <a:r>
-                        <a:rPr lang="en-SG" dirty="0"/>
-                        <a:t>Customer / Tenant Company: KY Sub Assembly Pte Ltd</a:t>
-                      </a:r>
-                    </a:p>
-                  </a:txBody>
-                  <a:tcPr/>
-                </a:tc>
-                <a:tc hMerge="1">
-                  <a:txBody>
-                    <a:bodyPr/>
-                    <a:lstStyle/>
-                    <a:p>
-                      <a:endParaRPr lang="en-SG" dirty="0"/>
-                    </a:p>
-                  </a:txBody>
-                  <a:tcPr/>
-                </a:tc>
-                <a:extLst>
-                  <a:ext uri="{0D108BD9-81ED-4DB2-BD59-A6C34878D82A}">
-                    <a16:rowId xmlns:a16="http://schemas.microsoft.com/office/drawing/2014/main" val="3714705615"/>
-                  </a:ext>
-                </a:extLst>
-              </a:tr>
-              <a:tr h="327659">
-                <a:tc>
-                  <a:txBody>
-                    <a:bodyPr/>
-                    <a:lstStyle/>
-                    <a:p>
-                      <a:r>
-                        <a:rPr lang="en-SG" sz="1100" dirty="0"/>
-                        <a:t>Site Location: 25 Bulim Square</a:t>
-                      </a:r>
-                    </a:p>
-                  </a:txBody>
-                  <a:tcPr/>
-                </a:tc>
-                <a:tc rowSpan="3">
-                  <a:txBody>
-                    <a:bodyPr/>
-                    <a:lstStyle/>
-                    <a:p>
-                      <a:endParaRPr lang="en-SG" sz="1100" dirty="0"/>
-                    </a:p>
-                    <a:p>
-                      <a:endParaRPr lang="en-SG" sz="1100" dirty="0"/>
-                    </a:p>
-                    <a:p>
-                      <a:endParaRPr lang="en-SG" sz="1100" dirty="0"/>
-                    </a:p>
-                    <a:p>
-                      <a:endParaRPr lang="en-SG" sz="1100" dirty="0"/>
-                    </a:p>
-                    <a:p>
-                      <a:r>
-                        <a:rPr lang="en-SG" sz="1100" dirty="0"/>
-                        <a:t>Approved By:  Eric Wong (Director)</a:t>
-                      </a:r>
-                    </a:p>
-                  </a:txBody>
-                  <a:tcPr>
-                    <a:solidFill>
-                      <a:schemeClr val="bg1"/>
-                    </a:solidFill>
-                  </a:tcPr>
-                </a:tc>
-                <a:extLst>
-                  <a:ext uri="{0D108BD9-81ED-4DB2-BD59-A6C34878D82A}">
-                    <a16:rowId xmlns:a16="http://schemas.microsoft.com/office/drawing/2014/main" val="2691564520"/>
-                  </a:ext>
-                </a:extLst>
-              </a:tr>
-              <a:tr h="343322">
-                <a:tc>
-                  <a:txBody>
-                    <a:bodyPr/>
-                    <a:lstStyle/>
-                    <a:p>
-                      <a:r>
-                        <a:rPr lang="en-SG" sz="1100" dirty="0"/>
-                        <a:t>Process: Lifting and Moving of Machinery on Platform</a:t>
-                      </a:r>
-                    </a:p>
-                  </a:txBody>
-                  <a:tcPr/>
-                </a:tc>
-                <a:tc vMerge="1">
-                  <a:txBody>
-                    <a:bodyPr/>
-                    <a:lstStyle/>
-                    <a:p>
-                      <a:endParaRPr lang="en-SG" dirty="0"/>
-                    </a:p>
-                  </a:txBody>
-                  <a:tcPr/>
-                </a:tc>
-                <a:extLst>
-                  <a:ext uri="{0D108BD9-81ED-4DB2-BD59-A6C34878D82A}">
-                    <a16:rowId xmlns:a16="http://schemas.microsoft.com/office/drawing/2014/main" val="784894797"/>
-                  </a:ext>
-                </a:extLst>
-              </a:tr>
-              <a:tr h="268395">
-                <a:tc>
-                  <a:txBody>
-                    <a:bodyPr/>
-                    <a:lstStyle/>
-                    <a:p>
-                      <a:r>
-                        <a:rPr lang="en-SG" sz="1100" dirty="0"/>
-                        <a:t>Prepared by: Kevin Wong</a:t>
-                      </a:r>
-                    </a:p>
-                  </a:txBody>
-                  <a:tcPr/>
-                </a:tc>
-                <a:tc vMerge="1">
-                  <a:txBody>
-                    <a:bodyPr/>
-                    <a:lstStyle/>
-                    <a:p>
-                      <a:endParaRPr lang="en-SG" dirty="0"/>
-                    </a:p>
-                  </a:txBody>
-                  <a:tcPr/>
-                </a:tc>
-                <a:extLst>
-                  <a:ext uri="{0D108BD9-81ED-4DB2-BD59-A6C34878D82A}">
-                    <a16:rowId xmlns:a16="http://schemas.microsoft.com/office/drawing/2014/main" val="3405944484"/>
-                  </a:ext>
-                </a:extLst>
-              </a:tr>
-              <a:tr h="295767">
-                <a:tc>
-                  <a:txBody>
-                    <a:bodyPr/>
-                    <a:lstStyle/>
-                    <a:p>
-                      <a:r>
-                        <a:rPr lang="en-SG" sz="1100" dirty="0"/>
-                        <a:t>Last Review Date: 24.02.2025</a:t>
-                      </a:r>
-                    </a:p>
-                  </a:txBody>
-                  <a:tcPr/>
-                </a:tc>
-                <a:tc>
-                  <a:txBody>
-                    <a:bodyPr/>
-                    <a:lstStyle/>
-                    <a:p>
-                      <a:r>
-                        <a:rPr lang="en-SG" sz="1100" dirty="0"/>
-                        <a:t>Next Review Date: 23.02.2026</a:t>
-                      </a:r>
-                    </a:p>
-                  </a:txBody>
-                  <a:tcPr/>
-                </a:tc>
-                <a:extLst>
-                  <a:ext uri="{0D108BD9-81ED-4DB2-BD59-A6C34878D82A}">
-                    <a16:rowId xmlns:a16="http://schemas.microsoft.com/office/drawing/2014/main" val="3430118298"/>
-                  </a:ext>
-                </a:extLst>
-              </a:tr>
-            </a:tbl>
-          </a:graphicData>
-        </a:graphic>
-      </p:graphicFrame>
-      <p:pic>
-        <p:nvPicPr>
-          <p:cNvPr id="13" name="Picture 12" descr="A close-up of a stamp&#10;&#10;AI-generated content may be incorrect.">
-            <a:extLst>
-              <a:ext uri="{FF2B5EF4-FFF2-40B4-BE49-F238E27FC236}">
-                <a16:creationId xmlns:a16="http://schemas.microsoft.com/office/drawing/2014/main" id="{81D7C308-841F-6C96-0649-013E9A87D79C}"/>
-              </a:ext>
-            </a:extLst>
-          </p:cNvPr>
-          <p:cNvPicPr>
-            <a:picLocks noChangeAspect="1"/>
-          </p:cNvPicPr>
-          <p:nvPr/>
-        </p:nvPicPr>
-        <p:blipFill>
-          <a:blip r:embed="rId4">
-            <a:extLst>
-              <a:ext uri="{28A0092B-C50C-407E-A947-70E740481C1C}">
-                <a14:useLocalDpi xmlns:a14="http://schemas.microsoft.com/office/drawing/2010/main" val="0"/>
-              </a:ext>
-            </a:extLst>
-          </a:blip>
-          <a:stretch>
-            <a:fillRect/>
-          </a:stretch>
-        </p:blipFill>
-        <p:spPr>
-          <a:xfrm>
-            <a:off x="5878548" y="1522307"/>
-            <a:ext cx="693638" cy="764310"/>
-          </a:xfrm>
-          <a:prstGeom prst="rect">
-            <a:avLst/>
-          </a:prstGeom>
-        </p:spPr>
-      </p:pic>
-      <p:sp>
-        <p:nvSpPr>
-          <p:cNvPr id="4" name="Slide Number Placeholder 3">
-            <a:extLst>
-              <a:ext uri="{FF2B5EF4-FFF2-40B4-BE49-F238E27FC236}">
-                <a16:creationId xmlns:a16="http://schemas.microsoft.com/office/drawing/2014/main" id="{0E8E572A-2DE5-7111-7149-2D8B91173082}"/>
-              </a:ext>
-            </a:extLst>
-          </p:cNvPr>
-          <p:cNvSpPr>
-            <a:spLocks noGrp="1"/>
-          </p:cNvSpPr>
-          <p:nvPr>
-            <p:ph type="sldNum" sz="quarter" idx="12"/>
-          </p:nvPr>
-        </p:nvSpPr>
-        <p:spPr/>
-        <p:txBody>
-          <a:bodyPr/>
-          <a:lstStyle/>
-          <a:p>
-            <a:fld id="{F0052729-9336-4E5B-BC69-5177B8B6DD05}" type="slidenum">
-              <a:rPr lang="en-SG" smtClean="0"/>
-              <a:t>2</a:t>
-            </a:fld>
-            <a:endParaRPr lang="en-SG"/>
-          </a:p>
-        </p:txBody>
-      </p:sp>
-    </p:spTree>
-    <p:extLst>
-      <p:ext uri="{BB962C8B-B14F-4D97-AF65-F5344CB8AC3E}">
-        <p14:creationId xmlns:p14="http://schemas.microsoft.com/office/powerpoint/2010/main" val="3444258337"/>
-      </p:ext>
-    </p:extLst>
-  </p:cSld>
-  <p:clrMapOvr>
-    <a:masterClrMapping/>
-  </p:clrMapOvr>
-</p:sld>
-</file>
-
-<file path=ppt/slides/slide20.xml><?xml version="1.0" encoding="utf-8"?>
-<p:sld xmlns:a="http://schemas.openxmlformats.org/drawingml/2006/main" xmlns:r="http://schemas.openxmlformats.org/officeDocument/2006/relationships" xmlns:p="http://schemas.openxmlformats.org/presentationml/2006/main">
-  <p:cSld>
-    <p:spTree>
-      <p:nvGrpSpPr>
-        <p:cNvPr id="1" name="">
-          <a:extLst>
-            <a:ext uri="{FF2B5EF4-FFF2-40B4-BE49-F238E27FC236}">
-              <a16:creationId xmlns:a16="http://schemas.microsoft.com/office/drawing/2014/main" id="{FB0E8D00-3D4D-AF23-A999-7DDE6B659563}"/>
-            </a:ext>
-          </a:extLst>
-        </p:cNvPr>
-        <p:cNvGrpSpPr/>
-        <p:nvPr/>
-      </p:nvGrpSpPr>
-      <p:grpSpPr>
-        <a:xfrm>
-          <a:off x="0" y="0"/>
-          <a:ext cx="0" cy="0"/>
-          <a:chOff x="0" y="0"/>
-          <a:chExt cx="0" cy="0"/>
-        </a:xfrm>
-      </p:grpSpPr>
-      <p:grpSp>
-        <p:nvGrpSpPr>
-          <p:cNvPr id="10" name="Group 9">
-            <a:extLst>
-              <a:ext uri="{FF2B5EF4-FFF2-40B4-BE49-F238E27FC236}">
-                <a16:creationId xmlns:a16="http://schemas.microsoft.com/office/drawing/2014/main" id="{BE8AB48B-FA0A-5C28-99C4-563810188F22}"/>
-              </a:ext>
-            </a:extLst>
-          </p:cNvPr>
-          <p:cNvGrpSpPr/>
-          <p:nvPr/>
-        </p:nvGrpSpPr>
-        <p:grpSpPr>
-          <a:xfrm>
-            <a:off x="0" y="1"/>
-            <a:ext cx="6857999" cy="1168400"/>
-            <a:chOff x="701748" y="108190"/>
-            <a:chExt cx="5454507" cy="1318601"/>
-          </a:xfrm>
-        </p:grpSpPr>
-        <p:sp>
-          <p:nvSpPr>
-            <p:cNvPr id="6" name="TextBox 5">
-              <a:extLst>
-                <a:ext uri="{FF2B5EF4-FFF2-40B4-BE49-F238E27FC236}">
-                  <a16:creationId xmlns:a16="http://schemas.microsoft.com/office/drawing/2014/main" id="{1852B675-0E12-9A75-0259-1723F24E7B5D}"/>
-                </a:ext>
-              </a:extLst>
-            </p:cNvPr>
-            <p:cNvSpPr txBox="1"/>
-            <p:nvPr/>
-          </p:nvSpPr>
-          <p:spPr>
-            <a:xfrm>
-              <a:off x="701748" y="108190"/>
-              <a:ext cx="5454507" cy="1318601"/>
-            </a:xfrm>
-            <a:prstGeom prst="rect">
-              <a:avLst/>
-            </a:prstGeom>
-            <a:noFill/>
-            <a:ln>
-              <a:solidFill>
-                <a:schemeClr val="accent1"/>
-              </a:solidFill>
-            </a:ln>
-          </p:spPr>
-          <p:txBody>
-            <a:bodyPr wrap="square" rtlCol="0">
-              <a:spAutoFit/>
-            </a:bodyPr>
-            <a:lstStyle/>
-            <a:p>
-              <a:pPr algn="ctr">
-                <a:buNone/>
-                <a:tabLst>
-                  <a:tab pos="2743200" algn="ctr"/>
-                  <a:tab pos="5486400" algn="r"/>
-                </a:tabLst>
-              </a:pPr>
-              <a:r>
-                <a:rPr lang="en-US" sz="1100" b="1" dirty="0">
-                  <a:solidFill>
-                    <a:srgbClr val="0000FF"/>
-                  </a:solidFill>
-                  <a:effectLst/>
-                  <a:latin typeface="Times New Roman" panose="02020603050405020304" pitchFamily="18" charset="0"/>
-                  <a:ea typeface="SimSun" panose="02010600030101010101" pitchFamily="2" charset="-122"/>
-                </a:rPr>
-                <a:t>ERIC WONG MACHINERY TRANSPORTATION PTE LTD</a:t>
-              </a:r>
-              <a:endParaRPr lang="en-SG" sz="1100" b="1" dirty="0">
-                <a:solidFill>
-                  <a:srgbClr val="0000FF"/>
-                </a:solidFill>
-                <a:latin typeface="Times New Roman" panose="02020603050405020304" pitchFamily="18" charset="0"/>
-                <a:ea typeface="SimSun" panose="02010600030101010101" pitchFamily="2" charset="-122"/>
-              </a:endParaRPr>
-            </a:p>
-            <a:p>
-              <a:pPr algn="ctr">
-                <a:buNone/>
-                <a:tabLst>
-                  <a:tab pos="2743200" algn="ctr"/>
-                  <a:tab pos="5486400" algn="r"/>
-                </a:tabLst>
-              </a:pPr>
-              <a:r>
-                <a:rPr lang="en-US" sz="1100" dirty="0">
-                  <a:effectLst/>
-                  <a:latin typeface="Times New Roman" panose="02020603050405020304" pitchFamily="18" charset="0"/>
-                  <a:ea typeface="SimSun" panose="02010600030101010101" pitchFamily="2" charset="-122"/>
-                </a:rPr>
-                <a:t>28 </a:t>
-              </a:r>
-              <a:r>
-                <a:rPr lang="en-US" sz="1100" dirty="0" err="1">
-                  <a:effectLst/>
-                  <a:latin typeface="Times New Roman" panose="02020603050405020304" pitchFamily="18" charset="0"/>
-                  <a:ea typeface="SimSun" panose="02010600030101010101" pitchFamily="2" charset="-122"/>
-                </a:rPr>
-                <a:t>Kranji</a:t>
-              </a:r>
-              <a:r>
-                <a:rPr lang="en-US" sz="1100" dirty="0">
-                  <a:effectLst/>
-                  <a:latin typeface="Times New Roman" panose="02020603050405020304" pitchFamily="18" charset="0"/>
-                  <a:ea typeface="SimSun" panose="02010600030101010101" pitchFamily="2" charset="-122"/>
-                </a:rPr>
-                <a:t> Loop #05-03, </a:t>
-              </a:r>
-              <a:r>
-                <a:rPr lang="en-US" sz="1100" dirty="0" err="1">
-                  <a:effectLst/>
-                  <a:latin typeface="Times New Roman" panose="02020603050405020304" pitchFamily="18" charset="0"/>
-                  <a:ea typeface="SimSun" panose="02010600030101010101" pitchFamily="2" charset="-122"/>
-                </a:rPr>
-                <a:t>Kranji</a:t>
-              </a:r>
-              <a:r>
-                <a:rPr lang="en-US" sz="1100" dirty="0">
-                  <a:effectLst/>
-                  <a:latin typeface="Times New Roman" panose="02020603050405020304" pitchFamily="18" charset="0"/>
-                  <a:ea typeface="SimSun" panose="02010600030101010101" pitchFamily="2" charset="-122"/>
-                </a:rPr>
-                <a:t> Green, Singapore 739571</a:t>
-              </a:r>
-              <a:endParaRPr lang="en-SG" sz="1100" dirty="0">
-                <a:latin typeface="Times New Roman" panose="02020603050405020304" pitchFamily="18" charset="0"/>
-                <a:ea typeface="SimSun" panose="02010600030101010101" pitchFamily="2" charset="-122"/>
-              </a:endParaRPr>
-            </a:p>
-            <a:p>
-              <a:pPr algn="ctr">
-                <a:buNone/>
-                <a:tabLst>
-                  <a:tab pos="2743200" algn="ctr"/>
-                  <a:tab pos="5486400" algn="r"/>
-                </a:tabLst>
-              </a:pPr>
-              <a:r>
-                <a:rPr lang="en-US" sz="1100" dirty="0">
-                  <a:effectLst/>
-                  <a:latin typeface="Times New Roman" panose="02020603050405020304" pitchFamily="18" charset="0"/>
-                  <a:ea typeface="SimSun" panose="02010600030101010101" pitchFamily="2" charset="-122"/>
-                </a:rPr>
-                <a:t>Tel: 62824175, 62828203, 62826020</a:t>
-              </a:r>
-              <a:endParaRPr lang="en-SG" sz="1100" dirty="0">
-                <a:effectLst/>
-                <a:latin typeface="Times New Roman" panose="02020603050405020304" pitchFamily="18" charset="0"/>
-                <a:ea typeface="SimSun" panose="02010600030101010101" pitchFamily="2" charset="-122"/>
-              </a:endParaRPr>
-            </a:p>
-            <a:p>
-              <a:pPr algn="ctr">
-                <a:buNone/>
-                <a:tabLst>
-                  <a:tab pos="2743200" algn="ctr"/>
-                  <a:tab pos="5486400" algn="r"/>
-                </a:tabLst>
-              </a:pPr>
-              <a:r>
-                <a:rPr lang="en-US" sz="1100" dirty="0">
-                  <a:effectLst/>
-                  <a:latin typeface="Times New Roman" panose="02020603050405020304" pitchFamily="18" charset="0"/>
-                  <a:ea typeface="SimSun" panose="02010600030101010101" pitchFamily="2" charset="-122"/>
-                </a:rPr>
-                <a:t>GST Reg No. : M2-8923804-2</a:t>
-              </a:r>
-              <a:endParaRPr lang="en-SG" sz="1100" dirty="0">
-                <a:latin typeface="Times New Roman" panose="02020603050405020304" pitchFamily="18" charset="0"/>
-                <a:ea typeface="SimSun" panose="02010600030101010101" pitchFamily="2" charset="-122"/>
-              </a:endParaRPr>
-            </a:p>
-            <a:p>
-              <a:pPr algn="ctr">
-                <a:buNone/>
-                <a:tabLst>
-                  <a:tab pos="2743200" algn="ctr"/>
-                  <a:tab pos="5486400" algn="r"/>
-                </a:tabLst>
-              </a:pPr>
-              <a:r>
-                <a:rPr lang="en-US" sz="1100" dirty="0">
-                  <a:effectLst/>
-                  <a:latin typeface="Times New Roman" panose="02020603050405020304" pitchFamily="18" charset="0"/>
-                  <a:ea typeface="SimSun" panose="02010600030101010101" pitchFamily="2" charset="-122"/>
-                  <a:hlinkClick r:id="rId2"/>
-                </a:rPr>
-                <a:t>http://www.ericwong.com</a:t>
-              </a:r>
-              <a:endParaRPr lang="en-SG" sz="1100" dirty="0">
-                <a:latin typeface="Times New Roman" panose="02020603050405020304" pitchFamily="18" charset="0"/>
-                <a:ea typeface="SimSun" panose="02010600030101010101" pitchFamily="2" charset="-122"/>
-              </a:endParaRPr>
-            </a:p>
-            <a:p>
-              <a:pPr algn="ctr">
-                <a:buNone/>
-                <a:tabLst>
-                  <a:tab pos="2743200" algn="ctr"/>
-                  <a:tab pos="5486400" algn="r"/>
-                </a:tabLst>
-              </a:pPr>
-              <a:r>
-                <a:rPr lang="en-US" sz="1100" dirty="0">
-                  <a:latin typeface="Times New Roman" panose="02020603050405020304" pitchFamily="18" charset="0"/>
-                  <a:ea typeface="SimSun" panose="02010600030101010101" pitchFamily="2" charset="-122"/>
-                </a:rPr>
-                <a:t>E</a:t>
-              </a:r>
-              <a:r>
-                <a:rPr lang="en-US" sz="1100" dirty="0">
-                  <a:effectLst/>
-                  <a:latin typeface="Times New Roman" panose="02020603050405020304" pitchFamily="18" charset="0"/>
-                  <a:ea typeface="SimSun" panose="02010600030101010101" pitchFamily="2" charset="-122"/>
-                </a:rPr>
-                <a:t>-mail: ewmtpl@gmail.com</a:t>
-              </a:r>
-              <a:endParaRPr lang="en-SG" sz="1100" dirty="0">
-                <a:effectLst/>
-                <a:latin typeface="Times New Roman" panose="02020603050405020304" pitchFamily="18" charset="0"/>
-                <a:ea typeface="SimSun" panose="02010600030101010101" pitchFamily="2" charset="-122"/>
-              </a:endParaRPr>
-            </a:p>
-            <a:p>
-              <a:endParaRPr lang="en-SG" sz="1400" dirty="0"/>
-            </a:p>
-          </p:txBody>
-        </p:sp>
-        <p:pic>
-          <p:nvPicPr>
-            <p:cNvPr id="8" name="Picture 7" descr="A red logo with a white background&#10;&#10;AI-generated content may be incorrect.">
-              <a:extLst>
-                <a:ext uri="{FF2B5EF4-FFF2-40B4-BE49-F238E27FC236}">
-                  <a16:creationId xmlns:a16="http://schemas.microsoft.com/office/drawing/2014/main" id="{1391E1A5-63B6-3BC0-F216-88DD61510286}"/>
-                </a:ext>
-              </a:extLst>
-            </p:cNvPr>
-            <p:cNvPicPr>
-              <a:picLocks noChangeAspect="1"/>
-            </p:cNvPicPr>
-            <p:nvPr/>
-          </p:nvPicPr>
-          <p:blipFill>
-            <a:blip r:embed="rId3">
-              <a:extLst>
-                <a:ext uri="{28A0092B-C50C-407E-A947-70E740481C1C}">
-                  <a14:useLocalDpi xmlns:a14="http://schemas.microsoft.com/office/drawing/2010/main" val="0"/>
-                </a:ext>
-              </a:extLst>
-            </a:blip>
-            <a:stretch>
-              <a:fillRect/>
-            </a:stretch>
-          </p:blipFill>
-          <p:spPr>
-            <a:xfrm>
-              <a:off x="990192" y="150552"/>
-              <a:ext cx="726493" cy="1233876"/>
-            </a:xfrm>
-            <a:prstGeom prst="rect">
-              <a:avLst/>
-            </a:prstGeom>
-          </p:spPr>
-        </p:pic>
-      </p:grpSp>
-      <p:graphicFrame>
-        <p:nvGraphicFramePr>
-          <p:cNvPr id="9" name="Table 8">
-            <a:extLst>
-              <a:ext uri="{FF2B5EF4-FFF2-40B4-BE49-F238E27FC236}">
-                <a16:creationId xmlns:a16="http://schemas.microsoft.com/office/drawing/2014/main" id="{7A050B61-270E-4597-D6BF-305F9F6BA54D}"/>
-              </a:ext>
-            </a:extLst>
-          </p:cNvPr>
-          <p:cNvGraphicFramePr>
-            <a:graphicFrameLocks noGrp="1"/>
-          </p:cNvGraphicFramePr>
-          <p:nvPr>
-            <p:extLst>
-              <p:ext uri="{D42A27DB-BD31-4B8C-83A1-F6EECF244321}">
-                <p14:modId xmlns:p14="http://schemas.microsoft.com/office/powerpoint/2010/main" val="2293249366"/>
-              </p:ext>
-            </p:extLst>
-          </p:nvPr>
-        </p:nvGraphicFramePr>
-        <p:xfrm>
-          <a:off x="0" y="1168401"/>
-          <a:ext cx="6857998" cy="1605983"/>
-        </p:xfrm>
-        <a:graphic>
-          <a:graphicData uri="http://schemas.openxmlformats.org/drawingml/2006/table">
-            <a:tbl>
-              <a:tblPr firstRow="1" bandRow="1">
-                <a:tableStyleId>{5C22544A-7EE6-4342-B048-85BDC9FD1C3A}</a:tableStyleId>
-              </a:tblPr>
-              <a:tblGrid>
-                <a:gridCol w="3428999">
-                  <a:extLst>
-                    <a:ext uri="{9D8B030D-6E8A-4147-A177-3AD203B41FA5}">
-                      <a16:colId xmlns:a16="http://schemas.microsoft.com/office/drawing/2014/main" val="3963200382"/>
-                    </a:ext>
-                  </a:extLst>
-                </a:gridCol>
-                <a:gridCol w="3428999">
-                  <a:extLst>
-                    <a:ext uri="{9D8B030D-6E8A-4147-A177-3AD203B41FA5}">
-                      <a16:colId xmlns:a16="http://schemas.microsoft.com/office/drawing/2014/main" val="281614988"/>
-                    </a:ext>
-                  </a:extLst>
-                </a:gridCol>
-              </a:tblGrid>
-              <a:tr h="370840">
-                <a:tc gridSpan="2">
-                  <a:txBody>
-                    <a:bodyPr/>
-                    <a:lstStyle/>
-                    <a:p>
-                      <a:pPr algn="ctr"/>
-                      <a:r>
-                        <a:rPr lang="en-SG" dirty="0"/>
-                        <a:t>Customer / Tenant Company: Singapore Mint</a:t>
-                      </a:r>
-                    </a:p>
-                  </a:txBody>
-                  <a:tcPr/>
-                </a:tc>
-                <a:tc hMerge="1">
-                  <a:txBody>
-                    <a:bodyPr/>
-                    <a:lstStyle/>
-                    <a:p>
-                      <a:endParaRPr lang="en-SG" dirty="0"/>
-                    </a:p>
-                  </a:txBody>
-                  <a:tcPr/>
-                </a:tc>
-                <a:extLst>
-                  <a:ext uri="{0D108BD9-81ED-4DB2-BD59-A6C34878D82A}">
-                    <a16:rowId xmlns:a16="http://schemas.microsoft.com/office/drawing/2014/main" val="3714705615"/>
-                  </a:ext>
-                </a:extLst>
-              </a:tr>
-              <a:tr h="327659">
-                <a:tc>
-                  <a:txBody>
-                    <a:bodyPr/>
-                    <a:lstStyle/>
-                    <a:p>
-                      <a:r>
-                        <a:rPr lang="en-SG" sz="1100" dirty="0"/>
-                        <a:t>Site Location: Singapore Mint </a:t>
-                      </a:r>
-                    </a:p>
-                  </a:txBody>
-                  <a:tcPr/>
-                </a:tc>
-                <a:tc rowSpan="3">
-                  <a:txBody>
-                    <a:bodyPr/>
-                    <a:lstStyle/>
-                    <a:p>
-                      <a:endParaRPr lang="en-SG" sz="1100" dirty="0"/>
-                    </a:p>
-                    <a:p>
-                      <a:endParaRPr lang="en-SG" sz="1100" dirty="0"/>
-                    </a:p>
-                    <a:p>
-                      <a:endParaRPr lang="en-SG" sz="1100" dirty="0"/>
-                    </a:p>
-                    <a:p>
-                      <a:endParaRPr lang="en-SG" sz="1100" dirty="0"/>
-                    </a:p>
-                    <a:p>
-                      <a:r>
-                        <a:rPr lang="en-SG" sz="1100" dirty="0"/>
-                        <a:t>Approved By:  Eric Wong (Director)</a:t>
-                      </a:r>
-                    </a:p>
-                  </a:txBody>
-                  <a:tcPr>
-                    <a:solidFill>
-                      <a:schemeClr val="bg1"/>
-                    </a:solidFill>
-                  </a:tcPr>
-                </a:tc>
-                <a:extLst>
-                  <a:ext uri="{0D108BD9-81ED-4DB2-BD59-A6C34878D82A}">
-                    <a16:rowId xmlns:a16="http://schemas.microsoft.com/office/drawing/2014/main" val="2691564520"/>
-                  </a:ext>
-                </a:extLst>
-              </a:tr>
-              <a:tr h="343322">
-                <a:tc>
-                  <a:txBody>
-                    <a:bodyPr/>
-                    <a:lstStyle/>
-                    <a:p>
-                      <a:r>
-                        <a:rPr lang="en-SG" sz="1100" dirty="0"/>
-                        <a:t>Process: Lifting and Moving of Machinery on Platform</a:t>
-                      </a:r>
-                    </a:p>
-                  </a:txBody>
-                  <a:tcPr/>
-                </a:tc>
-                <a:tc vMerge="1">
-                  <a:txBody>
-                    <a:bodyPr/>
-                    <a:lstStyle/>
-                    <a:p>
-                      <a:endParaRPr lang="en-SG" dirty="0"/>
-                    </a:p>
-                  </a:txBody>
-                  <a:tcPr/>
-                </a:tc>
-                <a:extLst>
-                  <a:ext uri="{0D108BD9-81ED-4DB2-BD59-A6C34878D82A}">
-                    <a16:rowId xmlns:a16="http://schemas.microsoft.com/office/drawing/2014/main" val="784894797"/>
-                  </a:ext>
-                </a:extLst>
-              </a:tr>
-              <a:tr h="268395">
-                <a:tc>
-                  <a:txBody>
-                    <a:bodyPr/>
-                    <a:lstStyle/>
-                    <a:p>
-                      <a:r>
-                        <a:rPr lang="en-SG" sz="1100" dirty="0"/>
-                        <a:t>Prepared by: Kevin Wong</a:t>
-                      </a:r>
-                    </a:p>
-                  </a:txBody>
-                  <a:tcPr/>
-                </a:tc>
-                <a:tc vMerge="1">
-                  <a:txBody>
-                    <a:bodyPr/>
-                    <a:lstStyle/>
-                    <a:p>
-                      <a:endParaRPr lang="en-SG" dirty="0"/>
-                    </a:p>
-                  </a:txBody>
-                  <a:tcPr/>
-                </a:tc>
-                <a:extLst>
-                  <a:ext uri="{0D108BD9-81ED-4DB2-BD59-A6C34878D82A}">
-                    <a16:rowId xmlns:a16="http://schemas.microsoft.com/office/drawing/2014/main" val="3405944484"/>
-                  </a:ext>
-                </a:extLst>
-              </a:tr>
-              <a:tr h="295767">
-                <a:tc>
-                  <a:txBody>
-                    <a:bodyPr/>
-                    <a:lstStyle/>
-                    <a:p>
-                      <a:r>
-                        <a:rPr lang="en-SG" sz="1100" dirty="0"/>
-                        <a:t>Last Review Date: 24.02.2025</a:t>
-                      </a:r>
-                    </a:p>
-                  </a:txBody>
-                  <a:tcPr/>
-                </a:tc>
-                <a:tc>
-                  <a:txBody>
-                    <a:bodyPr/>
-                    <a:lstStyle/>
-                    <a:p>
-                      <a:r>
-                        <a:rPr lang="en-SG" sz="1100" dirty="0"/>
-                        <a:t>Next Review Date: 23.02.2026</a:t>
-                      </a:r>
-                    </a:p>
-                  </a:txBody>
-                  <a:tcPr/>
-                </a:tc>
-                <a:extLst>
-                  <a:ext uri="{0D108BD9-81ED-4DB2-BD59-A6C34878D82A}">
-                    <a16:rowId xmlns:a16="http://schemas.microsoft.com/office/drawing/2014/main" val="3430118298"/>
-                  </a:ext>
-                </a:extLst>
-              </a:tr>
-            </a:tbl>
-          </a:graphicData>
-        </a:graphic>
-      </p:graphicFrame>
-      <p:pic>
-        <p:nvPicPr>
-          <p:cNvPr id="11" name="Picture 10" descr="A close-up of a stamp&#10;&#10;AI-generated content may be incorrect.">
-            <a:extLst>
-              <a:ext uri="{FF2B5EF4-FFF2-40B4-BE49-F238E27FC236}">
-                <a16:creationId xmlns:a16="http://schemas.microsoft.com/office/drawing/2014/main" id="{17377D72-39E2-64AC-9C0A-E495745DCECB}"/>
-              </a:ext>
-            </a:extLst>
-          </p:cNvPr>
-          <p:cNvPicPr>
-            <a:picLocks noChangeAspect="1"/>
-          </p:cNvPicPr>
-          <p:nvPr/>
-        </p:nvPicPr>
-        <p:blipFill>
-          <a:blip r:embed="rId4">
-            <a:extLst>
-              <a:ext uri="{28A0092B-C50C-407E-A947-70E740481C1C}">
-                <a14:useLocalDpi xmlns:a14="http://schemas.microsoft.com/office/drawing/2010/main" val="0"/>
-              </a:ext>
-            </a:extLst>
-          </a:blip>
-          <a:stretch>
-            <a:fillRect/>
-          </a:stretch>
-        </p:blipFill>
-        <p:spPr>
-          <a:xfrm>
-            <a:off x="5878548" y="1522307"/>
-            <a:ext cx="693638" cy="764310"/>
-          </a:xfrm>
-          <a:prstGeom prst="rect">
-            <a:avLst/>
-          </a:prstGeom>
-        </p:spPr>
-      </p:pic>
-      <p:sp>
-        <p:nvSpPr>
-          <p:cNvPr id="4" name="Slide Number Placeholder 3">
-            <a:extLst>
-              <a:ext uri="{FF2B5EF4-FFF2-40B4-BE49-F238E27FC236}">
-                <a16:creationId xmlns:a16="http://schemas.microsoft.com/office/drawing/2014/main" id="{D1C63BF0-930F-A774-E514-F0E6BBE56B51}"/>
-              </a:ext>
-            </a:extLst>
-          </p:cNvPr>
-          <p:cNvSpPr>
-            <a:spLocks noGrp="1"/>
-          </p:cNvSpPr>
-          <p:nvPr>
-            <p:ph type="sldNum" sz="quarter" idx="12"/>
-          </p:nvPr>
-        </p:nvSpPr>
-        <p:spPr/>
-        <p:txBody>
-          <a:bodyPr/>
-          <a:lstStyle/>
-          <a:p>
-            <a:fld id="{F0052729-9336-4E5B-BC69-5177B8B6DD05}" type="slidenum">
-              <a:rPr lang="en-SG" smtClean="0"/>
-              <a:t>20</a:t>
-            </a:fld>
-            <a:endParaRPr lang="en-SG"/>
-          </a:p>
-        </p:txBody>
-      </p:sp>
-      <p:pic>
-        <p:nvPicPr>
-          <p:cNvPr id="5" name="Picture 4">
-            <a:extLst>
-              <a:ext uri="{FF2B5EF4-FFF2-40B4-BE49-F238E27FC236}">
-                <a16:creationId xmlns:a16="http://schemas.microsoft.com/office/drawing/2014/main" id="{81D62565-130F-3FE2-2E90-6E1A22CE8976}"/>
-              </a:ext>
-            </a:extLst>
-          </p:cNvPr>
-          <p:cNvPicPr>
-            <a:picLocks noChangeAspect="1"/>
-          </p:cNvPicPr>
-          <p:nvPr/>
-        </p:nvPicPr>
-        <p:blipFill>
-          <a:blip r:embed="rId5">
-            <a:extLst>
-              <a:ext uri="{28A0092B-C50C-407E-A947-70E740481C1C}">
-                <a14:useLocalDpi xmlns:a14="http://schemas.microsoft.com/office/drawing/2010/main" val="0"/>
-              </a:ext>
-            </a:extLst>
-          </a:blip>
-          <a:srcRect t="17753" r="918"/>
-          <a:stretch/>
-        </p:blipFill>
-        <p:spPr>
-          <a:xfrm>
-            <a:off x="-1" y="2811921"/>
-            <a:ext cx="6857997" cy="6369476"/>
-          </a:xfrm>
-          <a:prstGeom prst="rect">
-            <a:avLst/>
-          </a:prstGeom>
-        </p:spPr>
-      </p:pic>
-    </p:spTree>
-    <p:extLst>
-      <p:ext uri="{BB962C8B-B14F-4D97-AF65-F5344CB8AC3E}">
-        <p14:creationId xmlns:p14="http://schemas.microsoft.com/office/powerpoint/2010/main" val="3206948670"/>
-      </p:ext>
-    </p:extLst>
-  </p:cSld>
-  <p:clrMapOvr>
-    <a:masterClrMapping/>
-  </p:clrMapOvr>
-</p:sld>
-</file>
-
-<file path=ppt/slides/slide21.xml><?xml version="1.0" encoding="utf-8"?>
-<p:sld xmlns:a="http://schemas.openxmlformats.org/drawingml/2006/main" xmlns:r="http://schemas.openxmlformats.org/officeDocument/2006/relationships" xmlns:p="http://schemas.openxmlformats.org/presentationml/2006/main">
-  <p:cSld>
-    <p:spTree>
-      <p:nvGrpSpPr>
-        <p:cNvPr id="1" name="">
-          <a:extLst>
-            <a:ext uri="{FF2B5EF4-FFF2-40B4-BE49-F238E27FC236}">
-              <a16:creationId xmlns:a16="http://schemas.microsoft.com/office/drawing/2014/main" id="{EC8613F2-714C-BD2B-01DC-50A26F0269A5}"/>
-            </a:ext>
-          </a:extLst>
-        </p:cNvPr>
-        <p:cNvGrpSpPr/>
-        <p:nvPr/>
-      </p:nvGrpSpPr>
-      <p:grpSpPr>
-        <a:xfrm>
-          <a:off x="0" y="0"/>
-          <a:ext cx="0" cy="0"/>
-          <a:chOff x="0" y="0"/>
-          <a:chExt cx="0" cy="0"/>
-        </a:xfrm>
-      </p:grpSpPr>
-      <p:grpSp>
-        <p:nvGrpSpPr>
-          <p:cNvPr id="10" name="Group 9">
-            <a:extLst>
-              <a:ext uri="{FF2B5EF4-FFF2-40B4-BE49-F238E27FC236}">
-                <a16:creationId xmlns:a16="http://schemas.microsoft.com/office/drawing/2014/main" id="{2C8A1395-E968-A8D3-C094-F1AC4FB094E9}"/>
-              </a:ext>
-            </a:extLst>
-          </p:cNvPr>
-          <p:cNvGrpSpPr/>
-          <p:nvPr/>
-        </p:nvGrpSpPr>
-        <p:grpSpPr>
-          <a:xfrm>
-            <a:off x="0" y="1"/>
-            <a:ext cx="6857999" cy="1168400"/>
-            <a:chOff x="701748" y="108190"/>
-            <a:chExt cx="5454507" cy="1318601"/>
-          </a:xfrm>
-        </p:grpSpPr>
-        <p:sp>
-          <p:nvSpPr>
-            <p:cNvPr id="6" name="TextBox 5">
-              <a:extLst>
-                <a:ext uri="{FF2B5EF4-FFF2-40B4-BE49-F238E27FC236}">
-                  <a16:creationId xmlns:a16="http://schemas.microsoft.com/office/drawing/2014/main" id="{3BC594D3-953F-2251-77B9-69BD0D20C362}"/>
-                </a:ext>
-              </a:extLst>
-            </p:cNvPr>
-            <p:cNvSpPr txBox="1"/>
-            <p:nvPr/>
-          </p:nvSpPr>
-          <p:spPr>
-            <a:xfrm>
-              <a:off x="701748" y="108190"/>
-              <a:ext cx="5454507" cy="1318601"/>
-            </a:xfrm>
-            <a:prstGeom prst="rect">
-              <a:avLst/>
-            </a:prstGeom>
-            <a:noFill/>
-            <a:ln>
-              <a:solidFill>
-                <a:schemeClr val="accent1"/>
-              </a:solidFill>
-            </a:ln>
-          </p:spPr>
-          <p:txBody>
-            <a:bodyPr wrap="square" rtlCol="0">
-              <a:spAutoFit/>
-            </a:bodyPr>
-            <a:lstStyle/>
-            <a:p>
-              <a:pPr algn="ctr">
-                <a:buNone/>
-                <a:tabLst>
-                  <a:tab pos="2743200" algn="ctr"/>
-                  <a:tab pos="5486400" algn="r"/>
-                </a:tabLst>
-              </a:pPr>
-              <a:r>
-                <a:rPr lang="en-US" sz="1100" b="1" dirty="0">
-                  <a:solidFill>
-                    <a:srgbClr val="0000FF"/>
-                  </a:solidFill>
-                  <a:effectLst/>
-                  <a:latin typeface="Times New Roman" panose="02020603050405020304" pitchFamily="18" charset="0"/>
-                  <a:ea typeface="SimSun" panose="02010600030101010101" pitchFamily="2" charset="-122"/>
-                </a:rPr>
-                <a:t>ERIC WONG MACHINERY TRANSPORTATION PTE LTD</a:t>
-              </a:r>
-              <a:endParaRPr lang="en-SG" sz="1100" b="1" dirty="0">
-                <a:solidFill>
-                  <a:srgbClr val="0000FF"/>
-                </a:solidFill>
-                <a:latin typeface="Times New Roman" panose="02020603050405020304" pitchFamily="18" charset="0"/>
-                <a:ea typeface="SimSun" panose="02010600030101010101" pitchFamily="2" charset="-122"/>
-              </a:endParaRPr>
-            </a:p>
-            <a:p>
-              <a:pPr algn="ctr">
-                <a:buNone/>
-                <a:tabLst>
-                  <a:tab pos="2743200" algn="ctr"/>
-                  <a:tab pos="5486400" algn="r"/>
-                </a:tabLst>
-              </a:pPr>
-              <a:r>
-                <a:rPr lang="en-US" sz="1100" dirty="0">
-                  <a:effectLst/>
-                  <a:latin typeface="Times New Roman" panose="02020603050405020304" pitchFamily="18" charset="0"/>
-                  <a:ea typeface="SimSun" panose="02010600030101010101" pitchFamily="2" charset="-122"/>
-                </a:rPr>
-                <a:t>28 </a:t>
-              </a:r>
-              <a:r>
-                <a:rPr lang="en-US" sz="1100" dirty="0" err="1">
-                  <a:effectLst/>
-                  <a:latin typeface="Times New Roman" panose="02020603050405020304" pitchFamily="18" charset="0"/>
-                  <a:ea typeface="SimSun" panose="02010600030101010101" pitchFamily="2" charset="-122"/>
-                </a:rPr>
-                <a:t>Kranji</a:t>
-              </a:r>
-              <a:r>
-                <a:rPr lang="en-US" sz="1100" dirty="0">
-                  <a:effectLst/>
-                  <a:latin typeface="Times New Roman" panose="02020603050405020304" pitchFamily="18" charset="0"/>
-                  <a:ea typeface="SimSun" panose="02010600030101010101" pitchFamily="2" charset="-122"/>
-                </a:rPr>
-                <a:t> Loop #05-03, </a:t>
-              </a:r>
-              <a:r>
-                <a:rPr lang="en-US" sz="1100" dirty="0" err="1">
-                  <a:effectLst/>
-                  <a:latin typeface="Times New Roman" panose="02020603050405020304" pitchFamily="18" charset="0"/>
-                  <a:ea typeface="SimSun" panose="02010600030101010101" pitchFamily="2" charset="-122"/>
-                </a:rPr>
-                <a:t>Kranji</a:t>
-              </a:r>
-              <a:r>
-                <a:rPr lang="en-US" sz="1100" dirty="0">
-                  <a:effectLst/>
-                  <a:latin typeface="Times New Roman" panose="02020603050405020304" pitchFamily="18" charset="0"/>
-                  <a:ea typeface="SimSun" panose="02010600030101010101" pitchFamily="2" charset="-122"/>
-                </a:rPr>
-                <a:t> Green, Singapore 739571</a:t>
-              </a:r>
-              <a:endParaRPr lang="en-SG" sz="1100" dirty="0">
-                <a:latin typeface="Times New Roman" panose="02020603050405020304" pitchFamily="18" charset="0"/>
-                <a:ea typeface="SimSun" panose="02010600030101010101" pitchFamily="2" charset="-122"/>
-              </a:endParaRPr>
-            </a:p>
-            <a:p>
-              <a:pPr algn="ctr">
-                <a:buNone/>
-                <a:tabLst>
-                  <a:tab pos="2743200" algn="ctr"/>
-                  <a:tab pos="5486400" algn="r"/>
-                </a:tabLst>
-              </a:pPr>
-              <a:r>
-                <a:rPr lang="en-US" sz="1100" dirty="0">
-                  <a:effectLst/>
-                  <a:latin typeface="Times New Roman" panose="02020603050405020304" pitchFamily="18" charset="0"/>
-                  <a:ea typeface="SimSun" panose="02010600030101010101" pitchFamily="2" charset="-122"/>
-                </a:rPr>
-                <a:t>Tel: 62824175, 62828203, 62826020</a:t>
-              </a:r>
-              <a:endParaRPr lang="en-SG" sz="1100" dirty="0">
-                <a:effectLst/>
-                <a:latin typeface="Times New Roman" panose="02020603050405020304" pitchFamily="18" charset="0"/>
-                <a:ea typeface="SimSun" panose="02010600030101010101" pitchFamily="2" charset="-122"/>
-              </a:endParaRPr>
-            </a:p>
-            <a:p>
-              <a:pPr algn="ctr">
-                <a:buNone/>
-                <a:tabLst>
-                  <a:tab pos="2743200" algn="ctr"/>
-                  <a:tab pos="5486400" algn="r"/>
-                </a:tabLst>
-              </a:pPr>
-              <a:r>
-                <a:rPr lang="en-US" sz="1100" dirty="0">
-                  <a:effectLst/>
-                  <a:latin typeface="Times New Roman" panose="02020603050405020304" pitchFamily="18" charset="0"/>
-                  <a:ea typeface="SimSun" panose="02010600030101010101" pitchFamily="2" charset="-122"/>
-                </a:rPr>
-                <a:t>GST Reg No. : M2-8923804-2</a:t>
-              </a:r>
-              <a:endParaRPr lang="en-SG" sz="1100" dirty="0">
-                <a:latin typeface="Times New Roman" panose="02020603050405020304" pitchFamily="18" charset="0"/>
-                <a:ea typeface="SimSun" panose="02010600030101010101" pitchFamily="2" charset="-122"/>
-              </a:endParaRPr>
-            </a:p>
-            <a:p>
-              <a:pPr algn="ctr">
-                <a:buNone/>
-                <a:tabLst>
-                  <a:tab pos="2743200" algn="ctr"/>
-                  <a:tab pos="5486400" algn="r"/>
-                </a:tabLst>
-              </a:pPr>
-              <a:r>
-                <a:rPr lang="en-US" sz="1100" dirty="0">
-                  <a:effectLst/>
-                  <a:latin typeface="Times New Roman" panose="02020603050405020304" pitchFamily="18" charset="0"/>
-                  <a:ea typeface="SimSun" panose="02010600030101010101" pitchFamily="2" charset="-122"/>
-                  <a:hlinkClick r:id="rId2"/>
-                </a:rPr>
-                <a:t>http://www.ericwong.com</a:t>
-              </a:r>
-              <a:endParaRPr lang="en-SG" sz="1100" dirty="0">
-                <a:latin typeface="Times New Roman" panose="02020603050405020304" pitchFamily="18" charset="0"/>
-                <a:ea typeface="SimSun" panose="02010600030101010101" pitchFamily="2" charset="-122"/>
-              </a:endParaRPr>
-            </a:p>
-            <a:p>
-              <a:pPr algn="ctr">
-                <a:buNone/>
-                <a:tabLst>
-                  <a:tab pos="2743200" algn="ctr"/>
-                  <a:tab pos="5486400" algn="r"/>
-                </a:tabLst>
-              </a:pPr>
-              <a:r>
-                <a:rPr lang="en-US" sz="1100" dirty="0">
-                  <a:latin typeface="Times New Roman" panose="02020603050405020304" pitchFamily="18" charset="0"/>
-                  <a:ea typeface="SimSun" panose="02010600030101010101" pitchFamily="2" charset="-122"/>
-                </a:rPr>
-                <a:t>E</a:t>
-              </a:r>
-              <a:r>
-                <a:rPr lang="en-US" sz="1100" dirty="0">
-                  <a:effectLst/>
-                  <a:latin typeface="Times New Roman" panose="02020603050405020304" pitchFamily="18" charset="0"/>
-                  <a:ea typeface="SimSun" panose="02010600030101010101" pitchFamily="2" charset="-122"/>
-                </a:rPr>
-                <a:t>-mail: ewmtpl@gmail.com</a:t>
-              </a:r>
-              <a:endParaRPr lang="en-SG" sz="1100" dirty="0">
-                <a:effectLst/>
-                <a:latin typeface="Times New Roman" panose="02020603050405020304" pitchFamily="18" charset="0"/>
-                <a:ea typeface="SimSun" panose="02010600030101010101" pitchFamily="2" charset="-122"/>
-              </a:endParaRPr>
-            </a:p>
-            <a:p>
-              <a:endParaRPr lang="en-SG" sz="1400" dirty="0"/>
-            </a:p>
-          </p:txBody>
-        </p:sp>
-        <p:pic>
-          <p:nvPicPr>
-            <p:cNvPr id="8" name="Picture 7" descr="A red logo with a white background&#10;&#10;AI-generated content may be incorrect.">
-              <a:extLst>
-                <a:ext uri="{FF2B5EF4-FFF2-40B4-BE49-F238E27FC236}">
-                  <a16:creationId xmlns:a16="http://schemas.microsoft.com/office/drawing/2014/main" id="{38C28246-A49E-DC4A-DAFF-5999797EF797}"/>
-                </a:ext>
-              </a:extLst>
-            </p:cNvPr>
-            <p:cNvPicPr>
-              <a:picLocks noChangeAspect="1"/>
-            </p:cNvPicPr>
-            <p:nvPr/>
-          </p:nvPicPr>
-          <p:blipFill>
-            <a:blip r:embed="rId3">
-              <a:extLst>
-                <a:ext uri="{28A0092B-C50C-407E-A947-70E740481C1C}">
-                  <a14:useLocalDpi xmlns:a14="http://schemas.microsoft.com/office/drawing/2010/main" val="0"/>
-                </a:ext>
-              </a:extLst>
-            </a:blip>
-            <a:stretch>
-              <a:fillRect/>
-            </a:stretch>
-          </p:blipFill>
-          <p:spPr>
-            <a:xfrm>
-              <a:off x="990192" y="150552"/>
-              <a:ext cx="726493" cy="1233876"/>
-            </a:xfrm>
-            <a:prstGeom prst="rect">
-              <a:avLst/>
-            </a:prstGeom>
-          </p:spPr>
-        </p:pic>
-      </p:grpSp>
-      <p:graphicFrame>
-        <p:nvGraphicFramePr>
-          <p:cNvPr id="9" name="Table 8">
-            <a:extLst>
-              <a:ext uri="{FF2B5EF4-FFF2-40B4-BE49-F238E27FC236}">
-                <a16:creationId xmlns:a16="http://schemas.microsoft.com/office/drawing/2014/main" id="{295E22DB-DD33-24AE-0C66-64208258AE74}"/>
-              </a:ext>
-            </a:extLst>
-          </p:cNvPr>
-          <p:cNvGraphicFramePr>
-            <a:graphicFrameLocks noGrp="1"/>
-          </p:cNvGraphicFramePr>
-          <p:nvPr/>
-        </p:nvGraphicFramePr>
-        <p:xfrm>
-          <a:off x="0" y="1168401"/>
-          <a:ext cx="6857998" cy="1605983"/>
-        </p:xfrm>
-        <a:graphic>
-          <a:graphicData uri="http://schemas.openxmlformats.org/drawingml/2006/table">
-            <a:tbl>
-              <a:tblPr firstRow="1" bandRow="1">
-                <a:tableStyleId>{5C22544A-7EE6-4342-B048-85BDC9FD1C3A}</a:tableStyleId>
-              </a:tblPr>
-              <a:tblGrid>
-                <a:gridCol w="3428999">
-                  <a:extLst>
-                    <a:ext uri="{9D8B030D-6E8A-4147-A177-3AD203B41FA5}">
-                      <a16:colId xmlns:a16="http://schemas.microsoft.com/office/drawing/2014/main" val="3963200382"/>
-                    </a:ext>
-                  </a:extLst>
-                </a:gridCol>
-                <a:gridCol w="3428999">
-                  <a:extLst>
-                    <a:ext uri="{9D8B030D-6E8A-4147-A177-3AD203B41FA5}">
-                      <a16:colId xmlns:a16="http://schemas.microsoft.com/office/drawing/2014/main" val="281614988"/>
-                    </a:ext>
-                  </a:extLst>
-                </a:gridCol>
-              </a:tblGrid>
-              <a:tr h="370840">
-                <a:tc gridSpan="2">
-                  <a:txBody>
-                    <a:bodyPr/>
-                    <a:lstStyle/>
-                    <a:p>
-                      <a:pPr algn="ctr"/>
-                      <a:r>
-                        <a:rPr lang="en-SG" dirty="0"/>
-                        <a:t>Customer / Tenant Company: Singapore Mint</a:t>
-                      </a:r>
-                    </a:p>
-                  </a:txBody>
-                  <a:tcPr/>
-                </a:tc>
-                <a:tc hMerge="1">
-                  <a:txBody>
-                    <a:bodyPr/>
-                    <a:lstStyle/>
-                    <a:p>
-                      <a:endParaRPr lang="en-SG" dirty="0"/>
-                    </a:p>
-                  </a:txBody>
-                  <a:tcPr/>
-                </a:tc>
-                <a:extLst>
-                  <a:ext uri="{0D108BD9-81ED-4DB2-BD59-A6C34878D82A}">
-                    <a16:rowId xmlns:a16="http://schemas.microsoft.com/office/drawing/2014/main" val="3714705615"/>
-                  </a:ext>
-                </a:extLst>
-              </a:tr>
-              <a:tr h="327659">
-                <a:tc>
-                  <a:txBody>
-                    <a:bodyPr/>
-                    <a:lstStyle/>
-                    <a:p>
-                      <a:r>
-                        <a:rPr lang="en-SG" sz="1100" dirty="0"/>
-                        <a:t>Site Location: Singapore Mint </a:t>
-                      </a:r>
-                    </a:p>
-                  </a:txBody>
-                  <a:tcPr/>
-                </a:tc>
-                <a:tc rowSpan="3">
-                  <a:txBody>
-                    <a:bodyPr/>
-                    <a:lstStyle/>
-                    <a:p>
-                      <a:endParaRPr lang="en-SG" sz="1100" dirty="0"/>
-                    </a:p>
-                    <a:p>
-                      <a:endParaRPr lang="en-SG" sz="1100" dirty="0"/>
-                    </a:p>
-                    <a:p>
-                      <a:endParaRPr lang="en-SG" sz="1100" dirty="0"/>
-                    </a:p>
-                    <a:p>
-                      <a:endParaRPr lang="en-SG" sz="1100" dirty="0"/>
-                    </a:p>
-                    <a:p>
-                      <a:r>
-                        <a:rPr lang="en-SG" sz="1100" dirty="0"/>
-                        <a:t>Approved By:  Eric Wong (Director)</a:t>
-                      </a:r>
-                    </a:p>
-                  </a:txBody>
-                  <a:tcPr>
-                    <a:solidFill>
-                      <a:schemeClr val="bg1"/>
-                    </a:solidFill>
-                  </a:tcPr>
-                </a:tc>
-                <a:extLst>
-                  <a:ext uri="{0D108BD9-81ED-4DB2-BD59-A6C34878D82A}">
-                    <a16:rowId xmlns:a16="http://schemas.microsoft.com/office/drawing/2014/main" val="2691564520"/>
-                  </a:ext>
-                </a:extLst>
-              </a:tr>
-              <a:tr h="343322">
-                <a:tc>
-                  <a:txBody>
-                    <a:bodyPr/>
-                    <a:lstStyle/>
-                    <a:p>
-                      <a:r>
-                        <a:rPr lang="en-SG" sz="1100" dirty="0"/>
-                        <a:t>Process: Lifting and Moving of Machinery on Platform</a:t>
-                      </a:r>
-                    </a:p>
-                  </a:txBody>
-                  <a:tcPr/>
-                </a:tc>
-                <a:tc vMerge="1">
-                  <a:txBody>
-                    <a:bodyPr/>
-                    <a:lstStyle/>
-                    <a:p>
-                      <a:endParaRPr lang="en-SG" dirty="0"/>
-                    </a:p>
-                  </a:txBody>
-                  <a:tcPr/>
-                </a:tc>
-                <a:extLst>
-                  <a:ext uri="{0D108BD9-81ED-4DB2-BD59-A6C34878D82A}">
-                    <a16:rowId xmlns:a16="http://schemas.microsoft.com/office/drawing/2014/main" val="784894797"/>
-                  </a:ext>
-                </a:extLst>
-              </a:tr>
-              <a:tr h="268395">
-                <a:tc>
-                  <a:txBody>
-                    <a:bodyPr/>
-                    <a:lstStyle/>
-                    <a:p>
-                      <a:r>
-                        <a:rPr lang="en-SG" sz="1100" dirty="0"/>
-                        <a:t>Prepared by: Kevin Wong</a:t>
-                      </a:r>
-                    </a:p>
-                  </a:txBody>
-                  <a:tcPr/>
-                </a:tc>
-                <a:tc vMerge="1">
-                  <a:txBody>
-                    <a:bodyPr/>
-                    <a:lstStyle/>
-                    <a:p>
-                      <a:endParaRPr lang="en-SG" dirty="0"/>
-                    </a:p>
-                  </a:txBody>
-                  <a:tcPr/>
-                </a:tc>
-                <a:extLst>
-                  <a:ext uri="{0D108BD9-81ED-4DB2-BD59-A6C34878D82A}">
-                    <a16:rowId xmlns:a16="http://schemas.microsoft.com/office/drawing/2014/main" val="3405944484"/>
-                  </a:ext>
-                </a:extLst>
-              </a:tr>
-              <a:tr h="295767">
-                <a:tc>
-                  <a:txBody>
-                    <a:bodyPr/>
-                    <a:lstStyle/>
-                    <a:p>
-                      <a:r>
-                        <a:rPr lang="en-SG" sz="1100" dirty="0"/>
-                        <a:t>Last Review Date: 24.02.2025</a:t>
-                      </a:r>
-                    </a:p>
-                  </a:txBody>
-                  <a:tcPr/>
-                </a:tc>
-                <a:tc>
-                  <a:txBody>
-                    <a:bodyPr/>
-                    <a:lstStyle/>
-                    <a:p>
-                      <a:r>
-                        <a:rPr lang="en-SG" sz="1100" dirty="0"/>
-                        <a:t>Next Review Date: 23.02.2026</a:t>
-                      </a:r>
-                    </a:p>
-                  </a:txBody>
-                  <a:tcPr/>
-                </a:tc>
-                <a:extLst>
-                  <a:ext uri="{0D108BD9-81ED-4DB2-BD59-A6C34878D82A}">
-                    <a16:rowId xmlns:a16="http://schemas.microsoft.com/office/drawing/2014/main" val="3430118298"/>
-                  </a:ext>
-                </a:extLst>
-              </a:tr>
-            </a:tbl>
-          </a:graphicData>
-        </a:graphic>
-      </p:graphicFrame>
-      <p:pic>
-        <p:nvPicPr>
-          <p:cNvPr id="11" name="Picture 10" descr="A close-up of a stamp&#10;&#10;AI-generated content may be incorrect.">
-            <a:extLst>
-              <a:ext uri="{FF2B5EF4-FFF2-40B4-BE49-F238E27FC236}">
-                <a16:creationId xmlns:a16="http://schemas.microsoft.com/office/drawing/2014/main" id="{C3E6768D-90F0-010A-FC25-42A525B40131}"/>
-              </a:ext>
-            </a:extLst>
-          </p:cNvPr>
-          <p:cNvPicPr>
-            <a:picLocks noChangeAspect="1"/>
-          </p:cNvPicPr>
-          <p:nvPr/>
-        </p:nvPicPr>
-        <p:blipFill>
-          <a:blip r:embed="rId4">
-            <a:extLst>
-              <a:ext uri="{28A0092B-C50C-407E-A947-70E740481C1C}">
-                <a14:useLocalDpi xmlns:a14="http://schemas.microsoft.com/office/drawing/2010/main" val="0"/>
-              </a:ext>
-            </a:extLst>
-          </a:blip>
-          <a:stretch>
-            <a:fillRect/>
-          </a:stretch>
-        </p:blipFill>
-        <p:spPr>
-          <a:xfrm>
-            <a:off x="5878548" y="1522307"/>
-            <a:ext cx="693638" cy="764310"/>
-          </a:xfrm>
-          <a:prstGeom prst="rect">
-            <a:avLst/>
-          </a:prstGeom>
-        </p:spPr>
-      </p:pic>
-      <p:sp>
-        <p:nvSpPr>
-          <p:cNvPr id="4" name="Slide Number Placeholder 3">
-            <a:extLst>
-              <a:ext uri="{FF2B5EF4-FFF2-40B4-BE49-F238E27FC236}">
-                <a16:creationId xmlns:a16="http://schemas.microsoft.com/office/drawing/2014/main" id="{16EE5D9A-7C70-0668-DE85-8C01B6B77EAD}"/>
-              </a:ext>
-            </a:extLst>
-          </p:cNvPr>
-          <p:cNvSpPr>
-            <a:spLocks noGrp="1"/>
-          </p:cNvSpPr>
-          <p:nvPr>
-            <p:ph type="sldNum" sz="quarter" idx="12"/>
-          </p:nvPr>
-        </p:nvSpPr>
-        <p:spPr/>
-        <p:txBody>
-          <a:bodyPr/>
-          <a:lstStyle/>
-          <a:p>
-            <a:fld id="{F0052729-9336-4E5B-BC69-5177B8B6DD05}" type="slidenum">
-              <a:rPr lang="en-SG" smtClean="0"/>
-              <a:t>21</a:t>
-            </a:fld>
-            <a:endParaRPr lang="en-SG"/>
-          </a:p>
-        </p:txBody>
-      </p:sp>
-    </p:spTree>
-    <p:extLst>
-      <p:ext uri="{BB962C8B-B14F-4D97-AF65-F5344CB8AC3E}">
-        <p14:creationId xmlns:p14="http://schemas.microsoft.com/office/powerpoint/2010/main" val="2149631270"/>
-      </p:ext>
-    </p:extLst>
-  </p:cSld>
-  <p:clrMapOvr>
-    <a:masterClrMapping/>
-  </p:clrMapOvr>
-</p:sld>
-</file>
-
-<file path=ppt/slides/slide22.xml><?xml version="1.0" encoding="utf-8"?>
-<p:sld xmlns:a="http://schemas.openxmlformats.org/drawingml/2006/main" xmlns:r="http://schemas.openxmlformats.org/officeDocument/2006/relationships" xmlns:p="http://schemas.openxmlformats.org/presentationml/2006/main">
-  <p:cSld>
-    <p:spTree>
-      <p:nvGrpSpPr>
-        <p:cNvPr id="1" name="">
-          <a:extLst>
-            <a:ext uri="{FF2B5EF4-FFF2-40B4-BE49-F238E27FC236}">
-              <a16:creationId xmlns:a16="http://schemas.microsoft.com/office/drawing/2014/main" id="{18E38073-90C9-0B21-7D7C-3BACD07914AF}"/>
-            </a:ext>
-          </a:extLst>
-        </p:cNvPr>
-        <p:cNvGrpSpPr/>
-        <p:nvPr/>
-      </p:nvGrpSpPr>
-      <p:grpSpPr>
-        <a:xfrm>
-          <a:off x="0" y="0"/>
-          <a:ext cx="0" cy="0"/>
-          <a:chOff x="0" y="0"/>
-          <a:chExt cx="0" cy="0"/>
-        </a:xfrm>
-      </p:grpSpPr>
-      <p:grpSp>
-        <p:nvGrpSpPr>
-          <p:cNvPr id="10" name="Group 9">
-            <a:extLst>
-              <a:ext uri="{FF2B5EF4-FFF2-40B4-BE49-F238E27FC236}">
-                <a16:creationId xmlns:a16="http://schemas.microsoft.com/office/drawing/2014/main" id="{8819BAE8-28AA-9C2C-FD53-55F3D73CAD0A}"/>
-              </a:ext>
-            </a:extLst>
-          </p:cNvPr>
-          <p:cNvGrpSpPr/>
-          <p:nvPr/>
-        </p:nvGrpSpPr>
-        <p:grpSpPr>
-          <a:xfrm>
-            <a:off x="0" y="1"/>
-            <a:ext cx="6857999" cy="1168400"/>
-            <a:chOff x="701748" y="108190"/>
-            <a:chExt cx="5454507" cy="1318601"/>
-          </a:xfrm>
-        </p:grpSpPr>
-        <p:sp>
-          <p:nvSpPr>
-            <p:cNvPr id="6" name="TextBox 5">
-              <a:extLst>
-                <a:ext uri="{FF2B5EF4-FFF2-40B4-BE49-F238E27FC236}">
-                  <a16:creationId xmlns:a16="http://schemas.microsoft.com/office/drawing/2014/main" id="{B14A84AD-073F-71A8-34E3-67E9D69BCE50}"/>
-                </a:ext>
-              </a:extLst>
-            </p:cNvPr>
-            <p:cNvSpPr txBox="1"/>
-            <p:nvPr/>
-          </p:nvSpPr>
-          <p:spPr>
-            <a:xfrm>
-              <a:off x="701748" y="108190"/>
-              <a:ext cx="5454507" cy="1318601"/>
-            </a:xfrm>
-            <a:prstGeom prst="rect">
-              <a:avLst/>
-            </a:prstGeom>
-            <a:noFill/>
-            <a:ln>
-              <a:solidFill>
-                <a:schemeClr val="accent1"/>
-              </a:solidFill>
-            </a:ln>
-          </p:spPr>
-          <p:txBody>
-            <a:bodyPr wrap="square" rtlCol="0">
-              <a:spAutoFit/>
-            </a:bodyPr>
-            <a:lstStyle/>
-            <a:p>
-              <a:pPr algn="ctr">
-                <a:buNone/>
-                <a:tabLst>
-                  <a:tab pos="2743200" algn="ctr"/>
-                  <a:tab pos="5486400" algn="r"/>
-                </a:tabLst>
-              </a:pPr>
-              <a:r>
-                <a:rPr lang="en-US" sz="1100" b="1" dirty="0">
-                  <a:solidFill>
-                    <a:srgbClr val="0000FF"/>
-                  </a:solidFill>
-                  <a:effectLst/>
-                  <a:latin typeface="Times New Roman" panose="02020603050405020304" pitchFamily="18" charset="0"/>
-                  <a:ea typeface="SimSun" panose="02010600030101010101" pitchFamily="2" charset="-122"/>
-                </a:rPr>
-                <a:t>ERIC WONG MACHINERY TRANSPORTATION PTE LTD</a:t>
-              </a:r>
-              <a:endParaRPr lang="en-SG" sz="1100" b="1" dirty="0">
-                <a:solidFill>
-                  <a:srgbClr val="0000FF"/>
-                </a:solidFill>
-                <a:latin typeface="Times New Roman" panose="02020603050405020304" pitchFamily="18" charset="0"/>
-                <a:ea typeface="SimSun" panose="02010600030101010101" pitchFamily="2" charset="-122"/>
-              </a:endParaRPr>
-            </a:p>
-            <a:p>
-              <a:pPr algn="ctr">
-                <a:buNone/>
-                <a:tabLst>
-                  <a:tab pos="2743200" algn="ctr"/>
-                  <a:tab pos="5486400" algn="r"/>
-                </a:tabLst>
-              </a:pPr>
-              <a:r>
-                <a:rPr lang="en-US" sz="1100" dirty="0">
-                  <a:effectLst/>
-                  <a:latin typeface="Times New Roman" panose="02020603050405020304" pitchFamily="18" charset="0"/>
-                  <a:ea typeface="SimSun" panose="02010600030101010101" pitchFamily="2" charset="-122"/>
-                </a:rPr>
-                <a:t>28 </a:t>
-              </a:r>
-              <a:r>
-                <a:rPr lang="en-US" sz="1100" dirty="0" err="1">
-                  <a:effectLst/>
-                  <a:latin typeface="Times New Roman" panose="02020603050405020304" pitchFamily="18" charset="0"/>
-                  <a:ea typeface="SimSun" panose="02010600030101010101" pitchFamily="2" charset="-122"/>
-                </a:rPr>
-                <a:t>Kranji</a:t>
-              </a:r>
-              <a:r>
-                <a:rPr lang="en-US" sz="1100" dirty="0">
-                  <a:effectLst/>
-                  <a:latin typeface="Times New Roman" panose="02020603050405020304" pitchFamily="18" charset="0"/>
-                  <a:ea typeface="SimSun" panose="02010600030101010101" pitchFamily="2" charset="-122"/>
-                </a:rPr>
-                <a:t> Loop #05-03, </a:t>
-              </a:r>
-              <a:r>
-                <a:rPr lang="en-US" sz="1100" dirty="0" err="1">
-                  <a:effectLst/>
-                  <a:latin typeface="Times New Roman" panose="02020603050405020304" pitchFamily="18" charset="0"/>
-                  <a:ea typeface="SimSun" panose="02010600030101010101" pitchFamily="2" charset="-122"/>
-                </a:rPr>
-                <a:t>Kranji</a:t>
-              </a:r>
-              <a:r>
-                <a:rPr lang="en-US" sz="1100" dirty="0">
-                  <a:effectLst/>
-                  <a:latin typeface="Times New Roman" panose="02020603050405020304" pitchFamily="18" charset="0"/>
-                  <a:ea typeface="SimSun" panose="02010600030101010101" pitchFamily="2" charset="-122"/>
-                </a:rPr>
-                <a:t> Green, Singapore 739571</a:t>
-              </a:r>
-              <a:endParaRPr lang="en-SG" sz="1100" dirty="0">
-                <a:latin typeface="Times New Roman" panose="02020603050405020304" pitchFamily="18" charset="0"/>
-                <a:ea typeface="SimSun" panose="02010600030101010101" pitchFamily="2" charset="-122"/>
-              </a:endParaRPr>
-            </a:p>
-            <a:p>
-              <a:pPr algn="ctr">
-                <a:buNone/>
-                <a:tabLst>
-                  <a:tab pos="2743200" algn="ctr"/>
-                  <a:tab pos="5486400" algn="r"/>
-                </a:tabLst>
-              </a:pPr>
-              <a:r>
-                <a:rPr lang="en-US" sz="1100" dirty="0">
-                  <a:effectLst/>
-                  <a:latin typeface="Times New Roman" panose="02020603050405020304" pitchFamily="18" charset="0"/>
-                  <a:ea typeface="SimSun" panose="02010600030101010101" pitchFamily="2" charset="-122"/>
-                </a:rPr>
-                <a:t>Tel: 62824175, 62828203, 62826020</a:t>
-              </a:r>
-              <a:endParaRPr lang="en-SG" sz="1100" dirty="0">
-                <a:effectLst/>
-                <a:latin typeface="Times New Roman" panose="02020603050405020304" pitchFamily="18" charset="0"/>
-                <a:ea typeface="SimSun" panose="02010600030101010101" pitchFamily="2" charset="-122"/>
-              </a:endParaRPr>
-            </a:p>
-            <a:p>
-              <a:pPr algn="ctr">
-                <a:buNone/>
-                <a:tabLst>
-                  <a:tab pos="2743200" algn="ctr"/>
-                  <a:tab pos="5486400" algn="r"/>
-                </a:tabLst>
-              </a:pPr>
-              <a:r>
-                <a:rPr lang="en-US" sz="1100" dirty="0">
-                  <a:effectLst/>
-                  <a:latin typeface="Times New Roman" panose="02020603050405020304" pitchFamily="18" charset="0"/>
-                  <a:ea typeface="SimSun" panose="02010600030101010101" pitchFamily="2" charset="-122"/>
-                </a:rPr>
-                <a:t>GST Reg No. : M2-8923804-2</a:t>
-              </a:r>
-              <a:endParaRPr lang="en-SG" sz="1100" dirty="0">
-                <a:latin typeface="Times New Roman" panose="02020603050405020304" pitchFamily="18" charset="0"/>
-                <a:ea typeface="SimSun" panose="02010600030101010101" pitchFamily="2" charset="-122"/>
-              </a:endParaRPr>
-            </a:p>
-            <a:p>
-              <a:pPr algn="ctr">
-                <a:buNone/>
-                <a:tabLst>
-                  <a:tab pos="2743200" algn="ctr"/>
-                  <a:tab pos="5486400" algn="r"/>
-                </a:tabLst>
-              </a:pPr>
-              <a:r>
-                <a:rPr lang="en-US" sz="1100" dirty="0">
-                  <a:effectLst/>
-                  <a:latin typeface="Times New Roman" panose="02020603050405020304" pitchFamily="18" charset="0"/>
-                  <a:ea typeface="SimSun" panose="02010600030101010101" pitchFamily="2" charset="-122"/>
-                  <a:hlinkClick r:id="rId2"/>
-                </a:rPr>
-                <a:t>http://www.ericwong.com</a:t>
-              </a:r>
-              <a:endParaRPr lang="en-SG" sz="1100" dirty="0">
-                <a:latin typeface="Times New Roman" panose="02020603050405020304" pitchFamily="18" charset="0"/>
-                <a:ea typeface="SimSun" panose="02010600030101010101" pitchFamily="2" charset="-122"/>
-              </a:endParaRPr>
-            </a:p>
-            <a:p>
-              <a:pPr algn="ctr">
-                <a:buNone/>
-                <a:tabLst>
-                  <a:tab pos="2743200" algn="ctr"/>
-                  <a:tab pos="5486400" algn="r"/>
-                </a:tabLst>
-              </a:pPr>
-              <a:r>
-                <a:rPr lang="en-US" sz="1100" dirty="0">
-                  <a:latin typeface="Times New Roman" panose="02020603050405020304" pitchFamily="18" charset="0"/>
-                  <a:ea typeface="SimSun" panose="02010600030101010101" pitchFamily="2" charset="-122"/>
-                </a:rPr>
-                <a:t>E</a:t>
-              </a:r>
-              <a:r>
-                <a:rPr lang="en-US" sz="1100" dirty="0">
-                  <a:effectLst/>
-                  <a:latin typeface="Times New Roman" panose="02020603050405020304" pitchFamily="18" charset="0"/>
-                  <a:ea typeface="SimSun" panose="02010600030101010101" pitchFamily="2" charset="-122"/>
-                </a:rPr>
-                <a:t>-mail: ewmtpl@gmail.com</a:t>
-              </a:r>
-              <a:endParaRPr lang="en-SG" sz="1100" dirty="0">
-                <a:effectLst/>
-                <a:latin typeface="Times New Roman" panose="02020603050405020304" pitchFamily="18" charset="0"/>
-                <a:ea typeface="SimSun" panose="02010600030101010101" pitchFamily="2" charset="-122"/>
-              </a:endParaRPr>
-            </a:p>
-            <a:p>
-              <a:endParaRPr lang="en-SG" sz="1400" dirty="0"/>
-            </a:p>
-          </p:txBody>
-        </p:sp>
-        <p:pic>
-          <p:nvPicPr>
-            <p:cNvPr id="8" name="Picture 7" descr="A red logo with a white background&#10;&#10;AI-generated content may be incorrect.">
-              <a:extLst>
-                <a:ext uri="{FF2B5EF4-FFF2-40B4-BE49-F238E27FC236}">
-                  <a16:creationId xmlns:a16="http://schemas.microsoft.com/office/drawing/2014/main" id="{5EF555C1-ED78-F1C6-9E6E-608F932838B3}"/>
-                </a:ext>
-              </a:extLst>
-            </p:cNvPr>
-            <p:cNvPicPr>
-              <a:picLocks noChangeAspect="1"/>
-            </p:cNvPicPr>
-            <p:nvPr/>
-          </p:nvPicPr>
-          <p:blipFill>
-            <a:blip r:embed="rId3">
-              <a:extLst>
-                <a:ext uri="{28A0092B-C50C-407E-A947-70E740481C1C}">
-                  <a14:useLocalDpi xmlns:a14="http://schemas.microsoft.com/office/drawing/2010/main" val="0"/>
-                </a:ext>
-              </a:extLst>
-            </a:blip>
-            <a:stretch>
-              <a:fillRect/>
-            </a:stretch>
-          </p:blipFill>
-          <p:spPr>
-            <a:xfrm>
-              <a:off x="990192" y="150552"/>
-              <a:ext cx="726493" cy="1233876"/>
-            </a:xfrm>
-            <a:prstGeom prst="rect">
-              <a:avLst/>
-            </a:prstGeom>
-          </p:spPr>
-        </p:pic>
-      </p:grpSp>
-      <p:graphicFrame>
-        <p:nvGraphicFramePr>
-          <p:cNvPr id="9" name="Table 8">
-            <a:extLst>
-              <a:ext uri="{FF2B5EF4-FFF2-40B4-BE49-F238E27FC236}">
-                <a16:creationId xmlns:a16="http://schemas.microsoft.com/office/drawing/2014/main" id="{68FF41AB-3FC0-D71F-42E4-B9FD725EDB91}"/>
-              </a:ext>
-            </a:extLst>
-          </p:cNvPr>
-          <p:cNvGraphicFramePr>
-            <a:graphicFrameLocks noGrp="1"/>
-          </p:cNvGraphicFramePr>
-          <p:nvPr/>
-        </p:nvGraphicFramePr>
-        <p:xfrm>
-          <a:off x="0" y="1168401"/>
-          <a:ext cx="6857998" cy="1605983"/>
-        </p:xfrm>
-        <a:graphic>
-          <a:graphicData uri="http://schemas.openxmlformats.org/drawingml/2006/table">
-            <a:tbl>
-              <a:tblPr firstRow="1" bandRow="1">
-                <a:tableStyleId>{5C22544A-7EE6-4342-B048-85BDC9FD1C3A}</a:tableStyleId>
-              </a:tblPr>
-              <a:tblGrid>
-                <a:gridCol w="3428999">
-                  <a:extLst>
-                    <a:ext uri="{9D8B030D-6E8A-4147-A177-3AD203B41FA5}">
-                      <a16:colId xmlns:a16="http://schemas.microsoft.com/office/drawing/2014/main" val="3963200382"/>
-                    </a:ext>
-                  </a:extLst>
-                </a:gridCol>
-                <a:gridCol w="3428999">
-                  <a:extLst>
-                    <a:ext uri="{9D8B030D-6E8A-4147-A177-3AD203B41FA5}">
-                      <a16:colId xmlns:a16="http://schemas.microsoft.com/office/drawing/2014/main" val="281614988"/>
-                    </a:ext>
-                  </a:extLst>
-                </a:gridCol>
-              </a:tblGrid>
-              <a:tr h="370840">
-                <a:tc gridSpan="2">
-                  <a:txBody>
-                    <a:bodyPr/>
-                    <a:lstStyle/>
-                    <a:p>
-                      <a:pPr algn="ctr"/>
-                      <a:r>
-                        <a:rPr lang="en-SG" dirty="0"/>
-                        <a:t>Customer / Tenant Company: KY Sub Assembly Pte Ltd</a:t>
-                      </a:r>
-                    </a:p>
-                  </a:txBody>
-                  <a:tcPr/>
-                </a:tc>
-                <a:tc hMerge="1">
-                  <a:txBody>
-                    <a:bodyPr/>
-                    <a:lstStyle/>
-                    <a:p>
-                      <a:endParaRPr lang="en-SG" dirty="0"/>
-                    </a:p>
-                  </a:txBody>
-                  <a:tcPr/>
-                </a:tc>
-                <a:extLst>
-                  <a:ext uri="{0D108BD9-81ED-4DB2-BD59-A6C34878D82A}">
-                    <a16:rowId xmlns:a16="http://schemas.microsoft.com/office/drawing/2014/main" val="3714705615"/>
-                  </a:ext>
-                </a:extLst>
-              </a:tr>
-              <a:tr h="327659">
-                <a:tc>
-                  <a:txBody>
-                    <a:bodyPr/>
-                    <a:lstStyle/>
-                    <a:p>
-                      <a:r>
-                        <a:rPr lang="en-SG" sz="1100" dirty="0"/>
-                        <a:t>Site Location: Singapore Mint </a:t>
-                      </a:r>
-                    </a:p>
-                  </a:txBody>
-                  <a:tcPr/>
-                </a:tc>
-                <a:tc rowSpan="3">
-                  <a:txBody>
-                    <a:bodyPr/>
-                    <a:lstStyle/>
-                    <a:p>
-                      <a:endParaRPr lang="en-SG" sz="1100" dirty="0"/>
-                    </a:p>
-                    <a:p>
-                      <a:endParaRPr lang="en-SG" sz="1100" dirty="0"/>
-                    </a:p>
-                    <a:p>
-                      <a:endParaRPr lang="en-SG" sz="1100" dirty="0"/>
-                    </a:p>
-                    <a:p>
-                      <a:endParaRPr lang="en-SG" sz="1100" dirty="0"/>
-                    </a:p>
-                    <a:p>
-                      <a:r>
-                        <a:rPr lang="en-SG" sz="1100" dirty="0"/>
-                        <a:t>Approved By:  Eric Wong (Director)</a:t>
-                      </a:r>
-                    </a:p>
-                  </a:txBody>
-                  <a:tcPr>
-                    <a:solidFill>
-                      <a:schemeClr val="bg1"/>
-                    </a:solidFill>
-                  </a:tcPr>
-                </a:tc>
-                <a:extLst>
-                  <a:ext uri="{0D108BD9-81ED-4DB2-BD59-A6C34878D82A}">
-                    <a16:rowId xmlns:a16="http://schemas.microsoft.com/office/drawing/2014/main" val="2691564520"/>
-                  </a:ext>
-                </a:extLst>
-              </a:tr>
-              <a:tr h="343322">
-                <a:tc>
-                  <a:txBody>
-                    <a:bodyPr/>
-                    <a:lstStyle/>
-                    <a:p>
-                      <a:r>
-                        <a:rPr lang="en-SG" sz="1100" dirty="0"/>
-                        <a:t>Process: Lifting and Moving of Machinery on Platform</a:t>
-                      </a:r>
-                    </a:p>
-                  </a:txBody>
-                  <a:tcPr/>
-                </a:tc>
-                <a:tc vMerge="1">
-                  <a:txBody>
-                    <a:bodyPr/>
-                    <a:lstStyle/>
-                    <a:p>
-                      <a:endParaRPr lang="en-SG" dirty="0"/>
-                    </a:p>
-                  </a:txBody>
-                  <a:tcPr/>
-                </a:tc>
-                <a:extLst>
-                  <a:ext uri="{0D108BD9-81ED-4DB2-BD59-A6C34878D82A}">
-                    <a16:rowId xmlns:a16="http://schemas.microsoft.com/office/drawing/2014/main" val="784894797"/>
-                  </a:ext>
-                </a:extLst>
-              </a:tr>
-              <a:tr h="268395">
-                <a:tc>
-                  <a:txBody>
-                    <a:bodyPr/>
-                    <a:lstStyle/>
-                    <a:p>
-                      <a:r>
-                        <a:rPr lang="en-SG" sz="1100" dirty="0"/>
-                        <a:t>Prepared by: Kevin Wong</a:t>
-                      </a:r>
-                    </a:p>
-                  </a:txBody>
-                  <a:tcPr/>
-                </a:tc>
-                <a:tc vMerge="1">
-                  <a:txBody>
-                    <a:bodyPr/>
-                    <a:lstStyle/>
-                    <a:p>
-                      <a:endParaRPr lang="en-SG" dirty="0"/>
-                    </a:p>
-                  </a:txBody>
-                  <a:tcPr/>
-                </a:tc>
-                <a:extLst>
-                  <a:ext uri="{0D108BD9-81ED-4DB2-BD59-A6C34878D82A}">
-                    <a16:rowId xmlns:a16="http://schemas.microsoft.com/office/drawing/2014/main" val="3405944484"/>
-                  </a:ext>
-                </a:extLst>
-              </a:tr>
-              <a:tr h="295767">
-                <a:tc>
-                  <a:txBody>
-                    <a:bodyPr/>
-                    <a:lstStyle/>
-                    <a:p>
-                      <a:r>
-                        <a:rPr lang="en-SG" sz="1100" dirty="0"/>
-                        <a:t>Last Review Date: 24.02.2025</a:t>
-                      </a:r>
-                    </a:p>
-                  </a:txBody>
-                  <a:tcPr/>
-                </a:tc>
-                <a:tc>
-                  <a:txBody>
-                    <a:bodyPr/>
-                    <a:lstStyle/>
-                    <a:p>
-                      <a:r>
-                        <a:rPr lang="en-SG" sz="1100" dirty="0"/>
-                        <a:t>Next Review Date: 23.02.2026</a:t>
-                      </a:r>
-                    </a:p>
-                  </a:txBody>
-                  <a:tcPr/>
-                </a:tc>
-                <a:extLst>
-                  <a:ext uri="{0D108BD9-81ED-4DB2-BD59-A6C34878D82A}">
-                    <a16:rowId xmlns:a16="http://schemas.microsoft.com/office/drawing/2014/main" val="3430118298"/>
-                  </a:ext>
-                </a:extLst>
-              </a:tr>
-            </a:tbl>
-          </a:graphicData>
-        </a:graphic>
-      </p:graphicFrame>
-      <p:pic>
-        <p:nvPicPr>
-          <p:cNvPr id="11" name="Picture 10" descr="A close-up of a stamp&#10;&#10;AI-generated content may be incorrect.">
-            <a:extLst>
-              <a:ext uri="{FF2B5EF4-FFF2-40B4-BE49-F238E27FC236}">
-                <a16:creationId xmlns:a16="http://schemas.microsoft.com/office/drawing/2014/main" id="{2C01259D-5996-B31E-1B94-728BB91319DD}"/>
-              </a:ext>
-            </a:extLst>
-          </p:cNvPr>
-          <p:cNvPicPr>
-            <a:picLocks noChangeAspect="1"/>
-          </p:cNvPicPr>
-          <p:nvPr/>
-        </p:nvPicPr>
-        <p:blipFill>
-          <a:blip r:embed="rId4">
-            <a:extLst>
-              <a:ext uri="{28A0092B-C50C-407E-A947-70E740481C1C}">
-                <a14:useLocalDpi xmlns:a14="http://schemas.microsoft.com/office/drawing/2010/main" val="0"/>
-              </a:ext>
-            </a:extLst>
-          </a:blip>
-          <a:stretch>
-            <a:fillRect/>
-          </a:stretch>
-        </p:blipFill>
-        <p:spPr>
-          <a:xfrm>
-            <a:off x="5878548" y="1522307"/>
-            <a:ext cx="693638" cy="764310"/>
-          </a:xfrm>
-          <a:prstGeom prst="rect">
-            <a:avLst/>
-          </a:prstGeom>
-        </p:spPr>
-      </p:pic>
-      <p:sp>
-        <p:nvSpPr>
-          <p:cNvPr id="4" name="Slide Number Placeholder 3">
-            <a:extLst>
-              <a:ext uri="{FF2B5EF4-FFF2-40B4-BE49-F238E27FC236}">
-                <a16:creationId xmlns:a16="http://schemas.microsoft.com/office/drawing/2014/main" id="{47AEFC7C-41AB-90E6-788E-40908A0D20AD}"/>
-              </a:ext>
-            </a:extLst>
-          </p:cNvPr>
-          <p:cNvSpPr>
-            <a:spLocks noGrp="1"/>
-          </p:cNvSpPr>
-          <p:nvPr>
-            <p:ph type="sldNum" sz="quarter" idx="12"/>
-          </p:nvPr>
-        </p:nvSpPr>
-        <p:spPr/>
-        <p:txBody>
-          <a:bodyPr/>
-          <a:lstStyle/>
-          <a:p>
-            <a:fld id="{F0052729-9336-4E5B-BC69-5177B8B6DD05}" type="slidenum">
-              <a:rPr lang="en-SG" smtClean="0"/>
-              <a:t>22</a:t>
-            </a:fld>
-            <a:endParaRPr lang="en-SG"/>
-          </a:p>
-        </p:txBody>
-      </p:sp>
-      <p:pic>
-        <p:nvPicPr>
-          <p:cNvPr id="5" name="Picture 4">
-            <a:extLst>
-              <a:ext uri="{FF2B5EF4-FFF2-40B4-BE49-F238E27FC236}">
-                <a16:creationId xmlns:a16="http://schemas.microsoft.com/office/drawing/2014/main" id="{5BDB42AA-150D-2D2A-36C4-0EF57775007C}"/>
-              </a:ext>
-            </a:extLst>
-          </p:cNvPr>
-          <p:cNvPicPr>
-            <a:picLocks noChangeAspect="1"/>
-          </p:cNvPicPr>
-          <p:nvPr/>
-        </p:nvPicPr>
-        <p:blipFill>
-          <a:blip r:embed="rId5">
-            <a:extLst>
-              <a:ext uri="{28A0092B-C50C-407E-A947-70E740481C1C}">
-                <a14:useLocalDpi xmlns:a14="http://schemas.microsoft.com/office/drawing/2010/main" val="0"/>
-              </a:ext>
-            </a:extLst>
-          </a:blip>
-          <a:stretch>
-            <a:fillRect/>
-          </a:stretch>
-        </p:blipFill>
-        <p:spPr>
-          <a:xfrm>
-            <a:off x="156754" y="2811921"/>
-            <a:ext cx="6701244" cy="6428471"/>
-          </a:xfrm>
-          <a:prstGeom prst="rect">
-            <a:avLst/>
-          </a:prstGeom>
-        </p:spPr>
-      </p:pic>
-    </p:spTree>
-    <p:extLst>
-      <p:ext uri="{BB962C8B-B14F-4D97-AF65-F5344CB8AC3E}">
-        <p14:creationId xmlns:p14="http://schemas.microsoft.com/office/powerpoint/2010/main" val="2715367772"/>
-      </p:ext>
-    </p:extLst>
-  </p:cSld>
-  <p:clrMapOvr>
-    <a:masterClrMapping/>
-  </p:clrMapOvr>
-</p:sld>
-</file>
-
-<file path=ppt/slides/slide23.xml><?xml version="1.0" encoding="utf-8"?>
-<p:sld xmlns:a="http://schemas.openxmlformats.org/drawingml/2006/main" xmlns:r="http://schemas.openxmlformats.org/officeDocument/2006/relationships" xmlns:p="http://schemas.openxmlformats.org/presentationml/2006/main">
-  <p:cSld>
-    <p:spTree>
-      <p:nvGrpSpPr>
-        <p:cNvPr id="1" name="">
-          <a:extLst>
-            <a:ext uri="{FF2B5EF4-FFF2-40B4-BE49-F238E27FC236}">
-              <a16:creationId xmlns:a16="http://schemas.microsoft.com/office/drawing/2014/main" id="{01312019-AB4E-DD41-F8D2-75E765BFECA5}"/>
-            </a:ext>
-          </a:extLst>
-        </p:cNvPr>
-        <p:cNvGrpSpPr/>
-        <p:nvPr/>
-      </p:nvGrpSpPr>
-      <p:grpSpPr>
-        <a:xfrm>
-          <a:off x="0" y="0"/>
-          <a:ext cx="0" cy="0"/>
-          <a:chOff x="0" y="0"/>
-          <a:chExt cx="0" cy="0"/>
-        </a:xfrm>
-      </p:grpSpPr>
-      <p:grpSp>
-        <p:nvGrpSpPr>
-          <p:cNvPr id="10" name="Group 9">
-            <a:extLst>
-              <a:ext uri="{FF2B5EF4-FFF2-40B4-BE49-F238E27FC236}">
-                <a16:creationId xmlns:a16="http://schemas.microsoft.com/office/drawing/2014/main" id="{39F9C05A-6B77-AB48-FB3F-C1C6140128F4}"/>
-              </a:ext>
-            </a:extLst>
-          </p:cNvPr>
-          <p:cNvGrpSpPr/>
-          <p:nvPr/>
-        </p:nvGrpSpPr>
-        <p:grpSpPr>
-          <a:xfrm>
-            <a:off x="0" y="1"/>
-            <a:ext cx="6857999" cy="1168400"/>
-            <a:chOff x="701748" y="108190"/>
-            <a:chExt cx="5454507" cy="1318601"/>
-          </a:xfrm>
-        </p:grpSpPr>
-        <p:sp>
-          <p:nvSpPr>
-            <p:cNvPr id="6" name="TextBox 5">
-              <a:extLst>
-                <a:ext uri="{FF2B5EF4-FFF2-40B4-BE49-F238E27FC236}">
-                  <a16:creationId xmlns:a16="http://schemas.microsoft.com/office/drawing/2014/main" id="{1356FA13-3B92-C606-4072-211B23B63A59}"/>
-                </a:ext>
-              </a:extLst>
-            </p:cNvPr>
-            <p:cNvSpPr txBox="1"/>
-            <p:nvPr/>
-          </p:nvSpPr>
-          <p:spPr>
-            <a:xfrm>
-              <a:off x="701748" y="108190"/>
-              <a:ext cx="5454507" cy="1318601"/>
-            </a:xfrm>
-            <a:prstGeom prst="rect">
-              <a:avLst/>
-            </a:prstGeom>
-            <a:noFill/>
-            <a:ln>
-              <a:solidFill>
-                <a:schemeClr val="accent1"/>
-              </a:solidFill>
-            </a:ln>
-          </p:spPr>
-          <p:txBody>
-            <a:bodyPr wrap="square" rtlCol="0">
-              <a:spAutoFit/>
-            </a:bodyPr>
-            <a:lstStyle/>
-            <a:p>
-              <a:pPr algn="ctr">
-                <a:buNone/>
-                <a:tabLst>
-                  <a:tab pos="2743200" algn="ctr"/>
-                  <a:tab pos="5486400" algn="r"/>
-                </a:tabLst>
-              </a:pPr>
-              <a:r>
-                <a:rPr lang="en-US" sz="1100" b="1" dirty="0">
-                  <a:solidFill>
-                    <a:srgbClr val="0000FF"/>
-                  </a:solidFill>
-                  <a:effectLst/>
-                  <a:latin typeface="Times New Roman" panose="02020603050405020304" pitchFamily="18" charset="0"/>
-                  <a:ea typeface="SimSun" panose="02010600030101010101" pitchFamily="2" charset="-122"/>
-                </a:rPr>
-                <a:t>ERIC WONG MACHINERY TRANSPORTATION PTE LTD</a:t>
-              </a:r>
-              <a:endParaRPr lang="en-SG" sz="1100" b="1" dirty="0">
-                <a:solidFill>
-                  <a:srgbClr val="0000FF"/>
-                </a:solidFill>
-                <a:latin typeface="Times New Roman" panose="02020603050405020304" pitchFamily="18" charset="0"/>
-                <a:ea typeface="SimSun" panose="02010600030101010101" pitchFamily="2" charset="-122"/>
-              </a:endParaRPr>
-            </a:p>
-            <a:p>
-              <a:pPr algn="ctr">
-                <a:buNone/>
-                <a:tabLst>
-                  <a:tab pos="2743200" algn="ctr"/>
-                  <a:tab pos="5486400" algn="r"/>
-                </a:tabLst>
-              </a:pPr>
-              <a:r>
-                <a:rPr lang="en-US" sz="1100" dirty="0">
-                  <a:effectLst/>
-                  <a:latin typeface="Times New Roman" panose="02020603050405020304" pitchFamily="18" charset="0"/>
-                  <a:ea typeface="SimSun" panose="02010600030101010101" pitchFamily="2" charset="-122"/>
-                </a:rPr>
-                <a:t>28 </a:t>
-              </a:r>
-              <a:r>
-                <a:rPr lang="en-US" sz="1100" dirty="0" err="1">
-                  <a:effectLst/>
-                  <a:latin typeface="Times New Roman" panose="02020603050405020304" pitchFamily="18" charset="0"/>
-                  <a:ea typeface="SimSun" panose="02010600030101010101" pitchFamily="2" charset="-122"/>
-                </a:rPr>
-                <a:t>Kranji</a:t>
-              </a:r>
-              <a:r>
-                <a:rPr lang="en-US" sz="1100" dirty="0">
-                  <a:effectLst/>
-                  <a:latin typeface="Times New Roman" panose="02020603050405020304" pitchFamily="18" charset="0"/>
-                  <a:ea typeface="SimSun" panose="02010600030101010101" pitchFamily="2" charset="-122"/>
-                </a:rPr>
-                <a:t> Loop #05-03, </a:t>
-              </a:r>
-              <a:r>
-                <a:rPr lang="en-US" sz="1100" dirty="0" err="1">
-                  <a:effectLst/>
-                  <a:latin typeface="Times New Roman" panose="02020603050405020304" pitchFamily="18" charset="0"/>
-                  <a:ea typeface="SimSun" panose="02010600030101010101" pitchFamily="2" charset="-122"/>
-                </a:rPr>
-                <a:t>Kranji</a:t>
-              </a:r>
-              <a:r>
-                <a:rPr lang="en-US" sz="1100" dirty="0">
-                  <a:effectLst/>
-                  <a:latin typeface="Times New Roman" panose="02020603050405020304" pitchFamily="18" charset="0"/>
-                  <a:ea typeface="SimSun" panose="02010600030101010101" pitchFamily="2" charset="-122"/>
-                </a:rPr>
-                <a:t> Green, Singapore 739571</a:t>
-              </a:r>
-              <a:endParaRPr lang="en-SG" sz="1100" dirty="0">
-                <a:latin typeface="Times New Roman" panose="02020603050405020304" pitchFamily="18" charset="0"/>
-                <a:ea typeface="SimSun" panose="02010600030101010101" pitchFamily="2" charset="-122"/>
-              </a:endParaRPr>
-            </a:p>
-            <a:p>
-              <a:pPr algn="ctr">
-                <a:buNone/>
-                <a:tabLst>
-                  <a:tab pos="2743200" algn="ctr"/>
-                  <a:tab pos="5486400" algn="r"/>
-                </a:tabLst>
-              </a:pPr>
-              <a:r>
-                <a:rPr lang="en-US" sz="1100" dirty="0">
-                  <a:effectLst/>
-                  <a:latin typeface="Times New Roman" panose="02020603050405020304" pitchFamily="18" charset="0"/>
-                  <a:ea typeface="SimSun" panose="02010600030101010101" pitchFamily="2" charset="-122"/>
-                </a:rPr>
-                <a:t>Tel: 62824175, 62828203, 62826020</a:t>
-              </a:r>
-              <a:endParaRPr lang="en-SG" sz="1100" dirty="0">
-                <a:effectLst/>
-                <a:latin typeface="Times New Roman" panose="02020603050405020304" pitchFamily="18" charset="0"/>
-                <a:ea typeface="SimSun" panose="02010600030101010101" pitchFamily="2" charset="-122"/>
-              </a:endParaRPr>
-            </a:p>
-            <a:p>
-              <a:pPr algn="ctr">
-                <a:buNone/>
-                <a:tabLst>
-                  <a:tab pos="2743200" algn="ctr"/>
-                  <a:tab pos="5486400" algn="r"/>
-                </a:tabLst>
-              </a:pPr>
-              <a:r>
-                <a:rPr lang="en-US" sz="1100" dirty="0">
-                  <a:effectLst/>
-                  <a:latin typeface="Times New Roman" panose="02020603050405020304" pitchFamily="18" charset="0"/>
-                  <a:ea typeface="SimSun" panose="02010600030101010101" pitchFamily="2" charset="-122"/>
-                </a:rPr>
-                <a:t>GST Reg No. : M2-8923804-2</a:t>
-              </a:r>
-              <a:endParaRPr lang="en-SG" sz="1100" dirty="0">
-                <a:latin typeface="Times New Roman" panose="02020603050405020304" pitchFamily="18" charset="0"/>
-                <a:ea typeface="SimSun" panose="02010600030101010101" pitchFamily="2" charset="-122"/>
-              </a:endParaRPr>
-            </a:p>
-            <a:p>
-              <a:pPr algn="ctr">
-                <a:buNone/>
-                <a:tabLst>
-                  <a:tab pos="2743200" algn="ctr"/>
-                  <a:tab pos="5486400" algn="r"/>
-                </a:tabLst>
-              </a:pPr>
-              <a:r>
-                <a:rPr lang="en-US" sz="1100" dirty="0">
-                  <a:effectLst/>
-                  <a:latin typeface="Times New Roman" panose="02020603050405020304" pitchFamily="18" charset="0"/>
-                  <a:ea typeface="SimSun" panose="02010600030101010101" pitchFamily="2" charset="-122"/>
-                  <a:hlinkClick r:id="rId2"/>
-                </a:rPr>
-                <a:t>http://www.ericwong.com</a:t>
-              </a:r>
-              <a:endParaRPr lang="en-SG" sz="1100" dirty="0">
-                <a:latin typeface="Times New Roman" panose="02020603050405020304" pitchFamily="18" charset="0"/>
-                <a:ea typeface="SimSun" panose="02010600030101010101" pitchFamily="2" charset="-122"/>
-              </a:endParaRPr>
-            </a:p>
-            <a:p>
-              <a:pPr algn="ctr">
-                <a:buNone/>
-                <a:tabLst>
-                  <a:tab pos="2743200" algn="ctr"/>
-                  <a:tab pos="5486400" algn="r"/>
-                </a:tabLst>
-              </a:pPr>
-              <a:r>
-                <a:rPr lang="en-US" sz="1100" dirty="0">
-                  <a:latin typeface="Times New Roman" panose="02020603050405020304" pitchFamily="18" charset="0"/>
-                  <a:ea typeface="SimSun" panose="02010600030101010101" pitchFamily="2" charset="-122"/>
-                </a:rPr>
-                <a:t>E</a:t>
-              </a:r>
-              <a:r>
-                <a:rPr lang="en-US" sz="1100" dirty="0">
-                  <a:effectLst/>
-                  <a:latin typeface="Times New Roman" panose="02020603050405020304" pitchFamily="18" charset="0"/>
-                  <a:ea typeface="SimSun" panose="02010600030101010101" pitchFamily="2" charset="-122"/>
-                </a:rPr>
-                <a:t>-mail: ewmtpl@gmail.com</a:t>
-              </a:r>
-              <a:endParaRPr lang="en-SG" sz="1100" dirty="0">
-                <a:effectLst/>
-                <a:latin typeface="Times New Roman" panose="02020603050405020304" pitchFamily="18" charset="0"/>
-                <a:ea typeface="SimSun" panose="02010600030101010101" pitchFamily="2" charset="-122"/>
-              </a:endParaRPr>
-            </a:p>
-            <a:p>
-              <a:endParaRPr lang="en-SG" sz="1400" dirty="0"/>
-            </a:p>
-          </p:txBody>
-        </p:sp>
-        <p:pic>
-          <p:nvPicPr>
-            <p:cNvPr id="8" name="Picture 7" descr="A red logo with a white background&#10;&#10;AI-generated content may be incorrect.">
-              <a:extLst>
-                <a:ext uri="{FF2B5EF4-FFF2-40B4-BE49-F238E27FC236}">
-                  <a16:creationId xmlns:a16="http://schemas.microsoft.com/office/drawing/2014/main" id="{CE4DD8AB-AFF3-50ED-A83C-4BA7E406D306}"/>
-                </a:ext>
-              </a:extLst>
-            </p:cNvPr>
-            <p:cNvPicPr>
-              <a:picLocks noChangeAspect="1"/>
-            </p:cNvPicPr>
-            <p:nvPr/>
-          </p:nvPicPr>
-          <p:blipFill>
-            <a:blip r:embed="rId3">
-              <a:extLst>
-                <a:ext uri="{28A0092B-C50C-407E-A947-70E740481C1C}">
-                  <a14:useLocalDpi xmlns:a14="http://schemas.microsoft.com/office/drawing/2010/main" val="0"/>
-                </a:ext>
-              </a:extLst>
-            </a:blip>
-            <a:stretch>
-              <a:fillRect/>
-            </a:stretch>
-          </p:blipFill>
-          <p:spPr>
-            <a:xfrm>
-              <a:off x="990192" y="150552"/>
-              <a:ext cx="726493" cy="1233876"/>
-            </a:xfrm>
-            <a:prstGeom prst="rect">
-              <a:avLst/>
-            </a:prstGeom>
-          </p:spPr>
-        </p:pic>
-      </p:grpSp>
-      <p:graphicFrame>
-        <p:nvGraphicFramePr>
-          <p:cNvPr id="9" name="Table 8">
-            <a:extLst>
-              <a:ext uri="{FF2B5EF4-FFF2-40B4-BE49-F238E27FC236}">
-                <a16:creationId xmlns:a16="http://schemas.microsoft.com/office/drawing/2014/main" id="{69D5038E-9288-6496-4AAB-1F9666D2B7CB}"/>
-              </a:ext>
-            </a:extLst>
-          </p:cNvPr>
-          <p:cNvGraphicFramePr>
-            <a:graphicFrameLocks noGrp="1"/>
-          </p:cNvGraphicFramePr>
-          <p:nvPr/>
-        </p:nvGraphicFramePr>
-        <p:xfrm>
-          <a:off x="0" y="1168401"/>
-          <a:ext cx="6857998" cy="1605983"/>
-        </p:xfrm>
-        <a:graphic>
-          <a:graphicData uri="http://schemas.openxmlformats.org/drawingml/2006/table">
-            <a:tbl>
-              <a:tblPr firstRow="1" bandRow="1">
-                <a:tableStyleId>{5C22544A-7EE6-4342-B048-85BDC9FD1C3A}</a:tableStyleId>
-              </a:tblPr>
-              <a:tblGrid>
-                <a:gridCol w="3428999">
-                  <a:extLst>
-                    <a:ext uri="{9D8B030D-6E8A-4147-A177-3AD203B41FA5}">
-                      <a16:colId xmlns:a16="http://schemas.microsoft.com/office/drawing/2014/main" val="3963200382"/>
-                    </a:ext>
-                  </a:extLst>
-                </a:gridCol>
-                <a:gridCol w="3428999">
-                  <a:extLst>
-                    <a:ext uri="{9D8B030D-6E8A-4147-A177-3AD203B41FA5}">
-                      <a16:colId xmlns:a16="http://schemas.microsoft.com/office/drawing/2014/main" val="281614988"/>
-                    </a:ext>
-                  </a:extLst>
-                </a:gridCol>
-              </a:tblGrid>
-              <a:tr h="370840">
-                <a:tc gridSpan="2">
-                  <a:txBody>
-                    <a:bodyPr/>
-                    <a:lstStyle/>
-                    <a:p>
-                      <a:pPr algn="ctr"/>
-                      <a:r>
-                        <a:rPr lang="en-SG" dirty="0"/>
-                        <a:t>Customer / Tenant Company: KY Sub Assembly Pte Ltd</a:t>
-                      </a:r>
-                    </a:p>
-                  </a:txBody>
-                  <a:tcPr/>
-                </a:tc>
-                <a:tc hMerge="1">
-                  <a:txBody>
-                    <a:bodyPr/>
-                    <a:lstStyle/>
-                    <a:p>
-                      <a:endParaRPr lang="en-SG" dirty="0"/>
-                    </a:p>
-                  </a:txBody>
-                  <a:tcPr/>
-                </a:tc>
-                <a:extLst>
-                  <a:ext uri="{0D108BD9-81ED-4DB2-BD59-A6C34878D82A}">
-                    <a16:rowId xmlns:a16="http://schemas.microsoft.com/office/drawing/2014/main" val="3714705615"/>
-                  </a:ext>
-                </a:extLst>
-              </a:tr>
-              <a:tr h="327659">
-                <a:tc>
-                  <a:txBody>
-                    <a:bodyPr/>
-                    <a:lstStyle/>
-                    <a:p>
-                      <a:r>
-                        <a:rPr lang="en-SG" sz="1100" dirty="0"/>
-                        <a:t>Site Location: Singapore Mint </a:t>
-                      </a:r>
-                    </a:p>
-                  </a:txBody>
-                  <a:tcPr/>
-                </a:tc>
-                <a:tc rowSpan="3">
-                  <a:txBody>
-                    <a:bodyPr/>
-                    <a:lstStyle/>
-                    <a:p>
-                      <a:endParaRPr lang="en-SG" sz="1100" dirty="0"/>
-                    </a:p>
-                    <a:p>
-                      <a:endParaRPr lang="en-SG" sz="1100" dirty="0"/>
-                    </a:p>
-                    <a:p>
-                      <a:endParaRPr lang="en-SG" sz="1100" dirty="0"/>
-                    </a:p>
-                    <a:p>
-                      <a:endParaRPr lang="en-SG" sz="1100" dirty="0"/>
-                    </a:p>
-                    <a:p>
-                      <a:r>
-                        <a:rPr lang="en-SG" sz="1100" dirty="0"/>
-                        <a:t>Approved By:  Eric Wong (Director)</a:t>
-                      </a:r>
-                    </a:p>
-                  </a:txBody>
-                  <a:tcPr>
-                    <a:solidFill>
-                      <a:schemeClr val="bg1"/>
-                    </a:solidFill>
-                  </a:tcPr>
-                </a:tc>
-                <a:extLst>
-                  <a:ext uri="{0D108BD9-81ED-4DB2-BD59-A6C34878D82A}">
-                    <a16:rowId xmlns:a16="http://schemas.microsoft.com/office/drawing/2014/main" val="2691564520"/>
-                  </a:ext>
-                </a:extLst>
-              </a:tr>
-              <a:tr h="343322">
-                <a:tc>
-                  <a:txBody>
-                    <a:bodyPr/>
-                    <a:lstStyle/>
-                    <a:p>
-                      <a:r>
-                        <a:rPr lang="en-SG" sz="1100" dirty="0"/>
-                        <a:t>Process: Lifting and Moving of Machinery on Platform</a:t>
-                      </a:r>
-                    </a:p>
-                  </a:txBody>
-                  <a:tcPr/>
-                </a:tc>
-                <a:tc vMerge="1">
-                  <a:txBody>
-                    <a:bodyPr/>
-                    <a:lstStyle/>
-                    <a:p>
-                      <a:endParaRPr lang="en-SG" dirty="0"/>
-                    </a:p>
-                  </a:txBody>
-                  <a:tcPr/>
-                </a:tc>
-                <a:extLst>
-                  <a:ext uri="{0D108BD9-81ED-4DB2-BD59-A6C34878D82A}">
-                    <a16:rowId xmlns:a16="http://schemas.microsoft.com/office/drawing/2014/main" val="784894797"/>
-                  </a:ext>
-                </a:extLst>
-              </a:tr>
-              <a:tr h="268395">
-                <a:tc>
-                  <a:txBody>
-                    <a:bodyPr/>
-                    <a:lstStyle/>
-                    <a:p>
-                      <a:r>
-                        <a:rPr lang="en-SG" sz="1100" dirty="0"/>
-                        <a:t>Prepared by: Kevin Wong</a:t>
-                      </a:r>
-                    </a:p>
-                  </a:txBody>
-                  <a:tcPr/>
-                </a:tc>
-                <a:tc vMerge="1">
-                  <a:txBody>
-                    <a:bodyPr/>
-                    <a:lstStyle/>
-                    <a:p>
-                      <a:endParaRPr lang="en-SG" dirty="0"/>
-                    </a:p>
-                  </a:txBody>
-                  <a:tcPr/>
-                </a:tc>
-                <a:extLst>
-                  <a:ext uri="{0D108BD9-81ED-4DB2-BD59-A6C34878D82A}">
-                    <a16:rowId xmlns:a16="http://schemas.microsoft.com/office/drawing/2014/main" val="3405944484"/>
-                  </a:ext>
-                </a:extLst>
-              </a:tr>
-              <a:tr h="295767">
-                <a:tc>
-                  <a:txBody>
-                    <a:bodyPr/>
-                    <a:lstStyle/>
-                    <a:p>
-                      <a:r>
-                        <a:rPr lang="en-SG" sz="1100" dirty="0"/>
-                        <a:t>Last Review Date: 24.02.2025</a:t>
-                      </a:r>
-                    </a:p>
-                  </a:txBody>
-                  <a:tcPr/>
-                </a:tc>
-                <a:tc>
-                  <a:txBody>
-                    <a:bodyPr/>
-                    <a:lstStyle/>
-                    <a:p>
-                      <a:r>
-                        <a:rPr lang="en-SG" sz="1100" dirty="0"/>
-                        <a:t>Next Review Date: 23.02.2026</a:t>
-                      </a:r>
-                    </a:p>
-                  </a:txBody>
-                  <a:tcPr/>
-                </a:tc>
-                <a:extLst>
-                  <a:ext uri="{0D108BD9-81ED-4DB2-BD59-A6C34878D82A}">
-                    <a16:rowId xmlns:a16="http://schemas.microsoft.com/office/drawing/2014/main" val="3430118298"/>
-                  </a:ext>
-                </a:extLst>
-              </a:tr>
-            </a:tbl>
-          </a:graphicData>
-        </a:graphic>
-      </p:graphicFrame>
-      <p:pic>
-        <p:nvPicPr>
-          <p:cNvPr id="11" name="Picture 10" descr="A close-up of a stamp&#10;&#10;AI-generated content may be incorrect.">
-            <a:extLst>
-              <a:ext uri="{FF2B5EF4-FFF2-40B4-BE49-F238E27FC236}">
-                <a16:creationId xmlns:a16="http://schemas.microsoft.com/office/drawing/2014/main" id="{E8A84F07-2CF5-51CC-0938-2F6F5EC7569D}"/>
-              </a:ext>
-            </a:extLst>
-          </p:cNvPr>
-          <p:cNvPicPr>
-            <a:picLocks noChangeAspect="1"/>
-          </p:cNvPicPr>
-          <p:nvPr/>
-        </p:nvPicPr>
-        <p:blipFill>
-          <a:blip r:embed="rId4">
-            <a:extLst>
-              <a:ext uri="{28A0092B-C50C-407E-A947-70E740481C1C}">
-                <a14:useLocalDpi xmlns:a14="http://schemas.microsoft.com/office/drawing/2010/main" val="0"/>
-              </a:ext>
-            </a:extLst>
-          </a:blip>
-          <a:stretch>
-            <a:fillRect/>
-          </a:stretch>
-        </p:blipFill>
-        <p:spPr>
-          <a:xfrm>
-            <a:off x="5878548" y="1522307"/>
-            <a:ext cx="693638" cy="764310"/>
-          </a:xfrm>
-          <a:prstGeom prst="rect">
-            <a:avLst/>
-          </a:prstGeom>
-        </p:spPr>
-      </p:pic>
-      <p:sp>
-        <p:nvSpPr>
-          <p:cNvPr id="4" name="Slide Number Placeholder 3">
-            <a:extLst>
-              <a:ext uri="{FF2B5EF4-FFF2-40B4-BE49-F238E27FC236}">
-                <a16:creationId xmlns:a16="http://schemas.microsoft.com/office/drawing/2014/main" id="{8E828283-8A0C-5225-1AB0-B3F3130ECC9A}"/>
-              </a:ext>
-            </a:extLst>
-          </p:cNvPr>
-          <p:cNvSpPr>
-            <a:spLocks noGrp="1"/>
-          </p:cNvSpPr>
-          <p:nvPr>
-            <p:ph type="sldNum" sz="quarter" idx="12"/>
-          </p:nvPr>
-        </p:nvSpPr>
-        <p:spPr/>
-        <p:txBody>
-          <a:bodyPr/>
-          <a:lstStyle/>
-          <a:p>
-            <a:fld id="{F0052729-9336-4E5B-BC69-5177B8B6DD05}" type="slidenum">
-              <a:rPr lang="en-SG" smtClean="0"/>
-              <a:t>23</a:t>
-            </a:fld>
-            <a:endParaRPr lang="en-SG"/>
-          </a:p>
-        </p:txBody>
-      </p:sp>
-      <p:pic>
-        <p:nvPicPr>
-          <p:cNvPr id="5" name="Picture 4">
-            <a:extLst>
-              <a:ext uri="{FF2B5EF4-FFF2-40B4-BE49-F238E27FC236}">
-                <a16:creationId xmlns:a16="http://schemas.microsoft.com/office/drawing/2014/main" id="{BBB2EFE7-26AA-2D75-DBB3-7686B7FAE649}"/>
-              </a:ext>
-            </a:extLst>
-          </p:cNvPr>
-          <p:cNvPicPr>
-            <a:picLocks noChangeAspect="1"/>
-          </p:cNvPicPr>
-          <p:nvPr/>
-        </p:nvPicPr>
-        <p:blipFill>
-          <a:blip r:embed="rId5">
-            <a:extLst>
-              <a:ext uri="{28A0092B-C50C-407E-A947-70E740481C1C}">
-                <a14:useLocalDpi xmlns:a14="http://schemas.microsoft.com/office/drawing/2010/main" val="0"/>
-              </a:ext>
-            </a:extLst>
-          </a:blip>
-          <a:stretch>
-            <a:fillRect/>
-          </a:stretch>
-        </p:blipFill>
-        <p:spPr>
-          <a:xfrm>
-            <a:off x="-1" y="2811921"/>
-            <a:ext cx="6727371" cy="6528022"/>
-          </a:xfrm>
-          <a:prstGeom prst="rect">
-            <a:avLst/>
-          </a:prstGeom>
-        </p:spPr>
-      </p:pic>
-    </p:spTree>
-    <p:extLst>
-      <p:ext uri="{BB962C8B-B14F-4D97-AF65-F5344CB8AC3E}">
-        <p14:creationId xmlns:p14="http://schemas.microsoft.com/office/powerpoint/2010/main" val="2430811942"/>
-      </p:ext>
-    </p:extLst>
-  </p:cSld>
-  <p:clrMapOvr>
-    <a:masterClrMapping/>
-  </p:clrMapOvr>
-</p:sld>
-</file>
-
-<file path=ppt/slides/slide24.xml><?xml version="1.0" encoding="utf-8"?>
-<p:sld xmlns:a="http://schemas.openxmlformats.org/drawingml/2006/main" xmlns:r="http://schemas.openxmlformats.org/officeDocument/2006/relationships" xmlns:p="http://schemas.openxmlformats.org/presentationml/2006/main">
-  <p:cSld>
-    <p:spTree>
-      <p:nvGrpSpPr>
-        <p:cNvPr id="1" name="">
-          <a:extLst>
-            <a:ext uri="{FF2B5EF4-FFF2-40B4-BE49-F238E27FC236}">
-              <a16:creationId xmlns:a16="http://schemas.microsoft.com/office/drawing/2014/main" id="{7D99C3B5-AE03-A599-452E-829B27D3C715}"/>
-            </a:ext>
-          </a:extLst>
-        </p:cNvPr>
-        <p:cNvGrpSpPr/>
-        <p:nvPr/>
-      </p:nvGrpSpPr>
-      <p:grpSpPr>
-        <a:xfrm>
-          <a:off x="0" y="0"/>
-          <a:ext cx="0" cy="0"/>
-          <a:chOff x="0" y="0"/>
-          <a:chExt cx="0" cy="0"/>
-        </a:xfrm>
-      </p:grpSpPr>
-      <p:grpSp>
-        <p:nvGrpSpPr>
-          <p:cNvPr id="10" name="Group 9">
-            <a:extLst>
-              <a:ext uri="{FF2B5EF4-FFF2-40B4-BE49-F238E27FC236}">
-                <a16:creationId xmlns:a16="http://schemas.microsoft.com/office/drawing/2014/main" id="{6C36470F-C52D-76C8-FFA3-9EDEEAFCB2BD}"/>
-              </a:ext>
-            </a:extLst>
-          </p:cNvPr>
-          <p:cNvGrpSpPr/>
-          <p:nvPr/>
-        </p:nvGrpSpPr>
-        <p:grpSpPr>
-          <a:xfrm>
-            <a:off x="0" y="1"/>
-            <a:ext cx="6857999" cy="1168400"/>
-            <a:chOff x="701748" y="108190"/>
-            <a:chExt cx="5454507" cy="1318601"/>
-          </a:xfrm>
-        </p:grpSpPr>
-        <p:sp>
-          <p:nvSpPr>
-            <p:cNvPr id="6" name="TextBox 5">
-              <a:extLst>
-                <a:ext uri="{FF2B5EF4-FFF2-40B4-BE49-F238E27FC236}">
-                  <a16:creationId xmlns:a16="http://schemas.microsoft.com/office/drawing/2014/main" id="{89FC05BE-2289-7B94-CC17-8D64A1B41007}"/>
-                </a:ext>
-              </a:extLst>
-            </p:cNvPr>
-            <p:cNvSpPr txBox="1"/>
-            <p:nvPr/>
-          </p:nvSpPr>
-          <p:spPr>
-            <a:xfrm>
-              <a:off x="701748" y="108190"/>
-              <a:ext cx="5454507" cy="1318601"/>
-            </a:xfrm>
-            <a:prstGeom prst="rect">
-              <a:avLst/>
-            </a:prstGeom>
-            <a:noFill/>
-            <a:ln>
-              <a:solidFill>
-                <a:schemeClr val="accent1"/>
-              </a:solidFill>
-            </a:ln>
-          </p:spPr>
-          <p:txBody>
-            <a:bodyPr wrap="square" rtlCol="0">
-              <a:spAutoFit/>
-            </a:bodyPr>
-            <a:lstStyle/>
-            <a:p>
-              <a:pPr algn="ctr">
-                <a:buNone/>
-                <a:tabLst>
-                  <a:tab pos="2743200" algn="ctr"/>
-                  <a:tab pos="5486400" algn="r"/>
-                </a:tabLst>
-              </a:pPr>
-              <a:r>
-                <a:rPr lang="en-US" sz="1100" b="1" dirty="0">
-                  <a:solidFill>
-                    <a:srgbClr val="0000FF"/>
-                  </a:solidFill>
-                  <a:effectLst/>
-                  <a:latin typeface="Times New Roman" panose="02020603050405020304" pitchFamily="18" charset="0"/>
-                  <a:ea typeface="SimSun" panose="02010600030101010101" pitchFamily="2" charset="-122"/>
-                </a:rPr>
-                <a:t>ERIC WONG MACHINERY TRANSPORTATION PTE LTD</a:t>
-              </a:r>
-              <a:endParaRPr lang="en-SG" sz="1100" b="1" dirty="0">
-                <a:solidFill>
-                  <a:srgbClr val="0000FF"/>
-                </a:solidFill>
-                <a:latin typeface="Times New Roman" panose="02020603050405020304" pitchFamily="18" charset="0"/>
-                <a:ea typeface="SimSun" panose="02010600030101010101" pitchFamily="2" charset="-122"/>
-              </a:endParaRPr>
-            </a:p>
-            <a:p>
-              <a:pPr algn="ctr">
-                <a:buNone/>
-                <a:tabLst>
-                  <a:tab pos="2743200" algn="ctr"/>
-                  <a:tab pos="5486400" algn="r"/>
-                </a:tabLst>
-              </a:pPr>
-              <a:r>
-                <a:rPr lang="en-US" sz="1100" dirty="0">
-                  <a:effectLst/>
-                  <a:latin typeface="Times New Roman" panose="02020603050405020304" pitchFamily="18" charset="0"/>
-                  <a:ea typeface="SimSun" panose="02010600030101010101" pitchFamily="2" charset="-122"/>
-                </a:rPr>
-                <a:t>28 </a:t>
-              </a:r>
-              <a:r>
-                <a:rPr lang="en-US" sz="1100" dirty="0" err="1">
-                  <a:effectLst/>
-                  <a:latin typeface="Times New Roman" panose="02020603050405020304" pitchFamily="18" charset="0"/>
-                  <a:ea typeface="SimSun" panose="02010600030101010101" pitchFamily="2" charset="-122"/>
-                </a:rPr>
-                <a:t>Kranji</a:t>
-              </a:r>
-              <a:r>
-                <a:rPr lang="en-US" sz="1100" dirty="0">
-                  <a:effectLst/>
-                  <a:latin typeface="Times New Roman" panose="02020603050405020304" pitchFamily="18" charset="0"/>
-                  <a:ea typeface="SimSun" panose="02010600030101010101" pitchFamily="2" charset="-122"/>
-                </a:rPr>
-                <a:t> Loop #05-03, </a:t>
-              </a:r>
-              <a:r>
-                <a:rPr lang="en-US" sz="1100" dirty="0" err="1">
-                  <a:effectLst/>
-                  <a:latin typeface="Times New Roman" panose="02020603050405020304" pitchFamily="18" charset="0"/>
-                  <a:ea typeface="SimSun" panose="02010600030101010101" pitchFamily="2" charset="-122"/>
-                </a:rPr>
-                <a:t>Kranji</a:t>
-              </a:r>
-              <a:r>
-                <a:rPr lang="en-US" sz="1100" dirty="0">
-                  <a:effectLst/>
-                  <a:latin typeface="Times New Roman" panose="02020603050405020304" pitchFamily="18" charset="0"/>
-                  <a:ea typeface="SimSun" panose="02010600030101010101" pitchFamily="2" charset="-122"/>
-                </a:rPr>
-                <a:t> Green, Singapore 739571</a:t>
-              </a:r>
-              <a:endParaRPr lang="en-SG" sz="1100" dirty="0">
-                <a:latin typeface="Times New Roman" panose="02020603050405020304" pitchFamily="18" charset="0"/>
-                <a:ea typeface="SimSun" panose="02010600030101010101" pitchFamily="2" charset="-122"/>
-              </a:endParaRPr>
-            </a:p>
-            <a:p>
-              <a:pPr algn="ctr">
-                <a:buNone/>
-                <a:tabLst>
-                  <a:tab pos="2743200" algn="ctr"/>
-                  <a:tab pos="5486400" algn="r"/>
-                </a:tabLst>
-              </a:pPr>
-              <a:r>
-                <a:rPr lang="en-US" sz="1100" dirty="0">
-                  <a:effectLst/>
-                  <a:latin typeface="Times New Roman" panose="02020603050405020304" pitchFamily="18" charset="0"/>
-                  <a:ea typeface="SimSun" panose="02010600030101010101" pitchFamily="2" charset="-122"/>
-                </a:rPr>
-                <a:t>Tel: 62824175, 62828203, 62826020</a:t>
-              </a:r>
-              <a:endParaRPr lang="en-SG" sz="1100" dirty="0">
-                <a:effectLst/>
-                <a:latin typeface="Times New Roman" panose="02020603050405020304" pitchFamily="18" charset="0"/>
-                <a:ea typeface="SimSun" panose="02010600030101010101" pitchFamily="2" charset="-122"/>
-              </a:endParaRPr>
-            </a:p>
-            <a:p>
-              <a:pPr algn="ctr">
-                <a:buNone/>
-                <a:tabLst>
-                  <a:tab pos="2743200" algn="ctr"/>
-                  <a:tab pos="5486400" algn="r"/>
-                </a:tabLst>
-              </a:pPr>
-              <a:r>
-                <a:rPr lang="en-US" sz="1100" dirty="0">
-                  <a:effectLst/>
-                  <a:latin typeface="Times New Roman" panose="02020603050405020304" pitchFamily="18" charset="0"/>
-                  <a:ea typeface="SimSun" panose="02010600030101010101" pitchFamily="2" charset="-122"/>
-                </a:rPr>
-                <a:t>GST Reg No. : M2-8923804-2</a:t>
-              </a:r>
-              <a:endParaRPr lang="en-SG" sz="1100" dirty="0">
-                <a:latin typeface="Times New Roman" panose="02020603050405020304" pitchFamily="18" charset="0"/>
-                <a:ea typeface="SimSun" panose="02010600030101010101" pitchFamily="2" charset="-122"/>
-              </a:endParaRPr>
-            </a:p>
-            <a:p>
-              <a:pPr algn="ctr">
-                <a:buNone/>
-                <a:tabLst>
-                  <a:tab pos="2743200" algn="ctr"/>
-                  <a:tab pos="5486400" algn="r"/>
-                </a:tabLst>
-              </a:pPr>
-              <a:r>
-                <a:rPr lang="en-US" sz="1100" dirty="0">
-                  <a:effectLst/>
-                  <a:latin typeface="Times New Roman" panose="02020603050405020304" pitchFamily="18" charset="0"/>
-                  <a:ea typeface="SimSun" panose="02010600030101010101" pitchFamily="2" charset="-122"/>
-                  <a:hlinkClick r:id="rId2"/>
-                </a:rPr>
-                <a:t>http://www.ericwong.com</a:t>
-              </a:r>
-              <a:endParaRPr lang="en-SG" sz="1100" dirty="0">
-                <a:latin typeface="Times New Roman" panose="02020603050405020304" pitchFamily="18" charset="0"/>
-                <a:ea typeface="SimSun" panose="02010600030101010101" pitchFamily="2" charset="-122"/>
-              </a:endParaRPr>
-            </a:p>
-            <a:p>
-              <a:pPr algn="ctr">
-                <a:buNone/>
-                <a:tabLst>
-                  <a:tab pos="2743200" algn="ctr"/>
-                  <a:tab pos="5486400" algn="r"/>
-                </a:tabLst>
-              </a:pPr>
-              <a:r>
-                <a:rPr lang="en-US" sz="1100" dirty="0">
-                  <a:latin typeface="Times New Roman" panose="02020603050405020304" pitchFamily="18" charset="0"/>
-                  <a:ea typeface="SimSun" panose="02010600030101010101" pitchFamily="2" charset="-122"/>
-                </a:rPr>
-                <a:t>E</a:t>
-              </a:r>
-              <a:r>
-                <a:rPr lang="en-US" sz="1100" dirty="0">
-                  <a:effectLst/>
-                  <a:latin typeface="Times New Roman" panose="02020603050405020304" pitchFamily="18" charset="0"/>
-                  <a:ea typeface="SimSun" panose="02010600030101010101" pitchFamily="2" charset="-122"/>
-                </a:rPr>
-                <a:t>-mail: ewmtpl@gmail.com</a:t>
-              </a:r>
-              <a:endParaRPr lang="en-SG" sz="1100" dirty="0">
-                <a:effectLst/>
-                <a:latin typeface="Times New Roman" panose="02020603050405020304" pitchFamily="18" charset="0"/>
-                <a:ea typeface="SimSun" panose="02010600030101010101" pitchFamily="2" charset="-122"/>
-              </a:endParaRPr>
-            </a:p>
-            <a:p>
-              <a:endParaRPr lang="en-SG" sz="1400" dirty="0"/>
-            </a:p>
-          </p:txBody>
-        </p:sp>
-        <p:pic>
-          <p:nvPicPr>
-            <p:cNvPr id="8" name="Picture 7" descr="A red logo with a white background&#10;&#10;AI-generated content may be incorrect.">
-              <a:extLst>
-                <a:ext uri="{FF2B5EF4-FFF2-40B4-BE49-F238E27FC236}">
-                  <a16:creationId xmlns:a16="http://schemas.microsoft.com/office/drawing/2014/main" id="{305EAC80-9699-11EC-530A-1850CE37BC2E}"/>
-                </a:ext>
-              </a:extLst>
-            </p:cNvPr>
-            <p:cNvPicPr>
-              <a:picLocks noChangeAspect="1"/>
-            </p:cNvPicPr>
-            <p:nvPr/>
-          </p:nvPicPr>
-          <p:blipFill>
-            <a:blip r:embed="rId3">
-              <a:extLst>
-                <a:ext uri="{28A0092B-C50C-407E-A947-70E740481C1C}">
-                  <a14:useLocalDpi xmlns:a14="http://schemas.microsoft.com/office/drawing/2010/main" val="0"/>
-                </a:ext>
-              </a:extLst>
-            </a:blip>
-            <a:stretch>
-              <a:fillRect/>
-            </a:stretch>
-          </p:blipFill>
-          <p:spPr>
-            <a:xfrm>
-              <a:off x="990192" y="150552"/>
-              <a:ext cx="726493" cy="1233876"/>
-            </a:xfrm>
-            <a:prstGeom prst="rect">
-              <a:avLst/>
-            </a:prstGeom>
-          </p:spPr>
-        </p:pic>
-      </p:grpSp>
-      <p:graphicFrame>
-        <p:nvGraphicFramePr>
-          <p:cNvPr id="9" name="Table 8">
-            <a:extLst>
-              <a:ext uri="{FF2B5EF4-FFF2-40B4-BE49-F238E27FC236}">
-                <a16:creationId xmlns:a16="http://schemas.microsoft.com/office/drawing/2014/main" id="{6C9AFDD9-294A-3F7D-F377-DF7D9E1FB77D}"/>
-              </a:ext>
-            </a:extLst>
-          </p:cNvPr>
-          <p:cNvGraphicFramePr>
-            <a:graphicFrameLocks noGrp="1"/>
-          </p:cNvGraphicFramePr>
-          <p:nvPr/>
-        </p:nvGraphicFramePr>
-        <p:xfrm>
-          <a:off x="0" y="1168401"/>
-          <a:ext cx="6857998" cy="1605983"/>
-        </p:xfrm>
-        <a:graphic>
-          <a:graphicData uri="http://schemas.openxmlformats.org/drawingml/2006/table">
-            <a:tbl>
-              <a:tblPr firstRow="1" bandRow="1">
-                <a:tableStyleId>{5C22544A-7EE6-4342-B048-85BDC9FD1C3A}</a:tableStyleId>
-              </a:tblPr>
-              <a:tblGrid>
-                <a:gridCol w="3428999">
-                  <a:extLst>
-                    <a:ext uri="{9D8B030D-6E8A-4147-A177-3AD203B41FA5}">
-                      <a16:colId xmlns:a16="http://schemas.microsoft.com/office/drawing/2014/main" val="3963200382"/>
-                    </a:ext>
-                  </a:extLst>
-                </a:gridCol>
-                <a:gridCol w="3428999">
-                  <a:extLst>
-                    <a:ext uri="{9D8B030D-6E8A-4147-A177-3AD203B41FA5}">
-                      <a16:colId xmlns:a16="http://schemas.microsoft.com/office/drawing/2014/main" val="281614988"/>
-                    </a:ext>
-                  </a:extLst>
-                </a:gridCol>
-              </a:tblGrid>
-              <a:tr h="370840">
-                <a:tc gridSpan="2">
-                  <a:txBody>
-                    <a:bodyPr/>
-                    <a:lstStyle/>
-                    <a:p>
-                      <a:pPr algn="ctr"/>
-                      <a:r>
-                        <a:rPr lang="en-SG" dirty="0"/>
-                        <a:t>Customer / Tenant Company: KY Sub Assembly Pte Ltd</a:t>
-                      </a:r>
-                    </a:p>
-                  </a:txBody>
-                  <a:tcPr/>
-                </a:tc>
-                <a:tc hMerge="1">
-                  <a:txBody>
-                    <a:bodyPr/>
-                    <a:lstStyle/>
-                    <a:p>
-                      <a:endParaRPr lang="en-SG" dirty="0"/>
-                    </a:p>
-                  </a:txBody>
-                  <a:tcPr/>
-                </a:tc>
-                <a:extLst>
-                  <a:ext uri="{0D108BD9-81ED-4DB2-BD59-A6C34878D82A}">
-                    <a16:rowId xmlns:a16="http://schemas.microsoft.com/office/drawing/2014/main" val="3714705615"/>
-                  </a:ext>
-                </a:extLst>
-              </a:tr>
-              <a:tr h="327659">
-                <a:tc>
-                  <a:txBody>
-                    <a:bodyPr/>
-                    <a:lstStyle/>
-                    <a:p>
-                      <a:r>
-                        <a:rPr lang="en-SG" sz="1100" dirty="0"/>
-                        <a:t>Site Location: Singapore Mint </a:t>
-                      </a:r>
-                    </a:p>
-                  </a:txBody>
-                  <a:tcPr/>
-                </a:tc>
-                <a:tc rowSpan="3">
-                  <a:txBody>
-                    <a:bodyPr/>
-                    <a:lstStyle/>
-                    <a:p>
-                      <a:endParaRPr lang="en-SG" sz="1100" dirty="0"/>
-                    </a:p>
-                    <a:p>
-                      <a:endParaRPr lang="en-SG" sz="1100" dirty="0"/>
-                    </a:p>
-                    <a:p>
-                      <a:endParaRPr lang="en-SG" sz="1100" dirty="0"/>
-                    </a:p>
-                    <a:p>
-                      <a:endParaRPr lang="en-SG" sz="1100" dirty="0"/>
-                    </a:p>
-                    <a:p>
-                      <a:r>
-                        <a:rPr lang="en-SG" sz="1100" dirty="0"/>
-                        <a:t>Approved By:  Eric Wong (Director)</a:t>
-                      </a:r>
-                    </a:p>
-                  </a:txBody>
-                  <a:tcPr>
-                    <a:solidFill>
-                      <a:schemeClr val="bg1"/>
-                    </a:solidFill>
-                  </a:tcPr>
-                </a:tc>
-                <a:extLst>
-                  <a:ext uri="{0D108BD9-81ED-4DB2-BD59-A6C34878D82A}">
-                    <a16:rowId xmlns:a16="http://schemas.microsoft.com/office/drawing/2014/main" val="2691564520"/>
-                  </a:ext>
-                </a:extLst>
-              </a:tr>
-              <a:tr h="343322">
-                <a:tc>
-                  <a:txBody>
-                    <a:bodyPr/>
-                    <a:lstStyle/>
-                    <a:p>
-                      <a:r>
-                        <a:rPr lang="en-SG" sz="1100" dirty="0"/>
-                        <a:t>Process: Lifting and Moving of Machinery on Platform</a:t>
-                      </a:r>
-                    </a:p>
-                  </a:txBody>
-                  <a:tcPr/>
-                </a:tc>
-                <a:tc vMerge="1">
-                  <a:txBody>
-                    <a:bodyPr/>
-                    <a:lstStyle/>
-                    <a:p>
-                      <a:endParaRPr lang="en-SG" dirty="0"/>
-                    </a:p>
-                  </a:txBody>
-                  <a:tcPr/>
-                </a:tc>
-                <a:extLst>
-                  <a:ext uri="{0D108BD9-81ED-4DB2-BD59-A6C34878D82A}">
-                    <a16:rowId xmlns:a16="http://schemas.microsoft.com/office/drawing/2014/main" val="784894797"/>
-                  </a:ext>
-                </a:extLst>
-              </a:tr>
-              <a:tr h="268395">
-                <a:tc>
-                  <a:txBody>
-                    <a:bodyPr/>
-                    <a:lstStyle/>
-                    <a:p>
-                      <a:r>
-                        <a:rPr lang="en-SG" sz="1100" dirty="0"/>
-                        <a:t>Prepared by: Kevin Wong</a:t>
-                      </a:r>
-                    </a:p>
-                  </a:txBody>
-                  <a:tcPr/>
-                </a:tc>
-                <a:tc vMerge="1">
-                  <a:txBody>
-                    <a:bodyPr/>
-                    <a:lstStyle/>
-                    <a:p>
-                      <a:endParaRPr lang="en-SG" dirty="0"/>
-                    </a:p>
-                  </a:txBody>
-                  <a:tcPr/>
-                </a:tc>
-                <a:extLst>
-                  <a:ext uri="{0D108BD9-81ED-4DB2-BD59-A6C34878D82A}">
-                    <a16:rowId xmlns:a16="http://schemas.microsoft.com/office/drawing/2014/main" val="3405944484"/>
-                  </a:ext>
-                </a:extLst>
-              </a:tr>
-              <a:tr h="295767">
-                <a:tc>
-                  <a:txBody>
-                    <a:bodyPr/>
-                    <a:lstStyle/>
-                    <a:p>
-                      <a:r>
-                        <a:rPr lang="en-SG" sz="1100" dirty="0"/>
-                        <a:t>Last Review Date: 24.02.2025</a:t>
-                      </a:r>
-                    </a:p>
-                  </a:txBody>
-                  <a:tcPr/>
-                </a:tc>
-                <a:tc>
-                  <a:txBody>
-                    <a:bodyPr/>
-                    <a:lstStyle/>
-                    <a:p>
-                      <a:r>
-                        <a:rPr lang="en-SG" sz="1100" dirty="0"/>
-                        <a:t>Next Review Date: 23.02.2026</a:t>
-                      </a:r>
-                    </a:p>
-                  </a:txBody>
-                  <a:tcPr/>
-                </a:tc>
-                <a:extLst>
-                  <a:ext uri="{0D108BD9-81ED-4DB2-BD59-A6C34878D82A}">
-                    <a16:rowId xmlns:a16="http://schemas.microsoft.com/office/drawing/2014/main" val="3430118298"/>
-                  </a:ext>
-                </a:extLst>
-              </a:tr>
-            </a:tbl>
-          </a:graphicData>
-        </a:graphic>
-      </p:graphicFrame>
-      <p:pic>
-        <p:nvPicPr>
-          <p:cNvPr id="11" name="Picture 10" descr="A close-up of a stamp&#10;&#10;AI-generated content may be incorrect.">
-            <a:extLst>
-              <a:ext uri="{FF2B5EF4-FFF2-40B4-BE49-F238E27FC236}">
-                <a16:creationId xmlns:a16="http://schemas.microsoft.com/office/drawing/2014/main" id="{F70EC8C4-17A0-6DA2-5BB5-F3ACF928A6E5}"/>
-              </a:ext>
-            </a:extLst>
-          </p:cNvPr>
-          <p:cNvPicPr>
-            <a:picLocks noChangeAspect="1"/>
-          </p:cNvPicPr>
-          <p:nvPr/>
-        </p:nvPicPr>
-        <p:blipFill>
-          <a:blip r:embed="rId4">
-            <a:extLst>
-              <a:ext uri="{28A0092B-C50C-407E-A947-70E740481C1C}">
-                <a14:useLocalDpi xmlns:a14="http://schemas.microsoft.com/office/drawing/2010/main" val="0"/>
-              </a:ext>
-            </a:extLst>
-          </a:blip>
-          <a:stretch>
-            <a:fillRect/>
-          </a:stretch>
-        </p:blipFill>
-        <p:spPr>
-          <a:xfrm>
-            <a:off x="5878548" y="1522307"/>
-            <a:ext cx="693638" cy="764310"/>
-          </a:xfrm>
-          <a:prstGeom prst="rect">
-            <a:avLst/>
-          </a:prstGeom>
-        </p:spPr>
-      </p:pic>
-      <p:sp>
-        <p:nvSpPr>
-          <p:cNvPr id="4" name="Slide Number Placeholder 3">
-            <a:extLst>
-              <a:ext uri="{FF2B5EF4-FFF2-40B4-BE49-F238E27FC236}">
-                <a16:creationId xmlns:a16="http://schemas.microsoft.com/office/drawing/2014/main" id="{0778CDB1-020E-0DC0-077B-4ECCCA4569EE}"/>
-              </a:ext>
-            </a:extLst>
-          </p:cNvPr>
-          <p:cNvSpPr>
-            <a:spLocks noGrp="1"/>
-          </p:cNvSpPr>
-          <p:nvPr>
-            <p:ph type="sldNum" sz="quarter" idx="12"/>
-          </p:nvPr>
-        </p:nvSpPr>
-        <p:spPr/>
-        <p:txBody>
-          <a:bodyPr/>
-          <a:lstStyle/>
-          <a:p>
-            <a:fld id="{F0052729-9336-4E5B-BC69-5177B8B6DD05}" type="slidenum">
-              <a:rPr lang="en-SG" smtClean="0"/>
-              <a:t>24</a:t>
-            </a:fld>
-            <a:endParaRPr lang="en-SG"/>
-          </a:p>
-        </p:txBody>
-      </p:sp>
-      <p:pic>
-        <p:nvPicPr>
-          <p:cNvPr id="5" name="Picture 4">
-            <a:extLst>
-              <a:ext uri="{FF2B5EF4-FFF2-40B4-BE49-F238E27FC236}">
-                <a16:creationId xmlns:a16="http://schemas.microsoft.com/office/drawing/2014/main" id="{0280C671-1B3E-63B9-BF32-065221A982C1}"/>
-              </a:ext>
-            </a:extLst>
-          </p:cNvPr>
-          <p:cNvPicPr>
-            <a:picLocks noChangeAspect="1"/>
-          </p:cNvPicPr>
-          <p:nvPr/>
-        </p:nvPicPr>
-        <p:blipFill>
-          <a:blip r:embed="rId5">
-            <a:extLst>
-              <a:ext uri="{28A0092B-C50C-407E-A947-70E740481C1C}">
-                <a14:useLocalDpi xmlns:a14="http://schemas.microsoft.com/office/drawing/2010/main" val="0"/>
-              </a:ext>
-            </a:extLst>
-          </a:blip>
-          <a:stretch>
-            <a:fillRect/>
-          </a:stretch>
-        </p:blipFill>
-        <p:spPr>
-          <a:xfrm>
-            <a:off x="142906" y="2774384"/>
-            <a:ext cx="6572186" cy="6362315"/>
-          </a:xfrm>
-          <a:prstGeom prst="rect">
-            <a:avLst/>
-          </a:prstGeom>
-        </p:spPr>
-      </p:pic>
-    </p:spTree>
-    <p:extLst>
-      <p:ext uri="{BB962C8B-B14F-4D97-AF65-F5344CB8AC3E}">
-        <p14:creationId xmlns:p14="http://schemas.microsoft.com/office/powerpoint/2010/main" val="836431312"/>
-      </p:ext>
-    </p:extLst>
-  </p:cSld>
-  <p:clrMapOvr>
-    <a:masterClrMapping/>
-  </p:clrMapOvr>
-</p:sld>
-</file>
-
-<file path=ppt/slides/slide25.xml><?xml version="1.0" encoding="utf-8"?>
-<p:sld xmlns:a="http://schemas.openxmlformats.org/drawingml/2006/main" xmlns:r="http://schemas.openxmlformats.org/officeDocument/2006/relationships" xmlns:p="http://schemas.openxmlformats.org/presentationml/2006/main">
-  <p:cSld>
-    <p:spTree>
-      <p:nvGrpSpPr>
-        <p:cNvPr id="1" name="">
-          <a:extLst>
-            <a:ext uri="{FF2B5EF4-FFF2-40B4-BE49-F238E27FC236}">
-              <a16:creationId xmlns:a16="http://schemas.microsoft.com/office/drawing/2014/main" id="{35D7EEBE-4BB9-1BE2-3C38-ED8AD264A99C}"/>
-            </a:ext>
-          </a:extLst>
-        </p:cNvPr>
-        <p:cNvGrpSpPr/>
-        <p:nvPr/>
-      </p:nvGrpSpPr>
-      <p:grpSpPr>
-        <a:xfrm>
-          <a:off x="0" y="0"/>
-          <a:ext cx="0" cy="0"/>
-          <a:chOff x="0" y="0"/>
-          <a:chExt cx="0" cy="0"/>
-        </a:xfrm>
-      </p:grpSpPr>
-      <p:grpSp>
-        <p:nvGrpSpPr>
-          <p:cNvPr id="10" name="Group 9">
-            <a:extLst>
-              <a:ext uri="{FF2B5EF4-FFF2-40B4-BE49-F238E27FC236}">
-                <a16:creationId xmlns:a16="http://schemas.microsoft.com/office/drawing/2014/main" id="{684091EE-3610-3861-D207-93A4C42C1EE3}"/>
-              </a:ext>
-            </a:extLst>
-          </p:cNvPr>
-          <p:cNvGrpSpPr/>
-          <p:nvPr/>
-        </p:nvGrpSpPr>
-        <p:grpSpPr>
-          <a:xfrm>
-            <a:off x="0" y="1"/>
-            <a:ext cx="6857999" cy="1168400"/>
-            <a:chOff x="701748" y="108190"/>
-            <a:chExt cx="5454507" cy="1318601"/>
-          </a:xfrm>
-        </p:grpSpPr>
-        <p:sp>
-          <p:nvSpPr>
-            <p:cNvPr id="6" name="TextBox 5">
-              <a:extLst>
-                <a:ext uri="{FF2B5EF4-FFF2-40B4-BE49-F238E27FC236}">
-                  <a16:creationId xmlns:a16="http://schemas.microsoft.com/office/drawing/2014/main" id="{7A8B7D52-5AEE-B548-26A6-544B7CDA357A}"/>
-                </a:ext>
-              </a:extLst>
-            </p:cNvPr>
-            <p:cNvSpPr txBox="1"/>
-            <p:nvPr/>
-          </p:nvSpPr>
-          <p:spPr>
-            <a:xfrm>
-              <a:off x="701748" y="108190"/>
-              <a:ext cx="5454507" cy="1318601"/>
-            </a:xfrm>
-            <a:prstGeom prst="rect">
-              <a:avLst/>
-            </a:prstGeom>
-            <a:noFill/>
-            <a:ln>
-              <a:solidFill>
-                <a:schemeClr val="accent1"/>
-              </a:solidFill>
-            </a:ln>
-          </p:spPr>
-          <p:txBody>
-            <a:bodyPr wrap="square" rtlCol="0">
-              <a:spAutoFit/>
-            </a:bodyPr>
-            <a:lstStyle/>
-            <a:p>
-              <a:pPr algn="ctr">
-                <a:buNone/>
-                <a:tabLst>
-                  <a:tab pos="2743200" algn="ctr"/>
-                  <a:tab pos="5486400" algn="r"/>
-                </a:tabLst>
-              </a:pPr>
-              <a:r>
-                <a:rPr lang="en-US" sz="1100" b="1" dirty="0">
-                  <a:solidFill>
-                    <a:srgbClr val="0000FF"/>
-                  </a:solidFill>
-                  <a:effectLst/>
-                  <a:latin typeface="Times New Roman" panose="02020603050405020304" pitchFamily="18" charset="0"/>
-                  <a:ea typeface="SimSun" panose="02010600030101010101" pitchFamily="2" charset="-122"/>
-                </a:rPr>
-                <a:t>ERIC WONG MACHINERY TRANSPORTATION PTE LTD</a:t>
-              </a:r>
-              <a:endParaRPr lang="en-SG" sz="1100" b="1" dirty="0">
-                <a:solidFill>
-                  <a:srgbClr val="0000FF"/>
-                </a:solidFill>
-                <a:latin typeface="Times New Roman" panose="02020603050405020304" pitchFamily="18" charset="0"/>
-                <a:ea typeface="SimSun" panose="02010600030101010101" pitchFamily="2" charset="-122"/>
-              </a:endParaRPr>
-            </a:p>
-            <a:p>
-              <a:pPr algn="ctr">
-                <a:buNone/>
-                <a:tabLst>
-                  <a:tab pos="2743200" algn="ctr"/>
-                  <a:tab pos="5486400" algn="r"/>
-                </a:tabLst>
-              </a:pPr>
-              <a:r>
-                <a:rPr lang="en-US" sz="1100" dirty="0">
-                  <a:effectLst/>
-                  <a:latin typeface="Times New Roman" panose="02020603050405020304" pitchFamily="18" charset="0"/>
-                  <a:ea typeface="SimSun" panose="02010600030101010101" pitchFamily="2" charset="-122"/>
-                </a:rPr>
-                <a:t>28 </a:t>
-              </a:r>
-              <a:r>
-                <a:rPr lang="en-US" sz="1100" dirty="0" err="1">
-                  <a:effectLst/>
-                  <a:latin typeface="Times New Roman" panose="02020603050405020304" pitchFamily="18" charset="0"/>
-                  <a:ea typeface="SimSun" panose="02010600030101010101" pitchFamily="2" charset="-122"/>
-                </a:rPr>
-                <a:t>Kranji</a:t>
-              </a:r>
-              <a:r>
-                <a:rPr lang="en-US" sz="1100" dirty="0">
-                  <a:effectLst/>
-                  <a:latin typeface="Times New Roman" panose="02020603050405020304" pitchFamily="18" charset="0"/>
-                  <a:ea typeface="SimSun" panose="02010600030101010101" pitchFamily="2" charset="-122"/>
-                </a:rPr>
-                <a:t> Loop #05-03, </a:t>
-              </a:r>
-              <a:r>
-                <a:rPr lang="en-US" sz="1100" dirty="0" err="1">
-                  <a:effectLst/>
-                  <a:latin typeface="Times New Roman" panose="02020603050405020304" pitchFamily="18" charset="0"/>
-                  <a:ea typeface="SimSun" panose="02010600030101010101" pitchFamily="2" charset="-122"/>
-                </a:rPr>
-                <a:t>Kranji</a:t>
-              </a:r>
-              <a:r>
-                <a:rPr lang="en-US" sz="1100" dirty="0">
-                  <a:effectLst/>
-                  <a:latin typeface="Times New Roman" panose="02020603050405020304" pitchFamily="18" charset="0"/>
-                  <a:ea typeface="SimSun" panose="02010600030101010101" pitchFamily="2" charset="-122"/>
-                </a:rPr>
-                <a:t> Green, Singapore 739571</a:t>
-              </a:r>
-              <a:endParaRPr lang="en-SG" sz="1100" dirty="0">
-                <a:latin typeface="Times New Roman" panose="02020603050405020304" pitchFamily="18" charset="0"/>
-                <a:ea typeface="SimSun" panose="02010600030101010101" pitchFamily="2" charset="-122"/>
-              </a:endParaRPr>
-            </a:p>
-            <a:p>
-              <a:pPr algn="ctr">
-                <a:buNone/>
-                <a:tabLst>
-                  <a:tab pos="2743200" algn="ctr"/>
-                  <a:tab pos="5486400" algn="r"/>
-                </a:tabLst>
-              </a:pPr>
-              <a:r>
-                <a:rPr lang="en-US" sz="1100" dirty="0">
-                  <a:effectLst/>
-                  <a:latin typeface="Times New Roman" panose="02020603050405020304" pitchFamily="18" charset="0"/>
-                  <a:ea typeface="SimSun" panose="02010600030101010101" pitchFamily="2" charset="-122"/>
-                </a:rPr>
-                <a:t>Tel: 62824175, 62828203, 62826020</a:t>
-              </a:r>
-              <a:endParaRPr lang="en-SG" sz="1100" dirty="0">
-                <a:effectLst/>
-                <a:latin typeface="Times New Roman" panose="02020603050405020304" pitchFamily="18" charset="0"/>
-                <a:ea typeface="SimSun" panose="02010600030101010101" pitchFamily="2" charset="-122"/>
-              </a:endParaRPr>
-            </a:p>
-            <a:p>
-              <a:pPr algn="ctr">
-                <a:buNone/>
-                <a:tabLst>
-                  <a:tab pos="2743200" algn="ctr"/>
-                  <a:tab pos="5486400" algn="r"/>
-                </a:tabLst>
-              </a:pPr>
-              <a:r>
-                <a:rPr lang="en-US" sz="1100" dirty="0">
-                  <a:effectLst/>
-                  <a:latin typeface="Times New Roman" panose="02020603050405020304" pitchFamily="18" charset="0"/>
-                  <a:ea typeface="SimSun" panose="02010600030101010101" pitchFamily="2" charset="-122"/>
-                </a:rPr>
-                <a:t>GST Reg No. : M2-8923804-2</a:t>
-              </a:r>
-              <a:endParaRPr lang="en-SG" sz="1100" dirty="0">
-                <a:latin typeface="Times New Roman" panose="02020603050405020304" pitchFamily="18" charset="0"/>
-                <a:ea typeface="SimSun" panose="02010600030101010101" pitchFamily="2" charset="-122"/>
-              </a:endParaRPr>
-            </a:p>
-            <a:p>
-              <a:pPr algn="ctr">
-                <a:buNone/>
-                <a:tabLst>
-                  <a:tab pos="2743200" algn="ctr"/>
-                  <a:tab pos="5486400" algn="r"/>
-                </a:tabLst>
-              </a:pPr>
-              <a:r>
-                <a:rPr lang="en-US" sz="1100" dirty="0">
-                  <a:effectLst/>
-                  <a:latin typeface="Times New Roman" panose="02020603050405020304" pitchFamily="18" charset="0"/>
-                  <a:ea typeface="SimSun" panose="02010600030101010101" pitchFamily="2" charset="-122"/>
-                  <a:hlinkClick r:id="rId2"/>
-                </a:rPr>
-                <a:t>http://www.ericwong.com</a:t>
-              </a:r>
-              <a:endParaRPr lang="en-SG" sz="1100" dirty="0">
-                <a:latin typeface="Times New Roman" panose="02020603050405020304" pitchFamily="18" charset="0"/>
-                <a:ea typeface="SimSun" panose="02010600030101010101" pitchFamily="2" charset="-122"/>
-              </a:endParaRPr>
-            </a:p>
-            <a:p>
-              <a:pPr algn="ctr">
-                <a:buNone/>
-                <a:tabLst>
-                  <a:tab pos="2743200" algn="ctr"/>
-                  <a:tab pos="5486400" algn="r"/>
-                </a:tabLst>
-              </a:pPr>
-              <a:r>
-                <a:rPr lang="en-US" sz="1100" dirty="0">
-                  <a:latin typeface="Times New Roman" panose="02020603050405020304" pitchFamily="18" charset="0"/>
-                  <a:ea typeface="SimSun" panose="02010600030101010101" pitchFamily="2" charset="-122"/>
-                </a:rPr>
-                <a:t>E</a:t>
-              </a:r>
-              <a:r>
-                <a:rPr lang="en-US" sz="1100" dirty="0">
-                  <a:effectLst/>
-                  <a:latin typeface="Times New Roman" panose="02020603050405020304" pitchFamily="18" charset="0"/>
-                  <a:ea typeface="SimSun" panose="02010600030101010101" pitchFamily="2" charset="-122"/>
-                </a:rPr>
-                <a:t>-mail: ewmtpl@gmail.com</a:t>
-              </a:r>
-              <a:endParaRPr lang="en-SG" sz="1100" dirty="0">
-                <a:effectLst/>
-                <a:latin typeface="Times New Roman" panose="02020603050405020304" pitchFamily="18" charset="0"/>
-                <a:ea typeface="SimSun" panose="02010600030101010101" pitchFamily="2" charset="-122"/>
-              </a:endParaRPr>
-            </a:p>
-            <a:p>
-              <a:endParaRPr lang="en-SG" sz="1400" dirty="0"/>
-            </a:p>
-          </p:txBody>
-        </p:sp>
-        <p:pic>
-          <p:nvPicPr>
-            <p:cNvPr id="8" name="Picture 7" descr="A red logo with a white background&#10;&#10;AI-generated content may be incorrect.">
-              <a:extLst>
-                <a:ext uri="{FF2B5EF4-FFF2-40B4-BE49-F238E27FC236}">
-                  <a16:creationId xmlns:a16="http://schemas.microsoft.com/office/drawing/2014/main" id="{74C157C8-BE7D-28BC-DD35-494064F864E5}"/>
-                </a:ext>
-              </a:extLst>
-            </p:cNvPr>
-            <p:cNvPicPr>
-              <a:picLocks noChangeAspect="1"/>
-            </p:cNvPicPr>
-            <p:nvPr/>
-          </p:nvPicPr>
-          <p:blipFill>
-            <a:blip r:embed="rId3">
-              <a:extLst>
-                <a:ext uri="{28A0092B-C50C-407E-A947-70E740481C1C}">
-                  <a14:useLocalDpi xmlns:a14="http://schemas.microsoft.com/office/drawing/2010/main" val="0"/>
-                </a:ext>
-              </a:extLst>
-            </a:blip>
-            <a:stretch>
-              <a:fillRect/>
-            </a:stretch>
-          </p:blipFill>
-          <p:spPr>
-            <a:xfrm>
-              <a:off x="990192" y="150552"/>
-              <a:ext cx="726493" cy="1233876"/>
-            </a:xfrm>
-            <a:prstGeom prst="rect">
-              <a:avLst/>
-            </a:prstGeom>
-          </p:spPr>
-        </p:pic>
-      </p:grpSp>
-      <p:graphicFrame>
-        <p:nvGraphicFramePr>
-          <p:cNvPr id="9" name="Table 8">
-            <a:extLst>
-              <a:ext uri="{FF2B5EF4-FFF2-40B4-BE49-F238E27FC236}">
-                <a16:creationId xmlns:a16="http://schemas.microsoft.com/office/drawing/2014/main" id="{A0310682-D5C0-4C8F-58B5-EBE923683FBC}"/>
-              </a:ext>
-            </a:extLst>
-          </p:cNvPr>
-          <p:cNvGraphicFramePr>
-            <a:graphicFrameLocks noGrp="1"/>
-          </p:cNvGraphicFramePr>
-          <p:nvPr/>
-        </p:nvGraphicFramePr>
-        <p:xfrm>
-          <a:off x="0" y="1168401"/>
-          <a:ext cx="6857998" cy="1605983"/>
-        </p:xfrm>
-        <a:graphic>
-          <a:graphicData uri="http://schemas.openxmlformats.org/drawingml/2006/table">
-            <a:tbl>
-              <a:tblPr firstRow="1" bandRow="1">
-                <a:tableStyleId>{5C22544A-7EE6-4342-B048-85BDC9FD1C3A}</a:tableStyleId>
-              </a:tblPr>
-              <a:tblGrid>
-                <a:gridCol w="3428999">
-                  <a:extLst>
-                    <a:ext uri="{9D8B030D-6E8A-4147-A177-3AD203B41FA5}">
-                      <a16:colId xmlns:a16="http://schemas.microsoft.com/office/drawing/2014/main" val="3963200382"/>
-                    </a:ext>
-                  </a:extLst>
-                </a:gridCol>
-                <a:gridCol w="3428999">
-                  <a:extLst>
-                    <a:ext uri="{9D8B030D-6E8A-4147-A177-3AD203B41FA5}">
-                      <a16:colId xmlns:a16="http://schemas.microsoft.com/office/drawing/2014/main" val="281614988"/>
-                    </a:ext>
-                  </a:extLst>
-                </a:gridCol>
-              </a:tblGrid>
-              <a:tr h="370840">
-                <a:tc gridSpan="2">
-                  <a:txBody>
-                    <a:bodyPr/>
-                    <a:lstStyle/>
-                    <a:p>
-                      <a:pPr algn="ctr"/>
-                      <a:r>
-                        <a:rPr lang="en-SG" dirty="0"/>
-                        <a:t>Customer / Tenant Company: KY Sub Assembly Pte Ltd</a:t>
-                      </a:r>
-                    </a:p>
-                  </a:txBody>
-                  <a:tcPr/>
-                </a:tc>
-                <a:tc hMerge="1">
-                  <a:txBody>
-                    <a:bodyPr/>
-                    <a:lstStyle/>
-                    <a:p>
-                      <a:endParaRPr lang="en-SG" dirty="0"/>
-                    </a:p>
-                  </a:txBody>
-                  <a:tcPr/>
-                </a:tc>
-                <a:extLst>
-                  <a:ext uri="{0D108BD9-81ED-4DB2-BD59-A6C34878D82A}">
-                    <a16:rowId xmlns:a16="http://schemas.microsoft.com/office/drawing/2014/main" val="3714705615"/>
-                  </a:ext>
-                </a:extLst>
-              </a:tr>
-              <a:tr h="327659">
-                <a:tc>
-                  <a:txBody>
-                    <a:bodyPr/>
-                    <a:lstStyle/>
-                    <a:p>
-                      <a:r>
-                        <a:rPr lang="en-SG" sz="1100" dirty="0"/>
-                        <a:t>Site Location: Singapore Mint </a:t>
-                      </a:r>
-                    </a:p>
-                  </a:txBody>
-                  <a:tcPr/>
-                </a:tc>
-                <a:tc rowSpan="3">
-                  <a:txBody>
-                    <a:bodyPr/>
-                    <a:lstStyle/>
-                    <a:p>
-                      <a:endParaRPr lang="en-SG" sz="1100" dirty="0"/>
-                    </a:p>
-                    <a:p>
-                      <a:endParaRPr lang="en-SG" sz="1100" dirty="0"/>
-                    </a:p>
-                    <a:p>
-                      <a:endParaRPr lang="en-SG" sz="1100" dirty="0"/>
-                    </a:p>
-                    <a:p>
-                      <a:endParaRPr lang="en-SG" sz="1100" dirty="0"/>
-                    </a:p>
-                    <a:p>
-                      <a:r>
-                        <a:rPr lang="en-SG" sz="1100" dirty="0"/>
-                        <a:t>Approved By:  Eric Wong (Director)</a:t>
-                      </a:r>
-                    </a:p>
-                  </a:txBody>
-                  <a:tcPr>
-                    <a:solidFill>
-                      <a:schemeClr val="bg1"/>
-                    </a:solidFill>
-                  </a:tcPr>
-                </a:tc>
-                <a:extLst>
-                  <a:ext uri="{0D108BD9-81ED-4DB2-BD59-A6C34878D82A}">
-                    <a16:rowId xmlns:a16="http://schemas.microsoft.com/office/drawing/2014/main" val="2691564520"/>
-                  </a:ext>
-                </a:extLst>
-              </a:tr>
-              <a:tr h="343322">
-                <a:tc>
-                  <a:txBody>
-                    <a:bodyPr/>
-                    <a:lstStyle/>
-                    <a:p>
-                      <a:r>
-                        <a:rPr lang="en-SG" sz="1100" dirty="0"/>
-                        <a:t>Process: Lifting and Moving of Machinery on Platform</a:t>
-                      </a:r>
-                    </a:p>
-                  </a:txBody>
-                  <a:tcPr/>
-                </a:tc>
-                <a:tc vMerge="1">
-                  <a:txBody>
-                    <a:bodyPr/>
-                    <a:lstStyle/>
-                    <a:p>
-                      <a:endParaRPr lang="en-SG" dirty="0"/>
-                    </a:p>
-                  </a:txBody>
-                  <a:tcPr/>
-                </a:tc>
-                <a:extLst>
-                  <a:ext uri="{0D108BD9-81ED-4DB2-BD59-A6C34878D82A}">
-                    <a16:rowId xmlns:a16="http://schemas.microsoft.com/office/drawing/2014/main" val="784894797"/>
-                  </a:ext>
-                </a:extLst>
-              </a:tr>
-              <a:tr h="268395">
-                <a:tc>
-                  <a:txBody>
-                    <a:bodyPr/>
-                    <a:lstStyle/>
-                    <a:p>
-                      <a:r>
-                        <a:rPr lang="en-SG" sz="1100" dirty="0"/>
-                        <a:t>Prepared by: Kevin Wong</a:t>
-                      </a:r>
-                    </a:p>
-                  </a:txBody>
-                  <a:tcPr/>
-                </a:tc>
-                <a:tc vMerge="1">
-                  <a:txBody>
-                    <a:bodyPr/>
-                    <a:lstStyle/>
-                    <a:p>
-                      <a:endParaRPr lang="en-SG" dirty="0"/>
-                    </a:p>
-                  </a:txBody>
-                  <a:tcPr/>
-                </a:tc>
-                <a:extLst>
-                  <a:ext uri="{0D108BD9-81ED-4DB2-BD59-A6C34878D82A}">
-                    <a16:rowId xmlns:a16="http://schemas.microsoft.com/office/drawing/2014/main" val="3405944484"/>
-                  </a:ext>
-                </a:extLst>
-              </a:tr>
-              <a:tr h="295767">
-                <a:tc>
-                  <a:txBody>
-                    <a:bodyPr/>
-                    <a:lstStyle/>
-                    <a:p>
-                      <a:r>
-                        <a:rPr lang="en-SG" sz="1100" dirty="0"/>
-                        <a:t>Last Review Date: 24.02.2025</a:t>
-                      </a:r>
-                    </a:p>
-                  </a:txBody>
-                  <a:tcPr/>
-                </a:tc>
-                <a:tc>
-                  <a:txBody>
-                    <a:bodyPr/>
-                    <a:lstStyle/>
-                    <a:p>
-                      <a:r>
-                        <a:rPr lang="en-SG" sz="1100" dirty="0"/>
-                        <a:t>Next Review Date: 23.02.2026</a:t>
-                      </a:r>
-                    </a:p>
-                  </a:txBody>
-                  <a:tcPr/>
-                </a:tc>
-                <a:extLst>
-                  <a:ext uri="{0D108BD9-81ED-4DB2-BD59-A6C34878D82A}">
-                    <a16:rowId xmlns:a16="http://schemas.microsoft.com/office/drawing/2014/main" val="3430118298"/>
-                  </a:ext>
-                </a:extLst>
-              </a:tr>
-            </a:tbl>
-          </a:graphicData>
-        </a:graphic>
-      </p:graphicFrame>
-      <p:pic>
-        <p:nvPicPr>
-          <p:cNvPr id="11" name="Picture 10" descr="A close-up of a stamp&#10;&#10;AI-generated content may be incorrect.">
-            <a:extLst>
-              <a:ext uri="{FF2B5EF4-FFF2-40B4-BE49-F238E27FC236}">
-                <a16:creationId xmlns:a16="http://schemas.microsoft.com/office/drawing/2014/main" id="{497A7B8E-3F8D-C009-821A-753F58192AFF}"/>
-              </a:ext>
-            </a:extLst>
-          </p:cNvPr>
-          <p:cNvPicPr>
-            <a:picLocks noChangeAspect="1"/>
-          </p:cNvPicPr>
-          <p:nvPr/>
-        </p:nvPicPr>
-        <p:blipFill>
-          <a:blip r:embed="rId4">
-            <a:extLst>
-              <a:ext uri="{28A0092B-C50C-407E-A947-70E740481C1C}">
-                <a14:useLocalDpi xmlns:a14="http://schemas.microsoft.com/office/drawing/2010/main" val="0"/>
-              </a:ext>
-            </a:extLst>
-          </a:blip>
-          <a:stretch>
-            <a:fillRect/>
-          </a:stretch>
-        </p:blipFill>
-        <p:spPr>
-          <a:xfrm>
-            <a:off x="5878548" y="1522307"/>
-            <a:ext cx="693638" cy="764310"/>
-          </a:xfrm>
-          <a:prstGeom prst="rect">
-            <a:avLst/>
-          </a:prstGeom>
-        </p:spPr>
-      </p:pic>
-      <p:sp>
-        <p:nvSpPr>
-          <p:cNvPr id="4" name="Slide Number Placeholder 3">
-            <a:extLst>
-              <a:ext uri="{FF2B5EF4-FFF2-40B4-BE49-F238E27FC236}">
-                <a16:creationId xmlns:a16="http://schemas.microsoft.com/office/drawing/2014/main" id="{BFE3D211-B459-7168-C9DC-95A323F89599}"/>
-              </a:ext>
-            </a:extLst>
-          </p:cNvPr>
-          <p:cNvSpPr>
-            <a:spLocks noGrp="1"/>
-          </p:cNvSpPr>
-          <p:nvPr>
-            <p:ph type="sldNum" sz="quarter" idx="12"/>
-          </p:nvPr>
-        </p:nvSpPr>
-        <p:spPr/>
-        <p:txBody>
-          <a:bodyPr/>
-          <a:lstStyle/>
-          <a:p>
-            <a:fld id="{F0052729-9336-4E5B-BC69-5177B8B6DD05}" type="slidenum">
-              <a:rPr lang="en-SG" smtClean="0"/>
-              <a:t>25</a:t>
-            </a:fld>
-            <a:endParaRPr lang="en-SG"/>
-          </a:p>
-        </p:txBody>
-      </p:sp>
-      <p:pic>
-        <p:nvPicPr>
-          <p:cNvPr id="5" name="Picture 4">
-            <a:extLst>
-              <a:ext uri="{FF2B5EF4-FFF2-40B4-BE49-F238E27FC236}">
-                <a16:creationId xmlns:a16="http://schemas.microsoft.com/office/drawing/2014/main" id="{1EB8BCC1-3539-2E07-782D-9BA98C45D9E6}"/>
-              </a:ext>
-            </a:extLst>
-          </p:cNvPr>
-          <p:cNvPicPr>
-            <a:picLocks noChangeAspect="1"/>
-          </p:cNvPicPr>
-          <p:nvPr/>
-        </p:nvPicPr>
-        <p:blipFill>
-          <a:blip r:embed="rId5">
-            <a:extLst>
-              <a:ext uri="{28A0092B-C50C-407E-A947-70E740481C1C}">
-                <a14:useLocalDpi xmlns:a14="http://schemas.microsoft.com/office/drawing/2010/main" val="0"/>
-              </a:ext>
-            </a:extLst>
-          </a:blip>
-          <a:stretch>
-            <a:fillRect/>
-          </a:stretch>
-        </p:blipFill>
-        <p:spPr>
-          <a:xfrm>
-            <a:off x="119445" y="2811921"/>
-            <a:ext cx="6738553" cy="6727507"/>
-          </a:xfrm>
-          <a:prstGeom prst="rect">
-            <a:avLst/>
-          </a:prstGeom>
-        </p:spPr>
-      </p:pic>
-    </p:spTree>
-    <p:extLst>
-      <p:ext uri="{BB962C8B-B14F-4D97-AF65-F5344CB8AC3E}">
-        <p14:creationId xmlns:p14="http://schemas.microsoft.com/office/powerpoint/2010/main" val="3877381574"/>
-      </p:ext>
-    </p:extLst>
-  </p:cSld>
-  <p:clrMapOvr>
-    <a:masterClrMapping/>
-  </p:clrMapOvr>
-</p:sld>
-</file>
-
-<file path=ppt/slides/slide26.xml><?xml version="1.0" encoding="utf-8"?>
-<p:sld xmlns:a="http://schemas.openxmlformats.org/drawingml/2006/main" xmlns:r="http://schemas.openxmlformats.org/officeDocument/2006/relationships" xmlns:p="http://schemas.openxmlformats.org/presentationml/2006/main">
-  <p:cSld>
-    <p:spTree>
-      <p:nvGrpSpPr>
-        <p:cNvPr id="1" name="">
-          <a:extLst>
-            <a:ext uri="{FF2B5EF4-FFF2-40B4-BE49-F238E27FC236}">
               <a16:creationId xmlns:a16="http://schemas.microsoft.com/office/drawing/2014/main" id="{BD589BC5-15AF-0B03-BA58-AE6ACC9FD3A1}"/>
             </a:ext>
           </a:extLst>
@@ -17442,7 +9647,7 @@
           <a:p>
             <a:fld id="{F0052729-9336-4E5B-BC69-5177B8B6DD05}" type="slidenum">
               <a:rPr lang="en-SG" smtClean="0"/>
-              <a:t>26</a:t>
+              <a:t>15</a:t>
             </a:fld>
             <a:endParaRPr lang="en-SG"/>
           </a:p>
@@ -17652,7 +9857,7 @@
 </p:sld>
 </file>
 
-<file path=ppt/slides/slide27.xml><?xml version="1.0" encoding="utf-8"?>
+<file path=ppt/slides/slide16.xml><?xml version="1.0" encoding="utf-8"?>
 <p:sld xmlns:a="http://schemas.openxmlformats.org/drawingml/2006/main" xmlns:r="http://schemas.openxmlformats.org/officeDocument/2006/relationships" xmlns:p="http://schemas.openxmlformats.org/presentationml/2006/main">
   <p:cSld>
     <p:spTree>
@@ -18219,7 +10424,7 @@
           <a:p>
             <a:fld id="{F0052729-9336-4E5B-BC69-5177B8B6DD05}" type="slidenum">
               <a:rPr lang="en-SG" smtClean="0"/>
-              <a:t>27</a:t>
+              <a:t>16</a:t>
             </a:fld>
             <a:endParaRPr lang="en-SG"/>
           </a:p>
@@ -18455,6 +10660,1124 @@
     <p:extLst>
       <p:ext uri="{BB962C8B-B14F-4D97-AF65-F5344CB8AC3E}">
         <p14:creationId xmlns:p14="http://schemas.microsoft.com/office/powerpoint/2010/main" val="930224168"/>
+      </p:ext>
+    </p:extLst>
+  </p:cSld>
+  <p:clrMapOvr>
+    <a:masterClrMapping/>
+  </p:clrMapOvr>
+</p:sld>
+</file>
+
+<file path=ppt/slides/slide2.xml><?xml version="1.0" encoding="utf-8"?>
+<p:sld xmlns:a="http://schemas.openxmlformats.org/drawingml/2006/main" xmlns:r="http://schemas.openxmlformats.org/officeDocument/2006/relationships" xmlns:p="http://schemas.openxmlformats.org/presentationml/2006/main">
+  <p:cSld>
+    <p:spTree>
+      <p:nvGrpSpPr>
+        <p:cNvPr id="1" name="">
+          <a:extLst>
+            <a:ext uri="{FF2B5EF4-FFF2-40B4-BE49-F238E27FC236}">
+              <a16:creationId xmlns:a16="http://schemas.microsoft.com/office/drawing/2014/main" id="{102EC6FC-0672-673F-34B4-9E4031EE9AC6}"/>
+            </a:ext>
+          </a:extLst>
+        </p:cNvPr>
+        <p:cNvGrpSpPr/>
+        <p:nvPr/>
+      </p:nvGrpSpPr>
+      <p:grpSpPr>
+        <a:xfrm>
+          <a:off x="0" y="0"/>
+          <a:ext cx="0" cy="0"/>
+          <a:chOff x="0" y="0"/>
+          <a:chExt cx="0" cy="0"/>
+        </a:xfrm>
+      </p:grpSpPr>
+      <p:grpSp>
+        <p:nvGrpSpPr>
+          <p:cNvPr id="10" name="Group 9">
+            <a:extLst>
+              <a:ext uri="{FF2B5EF4-FFF2-40B4-BE49-F238E27FC236}">
+                <a16:creationId xmlns:a16="http://schemas.microsoft.com/office/drawing/2014/main" id="{79EFB375-181A-C68A-BC1C-97E24E1337F0}"/>
+              </a:ext>
+            </a:extLst>
+          </p:cNvPr>
+          <p:cNvGrpSpPr/>
+          <p:nvPr/>
+        </p:nvGrpSpPr>
+        <p:grpSpPr>
+          <a:xfrm>
+            <a:off x="0" y="1"/>
+            <a:ext cx="6857999" cy="1168400"/>
+            <a:chOff x="701748" y="108190"/>
+            <a:chExt cx="5454507" cy="1318601"/>
+          </a:xfrm>
+        </p:grpSpPr>
+        <p:sp>
+          <p:nvSpPr>
+            <p:cNvPr id="6" name="TextBox 5">
+              <a:extLst>
+                <a:ext uri="{FF2B5EF4-FFF2-40B4-BE49-F238E27FC236}">
+                  <a16:creationId xmlns:a16="http://schemas.microsoft.com/office/drawing/2014/main" id="{EDA7A706-77F8-2CB9-9919-1B5B36404E00}"/>
+                </a:ext>
+              </a:extLst>
+            </p:cNvPr>
+            <p:cNvSpPr txBox="1"/>
+            <p:nvPr/>
+          </p:nvSpPr>
+          <p:spPr>
+            <a:xfrm>
+              <a:off x="701748" y="108190"/>
+              <a:ext cx="5454507" cy="1318601"/>
+            </a:xfrm>
+            <a:prstGeom prst="rect">
+              <a:avLst/>
+            </a:prstGeom>
+            <a:noFill/>
+            <a:ln>
+              <a:solidFill>
+                <a:schemeClr val="accent1"/>
+              </a:solidFill>
+            </a:ln>
+          </p:spPr>
+          <p:txBody>
+            <a:bodyPr wrap="square" rtlCol="0">
+              <a:spAutoFit/>
+            </a:bodyPr>
+            <a:lstStyle/>
+            <a:p>
+              <a:pPr algn="ctr">
+                <a:buNone/>
+                <a:tabLst>
+                  <a:tab pos="2743200" algn="ctr"/>
+                  <a:tab pos="5486400" algn="r"/>
+                </a:tabLst>
+              </a:pPr>
+              <a:r>
+                <a:rPr lang="en-US" sz="1100" b="1" dirty="0">
+                  <a:solidFill>
+                    <a:srgbClr val="0000FF"/>
+                  </a:solidFill>
+                  <a:effectLst/>
+                  <a:latin typeface="Times New Roman" panose="02020603050405020304" pitchFamily="18" charset="0"/>
+                  <a:ea typeface="SimSun" panose="02010600030101010101" pitchFamily="2" charset="-122"/>
+                </a:rPr>
+                <a:t>ERIC WONG MACHINERY TRANSPORTATION PTE LTD</a:t>
+              </a:r>
+              <a:endParaRPr lang="en-SG" sz="1100" b="1" dirty="0">
+                <a:solidFill>
+                  <a:srgbClr val="0000FF"/>
+                </a:solidFill>
+                <a:latin typeface="Times New Roman" panose="02020603050405020304" pitchFamily="18" charset="0"/>
+                <a:ea typeface="SimSun" panose="02010600030101010101" pitchFamily="2" charset="-122"/>
+              </a:endParaRPr>
+            </a:p>
+            <a:p>
+              <a:pPr algn="ctr">
+                <a:buNone/>
+                <a:tabLst>
+                  <a:tab pos="2743200" algn="ctr"/>
+                  <a:tab pos="5486400" algn="r"/>
+                </a:tabLst>
+              </a:pPr>
+              <a:r>
+                <a:rPr lang="en-US" sz="1100" dirty="0">
+                  <a:effectLst/>
+                  <a:latin typeface="Times New Roman" panose="02020603050405020304" pitchFamily="18" charset="0"/>
+                  <a:ea typeface="SimSun" panose="02010600030101010101" pitchFamily="2" charset="-122"/>
+                </a:rPr>
+                <a:t>28 </a:t>
+              </a:r>
+              <a:r>
+                <a:rPr lang="en-US" sz="1100" dirty="0" err="1">
+                  <a:effectLst/>
+                  <a:latin typeface="Times New Roman" panose="02020603050405020304" pitchFamily="18" charset="0"/>
+                  <a:ea typeface="SimSun" panose="02010600030101010101" pitchFamily="2" charset="-122"/>
+                </a:rPr>
+                <a:t>Kranji</a:t>
+              </a:r>
+              <a:r>
+                <a:rPr lang="en-US" sz="1100" dirty="0">
+                  <a:effectLst/>
+                  <a:latin typeface="Times New Roman" panose="02020603050405020304" pitchFamily="18" charset="0"/>
+                  <a:ea typeface="SimSun" panose="02010600030101010101" pitchFamily="2" charset="-122"/>
+                </a:rPr>
+                <a:t> Loop #05-03, </a:t>
+              </a:r>
+              <a:r>
+                <a:rPr lang="en-US" sz="1100" dirty="0" err="1">
+                  <a:effectLst/>
+                  <a:latin typeface="Times New Roman" panose="02020603050405020304" pitchFamily="18" charset="0"/>
+                  <a:ea typeface="SimSun" panose="02010600030101010101" pitchFamily="2" charset="-122"/>
+                </a:rPr>
+                <a:t>Kranji</a:t>
+              </a:r>
+              <a:r>
+                <a:rPr lang="en-US" sz="1100" dirty="0">
+                  <a:effectLst/>
+                  <a:latin typeface="Times New Roman" panose="02020603050405020304" pitchFamily="18" charset="0"/>
+                  <a:ea typeface="SimSun" panose="02010600030101010101" pitchFamily="2" charset="-122"/>
+                </a:rPr>
+                <a:t> Green, Singapore 739571</a:t>
+              </a:r>
+              <a:endParaRPr lang="en-SG" sz="1100" dirty="0">
+                <a:latin typeface="Times New Roman" panose="02020603050405020304" pitchFamily="18" charset="0"/>
+                <a:ea typeface="SimSun" panose="02010600030101010101" pitchFamily="2" charset="-122"/>
+              </a:endParaRPr>
+            </a:p>
+            <a:p>
+              <a:pPr algn="ctr">
+                <a:buNone/>
+                <a:tabLst>
+                  <a:tab pos="2743200" algn="ctr"/>
+                  <a:tab pos="5486400" algn="r"/>
+                </a:tabLst>
+              </a:pPr>
+              <a:r>
+                <a:rPr lang="en-US" sz="1100" dirty="0">
+                  <a:effectLst/>
+                  <a:latin typeface="Times New Roman" panose="02020603050405020304" pitchFamily="18" charset="0"/>
+                  <a:ea typeface="SimSun" panose="02010600030101010101" pitchFamily="2" charset="-122"/>
+                </a:rPr>
+                <a:t>Tel: 62824175, 62828203, 62826020</a:t>
+              </a:r>
+              <a:endParaRPr lang="en-SG" sz="1100" dirty="0">
+                <a:effectLst/>
+                <a:latin typeface="Times New Roman" panose="02020603050405020304" pitchFamily="18" charset="0"/>
+                <a:ea typeface="SimSun" panose="02010600030101010101" pitchFamily="2" charset="-122"/>
+              </a:endParaRPr>
+            </a:p>
+            <a:p>
+              <a:pPr algn="ctr">
+                <a:buNone/>
+                <a:tabLst>
+                  <a:tab pos="2743200" algn="ctr"/>
+                  <a:tab pos="5486400" algn="r"/>
+                </a:tabLst>
+              </a:pPr>
+              <a:r>
+                <a:rPr lang="en-US" sz="1100" dirty="0">
+                  <a:effectLst/>
+                  <a:latin typeface="Times New Roman" panose="02020603050405020304" pitchFamily="18" charset="0"/>
+                  <a:ea typeface="SimSun" panose="02010600030101010101" pitchFamily="2" charset="-122"/>
+                </a:rPr>
+                <a:t>GST Reg No. : M2-8923804-2</a:t>
+              </a:r>
+              <a:endParaRPr lang="en-SG" sz="1100" dirty="0">
+                <a:latin typeface="Times New Roman" panose="02020603050405020304" pitchFamily="18" charset="0"/>
+                <a:ea typeface="SimSun" panose="02010600030101010101" pitchFamily="2" charset="-122"/>
+              </a:endParaRPr>
+            </a:p>
+            <a:p>
+              <a:pPr algn="ctr">
+                <a:buNone/>
+                <a:tabLst>
+                  <a:tab pos="2743200" algn="ctr"/>
+                  <a:tab pos="5486400" algn="r"/>
+                </a:tabLst>
+              </a:pPr>
+              <a:r>
+                <a:rPr lang="en-US" sz="1100" dirty="0">
+                  <a:effectLst/>
+                  <a:latin typeface="Times New Roman" panose="02020603050405020304" pitchFamily="18" charset="0"/>
+                  <a:ea typeface="SimSun" panose="02010600030101010101" pitchFamily="2" charset="-122"/>
+                  <a:hlinkClick r:id="rId2"/>
+                </a:rPr>
+                <a:t>http://www.ericwong.com</a:t>
+              </a:r>
+              <a:endParaRPr lang="en-SG" sz="1100" dirty="0">
+                <a:latin typeface="Times New Roman" panose="02020603050405020304" pitchFamily="18" charset="0"/>
+                <a:ea typeface="SimSun" panose="02010600030101010101" pitchFamily="2" charset="-122"/>
+              </a:endParaRPr>
+            </a:p>
+            <a:p>
+              <a:pPr algn="ctr">
+                <a:buNone/>
+                <a:tabLst>
+                  <a:tab pos="2743200" algn="ctr"/>
+                  <a:tab pos="5486400" algn="r"/>
+                </a:tabLst>
+              </a:pPr>
+              <a:r>
+                <a:rPr lang="en-US" sz="1100" dirty="0">
+                  <a:latin typeface="Times New Roman" panose="02020603050405020304" pitchFamily="18" charset="0"/>
+                  <a:ea typeface="SimSun" panose="02010600030101010101" pitchFamily="2" charset="-122"/>
+                </a:rPr>
+                <a:t>E</a:t>
+              </a:r>
+              <a:r>
+                <a:rPr lang="en-US" sz="1100" dirty="0">
+                  <a:effectLst/>
+                  <a:latin typeface="Times New Roman" panose="02020603050405020304" pitchFamily="18" charset="0"/>
+                  <a:ea typeface="SimSun" panose="02010600030101010101" pitchFamily="2" charset="-122"/>
+                </a:rPr>
+                <a:t>-mail: ewmtpl@gmail.com</a:t>
+              </a:r>
+              <a:endParaRPr lang="en-SG" sz="1100" dirty="0">
+                <a:effectLst/>
+                <a:latin typeface="Times New Roman" panose="02020603050405020304" pitchFamily="18" charset="0"/>
+                <a:ea typeface="SimSun" panose="02010600030101010101" pitchFamily="2" charset="-122"/>
+              </a:endParaRPr>
+            </a:p>
+            <a:p>
+              <a:endParaRPr lang="en-SG" sz="1400" dirty="0"/>
+            </a:p>
+          </p:txBody>
+        </p:sp>
+        <p:pic>
+          <p:nvPicPr>
+            <p:cNvPr id="8" name="Picture 7" descr="A red logo with a white background&#10;&#10;AI-generated content may be incorrect.">
+              <a:extLst>
+                <a:ext uri="{FF2B5EF4-FFF2-40B4-BE49-F238E27FC236}">
+                  <a16:creationId xmlns:a16="http://schemas.microsoft.com/office/drawing/2014/main" id="{0A7F4315-4EEF-4F1D-E0A7-0202101F66BE}"/>
+                </a:ext>
+              </a:extLst>
+            </p:cNvPr>
+            <p:cNvPicPr>
+              <a:picLocks noChangeAspect="1"/>
+            </p:cNvPicPr>
+            <p:nvPr/>
+          </p:nvPicPr>
+          <p:blipFill>
+            <a:blip r:embed="rId3">
+              <a:extLst>
+                <a:ext uri="{28A0092B-C50C-407E-A947-70E740481C1C}">
+                  <a14:useLocalDpi xmlns:a14="http://schemas.microsoft.com/office/drawing/2010/main" val="0"/>
+                </a:ext>
+              </a:extLst>
+            </a:blip>
+            <a:stretch>
+              <a:fillRect/>
+            </a:stretch>
+          </p:blipFill>
+          <p:spPr>
+            <a:xfrm>
+              <a:off x="990192" y="150552"/>
+              <a:ext cx="726493" cy="1233876"/>
+            </a:xfrm>
+            <a:prstGeom prst="rect">
+              <a:avLst/>
+            </a:prstGeom>
+          </p:spPr>
+        </p:pic>
+      </p:grpSp>
+      <p:sp>
+        <p:nvSpPr>
+          <p:cNvPr id="2" name="TextBox 1">
+            <a:extLst>
+              <a:ext uri="{FF2B5EF4-FFF2-40B4-BE49-F238E27FC236}">
+                <a16:creationId xmlns:a16="http://schemas.microsoft.com/office/drawing/2014/main" id="{730C7CF0-7F47-B0D6-0910-F3058F8F64DC}"/>
+              </a:ext>
+            </a:extLst>
+          </p:cNvPr>
+          <p:cNvSpPr txBox="1"/>
+          <p:nvPr/>
+        </p:nvSpPr>
+        <p:spPr>
+          <a:xfrm>
+            <a:off x="213463" y="3009621"/>
+            <a:ext cx="6431071" cy="5906425"/>
+          </a:xfrm>
+          <a:prstGeom prst="rect">
+            <a:avLst/>
+          </a:prstGeom>
+          <a:noFill/>
+        </p:spPr>
+        <p:txBody>
+          <a:bodyPr wrap="square" rtlCol="0">
+            <a:spAutoFit/>
+          </a:bodyPr>
+          <a:lstStyle/>
+          <a:p>
+            <a:pPr>
+              <a:lnSpc>
+                <a:spcPct val="150000"/>
+              </a:lnSpc>
+            </a:pPr>
+            <a:r>
+              <a:rPr lang="en-SG" sz="1100" b="0" i="0" u="none" strike="noStrike" baseline="0" dirty="0">
+                <a:solidFill>
+                  <a:srgbClr val="000000"/>
+                </a:solidFill>
+                <a:latin typeface="Arial" panose="020B0604020202020204" pitchFamily="34" charset="0"/>
+              </a:rPr>
+              <a:t>Contents 										Pages </a:t>
+            </a:r>
+          </a:p>
+          <a:p>
+            <a:pPr marL="171450" indent="-171450">
+              <a:lnSpc>
+                <a:spcPct val="150000"/>
+              </a:lnSpc>
+              <a:buFont typeface="Wingdings" panose="05000000000000000000" pitchFamily="2" charset="2"/>
+              <a:buChar char="q"/>
+            </a:pPr>
+            <a:r>
+              <a:rPr lang="en-US" sz="1100" b="0" i="0" u="none" strike="noStrike" baseline="0" dirty="0">
+                <a:solidFill>
+                  <a:srgbClr val="000000"/>
+                </a:solidFill>
+                <a:latin typeface="Arial" panose="020B0604020202020204" pitchFamily="34" charset="0"/>
+              </a:rPr>
+              <a:t>1.0 Workplace Safety and Health in the Workplace				    2</a:t>
+            </a:r>
+          </a:p>
+          <a:p>
+            <a:pPr marL="171450" indent="-171450">
+              <a:lnSpc>
+                <a:spcPct val="150000"/>
+              </a:lnSpc>
+              <a:buFont typeface="Wingdings" panose="05000000000000000000" pitchFamily="2" charset="2"/>
+              <a:buChar char="q"/>
+            </a:pPr>
+            <a:r>
+              <a:rPr lang="en-SG" sz="1100" b="0" i="0" u="none" strike="noStrike" baseline="0" dirty="0">
+                <a:solidFill>
+                  <a:srgbClr val="000000"/>
+                </a:solidFill>
+                <a:latin typeface="Arial" panose="020B0604020202020204" pitchFamily="34" charset="0"/>
+              </a:rPr>
+              <a:t>2.0 Objectives 									    2 </a:t>
+            </a:r>
+          </a:p>
+          <a:p>
+            <a:pPr marL="171450" indent="-171450">
+              <a:lnSpc>
+                <a:spcPct val="150000"/>
+              </a:lnSpc>
+              <a:buFont typeface="Wingdings" panose="05000000000000000000" pitchFamily="2" charset="2"/>
+              <a:buChar char="q"/>
+            </a:pPr>
+            <a:r>
+              <a:rPr lang="en-SG" sz="1100" b="0" i="0" u="none" strike="noStrike" baseline="0" dirty="0">
+                <a:solidFill>
+                  <a:srgbClr val="000000"/>
+                </a:solidFill>
+                <a:latin typeface="Arial" panose="020B0604020202020204" pitchFamily="34" charset="0"/>
+              </a:rPr>
+              <a:t>3.0 Scope 										    2 </a:t>
+            </a:r>
+          </a:p>
+          <a:p>
+            <a:pPr marL="171450" indent="-171450">
+              <a:lnSpc>
+                <a:spcPct val="150000"/>
+              </a:lnSpc>
+              <a:buFont typeface="Wingdings" panose="05000000000000000000" pitchFamily="2" charset="2"/>
+              <a:buChar char="q"/>
+            </a:pPr>
+            <a:r>
+              <a:rPr lang="en-SG" sz="1100" b="0" i="0" u="none" strike="noStrike" baseline="0" dirty="0">
+                <a:solidFill>
+                  <a:srgbClr val="000000"/>
+                </a:solidFill>
+                <a:latin typeface="Arial" panose="020B0604020202020204" pitchFamily="34" charset="0"/>
+              </a:rPr>
+              <a:t>4.0 Responsibility 									    2 </a:t>
+            </a:r>
+          </a:p>
+          <a:p>
+            <a:pPr marL="171450" indent="-171450">
+              <a:lnSpc>
+                <a:spcPct val="150000"/>
+              </a:lnSpc>
+              <a:buFont typeface="Wingdings" panose="05000000000000000000" pitchFamily="2" charset="2"/>
+              <a:buChar char="q"/>
+            </a:pPr>
+            <a:r>
+              <a:rPr lang="en-SG" sz="1100" b="0" i="0" u="none" strike="noStrike" baseline="0" dirty="0">
+                <a:solidFill>
+                  <a:srgbClr val="000000"/>
+                </a:solidFill>
+                <a:latin typeface="Arial" panose="020B0604020202020204" pitchFamily="34" charset="0"/>
+              </a:rPr>
+              <a:t>5.0 Site Survey 									    4 </a:t>
+            </a:r>
+          </a:p>
+          <a:p>
+            <a:pPr marL="171450" indent="-171450">
+              <a:lnSpc>
+                <a:spcPct val="150000"/>
+              </a:lnSpc>
+              <a:buFont typeface="Wingdings" panose="05000000000000000000" pitchFamily="2" charset="2"/>
+              <a:buChar char="q"/>
+            </a:pPr>
+            <a:r>
+              <a:rPr lang="en-SG" sz="1100" b="0" i="0" u="none" strike="noStrike" baseline="0" dirty="0">
+                <a:solidFill>
+                  <a:srgbClr val="000000"/>
+                </a:solidFill>
+                <a:latin typeface="Arial" panose="020B0604020202020204" pitchFamily="34" charset="0"/>
+              </a:rPr>
+              <a:t>6.0 Risk Assessment 								    4 </a:t>
+            </a:r>
+            <a:endParaRPr lang="en-US" sz="1100" b="0" i="0" u="none" strike="noStrike" baseline="0" dirty="0">
+              <a:solidFill>
+                <a:srgbClr val="000000"/>
+              </a:solidFill>
+              <a:latin typeface="Arial" panose="020B0604020202020204" pitchFamily="34" charset="0"/>
+            </a:endParaRPr>
+          </a:p>
+          <a:p>
+            <a:pPr marL="171450" indent="-171450">
+              <a:lnSpc>
+                <a:spcPct val="150000"/>
+              </a:lnSpc>
+              <a:buFont typeface="Wingdings" panose="05000000000000000000" pitchFamily="2" charset="2"/>
+              <a:buChar char="q"/>
+            </a:pPr>
+            <a:r>
+              <a:rPr lang="en-US" sz="1100" b="0" i="0" u="none" strike="noStrike" baseline="0" dirty="0">
+                <a:solidFill>
+                  <a:srgbClr val="000000"/>
+                </a:solidFill>
+                <a:latin typeface="Arial" panose="020B0604020202020204" pitchFamily="34" charset="0"/>
+              </a:rPr>
+              <a:t>7.0 Classifications of Lifts Types 							    4 </a:t>
+            </a:r>
+            <a:endParaRPr lang="en-SG" sz="1100" b="0" i="0" u="none" strike="noStrike" baseline="0" dirty="0">
+              <a:solidFill>
+                <a:srgbClr val="000000"/>
+              </a:solidFill>
+              <a:latin typeface="Arial" panose="020B0604020202020204" pitchFamily="34" charset="0"/>
+            </a:endParaRPr>
+          </a:p>
+          <a:p>
+            <a:pPr marL="171450" indent="-171450">
+              <a:lnSpc>
+                <a:spcPct val="150000"/>
+              </a:lnSpc>
+              <a:buFont typeface="Wingdings" panose="05000000000000000000" pitchFamily="2" charset="2"/>
+              <a:buChar char="q"/>
+            </a:pPr>
+            <a:r>
+              <a:rPr lang="en-SG" sz="1100" b="0" i="0" u="none" strike="noStrike" baseline="0" dirty="0">
+                <a:solidFill>
+                  <a:srgbClr val="000000"/>
+                </a:solidFill>
+                <a:latin typeface="Arial" panose="020B0604020202020204" pitchFamily="34" charset="0"/>
+              </a:rPr>
+              <a:t>8.0 Routine Lifts 									    5 </a:t>
+            </a:r>
+          </a:p>
+          <a:p>
+            <a:pPr marL="171450" indent="-171450">
+              <a:lnSpc>
+                <a:spcPct val="150000"/>
+              </a:lnSpc>
+              <a:buFont typeface="Wingdings" panose="05000000000000000000" pitchFamily="2" charset="2"/>
+              <a:buChar char="q"/>
+            </a:pPr>
+            <a:r>
+              <a:rPr lang="en-SG" sz="1100" b="0" i="0" u="none" strike="noStrike" baseline="0" dirty="0">
+                <a:solidFill>
+                  <a:srgbClr val="000000"/>
+                </a:solidFill>
+                <a:latin typeface="Arial" panose="020B0604020202020204" pitchFamily="34" charset="0"/>
+              </a:rPr>
+              <a:t>9.0 Non-Routine Lifts 								    6 </a:t>
+            </a:r>
+            <a:endParaRPr lang="en-US" sz="1100" b="0" i="0" u="none" strike="noStrike" baseline="0" dirty="0">
+              <a:solidFill>
+                <a:srgbClr val="000000"/>
+              </a:solidFill>
+              <a:latin typeface="Arial" panose="020B0604020202020204" pitchFamily="34" charset="0"/>
+            </a:endParaRPr>
+          </a:p>
+          <a:p>
+            <a:pPr marL="171450" indent="-171450">
+              <a:lnSpc>
+                <a:spcPct val="150000"/>
+              </a:lnSpc>
+              <a:buFont typeface="Wingdings" panose="05000000000000000000" pitchFamily="2" charset="2"/>
+              <a:buChar char="q"/>
+            </a:pPr>
+            <a:r>
+              <a:rPr lang="en-US" sz="1100" b="0" i="0" u="none" strike="noStrike" baseline="0" dirty="0">
+                <a:solidFill>
+                  <a:srgbClr val="000000"/>
+                </a:solidFill>
+                <a:latin typeface="Arial" panose="020B0604020202020204" pitchFamily="34" charset="0"/>
+              </a:rPr>
+              <a:t>10.0 A Non-Routine Lift is a lift which conforms to the following factors		    </a:t>
+            </a:r>
+            <a:r>
+              <a:rPr lang="en-US" sz="1100" dirty="0">
+                <a:solidFill>
+                  <a:srgbClr val="000000"/>
+                </a:solidFill>
+                <a:latin typeface="Arial" panose="020B0604020202020204" pitchFamily="34" charset="0"/>
+              </a:rPr>
+              <a:t>8</a:t>
+            </a:r>
+            <a:r>
+              <a:rPr lang="en-US" sz="1100" b="0" i="0" u="none" strike="noStrike" baseline="0" dirty="0">
+                <a:solidFill>
+                  <a:srgbClr val="000000"/>
+                </a:solidFill>
+                <a:latin typeface="Arial" panose="020B0604020202020204" pitchFamily="34" charset="0"/>
+              </a:rPr>
+              <a:t> </a:t>
+            </a:r>
+          </a:p>
+          <a:p>
+            <a:pPr marL="171450" indent="-171450">
+              <a:lnSpc>
+                <a:spcPct val="150000"/>
+              </a:lnSpc>
+              <a:buFont typeface="Wingdings" panose="05000000000000000000" pitchFamily="2" charset="2"/>
+              <a:buChar char="q"/>
+            </a:pPr>
+            <a:r>
+              <a:rPr lang="en-US" sz="1100" b="0" i="0" u="none" strike="noStrike" baseline="0" dirty="0">
+                <a:solidFill>
+                  <a:srgbClr val="000000"/>
+                </a:solidFill>
+                <a:latin typeface="Arial" panose="020B0604020202020204" pitchFamily="34" charset="0"/>
+              </a:rPr>
+              <a:t>11.0 Competent Person(s) 							    9 </a:t>
+            </a:r>
+            <a:endParaRPr lang="en-SG" sz="1100" b="0" i="0" u="none" strike="noStrike" baseline="0" dirty="0">
+              <a:solidFill>
+                <a:srgbClr val="000000"/>
+              </a:solidFill>
+              <a:latin typeface="Arial" panose="020B0604020202020204" pitchFamily="34" charset="0"/>
+            </a:endParaRPr>
+          </a:p>
+          <a:p>
+            <a:pPr marL="171450" indent="-171450">
+              <a:lnSpc>
+                <a:spcPct val="150000"/>
+              </a:lnSpc>
+              <a:buFont typeface="Wingdings" panose="05000000000000000000" pitchFamily="2" charset="2"/>
+              <a:buChar char="q"/>
+            </a:pPr>
+            <a:r>
+              <a:rPr lang="en-SG" sz="1100" b="0" i="0" u="none" strike="noStrike" baseline="0" dirty="0">
+                <a:solidFill>
+                  <a:srgbClr val="000000"/>
+                </a:solidFill>
+                <a:latin typeface="Arial" panose="020B0604020202020204" pitchFamily="34" charset="0"/>
+              </a:rPr>
+              <a:t>12.0 Supervisors 									    9 </a:t>
+            </a:r>
+            <a:endParaRPr lang="en-US" sz="1100" b="0" i="0" u="none" strike="noStrike" baseline="0" dirty="0">
+              <a:solidFill>
+                <a:srgbClr val="000000"/>
+              </a:solidFill>
+              <a:latin typeface="Arial" panose="020B0604020202020204" pitchFamily="34" charset="0"/>
+            </a:endParaRPr>
+          </a:p>
+          <a:p>
+            <a:pPr marL="171450" indent="-171450">
+              <a:lnSpc>
+                <a:spcPct val="150000"/>
+              </a:lnSpc>
+              <a:buFont typeface="Wingdings" panose="05000000000000000000" pitchFamily="2" charset="2"/>
+              <a:buChar char="q"/>
+            </a:pPr>
+            <a:r>
+              <a:rPr lang="en-US" sz="1100" b="0" i="0" u="none" strike="noStrike" baseline="0" dirty="0">
+                <a:solidFill>
+                  <a:srgbClr val="000000"/>
+                </a:solidFill>
+                <a:latin typeface="Arial" panose="020B0604020202020204" pitchFamily="34" charset="0"/>
+              </a:rPr>
+              <a:t>13.0 Operators /Riggers /Signalmen 						   10 </a:t>
+            </a:r>
+          </a:p>
+          <a:p>
+            <a:pPr marL="171450" indent="-171450">
+              <a:lnSpc>
+                <a:spcPct val="150000"/>
+              </a:lnSpc>
+              <a:buFont typeface="Wingdings" panose="05000000000000000000" pitchFamily="2" charset="2"/>
+              <a:buChar char="q"/>
+            </a:pPr>
+            <a:r>
+              <a:rPr lang="en-US" sz="1100" b="0" i="0" u="none" strike="noStrike" baseline="0" dirty="0">
+                <a:solidFill>
+                  <a:srgbClr val="000000"/>
+                </a:solidFill>
+                <a:latin typeface="Arial" panose="020B0604020202020204" pitchFamily="34" charset="0"/>
+              </a:rPr>
+              <a:t>14.0 Description of Load(s) to be lifted 						   10 </a:t>
+            </a:r>
+          </a:p>
+          <a:p>
+            <a:pPr marL="171450" indent="-171450">
+              <a:lnSpc>
+                <a:spcPct val="150000"/>
+              </a:lnSpc>
+              <a:buFont typeface="Wingdings" panose="05000000000000000000" pitchFamily="2" charset="2"/>
+              <a:buChar char="q"/>
+            </a:pPr>
+            <a:r>
+              <a:rPr lang="en-US" sz="1100" b="0" i="0" u="none" strike="noStrike" baseline="0" dirty="0">
+                <a:solidFill>
+                  <a:srgbClr val="000000"/>
+                </a:solidFill>
+                <a:latin typeface="Arial" panose="020B0604020202020204" pitchFamily="34" charset="0"/>
+              </a:rPr>
+              <a:t>15.10 Centre of Gravity (CG) of the load 						   11</a:t>
+            </a:r>
+            <a:endParaRPr lang="en-SG" sz="1100" b="0" i="0" u="none" strike="noStrike" baseline="0" dirty="0">
+              <a:solidFill>
+                <a:srgbClr val="000000"/>
+              </a:solidFill>
+              <a:latin typeface="Arial" panose="020B0604020202020204" pitchFamily="34" charset="0"/>
+            </a:endParaRPr>
+          </a:p>
+          <a:p>
+            <a:pPr marL="171450" indent="-171450">
+              <a:lnSpc>
+                <a:spcPct val="150000"/>
+              </a:lnSpc>
+              <a:buFont typeface="Wingdings" panose="05000000000000000000" pitchFamily="2" charset="2"/>
+              <a:buChar char="q"/>
+            </a:pPr>
+            <a:r>
+              <a:rPr lang="en-SG" sz="1100" b="0" i="0" u="none" strike="noStrike" baseline="0" dirty="0">
+                <a:solidFill>
+                  <a:srgbClr val="000000"/>
+                </a:solidFill>
+                <a:latin typeface="Arial" panose="020B0604020202020204" pitchFamily="34" charset="0"/>
+              </a:rPr>
+              <a:t>16.0 Crane Selection 								   11 </a:t>
+            </a:r>
+          </a:p>
+          <a:p>
+            <a:pPr marL="171450" indent="-171450">
+              <a:lnSpc>
+                <a:spcPct val="150000"/>
+              </a:lnSpc>
+              <a:buFont typeface="Wingdings" panose="05000000000000000000" pitchFamily="2" charset="2"/>
+              <a:buChar char="q"/>
+            </a:pPr>
+            <a:r>
+              <a:rPr lang="en-SG" sz="1100" b="0" i="0" u="none" strike="noStrike" baseline="0" dirty="0">
+                <a:solidFill>
+                  <a:srgbClr val="000000"/>
+                </a:solidFill>
+                <a:latin typeface="Arial" panose="020B0604020202020204" pitchFamily="34" charset="0"/>
+              </a:rPr>
+              <a:t>17.0 Ground &amp; Outriggers 								   11 </a:t>
+            </a:r>
+            <a:endParaRPr lang="en-US" sz="1100" b="0" i="0" u="none" strike="noStrike" baseline="0" dirty="0">
+              <a:solidFill>
+                <a:srgbClr val="000000"/>
+              </a:solidFill>
+              <a:latin typeface="Arial" panose="020B0604020202020204" pitchFamily="34" charset="0"/>
+            </a:endParaRPr>
+          </a:p>
+          <a:p>
+            <a:pPr marL="171450" indent="-171450">
+              <a:lnSpc>
+                <a:spcPct val="150000"/>
+              </a:lnSpc>
+              <a:buFont typeface="Wingdings" panose="05000000000000000000" pitchFamily="2" charset="2"/>
+              <a:buChar char="q"/>
+            </a:pPr>
+            <a:r>
+              <a:rPr lang="en-US" sz="1100" b="0" i="0" u="none" strike="noStrike" baseline="0" dirty="0">
+                <a:solidFill>
+                  <a:srgbClr val="000000"/>
+                </a:solidFill>
+                <a:latin typeface="Arial" panose="020B0604020202020204" pitchFamily="34" charset="0"/>
+              </a:rPr>
+              <a:t>18.0 Access &amp; Lifting Location 						   	   12 </a:t>
+            </a:r>
+          </a:p>
+          <a:p>
+            <a:pPr marL="171450" indent="-171450">
+              <a:lnSpc>
+                <a:spcPct val="150000"/>
+              </a:lnSpc>
+              <a:buFont typeface="Wingdings" panose="05000000000000000000" pitchFamily="2" charset="2"/>
+              <a:buChar char="q"/>
+            </a:pPr>
+            <a:r>
+              <a:rPr lang="en-US" sz="1100" b="0" i="0" u="none" strike="noStrike" baseline="0" dirty="0">
+                <a:solidFill>
+                  <a:srgbClr val="000000"/>
+                </a:solidFill>
+                <a:latin typeface="Arial" panose="020B0604020202020204" pitchFamily="34" charset="0"/>
+              </a:rPr>
+              <a:t>19.0 A Pre-Start Meeting 								   12 </a:t>
+            </a:r>
+          </a:p>
+          <a:p>
+            <a:pPr marL="171450" indent="-171450">
+              <a:lnSpc>
+                <a:spcPct val="150000"/>
+              </a:lnSpc>
+              <a:buFont typeface="Wingdings" panose="05000000000000000000" pitchFamily="2" charset="2"/>
+              <a:buChar char="q"/>
+            </a:pPr>
+            <a:r>
+              <a:rPr lang="en-US" sz="1100" b="0" i="0" u="none" strike="noStrike" baseline="0" dirty="0">
+                <a:solidFill>
+                  <a:srgbClr val="000000"/>
+                </a:solidFill>
+                <a:latin typeface="Arial" panose="020B0604020202020204" pitchFamily="34" charset="0"/>
+              </a:rPr>
+              <a:t>20.0 Sequence of Lifting operation 						   13 </a:t>
+            </a:r>
+          </a:p>
+          <a:p>
+            <a:pPr marL="171450" indent="-171450">
+              <a:lnSpc>
+                <a:spcPct val="150000"/>
+              </a:lnSpc>
+              <a:buFont typeface="Wingdings" panose="05000000000000000000" pitchFamily="2" charset="2"/>
+              <a:buChar char="q"/>
+            </a:pPr>
+            <a:r>
+              <a:rPr lang="en-US" sz="1100" b="0" i="0" u="none" strike="noStrike" baseline="0" dirty="0">
+                <a:solidFill>
+                  <a:srgbClr val="000000"/>
+                </a:solidFill>
+                <a:latin typeface="Arial" panose="020B0604020202020204" pitchFamily="34" charset="0"/>
+              </a:rPr>
+              <a:t>21.0 Lifting operation checklist 							   26</a:t>
+            </a:r>
+            <a:endParaRPr lang="en-SG" sz="1100" b="0" i="0" u="none" strike="noStrike" baseline="0" dirty="0">
+              <a:solidFill>
+                <a:srgbClr val="000000"/>
+              </a:solidFill>
+              <a:latin typeface="Arial" panose="020B0604020202020204" pitchFamily="34" charset="0"/>
+            </a:endParaRPr>
+          </a:p>
+          <a:p>
+            <a:pPr marL="171450" indent="-171450">
+              <a:lnSpc>
+                <a:spcPct val="150000"/>
+              </a:lnSpc>
+              <a:buFont typeface="Wingdings" panose="05000000000000000000" pitchFamily="2" charset="2"/>
+              <a:buChar char="q"/>
+            </a:pPr>
+            <a:r>
+              <a:rPr lang="en-SG" sz="1100" b="0" i="0" u="none" strike="noStrike" baseline="0" dirty="0">
+                <a:solidFill>
+                  <a:srgbClr val="000000"/>
+                </a:solidFill>
+                <a:latin typeface="Arial" panose="020B0604020202020204" pitchFamily="34" charset="0"/>
+              </a:rPr>
+              <a:t>22.0 Emergency procedures 							</a:t>
+            </a:r>
+            <a:r>
+              <a:rPr lang="en-SG" sz="1100" dirty="0">
+                <a:solidFill>
+                  <a:srgbClr val="000000"/>
+                </a:solidFill>
+                <a:latin typeface="Arial" panose="020B0604020202020204" pitchFamily="34" charset="0"/>
+              </a:rPr>
+              <a:t> </a:t>
+            </a:r>
+            <a:r>
+              <a:rPr lang="en-SG" sz="1100" b="0" i="0" u="none" strike="noStrike" baseline="0" dirty="0">
+                <a:solidFill>
+                  <a:srgbClr val="000000"/>
+                </a:solidFill>
+                <a:latin typeface="Arial" panose="020B0604020202020204" pitchFamily="34" charset="0"/>
+              </a:rPr>
+              <a:t>  27</a:t>
+            </a:r>
+            <a:endParaRPr lang="en-SG" sz="1100" dirty="0"/>
+          </a:p>
+        </p:txBody>
+      </p:sp>
+      <p:graphicFrame>
+        <p:nvGraphicFramePr>
+          <p:cNvPr id="12" name="Table 11">
+            <a:extLst>
+              <a:ext uri="{FF2B5EF4-FFF2-40B4-BE49-F238E27FC236}">
+                <a16:creationId xmlns:a16="http://schemas.microsoft.com/office/drawing/2014/main" id="{D2F6709C-23E8-B37C-8950-0044B1E68E4B}"/>
+              </a:ext>
+            </a:extLst>
+          </p:cNvPr>
+          <p:cNvGraphicFramePr>
+            <a:graphicFrameLocks noGrp="1"/>
+          </p:cNvGraphicFramePr>
+          <p:nvPr>
+            <p:extLst>
+              <p:ext uri="{D42A27DB-BD31-4B8C-83A1-F6EECF244321}">
+                <p14:modId xmlns:p14="http://schemas.microsoft.com/office/powerpoint/2010/main" val="758747526"/>
+              </p:ext>
+            </p:extLst>
+          </p:nvPr>
+        </p:nvGraphicFramePr>
+        <p:xfrm>
+          <a:off x="0" y="1168401"/>
+          <a:ext cx="6857998" cy="1605983"/>
+        </p:xfrm>
+        <a:graphic>
+          <a:graphicData uri="http://schemas.openxmlformats.org/drawingml/2006/table">
+            <a:tbl>
+              <a:tblPr firstRow="1" bandRow="1">
+                <a:tableStyleId>{5C22544A-7EE6-4342-B048-85BDC9FD1C3A}</a:tableStyleId>
+              </a:tblPr>
+              <a:tblGrid>
+                <a:gridCol w="3428999">
+                  <a:extLst>
+                    <a:ext uri="{9D8B030D-6E8A-4147-A177-3AD203B41FA5}">
+                      <a16:colId xmlns:a16="http://schemas.microsoft.com/office/drawing/2014/main" val="3963200382"/>
+                    </a:ext>
+                  </a:extLst>
+                </a:gridCol>
+                <a:gridCol w="3428999">
+                  <a:extLst>
+                    <a:ext uri="{9D8B030D-6E8A-4147-A177-3AD203B41FA5}">
+                      <a16:colId xmlns:a16="http://schemas.microsoft.com/office/drawing/2014/main" val="281614988"/>
+                    </a:ext>
+                  </a:extLst>
+                </a:gridCol>
+              </a:tblGrid>
+              <a:tr h="370840">
+                <a:tc gridSpan="2">
+                  <a:txBody>
+                    <a:bodyPr/>
+                    <a:lstStyle/>
+                    <a:p>
+                      <a:pPr algn="ctr"/>
+                      <a:r>
+                        <a:rPr lang="en-SG" dirty="0"/>
+                        <a:t>Customer / Tenant Company: KY Sub Assembly Pte Ltd</a:t>
+                      </a:r>
+                    </a:p>
+                  </a:txBody>
+                  <a:tcPr/>
+                </a:tc>
+                <a:tc hMerge="1">
+                  <a:txBody>
+                    <a:bodyPr/>
+                    <a:lstStyle/>
+                    <a:p>
+                      <a:endParaRPr lang="en-SG" dirty="0"/>
+                    </a:p>
+                  </a:txBody>
+                  <a:tcPr/>
+                </a:tc>
+                <a:extLst>
+                  <a:ext uri="{0D108BD9-81ED-4DB2-BD59-A6C34878D82A}">
+                    <a16:rowId xmlns:a16="http://schemas.microsoft.com/office/drawing/2014/main" val="3714705615"/>
+                  </a:ext>
+                </a:extLst>
+              </a:tr>
+              <a:tr h="327659">
+                <a:tc>
+                  <a:txBody>
+                    <a:bodyPr/>
+                    <a:lstStyle/>
+                    <a:p>
+                      <a:r>
+                        <a:rPr lang="en-SG" sz="1100" dirty="0"/>
+                        <a:t>Site Location: 25 Bulim Square</a:t>
+                      </a:r>
+                    </a:p>
+                  </a:txBody>
+                  <a:tcPr/>
+                </a:tc>
+                <a:tc rowSpan="3">
+                  <a:txBody>
+                    <a:bodyPr/>
+                    <a:lstStyle/>
+                    <a:p>
+                      <a:endParaRPr lang="en-SG" sz="1100" dirty="0"/>
+                    </a:p>
+                    <a:p>
+                      <a:endParaRPr lang="en-SG" sz="1100" dirty="0"/>
+                    </a:p>
+                    <a:p>
+                      <a:endParaRPr lang="en-SG" sz="1100" dirty="0"/>
+                    </a:p>
+                    <a:p>
+                      <a:endParaRPr lang="en-SG" sz="1100" dirty="0"/>
+                    </a:p>
+                    <a:p>
+                      <a:r>
+                        <a:rPr lang="en-SG" sz="1100" dirty="0"/>
+                        <a:t>Approved By:  Eric Wong (Director)</a:t>
+                      </a:r>
+                    </a:p>
+                  </a:txBody>
+                  <a:tcPr>
+                    <a:solidFill>
+                      <a:schemeClr val="bg1"/>
+                    </a:solidFill>
+                  </a:tcPr>
+                </a:tc>
+                <a:extLst>
+                  <a:ext uri="{0D108BD9-81ED-4DB2-BD59-A6C34878D82A}">
+                    <a16:rowId xmlns:a16="http://schemas.microsoft.com/office/drawing/2014/main" val="2691564520"/>
+                  </a:ext>
+                </a:extLst>
+              </a:tr>
+              <a:tr h="343322">
+                <a:tc>
+                  <a:txBody>
+                    <a:bodyPr/>
+                    <a:lstStyle/>
+                    <a:p>
+                      <a:r>
+                        <a:rPr lang="en-SG" sz="1100" dirty="0"/>
+                        <a:t>Process: Lifting and Moving of Machinery on Platform</a:t>
+                      </a:r>
+                    </a:p>
+                  </a:txBody>
+                  <a:tcPr/>
+                </a:tc>
+                <a:tc vMerge="1">
+                  <a:txBody>
+                    <a:bodyPr/>
+                    <a:lstStyle/>
+                    <a:p>
+                      <a:endParaRPr lang="en-SG" dirty="0"/>
+                    </a:p>
+                  </a:txBody>
+                  <a:tcPr/>
+                </a:tc>
+                <a:extLst>
+                  <a:ext uri="{0D108BD9-81ED-4DB2-BD59-A6C34878D82A}">
+                    <a16:rowId xmlns:a16="http://schemas.microsoft.com/office/drawing/2014/main" val="784894797"/>
+                  </a:ext>
+                </a:extLst>
+              </a:tr>
+              <a:tr h="268395">
+                <a:tc>
+                  <a:txBody>
+                    <a:bodyPr/>
+                    <a:lstStyle/>
+                    <a:p>
+                      <a:r>
+                        <a:rPr lang="en-SG" sz="1100" dirty="0"/>
+                        <a:t>Prepared by: Kevin Wong</a:t>
+                      </a:r>
+                    </a:p>
+                  </a:txBody>
+                  <a:tcPr/>
+                </a:tc>
+                <a:tc vMerge="1">
+                  <a:txBody>
+                    <a:bodyPr/>
+                    <a:lstStyle/>
+                    <a:p>
+                      <a:endParaRPr lang="en-SG" dirty="0"/>
+                    </a:p>
+                  </a:txBody>
+                  <a:tcPr/>
+                </a:tc>
+                <a:extLst>
+                  <a:ext uri="{0D108BD9-81ED-4DB2-BD59-A6C34878D82A}">
+                    <a16:rowId xmlns:a16="http://schemas.microsoft.com/office/drawing/2014/main" val="3405944484"/>
+                  </a:ext>
+                </a:extLst>
+              </a:tr>
+              <a:tr h="295767">
+                <a:tc>
+                  <a:txBody>
+                    <a:bodyPr/>
+                    <a:lstStyle/>
+                    <a:p>
+                      <a:r>
+                        <a:rPr lang="en-SG" sz="1100" dirty="0"/>
+                        <a:t>Last Review Date: 24.02.2025</a:t>
+                      </a:r>
+                    </a:p>
+                  </a:txBody>
+                  <a:tcPr/>
+                </a:tc>
+                <a:tc>
+                  <a:txBody>
+                    <a:bodyPr/>
+                    <a:lstStyle/>
+                    <a:p>
+                      <a:r>
+                        <a:rPr lang="en-SG" sz="1100" dirty="0"/>
+                        <a:t>Next Review Date: 23.02.2026</a:t>
+                      </a:r>
+                    </a:p>
+                  </a:txBody>
+                  <a:tcPr/>
+                </a:tc>
+                <a:extLst>
+                  <a:ext uri="{0D108BD9-81ED-4DB2-BD59-A6C34878D82A}">
+                    <a16:rowId xmlns:a16="http://schemas.microsoft.com/office/drawing/2014/main" val="3430118298"/>
+                  </a:ext>
+                </a:extLst>
+              </a:tr>
+            </a:tbl>
+          </a:graphicData>
+        </a:graphic>
+      </p:graphicFrame>
+      <p:pic>
+        <p:nvPicPr>
+          <p:cNvPr id="13" name="Picture 12" descr="A close-up of a stamp&#10;&#10;AI-generated content may be incorrect.">
+            <a:extLst>
+              <a:ext uri="{FF2B5EF4-FFF2-40B4-BE49-F238E27FC236}">
+                <a16:creationId xmlns:a16="http://schemas.microsoft.com/office/drawing/2014/main" id="{81D7C308-841F-6C96-0649-013E9A87D79C}"/>
+              </a:ext>
+            </a:extLst>
+          </p:cNvPr>
+          <p:cNvPicPr>
+            <a:picLocks noChangeAspect="1"/>
+          </p:cNvPicPr>
+          <p:nvPr/>
+        </p:nvPicPr>
+        <p:blipFill>
+          <a:blip r:embed="rId4">
+            <a:extLst>
+              <a:ext uri="{28A0092B-C50C-407E-A947-70E740481C1C}">
+                <a14:useLocalDpi xmlns:a14="http://schemas.microsoft.com/office/drawing/2010/main" val="0"/>
+              </a:ext>
+            </a:extLst>
+          </a:blip>
+          <a:stretch>
+            <a:fillRect/>
+          </a:stretch>
+        </p:blipFill>
+        <p:spPr>
+          <a:xfrm>
+            <a:off x="5878548" y="1522307"/>
+            <a:ext cx="693638" cy="764310"/>
+          </a:xfrm>
+          <a:prstGeom prst="rect">
+            <a:avLst/>
+          </a:prstGeom>
+        </p:spPr>
+      </p:pic>
+      <p:sp>
+        <p:nvSpPr>
+          <p:cNvPr id="4" name="Slide Number Placeholder 3">
+            <a:extLst>
+              <a:ext uri="{FF2B5EF4-FFF2-40B4-BE49-F238E27FC236}">
+                <a16:creationId xmlns:a16="http://schemas.microsoft.com/office/drawing/2014/main" id="{0E8E572A-2DE5-7111-7149-2D8B91173082}"/>
+              </a:ext>
+            </a:extLst>
+          </p:cNvPr>
+          <p:cNvSpPr>
+            <a:spLocks noGrp="1"/>
+          </p:cNvSpPr>
+          <p:nvPr>
+            <p:ph type="sldNum" sz="quarter" idx="12"/>
+          </p:nvPr>
+        </p:nvSpPr>
+        <p:spPr/>
+        <p:txBody>
+          <a:bodyPr/>
+          <a:lstStyle/>
+          <a:p>
+            <a:fld id="{F0052729-9336-4E5B-BC69-5177B8B6DD05}" type="slidenum">
+              <a:rPr lang="en-SG" smtClean="0"/>
+              <a:t>2</a:t>
+            </a:fld>
+            <a:endParaRPr lang="en-SG"/>
+          </a:p>
+        </p:txBody>
+      </p:sp>
+    </p:spTree>
+    <p:extLst>
+      <p:ext uri="{BB962C8B-B14F-4D97-AF65-F5344CB8AC3E}">
+        <p14:creationId xmlns:p14="http://schemas.microsoft.com/office/powerpoint/2010/main" val="3444258337"/>
       </p:ext>
     </p:extLst>
   </p:cSld>
